--- a/slides/doc-mt-01-editable-slides.pptx
+++ b/slides/doc-mt-01-editable-slides.pptx
@@ -2110,7 +2110,7 @@
                 <a:ea typeface="Arial" pitchFamily="34" charset="-122"/>
                 <a:cs typeface="Arial" pitchFamily="34" charset="-120"/>
               </a:rPr>
-              <a:t>Figure 1. Figure 1: The ten architectural components where pooled-versus-siloed tenancy decisions are enforced across the Routing Hub, Central Governance Hub, Pooled Runtime, and Sovereign Spoke.</a:t>
+              <a:t>Figure 1. The ten architectural components where pooled-versus-siloed tenancy decisions are enforced across the Routing Hub, Central Governance Hub, Pooled Runtime, and Sovereign Spoke.</a:t>
             </a:r>
             <a:endParaRPr lang="en-US" sz="820" dirty="0"/>
           </a:p>
@@ -2178,8 +2178,8 @@
         </p:nvSpPr>
         <p:spPr>
           <a:xfrm>
-            <a:off x="4027932" y="1869948"/>
-            <a:ext cx="1858975" cy="146304"/>
+            <a:off x="4027932" y="1858975"/>
+            <a:ext cx="1773936" cy="105156"/>
           </a:xfrm>
           <a:prstGeom prst="rect">
             <a:avLst/>
@@ -2188,7 +2188,7 @@
           <a:ln/>
         </p:spPr>
         <p:txBody>
-          <a:bodyPr wrap="square" lIns="0" tIns="0" rIns="0" bIns="0" rtlCol="0" anchor="t">
+          <a:bodyPr wrap="none" lIns="0" tIns="0" rIns="0" bIns="0" rtlCol="0" anchor="t">
             <a:normAutofit/>
           </a:bodyPr>
           <a:lstStyle/>
@@ -2200,17 +2200,17 @@
               <a:buNone/>
             </a:pPr>
             <a:r>
-              <a:rPr lang="en-US" sz="460" b="1" dirty="0">
-                <a:solidFill>
-                  <a:srgbClr val="202124"/>
-                </a:solidFill>
-                <a:latin typeface="Arial" pitchFamily="34" charset="0"/>
-                <a:ea typeface="Arial" pitchFamily="34" charset="-122"/>
-                <a:cs typeface="Arial" pitchFamily="34" charset="-120"/>
-              </a:rPr>
-              <a:t>Shared Control Plane &amp; Multi-Tenant Governance Perimeter (80% Reusable Core + 20% Topology Delta)</a:t>
-            </a:r>
-            <a:endParaRPr lang="en-US" sz="460" dirty="0"/>
+              <a:rPr lang="en-US" sz="420" b="1" dirty="0">
+                <a:solidFill>
+                  <a:srgbClr val="202124"/>
+                </a:solidFill>
+                <a:latin typeface="Arial" pitchFamily="34" charset="0"/>
+                <a:ea typeface="Arial" pitchFamily="34" charset="-122"/>
+                <a:cs typeface="Arial" pitchFamily="34" charset="-120"/>
+              </a:rPr>
+              <a:t>Shared Control Plane &amp; Multi-Tenant Governance Perimeter</a:t>
+            </a:r>
+            <a:endParaRPr lang="en-US" sz="420" dirty="0"/>
           </a:p>
         </p:txBody>
       </p:sp>
@@ -2249,8 +2249,8 @@
         </p:nvSpPr>
         <p:spPr>
           <a:xfrm>
-            <a:off x="4088282" y="2004365"/>
-            <a:ext cx="1805940" cy="146304"/>
+            <a:off x="4088282" y="1993392"/>
+            <a:ext cx="1723644" cy="105156"/>
           </a:xfrm>
           <a:prstGeom prst="rect">
             <a:avLst/>
@@ -2259,7 +2259,7 @@
           <a:ln/>
         </p:spPr>
         <p:txBody>
-          <a:bodyPr wrap="square" lIns="0" tIns="0" rIns="0" bIns="0" rtlCol="0" anchor="t">
+          <a:bodyPr wrap="none" lIns="0" tIns="0" rIns="0" bIns="0" rtlCol="0" anchor="t">
             <a:normAutofit/>
           </a:bodyPr>
           <a:lstStyle/>
@@ -2271,7 +2271,7 @@
               <a:buNone/>
             </a:pPr>
             <a:r>
-              <a:rPr lang="en-US" sz="460" b="1" dirty="0">
+              <a:rPr lang="en-US" sz="420" b="1" dirty="0">
                 <a:solidFill>
                   <a:srgbClr val="202124"/>
                 </a:solidFill>
@@ -2281,7 +2281,7 @@
               </a:rPr>
               <a:t>VPC &amp; 5-Hop Cryptographic Context Chain</a:t>
             </a:r>
-            <a:endParaRPr lang="en-US" sz="460" dirty="0"/>
+            <a:endParaRPr lang="en-US" sz="420" dirty="0"/>
           </a:p>
         </p:txBody>
       </p:sp>
@@ -2320,8 +2320,8 @@
         </p:nvSpPr>
         <p:spPr>
           <a:xfrm>
-            <a:off x="4155034" y="3757270"/>
-            <a:ext cx="1255471" cy="146304"/>
+            <a:off x="4155034" y="3746297"/>
+            <a:ext cx="1255471" cy="105156"/>
           </a:xfrm>
           <a:prstGeom prst="rect">
             <a:avLst/>
@@ -2330,7 +2330,7 @@
           <a:ln/>
         </p:spPr>
         <p:txBody>
-          <a:bodyPr wrap="square" lIns="0" tIns="0" rIns="0" bIns="0" rtlCol="0" anchor="t">
+          <a:bodyPr wrap="none" lIns="0" tIns="0" rIns="0" bIns="0" rtlCol="0" anchor="t">
             <a:normAutofit/>
           </a:bodyPr>
           <a:lstStyle/>
@@ -2350,7 +2350,7 @@
                 <a:ea typeface="Arial" pitchFamily="34" charset="-122"/>
                 <a:cs typeface="Arial" pitchFamily="34" charset="-120"/>
               </a:rPr>
-              <a:t>Pattern A: Pooled Shared Runtime (Standard &amp; High-Density SaaS)</a:t>
+              <a:t>Pattern A: Pooled Shared Runtime</a:t>
             </a:r>
             <a:endParaRPr lang="en-US" sz="385" dirty="0"/>
           </a:p>
@@ -2391,8 +2391,8 @@
         </p:nvSpPr>
         <p:spPr>
           <a:xfrm>
-            <a:off x="6192317" y="3757270"/>
-            <a:ext cx="1255471" cy="146304"/>
+            <a:off x="6192317" y="3746297"/>
+            <a:ext cx="1255471" cy="105156"/>
           </a:xfrm>
           <a:prstGeom prst="rect">
             <a:avLst/>
@@ -2401,7 +2401,7 @@
           <a:ln/>
         </p:spPr>
         <p:txBody>
-          <a:bodyPr wrap="square" lIns="0" tIns="0" rIns="0" bIns="0" rtlCol="0" anchor="t">
+          <a:bodyPr wrap="none" lIns="0" tIns="0" rIns="0" bIns="0" rtlCol="0" anchor="t">
             <a:normAutofit/>
           </a:bodyPr>
           <a:lstStyle/>
@@ -2421,7 +2421,7 @@
                 <a:ea typeface="Arial" pitchFamily="34" charset="-122"/>
                 <a:cs typeface="Arial" pitchFamily="34" charset="-120"/>
               </a:rPr>
-              <a:t>Pattern B (Sovereign Silos) &amp; Pattern C (Hybrid PSC Spokes)</a:t>
+              <a:t>Pattern B (Sovereign Silos) &amp; Pattern C</a:t>
             </a:r>
             <a:endParaRPr lang="en-US" sz="385" dirty="0"/>
           </a:p>
@@ -2736,7 +2736,7 @@
         <p:spPr>
           <a:xfrm>
             <a:off x="6881774" y="2161642"/>
-            <a:ext cx="1145743" cy="146304"/>
+            <a:ext cx="1145743" cy="137160"/>
           </a:xfrm>
           <a:prstGeom prst="rect">
             <a:avLst/>
@@ -3960,8 +3960,8 @@
         </p:blipFill>
         <p:spPr>
           <a:xfrm>
-            <a:off x="5576926" y="2516429"/>
-            <a:ext cx="181966" cy="181966"/>
+            <a:off x="5563210" y="2536546"/>
+            <a:ext cx="141732" cy="141732"/>
           </a:xfrm>
           <a:prstGeom prst="rect">
             <a:avLst/>
@@ -3976,8 +3976,8 @@
         </p:nvSpPr>
         <p:spPr>
           <a:xfrm>
-            <a:off x="5795467" y="2474366"/>
-            <a:ext cx="689458" cy="266090"/>
+            <a:off x="5727802" y="2470709"/>
+            <a:ext cx="779069" cy="273406"/>
           </a:xfrm>
           <a:prstGeom prst="rect">
             <a:avLst/>
@@ -3993,12 +3993,12 @@
           <a:p>
             <a:pPr algn="l" indent="0" marL="0">
               <a:lnSpc>
-                <a:spcPct val="86000"/>
-              </a:lnSpc>
-              <a:buNone/>
-            </a:pPr>
-            <a:r>
-              <a:rPr lang="en-US" sz="500" b="1" dirty="0">
+                <a:spcPct val="88000"/>
+              </a:lnSpc>
+              <a:buNone/>
+            </a:pPr>
+            <a:r>
+              <a:rPr lang="en-US" sz="435" b="1" dirty="0">
                 <a:solidFill>
                   <a:srgbClr val="202124"/>
                 </a:solidFill>
@@ -4008,17 +4008,17 @@
               </a:rPr>
               <a:t>External Application Load Balancer</a:t>
             </a:r>
-            <a:endParaRPr lang="en-US" sz="500" dirty="0"/>
+            <a:endParaRPr lang="en-US" sz="435" dirty="0"/>
           </a:p>
           <a:p>
             <a:pPr algn="l" indent="0" marL="0">
               <a:lnSpc>
-                <a:spcPct val="86000"/>
-              </a:lnSpc>
-              <a:buNone/>
-            </a:pPr>
-            <a:r>
-              <a:rPr lang="en-US" sz="430" dirty="0">
+                <a:spcPct val="88000"/>
+              </a:lnSpc>
+              <a:buNone/>
+            </a:pPr>
+            <a:r>
+              <a:rPr lang="en-US" sz="375" dirty="0">
                 <a:solidFill>
                   <a:srgbClr val="3C4043"/>
                 </a:solidFill>
@@ -4028,7 +4028,7 @@
               </a:rPr>
               <a:t>Cloud Load Balancing</a:t>
             </a:r>
-            <a:endParaRPr lang="en-US" sz="500" dirty="0"/>
+            <a:endParaRPr lang="en-US" sz="435" dirty="0"/>
           </a:p>
         </p:txBody>
       </p:sp>
@@ -4075,8 +4075,8 @@
         </p:blipFill>
         <p:spPr>
           <a:xfrm>
-            <a:off x="6969557" y="2416759"/>
-            <a:ext cx="172822" cy="172822"/>
+            <a:off x="6955841" y="2435962"/>
+            <a:ext cx="134417" cy="134417"/>
           </a:xfrm>
           <a:prstGeom prst="rect">
             <a:avLst/>
@@ -4091,8 +4091,8 @@
         </p:nvSpPr>
         <p:spPr>
           <a:xfrm>
-            <a:off x="7178954" y="2377440"/>
-            <a:ext cx="750722" cy="251460"/>
+            <a:off x="7113118" y="2373782"/>
+            <a:ext cx="838505" cy="258775"/>
           </a:xfrm>
           <a:prstGeom prst="rect">
             <a:avLst/>
@@ -4108,12 +4108,12 @@
           <a:p>
             <a:pPr algn="l" indent="0" marL="0">
               <a:lnSpc>
-                <a:spcPct val="86000"/>
-              </a:lnSpc>
-              <a:buNone/>
-            </a:pPr>
-            <a:r>
-              <a:rPr lang="en-US" sz="500" b="1" dirty="0">
+                <a:spcPct val="88000"/>
+              </a:lnSpc>
+              <a:buNone/>
+            </a:pPr>
+            <a:r>
+              <a:rPr lang="en-US" sz="435" b="1" dirty="0">
                 <a:solidFill>
                   <a:srgbClr val="202124"/>
                 </a:solidFill>
@@ -4123,17 +4123,17 @@
               </a:rPr>
               <a:t>Security Command Center</a:t>
             </a:r>
-            <a:endParaRPr lang="en-US" sz="500" dirty="0"/>
+            <a:endParaRPr lang="en-US" sz="435" dirty="0"/>
           </a:p>
           <a:p>
             <a:pPr algn="l" indent="0" marL="0">
               <a:lnSpc>
-                <a:spcPct val="86000"/>
-              </a:lnSpc>
-              <a:buNone/>
-            </a:pPr>
-            <a:r>
-              <a:rPr lang="en-US" sz="430" dirty="0">
+                <a:spcPct val="88000"/>
+              </a:lnSpc>
+              <a:buNone/>
+            </a:pPr>
+            <a:r>
+              <a:rPr lang="en-US" sz="375" dirty="0">
                 <a:solidFill>
                   <a:srgbClr val="3C4043"/>
                 </a:solidFill>
@@ -4143,7 +4143,7 @@
               </a:rPr>
               <a:t>Cross-Pattern Breach Alerts</a:t>
             </a:r>
-            <a:endParaRPr lang="en-US" sz="500" dirty="0"/>
+            <a:endParaRPr lang="en-US" sz="435" dirty="0"/>
           </a:p>
         </p:txBody>
       </p:sp>
@@ -4190,8 +4190,8 @@
         </p:blipFill>
         <p:spPr>
           <a:xfrm>
-            <a:off x="6985102" y="3043123"/>
-            <a:ext cx="163678" cy="163678"/>
+            <a:off x="6971386" y="3061411"/>
+            <a:ext cx="128016" cy="128016"/>
           </a:xfrm>
           <a:prstGeom prst="rect">
             <a:avLst/>
@@ -4206,8 +4206,8 @@
         </p:nvSpPr>
         <p:spPr>
           <a:xfrm>
-            <a:off x="7185355" y="3006547"/>
-            <a:ext cx="730606" cy="236830"/>
+            <a:off x="7121347" y="3002890"/>
+            <a:ext cx="817474" cy="244145"/>
           </a:xfrm>
           <a:prstGeom prst="rect">
             <a:avLst/>
@@ -4223,12 +4223,12 @@
           <a:p>
             <a:pPr algn="l" indent="0" marL="0">
               <a:lnSpc>
-                <a:spcPct val="86000"/>
-              </a:lnSpc>
-              <a:buNone/>
-            </a:pPr>
-            <a:r>
-              <a:rPr lang="en-US" sz="500" b="1" dirty="0">
+                <a:spcPct val="88000"/>
+              </a:lnSpc>
+              <a:buNone/>
+            </a:pPr>
+            <a:r>
+              <a:rPr lang="en-US" sz="435" b="1" dirty="0">
                 <a:solidFill>
                   <a:srgbClr val="202124"/>
                 </a:solidFill>
@@ -4238,17 +4238,17 @@
               </a:rPr>
               <a:t>Cloud Logging &amp; BQ</a:t>
             </a:r>
-            <a:endParaRPr lang="en-US" sz="500" dirty="0"/>
+            <a:endParaRPr lang="en-US" sz="435" dirty="0"/>
           </a:p>
           <a:p>
             <a:pPr algn="l" indent="0" marL="0">
               <a:lnSpc>
-                <a:spcPct val="86000"/>
-              </a:lnSpc>
-              <a:buNone/>
-            </a:pPr>
-            <a:r>
-              <a:rPr lang="en-US" sz="430" dirty="0">
+                <a:spcPct val="88000"/>
+              </a:lnSpc>
+              <a:buNone/>
+            </a:pPr>
+            <a:r>
+              <a:rPr lang="en-US" sz="375" dirty="0">
                 <a:solidFill>
                   <a:srgbClr val="3C4043"/>
                 </a:solidFill>
@@ -4258,7 +4258,7 @@
               </a:rPr>
               <a:t>Zero-PII OTel &amp; Chargeback</a:t>
             </a:r>
-            <a:endParaRPr lang="en-US" sz="500" dirty="0"/>
+            <a:endParaRPr lang="en-US" sz="435" dirty="0"/>
           </a:p>
         </p:txBody>
       </p:sp>
@@ -4305,8 +4305,8 @@
         </p:blipFill>
         <p:spPr>
           <a:xfrm>
-            <a:off x="6992417" y="2735885"/>
-            <a:ext cx="163678" cy="163678"/>
+            <a:off x="6978701" y="2754173"/>
+            <a:ext cx="128016" cy="128016"/>
           </a:xfrm>
           <a:prstGeom prst="rect">
             <a:avLst/>
@@ -4321,8 +4321,8 @@
         </p:nvSpPr>
         <p:spPr>
           <a:xfrm>
-            <a:off x="7192670" y="2699309"/>
-            <a:ext cx="715061" cy="236830"/>
+            <a:off x="7128662" y="2695651"/>
+            <a:ext cx="801014" cy="244145"/>
           </a:xfrm>
           <a:prstGeom prst="rect">
             <a:avLst/>
@@ -4338,12 +4338,12 @@
           <a:p>
             <a:pPr algn="l" indent="0" marL="0">
               <a:lnSpc>
-                <a:spcPct val="86000"/>
-              </a:lnSpc>
-              <a:buNone/>
-            </a:pPr>
-            <a:r>
-              <a:rPr lang="en-US" sz="500" b="1" dirty="0">
+                <a:spcPct val="88000"/>
+              </a:lnSpc>
+              <a:buNone/>
+            </a:pPr>
+            <a:r>
+              <a:rPr lang="en-US" sz="435" b="1" dirty="0">
                 <a:solidFill>
                   <a:srgbClr val="202124"/>
                 </a:solidFill>
@@ -4353,17 +4353,17 @@
               </a:rPr>
               <a:t>Central IAM &amp; PAB</a:t>
             </a:r>
-            <a:endParaRPr lang="en-US" sz="500" dirty="0"/>
+            <a:endParaRPr lang="en-US" sz="435" dirty="0"/>
           </a:p>
           <a:p>
             <a:pPr algn="l" indent="0" marL="0">
               <a:lnSpc>
-                <a:spcPct val="86000"/>
-              </a:lnSpc>
-              <a:buNone/>
-            </a:pPr>
-            <a:r>
-              <a:rPr lang="en-US" sz="430" dirty="0">
+                <a:spcPct val="88000"/>
+              </a:lnSpc>
+              <a:buNone/>
+            </a:pPr>
+            <a:r>
+              <a:rPr lang="en-US" sz="375" dirty="0">
                 <a:solidFill>
                   <a:srgbClr val="3C4043"/>
                 </a:solidFill>
@@ -4373,7 +4373,7 @@
               </a:rPr>
               <a:t>Agent Identity (2LO/3LO)</a:t>
             </a:r>
-            <a:endParaRPr lang="en-US" sz="500" dirty="0"/>
+            <a:endParaRPr lang="en-US" sz="435" dirty="0"/>
           </a:p>
         </p:txBody>
       </p:sp>
@@ -4420,8 +4420,8 @@
         </p:blipFill>
         <p:spPr>
           <a:xfrm>
-            <a:off x="5164531" y="4358030"/>
-            <a:ext cx="177394" cy="177394"/>
+            <a:off x="5150815" y="4377233"/>
+            <a:ext cx="138074" cy="138074"/>
           </a:xfrm>
           <a:prstGeom prst="rect">
             <a:avLst/>
@@ -4436,8 +4436,8 @@
         </p:nvSpPr>
         <p:spPr>
           <a:xfrm>
-            <a:off x="5378501" y="4316882"/>
-            <a:ext cx="513893" cy="258775"/>
+            <a:off x="5311750" y="4313225"/>
+            <a:ext cx="602590" cy="266090"/>
           </a:xfrm>
           <a:prstGeom prst="rect">
             <a:avLst/>
@@ -4453,12 +4453,12 @@
           <a:p>
             <a:pPr algn="l" indent="0" marL="0">
               <a:lnSpc>
-                <a:spcPct val="86000"/>
-              </a:lnSpc>
-              <a:buNone/>
-            </a:pPr>
-            <a:r>
-              <a:rPr lang="en-US" sz="500" b="1" dirty="0">
+                <a:spcPct val="88000"/>
+              </a:lnSpc>
+              <a:buNone/>
+            </a:pPr>
+            <a:r>
+              <a:rPr lang="en-US" sz="435" b="1" dirty="0">
                 <a:solidFill>
                   <a:srgbClr val="202124"/>
                 </a:solidFill>
@@ -4468,17 +4468,17 @@
               </a:rPr>
               <a:t>Vertex AI Agent Engine</a:t>
             </a:r>
-            <a:endParaRPr lang="en-US" sz="500" dirty="0"/>
+            <a:endParaRPr lang="en-US" sz="435" dirty="0"/>
           </a:p>
           <a:p>
             <a:pPr algn="l" indent="0" marL="0">
               <a:lnSpc>
-                <a:spcPct val="86000"/>
-              </a:lnSpc>
-              <a:buNone/>
-            </a:pPr>
-            <a:r>
-              <a:rPr lang="en-US" sz="430" dirty="0">
+                <a:spcPct val="88000"/>
+              </a:lnSpc>
+              <a:buNone/>
+            </a:pPr>
+            <a:r>
+              <a:rPr lang="en-US" sz="375" dirty="0">
                 <a:solidFill>
                   <a:srgbClr val="3C4043"/>
                 </a:solidFill>
@@ -4488,7 +4488,7 @@
               </a:rPr>
               <a:t>gVisor + temp:tenant_id</a:t>
             </a:r>
-            <a:endParaRPr lang="en-US" sz="500" dirty="0"/>
+            <a:endParaRPr lang="en-US" sz="435" dirty="0"/>
           </a:p>
         </p:txBody>
       </p:sp>
@@ -4535,8 +4535,8 @@
         </p:blipFill>
         <p:spPr>
           <a:xfrm>
-            <a:off x="5164531" y="4897526"/>
-            <a:ext cx="177394" cy="177394"/>
+            <a:off x="5150815" y="4916729"/>
+            <a:ext cx="138074" cy="138074"/>
           </a:xfrm>
           <a:prstGeom prst="rect">
             <a:avLst/>
@@ -4551,8 +4551,8 @@
         </p:nvSpPr>
         <p:spPr>
           <a:xfrm>
-            <a:off x="5378501" y="4856378"/>
-            <a:ext cx="513893" cy="258775"/>
+            <a:off x="5311750" y="4852721"/>
+            <a:ext cx="602590" cy="266090"/>
           </a:xfrm>
           <a:prstGeom prst="rect">
             <a:avLst/>
@@ -4568,12 +4568,12 @@
           <a:p>
             <a:pPr algn="l" indent="0" marL="0">
               <a:lnSpc>
-                <a:spcPct val="86000"/>
-              </a:lnSpc>
-              <a:buNone/>
-            </a:pPr>
-            <a:r>
-              <a:rPr lang="en-US" sz="500" b="1" dirty="0">
+                <a:spcPct val="88000"/>
+              </a:lnSpc>
+              <a:buNone/>
+            </a:pPr>
+            <a:r>
+              <a:rPr lang="en-US" sz="435" b="1" dirty="0">
                 <a:solidFill>
                   <a:srgbClr val="202124"/>
                 </a:solidFill>
@@ -4583,17 +4583,17 @@
               </a:rPr>
               <a:t>MCP servers</a:t>
             </a:r>
-            <a:endParaRPr lang="en-US" sz="500" dirty="0"/>
+            <a:endParaRPr lang="en-US" sz="435" dirty="0"/>
           </a:p>
           <a:p>
             <a:pPr algn="l" indent="0" marL="0">
               <a:lnSpc>
-                <a:spcPct val="86000"/>
-              </a:lnSpc>
-              <a:buNone/>
-            </a:pPr>
-            <a:r>
-              <a:rPr lang="en-US" sz="430" dirty="0">
+                <a:spcPct val="88000"/>
+              </a:lnSpc>
+              <a:buNone/>
+            </a:pPr>
+            <a:r>
+              <a:rPr lang="en-US" sz="375" dirty="0">
                 <a:solidFill>
                   <a:srgbClr val="3C4043"/>
                 </a:solidFill>
@@ -4603,7 +4603,7 @@
               </a:rPr>
               <a:t>2LO + 3LO OIDC/Entra</a:t>
             </a:r>
-            <a:endParaRPr lang="en-US" sz="500" dirty="0"/>
+            <a:endParaRPr lang="en-US" sz="435" dirty="0"/>
           </a:p>
         </p:txBody>
       </p:sp>
@@ -4650,8 +4650,8 @@
         </p:blipFill>
         <p:spPr>
           <a:xfrm>
-            <a:off x="5164531" y="5459882"/>
-            <a:ext cx="177394" cy="177394"/>
+            <a:off x="5150815" y="5479085"/>
+            <a:ext cx="138074" cy="138074"/>
           </a:xfrm>
           <a:prstGeom prst="rect">
             <a:avLst/>
@@ -4666,8 +4666,8 @@
         </p:nvSpPr>
         <p:spPr>
           <a:xfrm>
-            <a:off x="5378501" y="5418734"/>
-            <a:ext cx="513893" cy="258775"/>
+            <a:off x="5311750" y="5415077"/>
+            <a:ext cx="602590" cy="266090"/>
           </a:xfrm>
           <a:prstGeom prst="rect">
             <a:avLst/>
@@ -4683,12 +4683,12 @@
           <a:p>
             <a:pPr algn="l" indent="0" marL="0">
               <a:lnSpc>
-                <a:spcPct val="86000"/>
-              </a:lnSpc>
-              <a:buNone/>
-            </a:pPr>
-            <a:r>
-              <a:rPr lang="en-US" sz="500" b="1" dirty="0">
+                <a:spcPct val="88000"/>
+              </a:lnSpc>
+              <a:buNone/>
+            </a:pPr>
+            <a:r>
+              <a:rPr lang="en-US" sz="435" b="1" dirty="0">
                 <a:solidFill>
                   <a:srgbClr val="202124"/>
                 </a:solidFill>
@@ -4698,17 +4698,17 @@
               </a:rPr>
               <a:t>Shared AlloyDB</a:t>
             </a:r>
-            <a:endParaRPr lang="en-US" sz="500" dirty="0"/>
+            <a:endParaRPr lang="en-US" sz="435" dirty="0"/>
           </a:p>
           <a:p>
             <a:pPr algn="l" indent="0" marL="0">
               <a:lnSpc>
-                <a:spcPct val="86000"/>
-              </a:lnSpc>
-              <a:buNone/>
-            </a:pPr>
-            <a:r>
-              <a:rPr lang="en-US" sz="430" dirty="0">
+                <a:spcPct val="88000"/>
+              </a:lnSpc>
+              <a:buNone/>
+            </a:pPr>
+            <a:r>
+              <a:rPr lang="en-US" sz="375" dirty="0">
                 <a:solidFill>
                   <a:srgbClr val="3C4043"/>
                 </a:solidFill>
@@ -4718,7 +4718,7 @@
               </a:rPr>
               <a:t>FORCE Row-Level Security</a:t>
             </a:r>
-            <a:endParaRPr lang="en-US" sz="500" dirty="0"/>
+            <a:endParaRPr lang="en-US" sz="435" dirty="0"/>
           </a:p>
         </p:txBody>
       </p:sp>
@@ -4765,8 +4765,8 @@
         </p:blipFill>
         <p:spPr>
           <a:xfrm>
-            <a:off x="7201814" y="4358030"/>
-            <a:ext cx="177394" cy="177394"/>
+            <a:off x="7188098" y="4377233"/>
+            <a:ext cx="138074" cy="138074"/>
           </a:xfrm>
           <a:prstGeom prst="rect">
             <a:avLst/>
@@ -4781,8 +4781,8 @@
         </p:nvSpPr>
         <p:spPr>
           <a:xfrm>
-            <a:off x="7415784" y="4316882"/>
-            <a:ext cx="513893" cy="258775"/>
+            <a:off x="7349033" y="4313225"/>
+            <a:ext cx="602590" cy="266090"/>
           </a:xfrm>
           <a:prstGeom prst="rect">
             <a:avLst/>
@@ -4798,12 +4798,12 @@
           <a:p>
             <a:pPr algn="l" indent="0" marL="0">
               <a:lnSpc>
-                <a:spcPct val="86000"/>
-              </a:lnSpc>
-              <a:buNone/>
-            </a:pPr>
-            <a:r>
-              <a:rPr lang="en-US" sz="500" b="1" dirty="0">
+                <a:spcPct val="88000"/>
+              </a:lnSpc>
+              <a:buNone/>
+            </a:pPr>
+            <a:r>
+              <a:rPr lang="en-US" sz="435" b="1" dirty="0">
                 <a:solidFill>
                   <a:srgbClr val="202124"/>
                 </a:solidFill>
@@ -4813,17 +4813,17 @@
               </a:rPr>
               <a:t>Vertex AI Agent Engine</a:t>
             </a:r>
-            <a:endParaRPr lang="en-US" sz="500" dirty="0"/>
+            <a:endParaRPr lang="en-US" sz="435" dirty="0"/>
           </a:p>
           <a:p>
             <a:pPr algn="l" indent="0" marL="0">
               <a:lnSpc>
-                <a:spcPct val="86000"/>
-              </a:lnSpc>
-              <a:buNone/>
-            </a:pPr>
-            <a:r>
-              <a:rPr lang="en-US" sz="430" dirty="0">
+                <a:spcPct val="88000"/>
+              </a:lnSpc>
+              <a:buNone/>
+            </a:pPr>
+            <a:r>
+              <a:rPr lang="en-US" sz="375" dirty="0">
                 <a:solidFill>
                   <a:srgbClr val="3C4043"/>
                 </a:solidFill>
@@ -4833,7 +4833,7 @@
               </a:rPr>
               <a:t>Dedicated Silo + Agent Alpha</a:t>
             </a:r>
-            <a:endParaRPr lang="en-US" sz="500" dirty="0"/>
+            <a:endParaRPr lang="en-US" sz="435" dirty="0"/>
           </a:p>
         </p:txBody>
       </p:sp>
@@ -4880,8 +4880,8 @@
         </p:blipFill>
         <p:spPr>
           <a:xfrm>
-            <a:off x="7201814" y="4897526"/>
-            <a:ext cx="177394" cy="177394"/>
+            <a:off x="7188098" y="4916729"/>
+            <a:ext cx="138074" cy="138074"/>
           </a:xfrm>
           <a:prstGeom prst="rect">
             <a:avLst/>
@@ -4896,8 +4896,8 @@
         </p:nvSpPr>
         <p:spPr>
           <a:xfrm>
-            <a:off x="7415784" y="4856378"/>
-            <a:ext cx="513893" cy="258775"/>
+            <a:off x="7349033" y="4852721"/>
+            <a:ext cx="602590" cy="266090"/>
           </a:xfrm>
           <a:prstGeom prst="rect">
             <a:avLst/>
@@ -4913,12 +4913,12 @@
           <a:p>
             <a:pPr algn="l" indent="0" marL="0">
               <a:lnSpc>
-                <a:spcPct val="86000"/>
-              </a:lnSpc>
-              <a:buNone/>
-            </a:pPr>
-            <a:r>
-              <a:rPr lang="en-US" sz="500" b="1" dirty="0">
+                <a:spcPct val="88000"/>
+              </a:lnSpc>
+              <a:buNone/>
+            </a:pPr>
+            <a:r>
+              <a:rPr lang="en-US" sz="435" b="1" dirty="0">
                 <a:solidFill>
                   <a:srgbClr val="202124"/>
                 </a:solidFill>
@@ -4928,17 +4928,17 @@
               </a:rPr>
               <a:t>MCP servers</a:t>
             </a:r>
-            <a:endParaRPr lang="en-US" sz="500" dirty="0"/>
+            <a:endParaRPr lang="en-US" sz="435" dirty="0"/>
           </a:p>
           <a:p>
             <a:pPr algn="l" indent="0" marL="0">
               <a:lnSpc>
-                <a:spcPct val="86000"/>
-              </a:lnSpc>
-              <a:buNone/>
-            </a:pPr>
-            <a:r>
-              <a:rPr lang="en-US" sz="430" dirty="0">
+                <a:spcPct val="88000"/>
+              </a:lnSpc>
+              <a:buNone/>
+            </a:pPr>
+            <a:r>
+              <a:rPr lang="en-US" sz="375" dirty="0">
                 <a:solidFill>
                   <a:srgbClr val="3C4043"/>
                 </a:solidFill>
@@ -4948,7 +4948,7 @@
               </a:rPr>
               <a:t>Local Silo 3LO Connectors</a:t>
             </a:r>
-            <a:endParaRPr lang="en-US" sz="500" dirty="0"/>
+            <a:endParaRPr lang="en-US" sz="435" dirty="0"/>
           </a:p>
         </p:txBody>
       </p:sp>
@@ -4995,8 +4995,8 @@
         </p:blipFill>
         <p:spPr>
           <a:xfrm>
-            <a:off x="7201814" y="5459882"/>
-            <a:ext cx="177394" cy="177394"/>
+            <a:off x="7188098" y="5479085"/>
+            <a:ext cx="138074" cy="138074"/>
           </a:xfrm>
           <a:prstGeom prst="rect">
             <a:avLst/>
@@ -5011,8 +5011,8 @@
         </p:nvSpPr>
         <p:spPr>
           <a:xfrm>
-            <a:off x="7415784" y="5418734"/>
-            <a:ext cx="513893" cy="258775"/>
+            <a:off x="7349033" y="5415077"/>
+            <a:ext cx="602590" cy="266090"/>
           </a:xfrm>
           <a:prstGeom prst="rect">
             <a:avLst/>
@@ -5028,12 +5028,12 @@
           <a:p>
             <a:pPr algn="l" indent="0" marL="0">
               <a:lnSpc>
-                <a:spcPct val="86000"/>
-              </a:lnSpc>
-              <a:buNone/>
-            </a:pPr>
-            <a:r>
-              <a:rPr lang="en-US" sz="500" b="1" dirty="0">
+                <a:spcPct val="88000"/>
+              </a:lnSpc>
+              <a:buNone/>
+            </a:pPr>
+            <a:r>
+              <a:rPr lang="en-US" sz="435" b="1" dirty="0">
                 <a:solidFill>
                   <a:srgbClr val="202124"/>
                 </a:solidFill>
@@ -5043,17 +5043,17 @@
               </a:rPr>
               <a:t>CMEK Datastore</a:t>
             </a:r>
-            <a:endParaRPr lang="en-US" sz="500" dirty="0"/>
+            <a:endParaRPr lang="en-US" sz="435" dirty="0"/>
           </a:p>
           <a:p>
             <a:pPr algn="l" indent="0" marL="0">
               <a:lnSpc>
-                <a:spcPct val="86000"/>
-              </a:lnSpc>
-              <a:buNone/>
-            </a:pPr>
-            <a:r>
-              <a:rPr lang="en-US" sz="430" dirty="0">
+                <a:spcPct val="88000"/>
+              </a:lnSpc>
+              <a:buNone/>
+            </a:pPr>
+            <a:r>
+              <a:rPr lang="en-US" sz="375" dirty="0">
                 <a:solidFill>
                   <a:srgbClr val="3C4043"/>
                 </a:solidFill>
@@ -5063,7 +5063,7 @@
               </a:rPr>
               <a:t>AlloyDB, BQ &amp; KMS 423 Lock</a:t>
             </a:r>
-            <a:endParaRPr lang="en-US" sz="500" dirty="0"/>
+            <a:endParaRPr lang="en-US" sz="435" dirty="0"/>
           </a:p>
         </p:txBody>
       </p:sp>
@@ -5110,8 +5110,8 @@
         </p:blipFill>
         <p:spPr>
           <a:xfrm>
-            <a:off x="5666537" y="3065069"/>
-            <a:ext cx="158191" cy="158191"/>
+            <a:off x="5652821" y="3081528"/>
+            <a:ext cx="123444" cy="123444"/>
           </a:xfrm>
           <a:prstGeom prst="rect">
             <a:avLst/>
@@ -5126,8 +5126,8 @@
         </p:nvSpPr>
         <p:spPr>
           <a:xfrm>
-            <a:off x="5861304" y="3029407"/>
-            <a:ext cx="570586" cy="228600"/>
+            <a:off x="5799125" y="3025750"/>
+            <a:ext cx="655625" cy="235915"/>
           </a:xfrm>
           <a:prstGeom prst="rect">
             <a:avLst/>
@@ -5143,12 +5143,12 @@
           <a:p>
             <a:pPr algn="l" indent="0" marL="0">
               <a:lnSpc>
-                <a:spcPct val="86000"/>
-              </a:lnSpc>
-              <a:buNone/>
-            </a:pPr>
-            <a:r>
-              <a:rPr lang="en-US" sz="500" b="1" dirty="0">
+                <a:spcPct val="88000"/>
+              </a:lnSpc>
+              <a:buNone/>
+            </a:pPr>
+            <a:r>
+              <a:rPr lang="en-US" sz="435" b="1" dirty="0">
                 <a:solidFill>
                   <a:srgbClr val="202124"/>
                 </a:solidFill>
@@ -5158,17 +5158,17 @@
               </a:rPr>
               <a:t>Cloud Run</a:t>
             </a:r>
-            <a:endParaRPr lang="en-US" sz="500" dirty="0"/>
+            <a:endParaRPr lang="en-US" sz="435" dirty="0"/>
           </a:p>
           <a:p>
             <a:pPr algn="l" indent="0" marL="0">
               <a:lnSpc>
-                <a:spcPct val="86000"/>
-              </a:lnSpc>
-              <a:buNone/>
-            </a:pPr>
-            <a:r>
-              <a:rPr lang="en-US" sz="430" dirty="0">
+                <a:spcPct val="88000"/>
+              </a:lnSpc>
+              <a:buNone/>
+            </a:pPr>
+            <a:r>
+              <a:rPr lang="en-US" sz="375" dirty="0">
                 <a:solidFill>
                   <a:srgbClr val="3C4043"/>
                 </a:solidFill>
@@ -5178,7 +5178,7 @@
               </a:rPr>
               <a:t>Topology Router &amp; Agent Catalog PDP</a:t>
             </a:r>
-            <a:endParaRPr lang="en-US" sz="500" dirty="0"/>
+            <a:endParaRPr lang="en-US" sz="435" dirty="0"/>
           </a:p>
         </p:txBody>
       </p:sp>
@@ -5225,8 +5225,8 @@
         </p:blipFill>
         <p:spPr>
           <a:xfrm>
-            <a:off x="4243730" y="4169664"/>
-            <a:ext cx="172822" cy="172822"/>
+            <a:off x="4230014" y="4190695"/>
+            <a:ext cx="130759" cy="130759"/>
           </a:xfrm>
           <a:prstGeom prst="rect">
             <a:avLst/>
@@ -5241,8 +5241,8 @@
         </p:nvSpPr>
         <p:spPr>
           <a:xfrm>
-            <a:off x="4453128" y="4130345"/>
-            <a:ext cx="444398" cy="251460"/>
+            <a:off x="4383634" y="4126687"/>
+            <a:ext cx="536753" cy="258775"/>
           </a:xfrm>
           <a:prstGeom prst="rect">
             <a:avLst/>
@@ -5258,12 +5258,12 @@
           <a:p>
             <a:pPr algn="l" indent="0" marL="0">
               <a:lnSpc>
-                <a:spcPct val="86000"/>
-              </a:lnSpc>
-              <a:buNone/>
-            </a:pPr>
-            <a:r>
-              <a:rPr lang="en-US" sz="500" b="1" dirty="0">
+                <a:spcPct val="88000"/>
+              </a:lnSpc>
+              <a:buNone/>
+            </a:pPr>
+            <a:r>
+              <a:rPr lang="en-US" sz="435" b="1" dirty="0">
                 <a:solidFill>
                   <a:srgbClr val="202124"/>
                 </a:solidFill>
@@ -5273,17 +5273,17 @@
               </a:rPr>
               <a:t>Model Armor</a:t>
             </a:r>
-            <a:endParaRPr lang="en-US" sz="500" dirty="0"/>
+            <a:endParaRPr lang="en-US" sz="435" dirty="0"/>
           </a:p>
           <a:p>
             <a:pPr algn="l" indent="0" marL="0">
               <a:lnSpc>
-                <a:spcPct val="86000"/>
-              </a:lnSpc>
-              <a:buNone/>
-            </a:pPr>
-            <a:r>
-              <a:rPr lang="en-US" sz="430" dirty="0">
+                <a:spcPct val="88000"/>
+              </a:lnSpc>
+              <a:buNone/>
+            </a:pPr>
+            <a:r>
+              <a:rPr lang="en-US" sz="375" dirty="0">
                 <a:solidFill>
                   <a:srgbClr val="3C4043"/>
                 </a:solidFill>
@@ -5293,7 +5293,7 @@
               </a:rPr>
               <a:t>Tenant Rai Filters &amp; SDP PII</a:t>
             </a:r>
-            <a:endParaRPr lang="en-US" sz="500" dirty="0"/>
+            <a:endParaRPr lang="en-US" sz="435" dirty="0"/>
           </a:p>
         </p:txBody>
       </p:sp>
@@ -5340,8 +5340,8 @@
         </p:blipFill>
         <p:spPr>
           <a:xfrm>
-            <a:off x="4243730" y="5052974"/>
-            <a:ext cx="172822" cy="172822"/>
+            <a:off x="4230014" y="5074006"/>
+            <a:ext cx="130759" cy="130759"/>
           </a:xfrm>
           <a:prstGeom prst="rect">
             <a:avLst/>
@@ -5356,8 +5356,8 @@
         </p:nvSpPr>
         <p:spPr>
           <a:xfrm>
-            <a:off x="4453128" y="5013655"/>
-            <a:ext cx="444398" cy="251460"/>
+            <a:off x="4383634" y="5009998"/>
+            <a:ext cx="536753" cy="258775"/>
           </a:xfrm>
           <a:prstGeom prst="rect">
             <a:avLst/>
@@ -5373,12 +5373,12 @@
           <a:p>
             <a:pPr algn="l" indent="0" marL="0">
               <a:lnSpc>
-                <a:spcPct val="86000"/>
-              </a:lnSpc>
-              <a:buNone/>
-            </a:pPr>
-            <a:r>
-              <a:rPr lang="en-US" sz="500" b="1" dirty="0">
+                <a:spcPct val="88000"/>
+              </a:lnSpc>
+              <a:buNone/>
+            </a:pPr>
+            <a:r>
+              <a:rPr lang="en-US" sz="435" b="1" dirty="0">
                 <a:solidFill>
                   <a:srgbClr val="202124"/>
                 </a:solidFill>
@@ -5388,17 +5388,17 @@
               </a:rPr>
               <a:t>Gemini 2.5 Pro</a:t>
             </a:r>
-            <a:endParaRPr lang="en-US" sz="500" dirty="0"/>
+            <a:endParaRPr lang="en-US" sz="435" dirty="0"/>
           </a:p>
           <a:p>
             <a:pPr algn="l" indent="0" marL="0">
               <a:lnSpc>
-                <a:spcPct val="86000"/>
-              </a:lnSpc>
-              <a:buNone/>
-            </a:pPr>
-            <a:r>
-              <a:rPr lang="en-US" sz="430" dirty="0">
+                <a:spcPct val="88000"/>
+              </a:lnSpc>
+              <a:buNone/>
+            </a:pPr>
+            <a:r>
+              <a:rPr lang="en-US" sz="375" dirty="0">
                 <a:solidFill>
                   <a:srgbClr val="3C4043"/>
                 </a:solidFill>
@@ -5408,7 +5408,7 @@
               </a:rPr>
               <a:t>90% Prefix Cache Savings</a:t>
             </a:r>
-            <a:endParaRPr lang="en-US" sz="500" dirty="0"/>
+            <a:endParaRPr lang="en-US" sz="435" dirty="0"/>
           </a:p>
         </p:txBody>
       </p:sp>
@@ -5455,8 +5455,8 @@
         </p:blipFill>
         <p:spPr>
           <a:xfrm>
-            <a:off x="6281014" y="4169664"/>
-            <a:ext cx="172822" cy="172822"/>
+            <a:off x="6267298" y="4190695"/>
+            <a:ext cx="130759" cy="130759"/>
           </a:xfrm>
           <a:prstGeom prst="rect">
             <a:avLst/>
@@ -5471,8 +5471,8 @@
         </p:nvSpPr>
         <p:spPr>
           <a:xfrm>
-            <a:off x="6490411" y="4130345"/>
-            <a:ext cx="444398" cy="251460"/>
+            <a:off x="6420917" y="4126687"/>
+            <a:ext cx="536753" cy="258775"/>
           </a:xfrm>
           <a:prstGeom prst="rect">
             <a:avLst/>
@@ -5488,12 +5488,12 @@
           <a:p>
             <a:pPr algn="l" indent="0" marL="0">
               <a:lnSpc>
-                <a:spcPct val="86000"/>
-              </a:lnSpc>
-              <a:buNone/>
-            </a:pPr>
-            <a:r>
-              <a:rPr lang="en-US" sz="500" b="1" dirty="0">
+                <a:spcPct val="88000"/>
+              </a:lnSpc>
+              <a:buNone/>
+            </a:pPr>
+            <a:r>
+              <a:rPr lang="en-US" sz="435" b="1" dirty="0">
                 <a:solidFill>
                   <a:srgbClr val="202124"/>
                 </a:solidFill>
@@ -5503,17 +5503,17 @@
               </a:rPr>
               <a:t>VPC-SC &amp; Model Armor</a:t>
             </a:r>
-            <a:endParaRPr lang="en-US" sz="500" dirty="0"/>
+            <a:endParaRPr lang="en-US" sz="435" dirty="0"/>
           </a:p>
           <a:p>
             <a:pPr algn="l" indent="0" marL="0">
               <a:lnSpc>
-                <a:spcPct val="86000"/>
-              </a:lnSpc>
-              <a:buNone/>
-            </a:pPr>
-            <a:r>
-              <a:rPr lang="en-US" sz="430" dirty="0">
+                <a:spcPct val="88000"/>
+              </a:lnSpc>
+              <a:buNone/>
+            </a:pPr>
+            <a:r>
+              <a:rPr lang="en-US" sz="375" dirty="0">
                 <a:solidFill>
                   <a:srgbClr val="3C4043"/>
                 </a:solidFill>
@@ -5523,7 +5523,7 @@
               </a:rPr>
               <a:t>Sovereign Silo Guardrails</a:t>
             </a:r>
-            <a:endParaRPr lang="en-US" sz="500" dirty="0"/>
+            <a:endParaRPr lang="en-US" sz="435" dirty="0"/>
           </a:p>
         </p:txBody>
       </p:sp>
@@ -5570,8 +5570,8 @@
         </p:blipFill>
         <p:spPr>
           <a:xfrm>
-            <a:off x="6281014" y="4550969"/>
-            <a:ext cx="172822" cy="172822"/>
+            <a:off x="6267298" y="4572000"/>
+            <a:ext cx="130759" cy="130759"/>
           </a:xfrm>
           <a:prstGeom prst="rect">
             <a:avLst/>
@@ -5586,8 +5586,8 @@
         </p:nvSpPr>
         <p:spPr>
           <a:xfrm>
-            <a:off x="6490411" y="4511650"/>
-            <a:ext cx="444398" cy="251460"/>
+            <a:off x="6420917" y="4507992"/>
+            <a:ext cx="536753" cy="258775"/>
           </a:xfrm>
           <a:prstGeom prst="rect">
             <a:avLst/>
@@ -5603,12 +5603,12 @@
           <a:p>
             <a:pPr algn="l" indent="0" marL="0">
               <a:lnSpc>
-                <a:spcPct val="86000"/>
-              </a:lnSpc>
-              <a:buNone/>
-            </a:pPr>
-            <a:r>
-              <a:rPr lang="en-US" sz="500" b="1" dirty="0">
+                <a:spcPct val="88000"/>
+              </a:lnSpc>
+              <a:buNone/>
+            </a:pPr>
+            <a:r>
+              <a:rPr lang="en-US" sz="435" b="1" dirty="0">
                 <a:solidFill>
                   <a:srgbClr val="202124"/>
                 </a:solidFill>
@@ -5618,17 +5618,17 @@
               </a:rPr>
               <a:t>Gemini / Gemma 3</a:t>
             </a:r>
-            <a:endParaRPr lang="en-US" sz="500" dirty="0"/>
+            <a:endParaRPr lang="en-US" sz="435" dirty="0"/>
           </a:p>
           <a:p>
             <a:pPr algn="l" indent="0" marL="0">
               <a:lnSpc>
-                <a:spcPct val="86000"/>
-              </a:lnSpc>
-              <a:buNone/>
-            </a:pPr>
-            <a:r>
-              <a:rPr lang="en-US" sz="430" dirty="0">
+                <a:spcPct val="88000"/>
+              </a:lnSpc>
+              <a:buNone/>
+            </a:pPr>
+            <a:r>
+              <a:rPr lang="en-US" sz="375" dirty="0">
                 <a:solidFill>
                   <a:srgbClr val="3C4043"/>
                 </a:solidFill>
@@ -5638,7 +5638,7 @@
               </a:rPr>
               <a:t>Claude 3.7 or Private GKE</a:t>
             </a:r>
-            <a:endParaRPr lang="en-US" sz="500" dirty="0"/>
+            <a:endParaRPr lang="en-US" sz="435" dirty="0"/>
           </a:p>
         </p:txBody>
       </p:sp>
@@ -5685,8 +5685,8 @@
         </p:blipFill>
         <p:spPr>
           <a:xfrm>
-            <a:off x="4213555" y="2382926"/>
-            <a:ext cx="158191" cy="158191"/>
+            <a:off x="4199839" y="2399386"/>
+            <a:ext cx="123444" cy="123444"/>
           </a:xfrm>
           <a:prstGeom prst="rect">
             <a:avLst/>
@@ -5701,8 +5701,8 @@
         </p:nvSpPr>
         <p:spPr>
           <a:xfrm>
-            <a:off x="4408322" y="2347265"/>
-            <a:ext cx="496519" cy="228600"/>
+            <a:off x="4346143" y="2343607"/>
+            <a:ext cx="581558" cy="235915"/>
           </a:xfrm>
           <a:prstGeom prst="rect">
             <a:avLst/>
@@ -5718,32 +5718,32 @@
           <a:p>
             <a:pPr algn="l" indent="0" marL="0">
               <a:lnSpc>
-                <a:spcPct val="86000"/>
-              </a:lnSpc>
-              <a:buNone/>
-            </a:pPr>
-            <a:r>
-              <a:rPr lang="en-US" sz="500" b="1" dirty="0">
-                <a:solidFill>
-                  <a:srgbClr val="202124"/>
-                </a:solidFill>
-                <a:latin typeface="Arial" pitchFamily="34" charset="0"/>
-                <a:ea typeface="Arial" pitchFamily="34" charset="-122"/>
-                <a:cs typeface="Arial" pitchFamily="34" charset="-120"/>
-              </a:rPr>
-              <a:t>Cloud Armor &amp; IAP</a:t>
-            </a:r>
-            <a:endParaRPr lang="en-US" sz="500" dirty="0"/>
+                <a:spcPct val="88000"/>
+              </a:lnSpc>
+              <a:buNone/>
+            </a:pPr>
+            <a:r>
+              <a:rPr lang="en-US" sz="435" b="1" dirty="0">
+                <a:solidFill>
+                  <a:srgbClr val="202124"/>
+                </a:solidFill>
+                <a:latin typeface="Arial" pitchFamily="34" charset="0"/>
+                <a:ea typeface="Arial" pitchFamily="34" charset="-122"/>
+                <a:cs typeface="Arial" pitchFamily="34" charset="-120"/>
+              </a:rPr>
+              <a:t>Google Cloud Armor</a:t>
+            </a:r>
+            <a:endParaRPr lang="en-US" sz="435" dirty="0"/>
           </a:p>
           <a:p>
             <a:pPr algn="l" indent="0" marL="0">
               <a:lnSpc>
-                <a:spcPct val="86000"/>
-              </a:lnSpc>
-              <a:buNone/>
-            </a:pPr>
-            <a:r>
-              <a:rPr lang="en-US" sz="430" dirty="0">
+                <a:spcPct val="88000"/>
+              </a:lnSpc>
+              <a:buNone/>
+            </a:pPr>
+            <a:r>
+              <a:rPr lang="en-US" sz="375" dirty="0">
                 <a:solidFill>
                   <a:srgbClr val="3C4043"/>
                 </a:solidFill>
@@ -5751,9 +5751,9 @@
                 <a:ea typeface="Arial" pitchFamily="34" charset="-122"/>
                 <a:cs typeface="Arial" pitchFamily="34" charset="-120"/>
               </a:rPr>
-              <a:t>Strip Forged X-Tenant-ID</a:t>
-            </a:r>
-            <a:endParaRPr lang="en-US" sz="500" dirty="0"/>
+              <a:t>WAF &amp; IAP Header Strip</a:t>
+            </a:r>
+            <a:endParaRPr lang="en-US" sz="435" dirty="0"/>
           </a:p>
         </p:txBody>
       </p:sp>
@@ -5800,8 +5800,8 @@
         </p:blipFill>
         <p:spPr>
           <a:xfrm>
-            <a:off x="4213555" y="2697480"/>
-            <a:ext cx="158191" cy="158191"/>
+            <a:off x="4199839" y="2713939"/>
+            <a:ext cx="123444" cy="123444"/>
           </a:xfrm>
           <a:prstGeom prst="rect">
             <a:avLst/>
@@ -5816,8 +5816,8 @@
         </p:nvSpPr>
         <p:spPr>
           <a:xfrm>
-            <a:off x="4408322" y="2661818"/>
-            <a:ext cx="496519" cy="228600"/>
+            <a:off x="4346143" y="2658161"/>
+            <a:ext cx="581558" cy="235915"/>
           </a:xfrm>
           <a:prstGeom prst="rect">
             <a:avLst/>
@@ -5833,12 +5833,12 @@
           <a:p>
             <a:pPr algn="l" indent="0" marL="0">
               <a:lnSpc>
-                <a:spcPct val="86000"/>
-              </a:lnSpc>
-              <a:buNone/>
-            </a:pPr>
-            <a:r>
-              <a:rPr lang="en-US" sz="500" b="1" dirty="0">
+                <a:spcPct val="88000"/>
+              </a:lnSpc>
+              <a:buNone/>
+            </a:pPr>
+            <a:r>
+              <a:rPr lang="en-US" sz="435" b="1" dirty="0">
                 <a:solidFill>
                   <a:srgbClr val="202124"/>
                 </a:solidFill>
@@ -5848,17 +5848,17 @@
               </a:rPr>
               <a:t>Model Armor</a:t>
             </a:r>
-            <a:endParaRPr lang="en-US" sz="500" dirty="0"/>
+            <a:endParaRPr lang="en-US" sz="435" dirty="0"/>
           </a:p>
           <a:p>
             <a:pPr algn="l" indent="0" marL="0">
               <a:lnSpc>
-                <a:spcPct val="86000"/>
-              </a:lnSpc>
-              <a:buNone/>
-            </a:pPr>
-            <a:r>
-              <a:rPr lang="en-US" sz="430" dirty="0">
+                <a:spcPct val="88000"/>
+              </a:lnSpc>
+              <a:buNone/>
+            </a:pPr>
+            <a:r>
+              <a:rPr lang="en-US" sz="375" dirty="0">
                 <a:solidFill>
                   <a:srgbClr val="3C4043"/>
                 </a:solidFill>
@@ -5868,7 +5868,7 @@
               </a:rPr>
               <a:t>Ingress Prompt Screen</a:t>
             </a:r>
-            <a:endParaRPr lang="en-US" sz="500" dirty="0"/>
+            <a:endParaRPr lang="en-US" sz="435" dirty="0"/>
           </a:p>
         </p:txBody>
       </p:sp>
@@ -5915,8 +5915,8 @@
         </p:blipFill>
         <p:spPr>
           <a:xfrm>
-            <a:off x="4243730" y="3065069"/>
-            <a:ext cx="158191" cy="158191"/>
+            <a:off x="4230014" y="3081528"/>
+            <a:ext cx="123444" cy="123444"/>
           </a:xfrm>
           <a:prstGeom prst="rect">
             <a:avLst/>
@@ -5931,8 +5931,8 @@
         </p:nvSpPr>
         <p:spPr>
           <a:xfrm>
-            <a:off x="4438498" y="3029407"/>
-            <a:ext cx="466344" cy="228600"/>
+            <a:off x="4376318" y="3025750"/>
+            <a:ext cx="551383" cy="235915"/>
           </a:xfrm>
           <a:prstGeom prst="rect">
             <a:avLst/>
@@ -5948,12 +5948,12 @@
           <a:p>
             <a:pPr algn="l" indent="0" marL="0">
               <a:lnSpc>
-                <a:spcPct val="86000"/>
-              </a:lnSpc>
-              <a:buNone/>
-            </a:pPr>
-            <a:r>
-              <a:rPr lang="en-US" sz="500" b="1" dirty="0">
+                <a:spcPct val="88000"/>
+              </a:lnSpc>
+              <a:buNone/>
+            </a:pPr>
+            <a:r>
+              <a:rPr lang="en-US" sz="435" b="1" dirty="0">
                 <a:solidFill>
                   <a:srgbClr val="202124"/>
                 </a:solidFill>
@@ -5963,17 +5963,17 @@
               </a:rPr>
               <a:t>RFC 8693 OBO + DPoP</a:t>
             </a:r>
-            <a:endParaRPr lang="en-US" sz="500" dirty="0"/>
+            <a:endParaRPr lang="en-US" sz="435" dirty="0"/>
           </a:p>
           <a:p>
             <a:pPr algn="l" indent="0" marL="0">
               <a:lnSpc>
-                <a:spcPct val="86000"/>
-              </a:lnSpc>
-              <a:buNone/>
-            </a:pPr>
-            <a:r>
-              <a:rPr lang="en-US" sz="430" dirty="0">
+                <a:spcPct val="88000"/>
+              </a:lnSpc>
+              <a:buNone/>
+            </a:pPr>
+            <a:r>
+              <a:rPr lang="en-US" sz="375" dirty="0">
                 <a:solidFill>
                   <a:srgbClr val="3C4043"/>
                 </a:solidFill>
@@ -5983,981 +5983,13 @@
               </a:rPr>
               <a:t>Sender-Constrained JWT</a:t>
             </a:r>
-            <a:endParaRPr lang="en-US" sz="500" dirty="0"/>
-          </a:p>
-        </p:txBody>
-      </p:sp>
-      <p:sp>
-        <p:nvSpPr>
-          <p:cNvPr id="129" name="Text 107"/>
-          <p:cNvSpPr/>
-          <p:nvPr/>
-        </p:nvSpPr>
-        <p:spPr>
-          <a:xfrm>
-            <a:off x="7541057" y="3373222"/>
-            <a:ext cx="546811" cy="161849"/>
-          </a:xfrm>
-          <a:prstGeom prst="rect">
-            <a:avLst/>
-          </a:prstGeom>
-          <a:noFill/>
-          <a:ln/>
-        </p:spPr>
-        <p:txBody>
-          <a:bodyPr wrap="square" lIns="0" tIns="0" rIns="0" bIns="0" rtlCol="0" anchor="ctr">
-            <a:normAutofit/>
-          </a:bodyPr>
-          <a:lstStyle/>
-          <a:p>
-            <a:pPr algn="l" indent="0" marL="0">
-              <a:lnSpc>
-                <a:spcPct val="88000"/>
-              </a:lnSpc>
-              <a:buNone/>
-            </a:pPr>
-            <a:r>
-              <a:rPr lang="en-US" sz="500" b="1" dirty="0">
-                <a:solidFill>
-                  <a:srgbClr val="202124"/>
-                </a:solidFill>
-                <a:latin typeface="Arial" pitchFamily="34" charset="0"/>
-                <a:ea typeface="Arial" pitchFamily="34" charset="-122"/>
-                <a:cs typeface="Arial" pitchFamily="34" charset="-120"/>
-              </a:rPr>
-              <a:t>Security, OTel &amp; FinOps</a:t>
-            </a:r>
-            <a:endParaRPr lang="en-US" sz="500" dirty="0"/>
-          </a:p>
-          <a:p>
-            <a:pPr algn="l" indent="0" marL="0">
-              <a:lnSpc>
-                <a:spcPct val="88000"/>
-              </a:lnSpc>
-              <a:buNone/>
-            </a:pPr>
-            <a:r>
-              <a:rPr lang="en-US" sz="440" dirty="0">
-                <a:solidFill>
-                  <a:srgbClr val="202124"/>
-                </a:solidFill>
-                <a:latin typeface="Arial" pitchFamily="34" charset="0"/>
-                <a:ea typeface="Arial" pitchFamily="34" charset="-122"/>
-                <a:cs typeface="Arial" pitchFamily="34" charset="-120"/>
-              </a:rPr>
-              <a:t>chargeback telemetry</a:t>
-            </a:r>
-            <a:endParaRPr lang="en-US" sz="500" dirty="0"/>
-          </a:p>
-        </p:txBody>
-      </p:sp>
-      <p:sp>
-        <p:nvSpPr>
-          <p:cNvPr id="130" name="Text 108"/>
-          <p:cNvSpPr/>
-          <p:nvPr/>
-        </p:nvSpPr>
-        <p:spPr>
-          <a:xfrm>
-            <a:off x="5237683" y="4654296"/>
-            <a:ext cx="591617" cy="124358"/>
-          </a:xfrm>
-          <a:prstGeom prst="rect">
-            <a:avLst/>
-          </a:prstGeom>
-          <a:noFill/>
-          <a:ln/>
-        </p:spPr>
-        <p:txBody>
-          <a:bodyPr wrap="square" lIns="0" tIns="0" rIns="0" bIns="0" rtlCol="0" anchor="ctr">
-            <a:normAutofit/>
-          </a:bodyPr>
-          <a:lstStyle/>
-          <a:p>
-            <a:pPr algn="ctr" indent="0" marL="0">
-              <a:lnSpc>
-                <a:spcPct val="88000"/>
-              </a:lnSpc>
-              <a:buNone/>
-            </a:pPr>
-            <a:r>
-              <a:rPr lang="en-US" sz="500" b="1" dirty="0">
-                <a:solidFill>
-                  <a:srgbClr val="202124"/>
-                </a:solidFill>
-                <a:latin typeface="Arial" pitchFamily="34" charset="0"/>
-                <a:ea typeface="Arial" pitchFamily="34" charset="-122"/>
-                <a:cs typeface="Arial" pitchFamily="34" charset="-120"/>
-              </a:rPr>
-              <a:t>Scoped</a:t>
-            </a:r>
-            <a:endParaRPr lang="en-US" sz="500" dirty="0"/>
-          </a:p>
-          <a:p>
-            <a:pPr algn="ctr" indent="0" marL="0">
-              <a:lnSpc>
-                <a:spcPct val="88000"/>
-              </a:lnSpc>
-              <a:buNone/>
-            </a:pPr>
-            <a:r>
-              <a:rPr lang="en-US" sz="440" dirty="0">
-                <a:solidFill>
-                  <a:srgbClr val="202124"/>
-                </a:solidFill>
-                <a:latin typeface="Arial" pitchFamily="34" charset="0"/>
-                <a:ea typeface="Arial" pitchFamily="34" charset="-122"/>
-                <a:cs typeface="Arial" pitchFamily="34" charset="-120"/>
-              </a:rPr>
-              <a:t>MCP &amp; RAG</a:t>
-            </a:r>
-            <a:endParaRPr lang="en-US" sz="500" dirty="0"/>
-          </a:p>
-        </p:txBody>
-      </p:sp>
-      <p:sp>
-        <p:nvSpPr>
-          <p:cNvPr id="131" name="Text 109"/>
-          <p:cNvSpPr/>
-          <p:nvPr/>
-        </p:nvSpPr>
-        <p:spPr>
-          <a:xfrm>
-            <a:off x="5237683" y="5201107"/>
-            <a:ext cx="591617" cy="124358"/>
-          </a:xfrm>
-          <a:prstGeom prst="rect">
-            <a:avLst/>
-          </a:prstGeom>
-          <a:noFill/>
-          <a:ln/>
-        </p:spPr>
-        <p:txBody>
-          <a:bodyPr wrap="square" lIns="0" tIns="0" rIns="0" bIns="0" rtlCol="0" anchor="ctr">
-            <a:normAutofit/>
-          </a:bodyPr>
-          <a:lstStyle/>
-          <a:p>
-            <a:pPr algn="ctr" indent="0" marL="0">
-              <a:lnSpc>
-                <a:spcPct val="88000"/>
-              </a:lnSpc>
-              <a:buNone/>
-            </a:pPr>
-            <a:r>
-              <a:rPr lang="en-US" sz="500" b="1" dirty="0">
-                <a:solidFill>
-                  <a:srgbClr val="202124"/>
-                </a:solidFill>
-                <a:latin typeface="Arial" pitchFamily="34" charset="0"/>
-                <a:ea typeface="Arial" pitchFamily="34" charset="-122"/>
-                <a:cs typeface="Arial" pitchFamily="34" charset="-120"/>
-              </a:rPr>
-              <a:t>SET LOCAL</a:t>
-            </a:r>
-            <a:endParaRPr lang="en-US" sz="500" dirty="0"/>
-          </a:p>
-          <a:p>
-            <a:pPr algn="ctr" indent="0" marL="0">
-              <a:lnSpc>
-                <a:spcPct val="88000"/>
-              </a:lnSpc>
-              <a:buNone/>
-            </a:pPr>
-            <a:r>
-              <a:rPr lang="en-US" sz="440" dirty="0">
-                <a:solidFill>
-                  <a:srgbClr val="202124"/>
-                </a:solidFill>
-                <a:latin typeface="Arial" pitchFamily="34" charset="0"/>
-                <a:ea typeface="Arial" pitchFamily="34" charset="-122"/>
-                <a:cs typeface="Arial" pitchFamily="34" charset="-120"/>
-              </a:rPr>
-              <a:t>current_tenant</a:t>
-            </a:r>
-            <a:endParaRPr lang="en-US" sz="500" dirty="0"/>
-          </a:p>
-        </p:txBody>
-      </p:sp>
-      <p:sp>
-        <p:nvSpPr>
-          <p:cNvPr id="132" name="Text 110"/>
-          <p:cNvSpPr/>
-          <p:nvPr/>
-        </p:nvSpPr>
-        <p:spPr>
-          <a:xfrm>
-            <a:off x="7274966" y="4654296"/>
-            <a:ext cx="591617" cy="124358"/>
-          </a:xfrm>
-          <a:prstGeom prst="rect">
-            <a:avLst/>
-          </a:prstGeom>
-          <a:noFill/>
-          <a:ln/>
-        </p:spPr>
-        <p:txBody>
-          <a:bodyPr wrap="square" lIns="0" tIns="0" rIns="0" bIns="0" rtlCol="0" anchor="ctr">
-            <a:normAutofit/>
-          </a:bodyPr>
-          <a:lstStyle/>
-          <a:p>
-            <a:pPr algn="ctr" indent="0" marL="0">
-              <a:lnSpc>
-                <a:spcPct val="88000"/>
-              </a:lnSpc>
-              <a:buNone/>
-            </a:pPr>
-            <a:r>
-              <a:rPr lang="en-US" sz="500" b="1" dirty="0">
-                <a:solidFill>
-                  <a:srgbClr val="202124"/>
-                </a:solidFill>
-                <a:latin typeface="Arial" pitchFamily="34" charset="0"/>
-                <a:ea typeface="Arial" pitchFamily="34" charset="-122"/>
-                <a:cs typeface="Arial" pitchFamily="34" charset="-120"/>
-              </a:rPr>
-              <a:t>Air-Gapped</a:t>
-            </a:r>
-            <a:endParaRPr lang="en-US" sz="500" dirty="0"/>
-          </a:p>
-          <a:p>
-            <a:pPr algn="ctr" indent="0" marL="0">
-              <a:lnSpc>
-                <a:spcPct val="88000"/>
-              </a:lnSpc>
-              <a:buNone/>
-            </a:pPr>
-            <a:r>
-              <a:rPr lang="en-US" sz="440" dirty="0">
-                <a:solidFill>
-                  <a:srgbClr val="202124"/>
-                </a:solidFill>
-                <a:latin typeface="Arial" pitchFamily="34" charset="0"/>
-                <a:ea typeface="Arial" pitchFamily="34" charset="-122"/>
-                <a:cs typeface="Arial" pitchFamily="34" charset="-120"/>
-              </a:rPr>
-              <a:t>Silo RAG</a:t>
-            </a:r>
-            <a:endParaRPr lang="en-US" sz="500" dirty="0"/>
-          </a:p>
-        </p:txBody>
-      </p:sp>
-      <p:sp>
-        <p:nvSpPr>
-          <p:cNvPr id="133" name="Text 111"/>
-          <p:cNvSpPr/>
-          <p:nvPr/>
-        </p:nvSpPr>
-        <p:spPr>
-          <a:xfrm>
-            <a:off x="7274966" y="5201107"/>
-            <a:ext cx="591617" cy="124358"/>
-          </a:xfrm>
-          <a:prstGeom prst="rect">
-            <a:avLst/>
-          </a:prstGeom>
-          <a:noFill/>
-          <a:ln/>
-        </p:spPr>
-        <p:txBody>
-          <a:bodyPr wrap="square" lIns="0" tIns="0" rIns="0" bIns="0" rtlCol="0" anchor="ctr">
-            <a:normAutofit/>
-          </a:bodyPr>
-          <a:lstStyle/>
-          <a:p>
-            <a:pPr algn="ctr" indent="0" marL="0">
-              <a:lnSpc>
-                <a:spcPct val="88000"/>
-              </a:lnSpc>
-              <a:buNone/>
-            </a:pPr>
-            <a:r>
-              <a:rPr lang="en-US" sz="500" b="1" dirty="0">
-                <a:solidFill>
-                  <a:srgbClr val="202124"/>
-                </a:solidFill>
-                <a:latin typeface="Arial" pitchFamily="34" charset="0"/>
-                <a:ea typeface="Arial" pitchFamily="34" charset="-122"/>
-                <a:cs typeface="Arial" pitchFamily="34" charset="-120"/>
-              </a:rPr>
-              <a:t>CMEK-Encrypted</a:t>
-            </a:r>
-            <a:endParaRPr lang="en-US" sz="500" dirty="0"/>
-          </a:p>
-          <a:p>
-            <a:pPr algn="ctr" indent="0" marL="0">
-              <a:lnSpc>
-                <a:spcPct val="88000"/>
-              </a:lnSpc>
-              <a:buNone/>
-            </a:pPr>
-            <a:r>
-              <a:rPr lang="en-US" sz="440" dirty="0">
-                <a:solidFill>
-                  <a:srgbClr val="202124"/>
-                </a:solidFill>
-                <a:latin typeface="Arial" pitchFamily="34" charset="0"/>
-                <a:ea typeface="Arial" pitchFamily="34" charset="-122"/>
-                <a:cs typeface="Arial" pitchFamily="34" charset="-120"/>
-              </a:rPr>
-              <a:t>State &amp; Tools</a:t>
-            </a:r>
-            <a:endParaRPr lang="en-US" sz="500" dirty="0"/>
-          </a:p>
-        </p:txBody>
-      </p:sp>
-      <p:sp>
-        <p:nvSpPr>
-          <p:cNvPr id="134" name="Text 112"/>
-          <p:cNvSpPr/>
-          <p:nvPr/>
-        </p:nvSpPr>
-        <p:spPr>
-          <a:xfrm>
-            <a:off x="4432097" y="5328209"/>
-            <a:ext cx="509321" cy="131674"/>
-          </a:xfrm>
-          <a:prstGeom prst="rect">
-            <a:avLst/>
-          </a:prstGeom>
-          <a:noFill/>
-          <a:ln/>
-        </p:spPr>
-        <p:txBody>
-          <a:bodyPr wrap="square" lIns="0" tIns="0" rIns="0" bIns="0" rtlCol="0" anchor="ctr">
-            <a:normAutofit/>
-          </a:bodyPr>
-          <a:lstStyle/>
-          <a:p>
-            <a:pPr algn="l" indent="0" marL="0">
-              <a:lnSpc>
-                <a:spcPct val="88000"/>
-              </a:lnSpc>
-              <a:buNone/>
-            </a:pPr>
-            <a:r>
-              <a:rPr lang="en-US" sz="500" b="1" dirty="0">
-                <a:solidFill>
-                  <a:srgbClr val="202124"/>
-                </a:solidFill>
-                <a:latin typeface="Arial" pitchFamily="34" charset="0"/>
-                <a:ea typeface="Arial" pitchFamily="34" charset="-122"/>
-                <a:cs typeface="Arial" pitchFamily="34" charset="-120"/>
-              </a:rPr>
-              <a:t>Generates</a:t>
-            </a:r>
-            <a:endParaRPr lang="en-US" sz="500" dirty="0"/>
-          </a:p>
-          <a:p>
-            <a:pPr algn="l" indent="0" marL="0">
-              <a:lnSpc>
-                <a:spcPct val="88000"/>
-              </a:lnSpc>
-              <a:buNone/>
-            </a:pPr>
-            <a:r>
-              <a:rPr lang="en-US" sz="440" dirty="0">
-                <a:solidFill>
-                  <a:srgbClr val="202124"/>
-                </a:solidFill>
-                <a:latin typeface="Arial" pitchFamily="34" charset="0"/>
-                <a:ea typeface="Arial" pitchFamily="34" charset="-122"/>
-                <a:cs typeface="Arial" pitchFamily="34" charset="-120"/>
-              </a:rPr>
-              <a:t>response</a:t>
-            </a:r>
-            <a:endParaRPr lang="en-US" sz="500" dirty="0"/>
-          </a:p>
-        </p:txBody>
-      </p:sp>
-      <p:sp>
-        <p:nvSpPr>
-          <p:cNvPr id="135" name="Text 113"/>
-          <p:cNvSpPr/>
-          <p:nvPr/>
-        </p:nvSpPr>
-        <p:spPr>
-          <a:xfrm>
-            <a:off x="6282842" y="3396082"/>
-            <a:ext cx="554126" cy="116129"/>
-          </a:xfrm>
-          <a:prstGeom prst="rect">
-            <a:avLst/>
-          </a:prstGeom>
-          <a:noFill/>
-          <a:ln/>
-        </p:spPr>
-        <p:txBody>
-          <a:bodyPr wrap="square" lIns="0" tIns="0" rIns="0" bIns="0" rtlCol="0" anchor="ctr">
-            <a:normAutofit/>
-          </a:bodyPr>
-          <a:lstStyle/>
-          <a:p>
-            <a:pPr algn="l" indent="0" marL="0">
-              <a:lnSpc>
-                <a:spcPct val="88000"/>
-              </a:lnSpc>
-              <a:buNone/>
-            </a:pPr>
-            <a:r>
-              <a:rPr lang="en-US" sz="500" b="1" dirty="0">
-                <a:solidFill>
-                  <a:srgbClr val="202124"/>
-                </a:solidFill>
-                <a:latin typeface="Arial" pitchFamily="34" charset="0"/>
-                <a:ea typeface="Arial" pitchFamily="34" charset="-122"/>
-                <a:cs typeface="Arial" pitchFamily="34" charset="-120"/>
-              </a:rPr>
-              <a:t>Sanitized response</a:t>
-            </a:r>
-            <a:endParaRPr lang="en-US" sz="500" dirty="0"/>
-          </a:p>
-          <a:p>
-            <a:pPr algn="l" indent="0" marL="0">
-              <a:lnSpc>
-                <a:spcPct val="88000"/>
-              </a:lnSpc>
-              <a:buNone/>
-            </a:pPr>
-            <a:r>
-              <a:rPr lang="en-US" sz="440" dirty="0">
-                <a:solidFill>
-                  <a:srgbClr val="202124"/>
-                </a:solidFill>
-                <a:latin typeface="Arial" pitchFamily="34" charset="0"/>
-                <a:ea typeface="Arial" pitchFamily="34" charset="-122"/>
-                <a:cs typeface="Arial" pitchFamily="34" charset="-120"/>
-              </a:rPr>
-              <a:t>with SDP redaction</a:t>
-            </a:r>
-            <a:endParaRPr lang="en-US" sz="500" dirty="0"/>
-          </a:p>
-        </p:txBody>
-      </p:sp>
-      <p:sp>
-        <p:nvSpPr>
-          <p:cNvPr id="136" name="Text 114"/>
-          <p:cNvSpPr/>
-          <p:nvPr/>
-        </p:nvSpPr>
-        <p:spPr>
-          <a:xfrm>
-            <a:off x="5488229" y="3396082"/>
-            <a:ext cx="494690" cy="116129"/>
-          </a:xfrm>
-          <a:prstGeom prst="rect">
-            <a:avLst/>
-          </a:prstGeom>
-          <a:noFill/>
-          <a:ln/>
-        </p:spPr>
-        <p:txBody>
-          <a:bodyPr wrap="square" lIns="0" tIns="0" rIns="0" bIns="0" rtlCol="0" anchor="ctr">
-            <a:normAutofit/>
-          </a:bodyPr>
-          <a:lstStyle/>
-          <a:p>
-            <a:pPr algn="l" indent="0" marL="0">
-              <a:lnSpc>
-                <a:spcPct val="88000"/>
-              </a:lnSpc>
-              <a:buNone/>
-            </a:pPr>
-            <a:r>
-              <a:rPr lang="en-US" sz="500" b="1" dirty="0">
-                <a:solidFill>
-                  <a:srgbClr val="202124"/>
-                </a:solidFill>
-                <a:latin typeface="Arial" pitchFamily="34" charset="0"/>
-                <a:ea typeface="Arial" pitchFamily="34" charset="-122"/>
-                <a:cs typeface="Arial" pitchFamily="34" charset="-120"/>
-              </a:rPr>
-              <a:t>Route by tenant tier</a:t>
-            </a:r>
-            <a:endParaRPr lang="en-US" sz="500" dirty="0"/>
-          </a:p>
-          <a:p>
-            <a:pPr algn="l" indent="0" marL="0">
-              <a:lnSpc>
-                <a:spcPct val="88000"/>
-              </a:lnSpc>
-              <a:buNone/>
-            </a:pPr>
-            <a:r>
-              <a:rPr lang="en-US" sz="440" dirty="0">
-                <a:solidFill>
-                  <a:srgbClr val="202124"/>
-                </a:solidFill>
-                <a:latin typeface="Arial" pitchFamily="34" charset="0"/>
-                <a:ea typeface="Arial" pitchFamily="34" charset="-122"/>
-                <a:cs typeface="Arial" pitchFamily="34" charset="-120"/>
-              </a:rPr>
-              <a:t>(Pool, Silo or PSC)</a:t>
-            </a:r>
-            <a:endParaRPr lang="en-US" sz="500" dirty="0"/>
-          </a:p>
-        </p:txBody>
-      </p:sp>
-      <p:sp>
-        <p:nvSpPr>
-          <p:cNvPr id="137" name="Text 115"/>
-          <p:cNvSpPr/>
-          <p:nvPr/>
-        </p:nvSpPr>
-        <p:spPr>
-          <a:xfrm>
-            <a:off x="5039258" y="2983687"/>
-            <a:ext cx="502006" cy="109728"/>
-          </a:xfrm>
-          <a:prstGeom prst="rect">
-            <a:avLst/>
-          </a:prstGeom>
-          <a:noFill/>
-          <a:ln/>
-        </p:spPr>
-        <p:txBody>
-          <a:bodyPr wrap="square" lIns="0" tIns="0" rIns="0" bIns="0" rtlCol="0" anchor="ctr">
-            <a:normAutofit/>
-          </a:bodyPr>
-          <a:lstStyle/>
-          <a:p>
-            <a:pPr algn="ctr" indent="0" marL="0">
-              <a:lnSpc>
-                <a:spcPct val="88000"/>
-              </a:lnSpc>
-              <a:buNone/>
-            </a:pPr>
-            <a:r>
-              <a:rPr lang="en-US" sz="500" b="1" dirty="0">
-                <a:solidFill>
-                  <a:srgbClr val="202124"/>
-                </a:solidFill>
-                <a:latin typeface="Arial" pitchFamily="34" charset="0"/>
-                <a:ea typeface="Arial" pitchFamily="34" charset="-122"/>
-                <a:cs typeface="Arial" pitchFamily="34" charset="-120"/>
-              </a:rPr>
-              <a:t>OBO + DPoP</a:t>
-            </a:r>
-            <a:endParaRPr lang="en-US" sz="500" dirty="0"/>
-          </a:p>
-          <a:p>
-            <a:pPr algn="ctr" indent="0" marL="0">
-              <a:lnSpc>
-                <a:spcPct val="88000"/>
-              </a:lnSpc>
-              <a:buNone/>
-            </a:pPr>
-            <a:r>
-              <a:rPr lang="en-US" sz="440" dirty="0">
-                <a:solidFill>
-                  <a:srgbClr val="202124"/>
-                </a:solidFill>
-                <a:latin typeface="Arial" pitchFamily="34" charset="0"/>
-                <a:ea typeface="Arial" pitchFamily="34" charset="-122"/>
-                <a:cs typeface="Arial" pitchFamily="34" charset="-120"/>
-              </a:rPr>
-              <a:t>verification</a:t>
-            </a:r>
-            <a:endParaRPr lang="en-US" sz="500" dirty="0"/>
-          </a:p>
-        </p:txBody>
-      </p:sp>
-      <p:sp>
-        <p:nvSpPr>
-          <p:cNvPr id="138" name="Text 116"/>
-          <p:cNvSpPr/>
-          <p:nvPr/>
-        </p:nvSpPr>
-        <p:spPr>
-          <a:xfrm>
-            <a:off x="4432097" y="4459529"/>
-            <a:ext cx="509321" cy="109728"/>
-          </a:xfrm>
-          <a:prstGeom prst="rect">
-            <a:avLst/>
-          </a:prstGeom>
-          <a:noFill/>
-          <a:ln/>
-        </p:spPr>
-        <p:txBody>
-          <a:bodyPr wrap="square" lIns="0" tIns="0" rIns="0" bIns="0" rtlCol="0" anchor="ctr">
-            <a:normAutofit/>
-          </a:bodyPr>
-          <a:lstStyle/>
-          <a:p>
-            <a:pPr algn="l" indent="0" marL="0">
-              <a:lnSpc>
-                <a:spcPct val="88000"/>
-              </a:lnSpc>
-              <a:buNone/>
-            </a:pPr>
-            <a:r>
-              <a:rPr lang="en-US" sz="500" b="1" dirty="0">
-                <a:solidFill>
-                  <a:srgbClr val="202124"/>
-                </a:solidFill>
-                <a:latin typeface="Arial" pitchFamily="34" charset="0"/>
-                <a:ea typeface="Arial" pitchFamily="34" charset="-122"/>
-                <a:cs typeface="Arial" pitchFamily="34" charset="-120"/>
-              </a:rPr>
-              <a:t>Sanitize request</a:t>
-            </a:r>
-            <a:endParaRPr lang="en-US" sz="500" dirty="0"/>
-          </a:p>
-        </p:txBody>
-      </p:sp>
-      <p:sp>
-        <p:nvSpPr>
-          <p:cNvPr id="139" name="Text 117"/>
-          <p:cNvSpPr/>
-          <p:nvPr/>
-        </p:nvSpPr>
-        <p:spPr>
-          <a:xfrm>
-            <a:off x="4432097" y="4639666"/>
-            <a:ext cx="509321" cy="109728"/>
-          </a:xfrm>
-          <a:prstGeom prst="rect">
-            <a:avLst/>
-          </a:prstGeom>
-          <a:noFill/>
-          <a:ln/>
-        </p:spPr>
-        <p:txBody>
-          <a:bodyPr wrap="square" lIns="0" tIns="0" rIns="0" bIns="0" rtlCol="0" anchor="ctr">
-            <a:normAutofit/>
-          </a:bodyPr>
-          <a:lstStyle/>
-          <a:p>
-            <a:pPr algn="l" indent="0" marL="0">
-              <a:lnSpc>
-                <a:spcPct val="88000"/>
-              </a:lnSpc>
-              <a:buNone/>
-            </a:pPr>
-            <a:r>
-              <a:rPr lang="en-US" sz="500" b="1" dirty="0">
-                <a:solidFill>
-                  <a:srgbClr val="202124"/>
-                </a:solidFill>
-                <a:latin typeface="Arial" pitchFamily="34" charset="0"/>
-                <a:ea typeface="Arial" pitchFamily="34" charset="-122"/>
-                <a:cs typeface="Arial" pitchFamily="34" charset="-120"/>
-              </a:rPr>
-              <a:t>Sanitize response</a:t>
-            </a:r>
-            <a:endParaRPr lang="en-US" sz="500" dirty="0"/>
-          </a:p>
-        </p:txBody>
-      </p:sp>
-      <p:sp>
-        <p:nvSpPr>
-          <p:cNvPr id="140" name="Text 118"/>
-          <p:cNvSpPr/>
-          <p:nvPr/>
-        </p:nvSpPr>
-        <p:spPr>
-          <a:xfrm>
-            <a:off x="5016398" y="2302459"/>
-            <a:ext cx="344729" cy="109728"/>
-          </a:xfrm>
-          <a:prstGeom prst="rect">
-            <a:avLst/>
-          </a:prstGeom>
-          <a:noFill/>
-          <a:ln/>
-        </p:spPr>
-        <p:txBody>
-          <a:bodyPr wrap="square" lIns="0" tIns="0" rIns="0" bIns="0" rtlCol="0" anchor="ctr">
-            <a:normAutofit/>
-          </a:bodyPr>
-          <a:lstStyle/>
-          <a:p>
-            <a:pPr algn="ctr" indent="0" marL="0">
-              <a:lnSpc>
-                <a:spcPct val="88000"/>
-              </a:lnSpc>
-              <a:buNone/>
-            </a:pPr>
-            <a:r>
-              <a:rPr lang="en-US" sz="500" b="1" dirty="0">
-                <a:solidFill>
-                  <a:srgbClr val="202124"/>
-                </a:solidFill>
-                <a:latin typeface="Arial" pitchFamily="34" charset="0"/>
-                <a:ea typeface="Arial" pitchFamily="34" charset="-122"/>
-                <a:cs typeface="Arial" pitchFamily="34" charset="-120"/>
-              </a:rPr>
-              <a:t>Header &amp; WAF</a:t>
-            </a:r>
-            <a:endParaRPr lang="en-US" sz="500" dirty="0"/>
-          </a:p>
-          <a:p>
-            <a:pPr algn="ctr" indent="0" marL="0">
-              <a:lnSpc>
-                <a:spcPct val="88000"/>
-              </a:lnSpc>
-              <a:buNone/>
-            </a:pPr>
-            <a:r>
-              <a:rPr lang="en-US" sz="440" dirty="0">
-                <a:solidFill>
-                  <a:srgbClr val="202124"/>
-                </a:solidFill>
-                <a:latin typeface="Arial" pitchFamily="34" charset="0"/>
-                <a:ea typeface="Arial" pitchFamily="34" charset="-122"/>
-                <a:cs typeface="Arial" pitchFamily="34" charset="-120"/>
-              </a:rPr>
-              <a:t>policies</a:t>
-            </a:r>
-            <a:endParaRPr lang="en-US" sz="500" dirty="0"/>
-          </a:p>
-        </p:txBody>
-      </p:sp>
-      <p:sp>
-        <p:nvSpPr>
-          <p:cNvPr id="141" name="Text 119"/>
-          <p:cNvSpPr/>
-          <p:nvPr/>
-        </p:nvSpPr>
-        <p:spPr>
-          <a:xfrm>
-            <a:off x="5016398" y="2819095"/>
-            <a:ext cx="344729" cy="109728"/>
-          </a:xfrm>
-          <a:prstGeom prst="rect">
-            <a:avLst/>
-          </a:prstGeom>
-          <a:noFill/>
-          <a:ln/>
-        </p:spPr>
-        <p:txBody>
-          <a:bodyPr wrap="square" lIns="0" tIns="0" rIns="0" bIns="0" rtlCol="0" anchor="ctr">
-            <a:normAutofit/>
-          </a:bodyPr>
-          <a:lstStyle/>
-          <a:p>
-            <a:pPr algn="ctr" indent="0" marL="0">
-              <a:lnSpc>
-                <a:spcPct val="88000"/>
-              </a:lnSpc>
-              <a:buNone/>
-            </a:pPr>
-            <a:r>
-              <a:rPr lang="en-US" sz="500" b="1" dirty="0">
-                <a:solidFill>
-                  <a:srgbClr val="202124"/>
-                </a:solidFill>
-                <a:latin typeface="Arial" pitchFamily="34" charset="0"/>
-                <a:ea typeface="Arial" pitchFamily="34" charset="-122"/>
-                <a:cs typeface="Arial" pitchFamily="34" charset="-120"/>
-              </a:rPr>
-              <a:t>Sanitize</a:t>
-            </a:r>
-            <a:endParaRPr lang="en-US" sz="500" dirty="0"/>
-          </a:p>
-          <a:p>
-            <a:pPr algn="ctr" indent="0" marL="0">
-              <a:lnSpc>
-                <a:spcPct val="88000"/>
-              </a:lnSpc>
-              <a:buNone/>
-            </a:pPr>
-            <a:r>
-              <a:rPr lang="en-US" sz="440" dirty="0">
-                <a:solidFill>
-                  <a:srgbClr val="202124"/>
-                </a:solidFill>
-                <a:latin typeface="Arial" pitchFamily="34" charset="0"/>
-                <a:ea typeface="Arial" pitchFamily="34" charset="-122"/>
-                <a:cs typeface="Arial" pitchFamily="34" charset="-120"/>
-              </a:rPr>
-              <a:t>prompt</a:t>
-            </a:r>
-            <a:endParaRPr lang="en-US" sz="500" dirty="0"/>
-          </a:p>
-        </p:txBody>
-      </p:sp>
-      <p:sp>
-        <p:nvSpPr>
-          <p:cNvPr id="142" name="Text 120"/>
-          <p:cNvSpPr/>
-          <p:nvPr/>
-        </p:nvSpPr>
-        <p:spPr>
-          <a:xfrm>
-            <a:off x="6267298" y="1478585"/>
-            <a:ext cx="299923" cy="109728"/>
-          </a:xfrm>
-          <a:prstGeom prst="rect">
-            <a:avLst/>
-          </a:prstGeom>
-          <a:noFill/>
-          <a:ln/>
-        </p:spPr>
-        <p:txBody>
-          <a:bodyPr wrap="square" lIns="0" tIns="0" rIns="0" bIns="0" rtlCol="0" anchor="ctr">
-            <a:normAutofit/>
-          </a:bodyPr>
-          <a:lstStyle/>
-          <a:p>
-            <a:pPr algn="l" indent="0" marL="0">
-              <a:lnSpc>
-                <a:spcPct val="88000"/>
-              </a:lnSpc>
-              <a:buNone/>
-            </a:pPr>
-            <a:r>
-              <a:rPr lang="en-US" sz="500" b="1" dirty="0">
-                <a:solidFill>
-                  <a:srgbClr val="202124"/>
-                </a:solidFill>
-                <a:latin typeface="Arial" pitchFamily="34" charset="0"/>
-                <a:ea typeface="Arial" pitchFamily="34" charset="-122"/>
-                <a:cs typeface="Arial" pitchFamily="34" charset="-120"/>
-              </a:rPr>
-              <a:t>Response</a:t>
-            </a:r>
-            <a:endParaRPr lang="en-US" sz="500" dirty="0"/>
-          </a:p>
-        </p:txBody>
-      </p:sp>
-      <p:sp>
-        <p:nvSpPr>
-          <p:cNvPr id="143" name="Text 121"/>
-          <p:cNvSpPr/>
-          <p:nvPr/>
-        </p:nvSpPr>
-        <p:spPr>
-          <a:xfrm>
-            <a:off x="6267298" y="2838298"/>
-            <a:ext cx="299923" cy="109728"/>
-          </a:xfrm>
-          <a:prstGeom prst="rect">
-            <a:avLst/>
-          </a:prstGeom>
-          <a:noFill/>
-          <a:ln/>
-        </p:spPr>
-        <p:txBody>
-          <a:bodyPr wrap="square" lIns="0" tIns="0" rIns="0" bIns="0" rtlCol="0" anchor="ctr">
-            <a:normAutofit/>
-          </a:bodyPr>
-          <a:lstStyle/>
-          <a:p>
-            <a:pPr algn="l" indent="0" marL="0">
-              <a:lnSpc>
-                <a:spcPct val="88000"/>
-              </a:lnSpc>
-              <a:buNone/>
-            </a:pPr>
-            <a:r>
-              <a:rPr lang="en-US" sz="500" b="1" dirty="0">
-                <a:solidFill>
-                  <a:srgbClr val="202124"/>
-                </a:solidFill>
-                <a:latin typeface="Arial" pitchFamily="34" charset="0"/>
-                <a:ea typeface="Arial" pitchFamily="34" charset="-122"/>
-                <a:cs typeface="Arial" pitchFamily="34" charset="-120"/>
-              </a:rPr>
-              <a:t>Response</a:t>
-            </a:r>
-            <a:endParaRPr lang="en-US" sz="500" dirty="0"/>
-          </a:p>
-        </p:txBody>
-      </p:sp>
-      <p:sp>
-        <p:nvSpPr>
-          <p:cNvPr id="144" name="Text 122"/>
-          <p:cNvSpPr/>
-          <p:nvPr/>
-        </p:nvSpPr>
-        <p:spPr>
-          <a:xfrm>
-            <a:off x="5578754" y="1478585"/>
-            <a:ext cx="262433" cy="109728"/>
-          </a:xfrm>
-          <a:prstGeom prst="rect">
-            <a:avLst/>
-          </a:prstGeom>
-          <a:noFill/>
-          <a:ln/>
-        </p:spPr>
-        <p:txBody>
-          <a:bodyPr wrap="square" lIns="0" tIns="0" rIns="0" bIns="0" rtlCol="0" anchor="ctr">
-            <a:normAutofit/>
-          </a:bodyPr>
-          <a:lstStyle/>
-          <a:p>
-            <a:pPr algn="r" indent="0" marL="0">
-              <a:lnSpc>
-                <a:spcPct val="88000"/>
-              </a:lnSpc>
-              <a:buNone/>
-            </a:pPr>
-            <a:r>
-              <a:rPr lang="en-US" sz="500" b="1" dirty="0">
-                <a:solidFill>
-                  <a:srgbClr val="202124"/>
-                </a:solidFill>
-                <a:latin typeface="Arial" pitchFamily="34" charset="0"/>
-                <a:ea typeface="Arial" pitchFamily="34" charset="-122"/>
-                <a:cs typeface="Arial" pitchFamily="34" charset="-120"/>
-              </a:rPr>
-              <a:t>Request</a:t>
-            </a:r>
-            <a:endParaRPr lang="en-US" sz="500" dirty="0"/>
-          </a:p>
-        </p:txBody>
-      </p:sp>
-      <p:sp>
-        <p:nvSpPr>
-          <p:cNvPr id="145" name="Text 123"/>
-          <p:cNvSpPr/>
-          <p:nvPr/>
-        </p:nvSpPr>
-        <p:spPr>
-          <a:xfrm>
-            <a:off x="5578754" y="2838298"/>
-            <a:ext cx="262433" cy="109728"/>
-          </a:xfrm>
-          <a:prstGeom prst="rect">
-            <a:avLst/>
-          </a:prstGeom>
-          <a:noFill/>
-          <a:ln/>
-        </p:spPr>
-        <p:txBody>
-          <a:bodyPr wrap="square" lIns="0" tIns="0" rIns="0" bIns="0" rtlCol="0" anchor="ctr">
-            <a:normAutofit/>
-          </a:bodyPr>
-          <a:lstStyle/>
-          <a:p>
-            <a:pPr algn="r" indent="0" marL="0">
-              <a:lnSpc>
-                <a:spcPct val="88000"/>
-              </a:lnSpc>
-              <a:buNone/>
-            </a:pPr>
-            <a:r>
-              <a:rPr lang="en-US" sz="500" b="1" dirty="0">
-                <a:solidFill>
-                  <a:srgbClr val="202124"/>
-                </a:solidFill>
-                <a:latin typeface="Arial" pitchFamily="34" charset="0"/>
-                <a:ea typeface="Arial" pitchFamily="34" charset="-122"/>
-                <a:cs typeface="Arial" pitchFamily="34" charset="-120"/>
-              </a:rPr>
-              <a:t>Request</a:t>
-            </a:r>
-            <a:endParaRPr lang="en-US" sz="500" dirty="0"/>
-          </a:p>
-        </p:txBody>
-      </p:sp>
-      <p:sp>
-        <p:nvSpPr>
-          <p:cNvPr id="146" name="Shape 124"/>
+            <a:endParaRPr lang="en-US" sz="435" dirty="0"/>
+          </a:p>
+        </p:txBody>
+      </p:sp>
+      <p:sp>
+        <p:nvSpPr>
+          <p:cNvPr id="129" name="Shape 107"/>
           <p:cNvSpPr/>
           <p:nvPr/>
         </p:nvSpPr>
@@ -6982,7 +6014,7 @@
       </p:sp>
       <p:sp>
         <p:nvSpPr>
-          <p:cNvPr id="147" name="Text 125"/>
+          <p:cNvPr id="130" name="Text 108"/>
           <p:cNvSpPr/>
           <p:nvPr/>
         </p:nvSpPr>
@@ -7021,7 +6053,7 @@
       </p:sp>
       <p:sp>
         <p:nvSpPr>
-          <p:cNvPr id="148" name="Shape 126"/>
+          <p:cNvPr id="131" name="Shape 109"/>
           <p:cNvSpPr/>
           <p:nvPr/>
         </p:nvSpPr>
@@ -7046,7 +6078,7 @@
       </p:sp>
       <p:sp>
         <p:nvSpPr>
-          <p:cNvPr id="149" name="Text 127"/>
+          <p:cNvPr id="132" name="Text 110"/>
           <p:cNvSpPr/>
           <p:nvPr/>
         </p:nvSpPr>
@@ -7085,7 +6117,7 @@
       </p:sp>
       <p:sp>
         <p:nvSpPr>
-          <p:cNvPr id="150" name="Shape 128"/>
+          <p:cNvPr id="133" name="Shape 111"/>
           <p:cNvSpPr/>
           <p:nvPr/>
         </p:nvSpPr>
@@ -7110,7 +6142,7 @@
       </p:sp>
       <p:sp>
         <p:nvSpPr>
-          <p:cNvPr id="151" name="Text 129"/>
+          <p:cNvPr id="134" name="Text 112"/>
           <p:cNvSpPr/>
           <p:nvPr/>
         </p:nvSpPr>
@@ -7149,7 +6181,7 @@
       </p:sp>
       <p:sp>
         <p:nvSpPr>
-          <p:cNvPr id="152" name="Shape 130"/>
+          <p:cNvPr id="135" name="Shape 113"/>
           <p:cNvSpPr/>
           <p:nvPr/>
         </p:nvSpPr>
@@ -7174,7 +6206,7 @@
       </p:sp>
       <p:sp>
         <p:nvSpPr>
-          <p:cNvPr id="153" name="Text 131"/>
+          <p:cNvPr id="136" name="Text 114"/>
           <p:cNvSpPr/>
           <p:nvPr/>
         </p:nvSpPr>
@@ -7213,7 +6245,7 @@
       </p:sp>
       <p:sp>
         <p:nvSpPr>
-          <p:cNvPr id="154" name="Shape 132"/>
+          <p:cNvPr id="137" name="Shape 115"/>
           <p:cNvSpPr/>
           <p:nvPr/>
         </p:nvSpPr>
@@ -7238,7 +6270,7 @@
       </p:sp>
       <p:sp>
         <p:nvSpPr>
-          <p:cNvPr id="155" name="Text 133"/>
+          <p:cNvPr id="138" name="Text 116"/>
           <p:cNvSpPr/>
           <p:nvPr/>
         </p:nvSpPr>
@@ -7277,7 +6309,7 @@
       </p:sp>
       <p:sp>
         <p:nvSpPr>
-          <p:cNvPr id="156" name="Shape 134"/>
+          <p:cNvPr id="139" name="Shape 117"/>
           <p:cNvSpPr/>
           <p:nvPr/>
         </p:nvSpPr>
@@ -7302,7 +6334,7 @@
       </p:sp>
       <p:sp>
         <p:nvSpPr>
-          <p:cNvPr id="157" name="Text 135"/>
+          <p:cNvPr id="140" name="Text 118"/>
           <p:cNvSpPr/>
           <p:nvPr/>
         </p:nvSpPr>
@@ -7341,7 +6373,7 @@
       </p:sp>
       <p:sp>
         <p:nvSpPr>
-          <p:cNvPr id="158" name="Shape 136"/>
+          <p:cNvPr id="141" name="Shape 119"/>
           <p:cNvSpPr/>
           <p:nvPr/>
         </p:nvSpPr>
@@ -7366,7 +6398,7 @@
       </p:sp>
       <p:sp>
         <p:nvSpPr>
-          <p:cNvPr id="159" name="Text 137"/>
+          <p:cNvPr id="142" name="Text 120"/>
           <p:cNvSpPr/>
           <p:nvPr/>
         </p:nvSpPr>
@@ -7405,7 +6437,7 @@
       </p:sp>
       <p:sp>
         <p:nvSpPr>
-          <p:cNvPr id="160" name="Shape 138"/>
+          <p:cNvPr id="143" name="Shape 121"/>
           <p:cNvSpPr/>
           <p:nvPr/>
         </p:nvSpPr>
@@ -7430,7 +6462,7 @@
       </p:sp>
       <p:sp>
         <p:nvSpPr>
-          <p:cNvPr id="161" name="Text 139"/>
+          <p:cNvPr id="144" name="Text 122"/>
           <p:cNvSpPr/>
           <p:nvPr/>
         </p:nvSpPr>
@@ -7469,7 +6501,7 @@
       </p:sp>
       <p:sp>
         <p:nvSpPr>
-          <p:cNvPr id="162" name="Shape 140"/>
+          <p:cNvPr id="145" name="Shape 123"/>
           <p:cNvSpPr/>
           <p:nvPr/>
         </p:nvSpPr>
@@ -7494,7 +6526,7 @@
       </p:sp>
       <p:sp>
         <p:nvSpPr>
-          <p:cNvPr id="163" name="Text 141"/>
+          <p:cNvPr id="146" name="Text 124"/>
           <p:cNvSpPr/>
           <p:nvPr/>
         </p:nvSpPr>
@@ -7528,6 +6560,805 @@
               <a:t>5</a:t>
             </a:r>
             <a:endParaRPr lang="en-US" sz="620" dirty="0"/>
+          </a:p>
+        </p:txBody>
+      </p:sp>
+      <p:sp>
+        <p:nvSpPr>
+          <p:cNvPr id="147" name="Text 125"/>
+          <p:cNvSpPr/>
+          <p:nvPr/>
+        </p:nvSpPr>
+        <p:spPr>
+          <a:xfrm>
+            <a:off x="7416698" y="3397910"/>
+            <a:ext cx="786384" cy="114300"/>
+          </a:xfrm>
+          <a:prstGeom prst="roundRect">
+            <a:avLst>
+              <a:gd name="adj" fmla="val 24000"/>
+            </a:avLst>
+          </a:prstGeom>
+          <a:solidFill>
+            <a:srgbClr val="FFFFFF"/>
+          </a:solidFill>
+          <a:ln w="5080">
+            <a:solidFill>
+              <a:srgbClr val="DADCE0"/>
+            </a:solidFill>
+          </a:ln>
+        </p:spPr>
+        <p:txBody>
+          <a:bodyPr wrap="square" lIns="0" tIns="0" rIns="0" bIns="0" rtlCol="0" anchor="ctr"/>
+          <a:lstStyle/>
+          <a:p>
+            <a:pPr algn="ctr" indent="0" marL="0">
+              <a:buNone/>
+            </a:pPr>
+            <a:r>
+              <a:rPr lang="en-US" sz="420" b="1" dirty="0">
+                <a:solidFill>
+                  <a:srgbClr val="202124"/>
+                </a:solidFill>
+                <a:latin typeface="Arial" pitchFamily="34" charset="0"/>
+                <a:ea typeface="Arial" pitchFamily="34" charset="-122"/>
+                <a:cs typeface="Arial" pitchFamily="34" charset="-120"/>
+              </a:rPr>
+              <a:t>Security, OTel &amp; FinOps chargeback telemetry</a:t>
+            </a:r>
+            <a:endParaRPr lang="en-US" sz="420" dirty="0"/>
+          </a:p>
+        </p:txBody>
+      </p:sp>
+      <p:sp>
+        <p:nvSpPr>
+          <p:cNvPr id="148" name="Text 126"/>
+          <p:cNvSpPr/>
+          <p:nvPr/>
+        </p:nvSpPr>
+        <p:spPr>
+          <a:xfrm>
+            <a:off x="5295290" y="4659782"/>
+            <a:ext cx="468173" cy="114300"/>
+          </a:xfrm>
+          <a:prstGeom prst="roundRect">
+            <a:avLst>
+              <a:gd name="adj" fmla="val 24000"/>
+            </a:avLst>
+          </a:prstGeom>
+          <a:solidFill>
+            <a:srgbClr val="FFFFFF"/>
+          </a:solidFill>
+          <a:ln w="5080">
+            <a:solidFill>
+              <a:srgbClr val="DADCE0"/>
+            </a:solidFill>
+          </a:ln>
+        </p:spPr>
+        <p:txBody>
+          <a:bodyPr wrap="square" lIns="0" tIns="0" rIns="0" bIns="0" rtlCol="0" anchor="ctr"/>
+          <a:lstStyle/>
+          <a:p>
+            <a:pPr algn="ctr" indent="0" marL="0">
+              <a:buNone/>
+            </a:pPr>
+            <a:r>
+              <a:rPr lang="en-US" sz="420" b="1" dirty="0">
+                <a:solidFill>
+                  <a:srgbClr val="202124"/>
+                </a:solidFill>
+                <a:latin typeface="Arial" pitchFamily="34" charset="0"/>
+                <a:ea typeface="Arial" pitchFamily="34" charset="-122"/>
+                <a:cs typeface="Arial" pitchFamily="34" charset="-120"/>
+              </a:rPr>
+              <a:t>Scoped MCP &amp; RAG</a:t>
+            </a:r>
+            <a:endParaRPr lang="en-US" sz="420" dirty="0"/>
+          </a:p>
+        </p:txBody>
+      </p:sp>
+      <p:sp>
+        <p:nvSpPr>
+          <p:cNvPr id="149" name="Text 127"/>
+          <p:cNvSpPr/>
+          <p:nvPr/>
+        </p:nvSpPr>
+        <p:spPr>
+          <a:xfrm>
+            <a:off x="5196535" y="5206594"/>
+            <a:ext cx="665683" cy="114300"/>
+          </a:xfrm>
+          <a:prstGeom prst="roundRect">
+            <a:avLst>
+              <a:gd name="adj" fmla="val 24000"/>
+            </a:avLst>
+          </a:prstGeom>
+          <a:solidFill>
+            <a:srgbClr val="FFFFFF"/>
+          </a:solidFill>
+          <a:ln w="5080">
+            <a:solidFill>
+              <a:srgbClr val="DADCE0"/>
+            </a:solidFill>
+          </a:ln>
+        </p:spPr>
+        <p:txBody>
+          <a:bodyPr wrap="square" lIns="0" tIns="0" rIns="0" bIns="0" rtlCol="0" anchor="ctr"/>
+          <a:lstStyle/>
+          <a:p>
+            <a:pPr algn="ctr" indent="0" marL="0">
+              <a:buNone/>
+            </a:pPr>
+            <a:r>
+              <a:rPr lang="en-US" sz="420" b="1" dirty="0">
+                <a:solidFill>
+                  <a:srgbClr val="202124"/>
+                </a:solidFill>
+                <a:latin typeface="Arial" pitchFamily="34" charset="0"/>
+                <a:ea typeface="Arial" pitchFamily="34" charset="-122"/>
+                <a:cs typeface="Arial" pitchFamily="34" charset="-120"/>
+              </a:rPr>
+              <a:t>SET LOCAL current_tenant</a:t>
+            </a:r>
+            <a:endParaRPr lang="en-US" sz="420" dirty="0"/>
+          </a:p>
+        </p:txBody>
+      </p:sp>
+      <p:sp>
+        <p:nvSpPr>
+          <p:cNvPr id="150" name="Text 128"/>
+          <p:cNvSpPr/>
+          <p:nvPr/>
+        </p:nvSpPr>
+        <p:spPr>
+          <a:xfrm>
+            <a:off x="7295998" y="4659782"/>
+            <a:ext cx="542239" cy="114300"/>
+          </a:xfrm>
+          <a:prstGeom prst="roundRect">
+            <a:avLst>
+              <a:gd name="adj" fmla="val 24000"/>
+            </a:avLst>
+          </a:prstGeom>
+          <a:solidFill>
+            <a:srgbClr val="FFFFFF"/>
+          </a:solidFill>
+          <a:ln w="5080">
+            <a:solidFill>
+              <a:srgbClr val="DADCE0"/>
+            </a:solidFill>
+          </a:ln>
+        </p:spPr>
+        <p:txBody>
+          <a:bodyPr wrap="square" lIns="0" tIns="0" rIns="0" bIns="0" rtlCol="0" anchor="ctr"/>
+          <a:lstStyle/>
+          <a:p>
+            <a:pPr algn="ctr" indent="0" marL="0">
+              <a:buNone/>
+            </a:pPr>
+            <a:r>
+              <a:rPr lang="en-US" sz="420" b="1" dirty="0">
+                <a:solidFill>
+                  <a:srgbClr val="202124"/>
+                </a:solidFill>
+                <a:latin typeface="Arial" pitchFamily="34" charset="0"/>
+                <a:ea typeface="Arial" pitchFamily="34" charset="-122"/>
+                <a:cs typeface="Arial" pitchFamily="34" charset="-120"/>
+              </a:rPr>
+              <a:t>Air-Gapped Silo RAG</a:t>
+            </a:r>
+            <a:endParaRPr lang="en-US" sz="420" dirty="0"/>
+          </a:p>
+        </p:txBody>
+      </p:sp>
+      <p:sp>
+        <p:nvSpPr>
+          <p:cNvPr id="151" name="Text 129"/>
+          <p:cNvSpPr/>
+          <p:nvPr/>
+        </p:nvSpPr>
+        <p:spPr>
+          <a:xfrm>
+            <a:off x="7184441" y="5206594"/>
+            <a:ext cx="764438" cy="114300"/>
+          </a:xfrm>
+          <a:prstGeom prst="roundRect">
+            <a:avLst>
+              <a:gd name="adj" fmla="val 24000"/>
+            </a:avLst>
+          </a:prstGeom>
+          <a:solidFill>
+            <a:srgbClr val="FFFFFF"/>
+          </a:solidFill>
+          <a:ln w="5080">
+            <a:solidFill>
+              <a:srgbClr val="DADCE0"/>
+            </a:solidFill>
+          </a:ln>
+        </p:spPr>
+        <p:txBody>
+          <a:bodyPr wrap="square" lIns="0" tIns="0" rIns="0" bIns="0" rtlCol="0" anchor="ctr"/>
+          <a:lstStyle/>
+          <a:p>
+            <a:pPr algn="ctr" indent="0" marL="0">
+              <a:buNone/>
+            </a:pPr>
+            <a:r>
+              <a:rPr lang="en-US" sz="420" b="1" dirty="0">
+                <a:solidFill>
+                  <a:srgbClr val="202124"/>
+                </a:solidFill>
+                <a:latin typeface="Arial" pitchFamily="34" charset="0"/>
+                <a:ea typeface="Arial" pitchFamily="34" charset="-122"/>
+                <a:cs typeface="Arial" pitchFamily="34" charset="-120"/>
+              </a:rPr>
+              <a:t>CMEK-Encrypted State &amp; Tools</a:t>
+            </a:r>
+            <a:endParaRPr lang="en-US" sz="420" dirty="0"/>
+          </a:p>
+        </p:txBody>
+      </p:sp>
+      <p:sp>
+        <p:nvSpPr>
+          <p:cNvPr id="152" name="Text 130"/>
+          <p:cNvSpPr/>
+          <p:nvPr/>
+        </p:nvSpPr>
+        <p:spPr>
+          <a:xfrm>
+            <a:off x="4423867" y="5337353"/>
+            <a:ext cx="517550" cy="114300"/>
+          </a:xfrm>
+          <a:prstGeom prst="roundRect">
+            <a:avLst>
+              <a:gd name="adj" fmla="val 24000"/>
+            </a:avLst>
+          </a:prstGeom>
+          <a:solidFill>
+            <a:srgbClr val="FFFFFF"/>
+          </a:solidFill>
+          <a:ln w="5080">
+            <a:solidFill>
+              <a:srgbClr val="DADCE0"/>
+            </a:solidFill>
+          </a:ln>
+        </p:spPr>
+        <p:txBody>
+          <a:bodyPr wrap="square" lIns="0" tIns="0" rIns="0" bIns="0" rtlCol="0" anchor="ctr"/>
+          <a:lstStyle/>
+          <a:p>
+            <a:pPr algn="ctr" indent="0" marL="0">
+              <a:buNone/>
+            </a:pPr>
+            <a:r>
+              <a:rPr lang="en-US" sz="420" b="1" dirty="0">
+                <a:solidFill>
+                  <a:srgbClr val="202124"/>
+                </a:solidFill>
+                <a:latin typeface="Arial" pitchFamily="34" charset="0"/>
+                <a:ea typeface="Arial" pitchFamily="34" charset="-122"/>
+                <a:cs typeface="Arial" pitchFamily="34" charset="-120"/>
+              </a:rPr>
+              <a:t>Generates response</a:t>
+            </a:r>
+            <a:endParaRPr lang="en-US" sz="420" dirty="0"/>
+          </a:p>
+        </p:txBody>
+      </p:sp>
+      <p:sp>
+        <p:nvSpPr>
+          <p:cNvPr id="153" name="Text 131"/>
+          <p:cNvSpPr/>
+          <p:nvPr/>
+        </p:nvSpPr>
+        <p:spPr>
+          <a:xfrm>
+            <a:off x="6326734" y="3397910"/>
+            <a:ext cx="786384" cy="114300"/>
+          </a:xfrm>
+          <a:prstGeom prst="roundRect">
+            <a:avLst>
+              <a:gd name="adj" fmla="val 24000"/>
+            </a:avLst>
+          </a:prstGeom>
+          <a:solidFill>
+            <a:srgbClr val="FFFFFF"/>
+          </a:solidFill>
+          <a:ln w="5080">
+            <a:solidFill>
+              <a:srgbClr val="DADCE0"/>
+            </a:solidFill>
+          </a:ln>
+        </p:spPr>
+        <p:txBody>
+          <a:bodyPr wrap="square" lIns="0" tIns="0" rIns="0" bIns="0" rtlCol="0" anchor="ctr"/>
+          <a:lstStyle/>
+          <a:p>
+            <a:pPr algn="ctr" indent="0" marL="0">
+              <a:buNone/>
+            </a:pPr>
+            <a:r>
+              <a:rPr lang="en-US" sz="420" b="1" dirty="0">
+                <a:solidFill>
+                  <a:srgbClr val="202124"/>
+                </a:solidFill>
+                <a:latin typeface="Arial" pitchFamily="34" charset="0"/>
+                <a:ea typeface="Arial" pitchFamily="34" charset="-122"/>
+                <a:cs typeface="Arial" pitchFamily="34" charset="-120"/>
+              </a:rPr>
+              <a:t>Sanitized response with SDP redaction</a:t>
+            </a:r>
+            <a:endParaRPr lang="en-US" sz="420" dirty="0"/>
+          </a:p>
+        </p:txBody>
+      </p:sp>
+      <p:sp>
+        <p:nvSpPr>
+          <p:cNvPr id="154" name="Text 132"/>
+          <p:cNvSpPr/>
+          <p:nvPr/>
+        </p:nvSpPr>
+        <p:spPr>
+          <a:xfrm>
+            <a:off x="5338267" y="3397910"/>
+            <a:ext cx="786384" cy="114300"/>
+          </a:xfrm>
+          <a:prstGeom prst="roundRect">
+            <a:avLst>
+              <a:gd name="adj" fmla="val 24000"/>
+            </a:avLst>
+          </a:prstGeom>
+          <a:solidFill>
+            <a:srgbClr val="FFFFFF"/>
+          </a:solidFill>
+          <a:ln w="5080">
+            <a:solidFill>
+              <a:srgbClr val="DADCE0"/>
+            </a:solidFill>
+          </a:ln>
+        </p:spPr>
+        <p:txBody>
+          <a:bodyPr wrap="square" lIns="0" tIns="0" rIns="0" bIns="0" rtlCol="0" anchor="ctr"/>
+          <a:lstStyle/>
+          <a:p>
+            <a:pPr algn="ctr" indent="0" marL="0">
+              <a:buNone/>
+            </a:pPr>
+            <a:r>
+              <a:rPr lang="en-US" sz="420" b="1" dirty="0">
+                <a:solidFill>
+                  <a:srgbClr val="202124"/>
+                </a:solidFill>
+                <a:latin typeface="Arial" pitchFamily="34" charset="0"/>
+                <a:ea typeface="Arial" pitchFamily="34" charset="-122"/>
+                <a:cs typeface="Arial" pitchFamily="34" charset="-120"/>
+              </a:rPr>
+              <a:t>Route by tenant tier (Pool, Silo or PSC)</a:t>
+            </a:r>
+            <a:endParaRPr lang="en-US" sz="420" dirty="0"/>
+          </a:p>
+        </p:txBody>
+      </p:sp>
+      <p:sp>
+        <p:nvSpPr>
+          <p:cNvPr id="155" name="Text 133"/>
+          <p:cNvSpPr/>
+          <p:nvPr/>
+        </p:nvSpPr>
+        <p:spPr>
+          <a:xfrm>
+            <a:off x="4964278" y="2980944"/>
+            <a:ext cx="640994" cy="114300"/>
+          </a:xfrm>
+          <a:prstGeom prst="roundRect">
+            <a:avLst>
+              <a:gd name="adj" fmla="val 24000"/>
+            </a:avLst>
+          </a:prstGeom>
+          <a:solidFill>
+            <a:srgbClr val="FFFFFF"/>
+          </a:solidFill>
+          <a:ln w="5080">
+            <a:solidFill>
+              <a:srgbClr val="DADCE0"/>
+            </a:solidFill>
+          </a:ln>
+        </p:spPr>
+        <p:txBody>
+          <a:bodyPr wrap="square" lIns="0" tIns="0" rIns="0" bIns="0" rtlCol="0" anchor="ctr"/>
+          <a:lstStyle/>
+          <a:p>
+            <a:pPr algn="ctr" indent="0" marL="0">
+              <a:buNone/>
+            </a:pPr>
+            <a:r>
+              <a:rPr lang="en-US" sz="420" b="1" dirty="0">
+                <a:solidFill>
+                  <a:srgbClr val="202124"/>
+                </a:solidFill>
+                <a:latin typeface="Arial" pitchFamily="34" charset="0"/>
+                <a:ea typeface="Arial" pitchFamily="34" charset="-122"/>
+                <a:cs typeface="Arial" pitchFamily="34" charset="-120"/>
+              </a:rPr>
+              <a:t>OBO + DPoP verification</a:t>
+            </a:r>
+            <a:endParaRPr lang="en-US" sz="420" dirty="0"/>
+          </a:p>
+        </p:txBody>
+      </p:sp>
+      <p:sp>
+        <p:nvSpPr>
+          <p:cNvPr id="156" name="Text 134"/>
+          <p:cNvSpPr/>
+          <p:nvPr/>
+        </p:nvSpPr>
+        <p:spPr>
+          <a:xfrm>
+            <a:off x="4448556" y="4445813"/>
+            <a:ext cx="468173" cy="114300"/>
+          </a:xfrm>
+          <a:prstGeom prst="roundRect">
+            <a:avLst>
+              <a:gd name="adj" fmla="val 24000"/>
+            </a:avLst>
+          </a:prstGeom>
+          <a:solidFill>
+            <a:srgbClr val="FFFFFF"/>
+          </a:solidFill>
+          <a:ln w="5080">
+            <a:solidFill>
+              <a:srgbClr val="DADCE0"/>
+            </a:solidFill>
+          </a:ln>
+        </p:spPr>
+        <p:txBody>
+          <a:bodyPr wrap="square" lIns="0" tIns="0" rIns="0" bIns="0" rtlCol="0" anchor="ctr"/>
+          <a:lstStyle/>
+          <a:p>
+            <a:pPr algn="ctr" indent="0" marL="0">
+              <a:buNone/>
+            </a:pPr>
+            <a:r>
+              <a:rPr lang="en-US" sz="420" b="1" dirty="0">
+                <a:solidFill>
+                  <a:srgbClr val="202124"/>
+                </a:solidFill>
+                <a:latin typeface="Arial" pitchFamily="34" charset="0"/>
+                <a:ea typeface="Arial" pitchFamily="34" charset="-122"/>
+                <a:cs typeface="Arial" pitchFamily="34" charset="-120"/>
+              </a:rPr>
+              <a:t>Sanitize request</a:t>
+            </a:r>
+            <a:endParaRPr lang="en-US" sz="420" dirty="0"/>
+          </a:p>
+        </p:txBody>
+      </p:sp>
+      <p:sp>
+        <p:nvSpPr>
+          <p:cNvPr id="157" name="Text 135"/>
+          <p:cNvSpPr/>
+          <p:nvPr/>
+        </p:nvSpPr>
+        <p:spPr>
+          <a:xfrm>
+            <a:off x="4436669" y="4625950"/>
+            <a:ext cx="492862" cy="114300"/>
+          </a:xfrm>
+          <a:prstGeom prst="roundRect">
+            <a:avLst>
+              <a:gd name="adj" fmla="val 24000"/>
+            </a:avLst>
+          </a:prstGeom>
+          <a:solidFill>
+            <a:srgbClr val="FFFFFF"/>
+          </a:solidFill>
+          <a:ln w="5080">
+            <a:solidFill>
+              <a:srgbClr val="DADCE0"/>
+            </a:solidFill>
+          </a:ln>
+        </p:spPr>
+        <p:txBody>
+          <a:bodyPr wrap="square" lIns="0" tIns="0" rIns="0" bIns="0" rtlCol="0" anchor="ctr"/>
+          <a:lstStyle/>
+          <a:p>
+            <a:pPr algn="ctr" indent="0" marL="0">
+              <a:buNone/>
+            </a:pPr>
+            <a:r>
+              <a:rPr lang="en-US" sz="420" b="1" dirty="0">
+                <a:solidFill>
+                  <a:srgbClr val="202124"/>
+                </a:solidFill>
+                <a:latin typeface="Arial" pitchFamily="34" charset="0"/>
+                <a:ea typeface="Arial" pitchFamily="34" charset="-122"/>
+                <a:cs typeface="Arial" pitchFamily="34" charset="-120"/>
+              </a:rPr>
+              <a:t>Sanitize response</a:t>
+            </a:r>
+            <a:endParaRPr lang="en-US" sz="420" dirty="0"/>
+          </a:p>
+        </p:txBody>
+      </p:sp>
+      <p:sp>
+        <p:nvSpPr>
+          <p:cNvPr id="158" name="Text 136"/>
+          <p:cNvSpPr/>
+          <p:nvPr/>
+        </p:nvSpPr>
+        <p:spPr>
+          <a:xfrm>
+            <a:off x="4888382" y="2299716"/>
+            <a:ext cx="591617" cy="114300"/>
+          </a:xfrm>
+          <a:prstGeom prst="roundRect">
+            <a:avLst>
+              <a:gd name="adj" fmla="val 24000"/>
+            </a:avLst>
+          </a:prstGeom>
+          <a:solidFill>
+            <a:srgbClr val="FFFFFF"/>
+          </a:solidFill>
+          <a:ln w="5080">
+            <a:solidFill>
+              <a:srgbClr val="DADCE0"/>
+            </a:solidFill>
+          </a:ln>
+        </p:spPr>
+        <p:txBody>
+          <a:bodyPr wrap="square" lIns="0" tIns="0" rIns="0" bIns="0" rtlCol="0" anchor="ctr"/>
+          <a:lstStyle/>
+          <a:p>
+            <a:pPr algn="ctr" indent="0" marL="0">
+              <a:buNone/>
+            </a:pPr>
+            <a:r>
+              <a:rPr lang="en-US" sz="420" b="1" dirty="0">
+                <a:solidFill>
+                  <a:srgbClr val="202124"/>
+                </a:solidFill>
+                <a:latin typeface="Arial" pitchFamily="34" charset="0"/>
+                <a:ea typeface="Arial" pitchFamily="34" charset="-122"/>
+                <a:cs typeface="Arial" pitchFamily="34" charset="-120"/>
+              </a:rPr>
+              <a:t>Header &amp; WAF policies</a:t>
+            </a:r>
+            <a:endParaRPr lang="en-US" sz="420" dirty="0"/>
+          </a:p>
+        </p:txBody>
+      </p:sp>
+      <p:sp>
+        <p:nvSpPr>
+          <p:cNvPr id="159" name="Text 137"/>
+          <p:cNvSpPr/>
+          <p:nvPr/>
+        </p:nvSpPr>
+        <p:spPr>
+          <a:xfrm>
+            <a:off x="4963363" y="2816352"/>
+            <a:ext cx="443484" cy="114300"/>
+          </a:xfrm>
+          <a:prstGeom prst="roundRect">
+            <a:avLst>
+              <a:gd name="adj" fmla="val 24000"/>
+            </a:avLst>
+          </a:prstGeom>
+          <a:solidFill>
+            <a:srgbClr val="FFFFFF"/>
+          </a:solidFill>
+          <a:ln w="5080">
+            <a:solidFill>
+              <a:srgbClr val="DADCE0"/>
+            </a:solidFill>
+          </a:ln>
+        </p:spPr>
+        <p:txBody>
+          <a:bodyPr wrap="square" lIns="0" tIns="0" rIns="0" bIns="0" rtlCol="0" anchor="ctr"/>
+          <a:lstStyle/>
+          <a:p>
+            <a:pPr algn="ctr" indent="0" marL="0">
+              <a:buNone/>
+            </a:pPr>
+            <a:r>
+              <a:rPr lang="en-US" sz="420" b="1" dirty="0">
+                <a:solidFill>
+                  <a:srgbClr val="202124"/>
+                </a:solidFill>
+                <a:latin typeface="Arial" pitchFamily="34" charset="0"/>
+                <a:ea typeface="Arial" pitchFamily="34" charset="-122"/>
+                <a:cs typeface="Arial" pitchFamily="34" charset="-120"/>
+              </a:rPr>
+              <a:t>Sanitize prompt</a:t>
+            </a:r>
+            <a:endParaRPr lang="en-US" sz="420" dirty="0"/>
+          </a:p>
+        </p:txBody>
+      </p:sp>
+      <p:sp>
+        <p:nvSpPr>
+          <p:cNvPr id="160" name="Text 138"/>
+          <p:cNvSpPr/>
+          <p:nvPr/>
+        </p:nvSpPr>
+        <p:spPr>
+          <a:xfrm>
+            <a:off x="6238951" y="1463954"/>
+            <a:ext cx="347472" cy="114300"/>
+          </a:xfrm>
+          <a:prstGeom prst="roundRect">
+            <a:avLst>
+              <a:gd name="adj" fmla="val 24000"/>
+            </a:avLst>
+          </a:prstGeom>
+          <a:solidFill>
+            <a:srgbClr val="FFFFFF"/>
+          </a:solidFill>
+          <a:ln w="5080">
+            <a:solidFill>
+              <a:srgbClr val="DADCE0"/>
+            </a:solidFill>
+          </a:ln>
+        </p:spPr>
+        <p:txBody>
+          <a:bodyPr wrap="square" lIns="0" tIns="0" rIns="0" bIns="0" rtlCol="0" anchor="ctr"/>
+          <a:lstStyle/>
+          <a:p>
+            <a:pPr algn="ctr" indent="0" marL="0">
+              <a:buNone/>
+            </a:pPr>
+            <a:r>
+              <a:rPr lang="en-US" sz="420" b="1" dirty="0">
+                <a:solidFill>
+                  <a:srgbClr val="202124"/>
+                </a:solidFill>
+                <a:latin typeface="Arial" pitchFamily="34" charset="0"/>
+                <a:ea typeface="Arial" pitchFamily="34" charset="-122"/>
+                <a:cs typeface="Arial" pitchFamily="34" charset="-120"/>
+              </a:rPr>
+              <a:t>Response</a:t>
+            </a:r>
+            <a:endParaRPr lang="en-US" sz="420" dirty="0"/>
+          </a:p>
+        </p:txBody>
+      </p:sp>
+      <p:sp>
+        <p:nvSpPr>
+          <p:cNvPr id="161" name="Text 139"/>
+          <p:cNvSpPr/>
+          <p:nvPr/>
+        </p:nvSpPr>
+        <p:spPr>
+          <a:xfrm>
+            <a:off x="6238951" y="2823667"/>
+            <a:ext cx="347472" cy="114300"/>
+          </a:xfrm>
+          <a:prstGeom prst="roundRect">
+            <a:avLst>
+              <a:gd name="adj" fmla="val 24000"/>
+            </a:avLst>
+          </a:prstGeom>
+          <a:solidFill>
+            <a:srgbClr val="FFFFFF"/>
+          </a:solidFill>
+          <a:ln w="5080">
+            <a:solidFill>
+              <a:srgbClr val="DADCE0"/>
+            </a:solidFill>
+          </a:ln>
+        </p:spPr>
+        <p:txBody>
+          <a:bodyPr wrap="square" lIns="0" tIns="0" rIns="0" bIns="0" rtlCol="0" anchor="ctr"/>
+          <a:lstStyle/>
+          <a:p>
+            <a:pPr algn="ctr" indent="0" marL="0">
+              <a:buNone/>
+            </a:pPr>
+            <a:r>
+              <a:rPr lang="en-US" sz="420" b="1" dirty="0">
+                <a:solidFill>
+                  <a:srgbClr val="202124"/>
+                </a:solidFill>
+                <a:latin typeface="Arial" pitchFamily="34" charset="0"/>
+                <a:ea typeface="Arial" pitchFamily="34" charset="-122"/>
+                <a:cs typeface="Arial" pitchFamily="34" charset="-120"/>
+              </a:rPr>
+              <a:t>Response</a:t>
+            </a:r>
+            <a:endParaRPr lang="en-US" sz="420" dirty="0"/>
+          </a:p>
+        </p:txBody>
+      </p:sp>
+      <p:sp>
+        <p:nvSpPr>
+          <p:cNvPr id="162" name="Text 140"/>
+          <p:cNvSpPr/>
+          <p:nvPr/>
+        </p:nvSpPr>
+        <p:spPr>
+          <a:xfrm>
+            <a:off x="5531206" y="1463954"/>
+            <a:ext cx="347472" cy="114300"/>
+          </a:xfrm>
+          <a:prstGeom prst="roundRect">
+            <a:avLst>
+              <a:gd name="adj" fmla="val 24000"/>
+            </a:avLst>
+          </a:prstGeom>
+          <a:solidFill>
+            <a:srgbClr val="FFFFFF"/>
+          </a:solidFill>
+          <a:ln w="5080">
+            <a:solidFill>
+              <a:srgbClr val="DADCE0"/>
+            </a:solidFill>
+          </a:ln>
+        </p:spPr>
+        <p:txBody>
+          <a:bodyPr wrap="square" lIns="0" tIns="0" rIns="0" bIns="0" rtlCol="0" anchor="ctr"/>
+          <a:lstStyle/>
+          <a:p>
+            <a:pPr algn="ctr" indent="0" marL="0">
+              <a:buNone/>
+            </a:pPr>
+            <a:r>
+              <a:rPr lang="en-US" sz="420" b="1" dirty="0">
+                <a:solidFill>
+                  <a:srgbClr val="202124"/>
+                </a:solidFill>
+                <a:latin typeface="Arial" pitchFamily="34" charset="0"/>
+                <a:ea typeface="Arial" pitchFamily="34" charset="-122"/>
+                <a:cs typeface="Arial" pitchFamily="34" charset="-120"/>
+              </a:rPr>
+              <a:t>Request</a:t>
+            </a:r>
+            <a:endParaRPr lang="en-US" sz="420" dirty="0"/>
+          </a:p>
+        </p:txBody>
+      </p:sp>
+      <p:sp>
+        <p:nvSpPr>
+          <p:cNvPr id="163" name="Text 141"/>
+          <p:cNvSpPr/>
+          <p:nvPr/>
+        </p:nvSpPr>
+        <p:spPr>
+          <a:xfrm>
+            <a:off x="5531206" y="2823667"/>
+            <a:ext cx="347472" cy="114300"/>
+          </a:xfrm>
+          <a:prstGeom prst="roundRect">
+            <a:avLst>
+              <a:gd name="adj" fmla="val 24000"/>
+            </a:avLst>
+          </a:prstGeom>
+          <a:solidFill>
+            <a:srgbClr val="FFFFFF"/>
+          </a:solidFill>
+          <a:ln w="5080">
+            <a:solidFill>
+              <a:srgbClr val="DADCE0"/>
+            </a:solidFill>
+          </a:ln>
+        </p:spPr>
+        <p:txBody>
+          <a:bodyPr wrap="square" lIns="0" tIns="0" rIns="0" bIns="0" rtlCol="0" anchor="ctr"/>
+          <a:lstStyle/>
+          <a:p>
+            <a:pPr algn="ctr" indent="0" marL="0">
+              <a:buNone/>
+            </a:pPr>
+            <a:r>
+              <a:rPr lang="en-US" sz="420" b="1" dirty="0">
+                <a:solidFill>
+                  <a:srgbClr val="202124"/>
+                </a:solidFill>
+                <a:latin typeface="Arial" pitchFamily="34" charset="0"/>
+                <a:ea typeface="Arial" pitchFamily="34" charset="-122"/>
+                <a:cs typeface="Arial" pitchFamily="34" charset="-120"/>
+              </a:rPr>
+              <a:t>Request</a:t>
+            </a:r>
+            <a:endParaRPr lang="en-US" sz="420" dirty="0"/>
           </a:p>
         </p:txBody>
       </p:sp>
@@ -7699,8 +7530,8 @@
         </p:nvSpPr>
         <p:spPr>
           <a:xfrm>
-            <a:off x="749808" y="621792"/>
-            <a:ext cx="10680192" cy="219456"/>
+            <a:off x="749808" y="603504"/>
+            <a:ext cx="10680192" cy="201168"/>
           </a:xfrm>
           <a:prstGeom prst="rect">
             <a:avLst/>
@@ -7716,7 +7547,7 @@
               <a:buNone/>
             </a:pPr>
             <a:r>
-              <a:rPr lang="en-US" sz="940" dirty="0">
+              <a:rPr lang="en-US" sz="920" dirty="0">
                 <a:solidFill>
                   <a:srgbClr val="3C4043"/>
                 </a:solidFill>
@@ -7726,7 +7557,7 @@
               </a:rPr>
               <a:t>The architecture consists of the following components:</a:t>
             </a:r>
-            <a:endParaRPr lang="en-US" sz="940" dirty="0"/>
+            <a:endParaRPr lang="en-US" sz="920" dirty="0"/>
           </a:p>
         </p:txBody>
       </p:sp>
@@ -7738,8 +7569,8 @@
         </p:nvSpPr>
         <p:spPr>
           <a:xfrm>
-            <a:off x="749808" y="877824"/>
-            <a:ext cx="2889504" cy="274320"/>
+            <a:off x="749808" y="841248"/>
+            <a:ext cx="2889504" cy="256032"/>
           </a:xfrm>
           <a:prstGeom prst="rect">
             <a:avLst/>
@@ -7763,8 +7594,8 @@
         </p:nvSpPr>
         <p:spPr>
           <a:xfrm>
-            <a:off x="841248" y="877824"/>
-            <a:ext cx="2706624" cy="274320"/>
+            <a:off x="841248" y="841248"/>
+            <a:ext cx="2706624" cy="256032"/>
           </a:xfrm>
           <a:prstGeom prst="rect">
             <a:avLst/>
@@ -7802,8 +7633,8 @@
         </p:nvSpPr>
         <p:spPr>
           <a:xfrm>
-            <a:off x="3639312" y="877824"/>
-            <a:ext cx="7790688" cy="274320"/>
+            <a:off x="3639312" y="841248"/>
+            <a:ext cx="7790688" cy="256032"/>
           </a:xfrm>
           <a:prstGeom prst="rect">
             <a:avLst/>
@@ -7827,8 +7658,8 @@
         </p:nvSpPr>
         <p:spPr>
           <a:xfrm>
-            <a:off x="3749040" y="877824"/>
-            <a:ext cx="7571232" cy="274320"/>
+            <a:off x="3749040" y="841248"/>
+            <a:ext cx="7571232" cy="256032"/>
           </a:xfrm>
           <a:prstGeom prst="rect">
             <a:avLst/>
@@ -7866,8 +7697,8 @@
         </p:nvSpPr>
         <p:spPr>
           <a:xfrm>
-            <a:off x="749808" y="1152144"/>
-            <a:ext cx="2889504" cy="296266"/>
+            <a:off x="749808" y="1097280"/>
+            <a:ext cx="2889504" cy="338328"/>
           </a:xfrm>
           <a:prstGeom prst="rect">
             <a:avLst/>
@@ -7891,8 +7722,8 @@
         </p:nvSpPr>
         <p:spPr>
           <a:xfrm>
-            <a:off x="841248" y="1170432"/>
-            <a:ext cx="2706624" cy="259690"/>
+            <a:off x="841248" y="1115568"/>
+            <a:ext cx="2706624" cy="301752"/>
           </a:xfrm>
           <a:prstGeom prst="rect">
             <a:avLst/>
@@ -7901,14 +7732,16 @@
           <a:ln/>
         </p:spPr>
         <p:txBody>
-          <a:bodyPr wrap="square" rtlCol="0" anchor="ctr"/>
-          <a:lstStyle/>
-          <a:p>
-            <a:pPr indent="0" marL="0">
-              <a:buNone/>
-            </a:pPr>
-            <a:r>
-              <a:rPr lang="en-US" sz="780" b="1" dirty="0">
+          <a:bodyPr wrap="square" rtlCol="0" anchor="ctr">
+            <a:normAutofit/>
+          </a:bodyPr>
+          <a:lstStyle/>
+          <a:p>
+            <a:pPr indent="0" marL="0">
+              <a:buNone/>
+            </a:pPr>
+            <a:r>
+              <a:rPr lang="en-US" sz="750" b="1" dirty="0">
                 <a:solidFill>
                   <a:srgbClr val="202124"/>
                 </a:solidFill>
@@ -7923,7 +7756,7 @@
               <a:buNone/>
             </a:pPr>
             <a:r>
-              <a:rPr lang="en-US" sz="670" dirty="0">
+              <a:rPr lang="en-US" sz="650" dirty="0">
                 <a:solidFill>
                   <a:srgbClr val="5F6368"/>
                 </a:solidFill>
@@ -7931,9 +7764,9 @@
                 <a:ea typeface="Arial" pitchFamily="34" charset="-122"/>
                 <a:cs typeface="Arial" pitchFamily="34" charset="-120"/>
               </a:rPr>
-              <a:t>Outer security and governance boundary that prevents unauthorized data exfiltration.</a:t>
-            </a:r>
-            <a:endParaRPr lang="en-US" sz="780" dirty="0"/>
+              <a:t>Outer security and governance boundary that prevents unauthorized data.</a:t>
+            </a:r>
+            <a:endParaRPr lang="en-US" sz="750" dirty="0"/>
           </a:p>
         </p:txBody>
       </p:sp>
@@ -7945,8 +7778,8 @@
         </p:nvSpPr>
         <p:spPr>
           <a:xfrm>
-            <a:off x="3639312" y="1152144"/>
-            <a:ext cx="7790688" cy="296266"/>
+            <a:off x="3639312" y="1097280"/>
+            <a:ext cx="7790688" cy="338328"/>
           </a:xfrm>
           <a:prstGeom prst="rect">
             <a:avLst/>
@@ -7970,8 +7803,8 @@
         </p:nvSpPr>
         <p:spPr>
           <a:xfrm>
-            <a:off x="3749040" y="1170432"/>
-            <a:ext cx="7571232" cy="259690"/>
+            <a:off x="3749040" y="1115568"/>
+            <a:ext cx="7571232" cy="301752"/>
           </a:xfrm>
           <a:prstGeom prst="rect">
             <a:avLst/>
@@ -7980,14 +7813,19 @@
           <a:ln/>
         </p:spPr>
         <p:txBody>
-          <a:bodyPr wrap="square" rtlCol="0" anchor="ctr"/>
-          <a:lstStyle/>
-          <a:p>
-            <a:pPr indent="0" marL="0">
-              <a:buNone/>
-            </a:pPr>
-            <a:r>
-              <a:rPr lang="en-US" sz="720" b="1" dirty="0">
+          <a:bodyPr wrap="square" rtlCol="0" anchor="ctr">
+            <a:normAutofit/>
+          </a:bodyPr>
+          <a:lstStyle/>
+          <a:p>
+            <a:pPr indent="0" marL="0">
+              <a:lnSpc>
+                <a:spcPct val="102000"/>
+              </a:lnSpc>
+              <a:buNone/>
+            </a:pPr>
+            <a:r>
+              <a:rPr lang="en-US" sz="690" b="1" dirty="0">
                 <a:solidFill>
                   <a:srgbClr val="202124"/>
                 </a:solidFill>
@@ -7998,10 +7836,13 @@
               <a:t>• Shared Control Plane &amp; Multi-Tenant Governance Perimeter: </a:t>
             </a:r>
             <a:pPr indent="0" marL="0">
-              <a:buNone/>
-            </a:pPr>
-            <a:r>
-              <a:rPr lang="en-US" sz="700" dirty="0">
+              <a:lnSpc>
+                <a:spcPct val="102000"/>
+              </a:lnSpc>
+              <a:buNone/>
+            </a:pPr>
+            <a:r>
+              <a:rPr lang="en-US" sz="670" dirty="0">
                 <a:solidFill>
                   <a:srgbClr val="3C4043"/>
                 </a:solidFill>
@@ -8011,7 +7852,7 @@
               </a:rPr>
               <a:t>Enforces VPC Service Controls service perimeters around hub and spoke projects to block unauthorized cross-perimeter data movement.</a:t>
             </a:r>
-            <a:endParaRPr lang="en-US" sz="720" dirty="0"/>
+            <a:endParaRPr lang="en-US" sz="690" dirty="0"/>
           </a:p>
         </p:txBody>
       </p:sp>
@@ -8023,8 +7864,8 @@
         </p:nvSpPr>
         <p:spPr>
           <a:xfrm>
-            <a:off x="749808" y="1448410"/>
-            <a:ext cx="2889504" cy="786384"/>
+            <a:off x="749808" y="1435608"/>
+            <a:ext cx="2889504" cy="822960"/>
           </a:xfrm>
           <a:prstGeom prst="rect">
             <a:avLst/>
@@ -8048,8 +7889,8 @@
         </p:nvSpPr>
         <p:spPr>
           <a:xfrm>
-            <a:off x="841248" y="1466698"/>
-            <a:ext cx="2706624" cy="749808"/>
+            <a:off x="841248" y="1453896"/>
+            <a:ext cx="2706624" cy="786384"/>
           </a:xfrm>
           <a:prstGeom prst="rect">
             <a:avLst/>
@@ -8058,14 +7899,16 @@
           <a:ln/>
         </p:spPr>
         <p:txBody>
-          <a:bodyPr wrap="square" rtlCol="0" anchor="ctr"/>
-          <a:lstStyle/>
-          <a:p>
-            <a:pPr indent="0" marL="0">
-              <a:buNone/>
-            </a:pPr>
-            <a:r>
-              <a:rPr lang="en-US" sz="780" b="1" dirty="0">
+          <a:bodyPr wrap="square" rtlCol="0" anchor="ctr">
+            <a:normAutofit/>
+          </a:bodyPr>
+          <a:lstStyle/>
+          <a:p>
+            <a:pPr indent="0" marL="0">
+              <a:buNone/>
+            </a:pPr>
+            <a:r>
+              <a:rPr lang="en-US" sz="750" b="1" dirty="0">
                 <a:solidFill>
                   <a:srgbClr val="202124"/>
                 </a:solidFill>
@@ -8080,7 +7923,7 @@
               <a:buNone/>
             </a:pPr>
             <a:r>
-              <a:rPr lang="en-US" sz="670" dirty="0">
+              <a:rPr lang="en-US" sz="650" dirty="0">
                 <a:solidFill>
                   <a:srgbClr val="5F6368"/>
                 </a:solidFill>
@@ -8090,7 +7933,7 @@
               </a:rPr>
               <a:t>Centralized ingress and control plane managing edge security, identity verification, and request routing.</a:t>
             </a:r>
-            <a:endParaRPr lang="en-US" sz="780" dirty="0"/>
+            <a:endParaRPr lang="en-US" sz="750" dirty="0"/>
           </a:p>
         </p:txBody>
       </p:sp>
@@ -8102,8 +7945,8 @@
         </p:nvSpPr>
         <p:spPr>
           <a:xfrm>
-            <a:off x="3639312" y="1448410"/>
-            <a:ext cx="7790688" cy="786384"/>
+            <a:off x="3639312" y="1435608"/>
+            <a:ext cx="7790688" cy="822960"/>
           </a:xfrm>
           <a:prstGeom prst="rect">
             <a:avLst/>
@@ -8127,8 +7970,8 @@
         </p:nvSpPr>
         <p:spPr>
           <a:xfrm>
-            <a:off x="3749040" y="1466698"/>
-            <a:ext cx="7571232" cy="749808"/>
+            <a:off x="3749040" y="1453896"/>
+            <a:ext cx="7571232" cy="786384"/>
           </a:xfrm>
           <a:prstGeom prst="rect">
             <a:avLst/>
@@ -8137,14 +7980,19 @@
           <a:ln/>
         </p:spPr>
         <p:txBody>
-          <a:bodyPr wrap="square" rtlCol="0" anchor="ctr"/>
-          <a:lstStyle/>
-          <a:p>
-            <a:pPr indent="0" marL="0">
-              <a:buNone/>
-            </a:pPr>
-            <a:r>
-              <a:rPr lang="en-US" sz="720" b="1" dirty="0">
+          <a:bodyPr wrap="square" rtlCol="0" anchor="ctr">
+            <a:normAutofit/>
+          </a:bodyPr>
+          <a:lstStyle/>
+          <a:p>
+            <a:pPr indent="0" marL="0">
+              <a:lnSpc>
+                <a:spcPct val="102000"/>
+              </a:lnSpc>
+              <a:buNone/>
+            </a:pPr>
+            <a:r>
+              <a:rPr lang="en-US" sz="690" b="1" dirty="0">
                 <a:solidFill>
                   <a:srgbClr val="202124"/>
                 </a:solidFill>
@@ -8155,10 +8003,13 @@
               <a:t>• External Application Load Balancer: </a:t>
             </a:r>
             <a:pPr indent="0" marL="0">
-              <a:buNone/>
-            </a:pPr>
-            <a:r>
-              <a:rPr lang="en-US" sz="700" dirty="0">
+              <a:lnSpc>
+                <a:spcPct val="102000"/>
+              </a:lnSpc>
+              <a:buNone/>
+            </a:pPr>
+            <a:r>
+              <a:rPr lang="en-US" sz="670" dirty="0">
                 <a:solidFill>
                   <a:srgbClr val="3C4043"/>
                 </a:solidFill>
@@ -8170,24 +8021,30 @@
 </a:t>
             </a:r>
             <a:pPr indent="0" marL="0">
-              <a:buNone/>
-            </a:pPr>
-            <a:r>
-              <a:rPr lang="en-US" sz="720" b="1" dirty="0">
-                <a:solidFill>
-                  <a:srgbClr val="202124"/>
-                </a:solidFill>
-                <a:latin typeface="Arial" pitchFamily="34" charset="0"/>
-                <a:ea typeface="Arial" pitchFamily="34" charset="-122"/>
-                <a:cs typeface="Arial" pitchFamily="34" charset="-120"/>
-              </a:rPr>
-              <a:t>• Cloud Armor &amp; IAP &amp; RFC 8693 OBO + DPoP: </a:t>
-            </a:r>
-            <a:pPr indent="0" marL="0">
-              <a:buNone/>
-            </a:pPr>
-            <a:r>
-              <a:rPr lang="en-US" sz="700" dirty="0">
+              <a:lnSpc>
+                <a:spcPct val="102000"/>
+              </a:lnSpc>
+              <a:buNone/>
+            </a:pPr>
+            <a:r>
+              <a:rPr lang="en-US" sz="690" b="1" dirty="0">
+                <a:solidFill>
+                  <a:srgbClr val="202124"/>
+                </a:solidFill>
+                <a:latin typeface="Arial" pitchFamily="34" charset="0"/>
+                <a:ea typeface="Arial" pitchFamily="34" charset="-122"/>
+                <a:cs typeface="Arial" pitchFamily="34" charset="-120"/>
+              </a:rPr>
+              <a:t>• Google Cloud Armor &amp; RFC 8693 OBO + DPoP: </a:t>
+            </a:r>
+            <a:pPr indent="0" marL="0">
+              <a:lnSpc>
+                <a:spcPct val="102000"/>
+              </a:lnSpc>
+              <a:buNone/>
+            </a:pPr>
+            <a:r>
+              <a:rPr lang="en-US" sz="670" dirty="0">
                 <a:solidFill>
                   <a:srgbClr val="3C4043"/>
                 </a:solidFill>
@@ -8199,10 +8056,13 @@
 </a:t>
             </a:r>
             <a:pPr indent="0" marL="0">
-              <a:buNone/>
-            </a:pPr>
-            <a:r>
-              <a:rPr lang="en-US" sz="720" b="1" dirty="0">
+              <a:lnSpc>
+                <a:spcPct val="102000"/>
+              </a:lnSpc>
+              <a:buNone/>
+            </a:pPr>
+            <a:r>
+              <a:rPr lang="en-US" sz="690" b="1" dirty="0">
                 <a:solidFill>
                   <a:srgbClr val="202124"/>
                 </a:solidFill>
@@ -8213,10 +8073,13 @@
               <a:t>• Model Armor: </a:t>
             </a:r>
             <a:pPr indent="0" marL="0">
-              <a:buNone/>
-            </a:pPr>
-            <a:r>
-              <a:rPr lang="en-US" sz="700" dirty="0">
+              <a:lnSpc>
+                <a:spcPct val="102000"/>
+              </a:lnSpc>
+              <a:buNone/>
+            </a:pPr>
+            <a:r>
+              <a:rPr lang="en-US" sz="670" dirty="0">
                 <a:solidFill>
                   <a:srgbClr val="3C4043"/>
                 </a:solidFill>
@@ -8228,10 +8091,13 @@
 </a:t>
             </a:r>
             <a:pPr indent="0" marL="0">
-              <a:buNone/>
-            </a:pPr>
-            <a:r>
-              <a:rPr lang="en-US" sz="720" b="1" dirty="0">
+              <a:lnSpc>
+                <a:spcPct val="102000"/>
+              </a:lnSpc>
+              <a:buNone/>
+            </a:pPr>
+            <a:r>
+              <a:rPr lang="en-US" sz="690" b="1" dirty="0">
                 <a:solidFill>
                   <a:srgbClr val="202124"/>
                 </a:solidFill>
@@ -8242,10 +8108,13 @@
               <a:t>• Cloud Run: </a:t>
             </a:r>
             <a:pPr indent="0" marL="0">
-              <a:buNone/>
-            </a:pPr>
-            <a:r>
-              <a:rPr lang="en-US" sz="700" dirty="0">
+              <a:lnSpc>
+                <a:spcPct val="102000"/>
+              </a:lnSpc>
+              <a:buNone/>
+            </a:pPr>
+            <a:r>
+              <a:rPr lang="en-US" sz="670" dirty="0">
                 <a:solidFill>
                   <a:srgbClr val="3C4043"/>
                 </a:solidFill>
@@ -8255,7 +8124,7 @@
               </a:rPr>
               <a:t>Serverless routing service that validates caller tokens and dispatches requests to the target execution spoke.</a:t>
             </a:r>
-            <a:endParaRPr lang="en-US" sz="720" dirty="0"/>
+            <a:endParaRPr lang="en-US" sz="690" dirty="0"/>
           </a:p>
         </p:txBody>
       </p:sp>
@@ -8267,8 +8136,8 @@
         </p:nvSpPr>
         <p:spPr>
           <a:xfrm>
-            <a:off x="749808" y="2234794"/>
-            <a:ext cx="2889504" cy="615391"/>
+            <a:off x="749808" y="2258568"/>
+            <a:ext cx="2889504" cy="822960"/>
           </a:xfrm>
           <a:prstGeom prst="rect">
             <a:avLst/>
@@ -8292,8 +8161,8 @@
         </p:nvSpPr>
         <p:spPr>
           <a:xfrm>
-            <a:off x="841248" y="2253082"/>
-            <a:ext cx="2706624" cy="578815"/>
+            <a:off x="841248" y="2276856"/>
+            <a:ext cx="2706624" cy="786384"/>
           </a:xfrm>
           <a:prstGeom prst="rect">
             <a:avLst/>
@@ -8302,14 +8171,16 @@
           <a:ln/>
         </p:spPr>
         <p:txBody>
-          <a:bodyPr wrap="square" rtlCol="0" anchor="ctr"/>
-          <a:lstStyle/>
-          <a:p>
-            <a:pPr indent="0" marL="0">
-              <a:buNone/>
-            </a:pPr>
-            <a:r>
-              <a:rPr lang="en-US" sz="780" b="1" dirty="0">
+          <a:bodyPr wrap="square" rtlCol="0" anchor="ctr">
+            <a:normAutofit/>
+          </a:bodyPr>
+          <a:lstStyle/>
+          <a:p>
+            <a:pPr indent="0" marL="0">
+              <a:buNone/>
+            </a:pPr>
+            <a:r>
+              <a:rPr lang="en-US" sz="750" b="1" dirty="0">
                 <a:solidFill>
                   <a:srgbClr val="202124"/>
                 </a:solidFill>
@@ -8324,7 +8195,7 @@
               <a:buNone/>
             </a:pPr>
             <a:r>
-              <a:rPr lang="en-US" sz="670" dirty="0">
+              <a:rPr lang="en-US" sz="650" dirty="0">
                 <a:solidFill>
                   <a:srgbClr val="5F6368"/>
                 </a:solidFill>
@@ -8334,7 +8205,7 @@
               </a:rPr>
               <a:t>Dedicated governance plane providing unified security posture, cryptographic key management, and OpenTelemetry observability.</a:t>
             </a:r>
-            <a:endParaRPr lang="en-US" sz="780" dirty="0"/>
+            <a:endParaRPr lang="en-US" sz="750" dirty="0"/>
           </a:p>
         </p:txBody>
       </p:sp>
@@ -8346,8 +8217,8 @@
         </p:nvSpPr>
         <p:spPr>
           <a:xfrm>
-            <a:off x="3639312" y="2234794"/>
-            <a:ext cx="7790688" cy="615391"/>
+            <a:off x="3639312" y="2258568"/>
+            <a:ext cx="7790688" cy="822960"/>
           </a:xfrm>
           <a:prstGeom prst="rect">
             <a:avLst/>
@@ -8371,8 +8242,8 @@
         </p:nvSpPr>
         <p:spPr>
           <a:xfrm>
-            <a:off x="3749040" y="2253082"/>
-            <a:ext cx="7571232" cy="578815"/>
+            <a:off x="3749040" y="2276856"/>
+            <a:ext cx="7571232" cy="786384"/>
           </a:xfrm>
           <a:prstGeom prst="rect">
             <a:avLst/>
@@ -8381,14 +8252,19 @@
           <a:ln/>
         </p:spPr>
         <p:txBody>
-          <a:bodyPr wrap="square" rtlCol="0" anchor="ctr"/>
-          <a:lstStyle/>
-          <a:p>
-            <a:pPr indent="0" marL="0">
-              <a:buNone/>
-            </a:pPr>
-            <a:r>
-              <a:rPr lang="en-US" sz="720" b="1" dirty="0">
+          <a:bodyPr wrap="square" rtlCol="0" anchor="ctr">
+            <a:normAutofit/>
+          </a:bodyPr>
+          <a:lstStyle/>
+          <a:p>
+            <a:pPr indent="0" marL="0">
+              <a:lnSpc>
+                <a:spcPct val="102000"/>
+              </a:lnSpc>
+              <a:buNone/>
+            </a:pPr>
+            <a:r>
+              <a:rPr lang="en-US" sz="690" b="1" dirty="0">
                 <a:solidFill>
                   <a:srgbClr val="202124"/>
                 </a:solidFill>
@@ -8399,10 +8275,13 @@
               <a:t>• Security Command Center: </a:t>
             </a:r>
             <a:pPr indent="0" marL="0">
-              <a:buNone/>
-            </a:pPr>
-            <a:r>
-              <a:rPr lang="en-US" sz="700" dirty="0">
+              <a:lnSpc>
+                <a:spcPct val="102000"/>
+              </a:lnSpc>
+              <a:buNone/>
+            </a:pPr>
+            <a:r>
+              <a:rPr lang="en-US" sz="670" dirty="0">
                 <a:solidFill>
                   <a:srgbClr val="3C4043"/>
                 </a:solidFill>
@@ -8414,10 +8293,13 @@
 </a:t>
             </a:r>
             <a:pPr indent="0" marL="0">
-              <a:buNone/>
-            </a:pPr>
-            <a:r>
-              <a:rPr lang="en-US" sz="720" b="1" dirty="0">
+              <a:lnSpc>
+                <a:spcPct val="102000"/>
+              </a:lnSpc>
+              <a:buNone/>
+            </a:pPr>
+            <a:r>
+              <a:rPr lang="en-US" sz="690" b="1" dirty="0">
                 <a:solidFill>
                   <a:srgbClr val="202124"/>
                 </a:solidFill>
@@ -8428,10 +8310,13 @@
               <a:t>• Central IAM &amp; PAB: </a:t>
             </a:r>
             <a:pPr indent="0" marL="0">
-              <a:buNone/>
-            </a:pPr>
-            <a:r>
-              <a:rPr lang="en-US" sz="700" dirty="0">
+              <a:lnSpc>
+                <a:spcPct val="102000"/>
+              </a:lnSpc>
+              <a:buNone/>
+            </a:pPr>
+            <a:r>
+              <a:rPr lang="en-US" sz="670" dirty="0">
                 <a:solidFill>
                   <a:srgbClr val="3C4043"/>
                 </a:solidFill>
@@ -8443,10 +8328,13 @@
 </a:t>
             </a:r>
             <a:pPr indent="0" marL="0">
-              <a:buNone/>
-            </a:pPr>
-            <a:r>
-              <a:rPr lang="en-US" sz="720" b="1" dirty="0">
+              <a:lnSpc>
+                <a:spcPct val="102000"/>
+              </a:lnSpc>
+              <a:buNone/>
+            </a:pPr>
+            <a:r>
+              <a:rPr lang="en-US" sz="690" b="1" dirty="0">
                 <a:solidFill>
                   <a:srgbClr val="202124"/>
                 </a:solidFill>
@@ -8457,10 +8345,13 @@
               <a:t>• Cloud Logging &amp; BQ: </a:t>
             </a:r>
             <a:pPr indent="0" marL="0">
-              <a:buNone/>
-            </a:pPr>
-            <a:r>
-              <a:rPr lang="en-US" sz="700" dirty="0">
+              <a:lnSpc>
+                <a:spcPct val="102000"/>
+              </a:lnSpc>
+              <a:buNone/>
+            </a:pPr>
+            <a:r>
+              <a:rPr lang="en-US" sz="670" dirty="0">
                 <a:solidFill>
                   <a:srgbClr val="3C4043"/>
                 </a:solidFill>
@@ -8470,7 +8361,7 @@
               </a:rPr>
               <a:t>Aggregates audit logs, execution traces, and OpenTelemetry FinOps telemetry into BigQuery.</a:t>
             </a:r>
-            <a:endParaRPr lang="en-US" sz="720" dirty="0"/>
+            <a:endParaRPr lang="en-US" sz="690" dirty="0"/>
           </a:p>
         </p:txBody>
       </p:sp>
@@ -8482,8 +8373,8 @@
         </p:nvSpPr>
         <p:spPr>
           <a:xfrm>
-            <a:off x="749808" y="2850185"/>
-            <a:ext cx="2889504" cy="296266"/>
+            <a:off x="749808" y="3081528"/>
+            <a:ext cx="2889504" cy="338328"/>
           </a:xfrm>
           <a:prstGeom prst="rect">
             <a:avLst/>
@@ -8507,8 +8398,8 @@
         </p:nvSpPr>
         <p:spPr>
           <a:xfrm>
-            <a:off x="841248" y="2868473"/>
-            <a:ext cx="2706624" cy="259690"/>
+            <a:off x="841248" y="3099816"/>
+            <a:ext cx="2706624" cy="301752"/>
           </a:xfrm>
           <a:prstGeom prst="rect">
             <a:avLst/>
@@ -8517,14 +8408,16 @@
           <a:ln/>
         </p:spPr>
         <p:txBody>
-          <a:bodyPr wrap="square" rtlCol="0" anchor="ctr"/>
-          <a:lstStyle/>
-          <a:p>
-            <a:pPr indent="0" marL="0">
-              <a:buNone/>
-            </a:pPr>
-            <a:r>
-              <a:rPr lang="en-US" sz="780" b="1" dirty="0">
+          <a:bodyPr wrap="square" rtlCol="0" anchor="ctr">
+            <a:normAutofit/>
+          </a:bodyPr>
+          <a:lstStyle/>
+          <a:p>
+            <a:pPr indent="0" marL="0">
+              <a:buNone/>
+            </a:pPr>
+            <a:r>
+              <a:rPr lang="en-US" sz="750" b="1" dirty="0">
                 <a:solidFill>
                   <a:srgbClr val="202124"/>
                 </a:solidFill>
@@ -8539,7 +8432,7 @@
               <a:buNone/>
             </a:pPr>
             <a:r>
-              <a:rPr lang="en-US" sz="670" dirty="0">
+              <a:rPr lang="en-US" sz="650" dirty="0">
                 <a:solidFill>
                   <a:srgbClr val="5F6368"/>
                 </a:solidFill>
@@ -8549,7 +8442,7 @@
               </a:rPr>
               <a:t>Identity and resource isolation boundary restricting principal access so workloads.</a:t>
             </a:r>
-            <a:endParaRPr lang="en-US" sz="780" dirty="0"/>
+            <a:endParaRPr lang="en-US" sz="750" dirty="0"/>
           </a:p>
         </p:txBody>
       </p:sp>
@@ -8561,8 +8454,8 @@
         </p:nvSpPr>
         <p:spPr>
           <a:xfrm>
-            <a:off x="3639312" y="2850185"/>
-            <a:ext cx="7790688" cy="296266"/>
+            <a:off x="3639312" y="3081528"/>
+            <a:ext cx="7790688" cy="338328"/>
           </a:xfrm>
           <a:prstGeom prst="rect">
             <a:avLst/>
@@ -8586,8 +8479,8 @@
         </p:nvSpPr>
         <p:spPr>
           <a:xfrm>
-            <a:off x="3749040" y="2868473"/>
-            <a:ext cx="7571232" cy="259690"/>
+            <a:off x="3749040" y="3099816"/>
+            <a:ext cx="7571232" cy="301752"/>
           </a:xfrm>
           <a:prstGeom prst="rect">
             <a:avLst/>
@@ -8596,14 +8489,19 @@
           <a:ln/>
         </p:spPr>
         <p:txBody>
-          <a:bodyPr wrap="square" rtlCol="0" anchor="ctr"/>
-          <a:lstStyle/>
-          <a:p>
-            <a:pPr indent="0" marL="0">
-              <a:buNone/>
-            </a:pPr>
-            <a:r>
-              <a:rPr lang="en-US" sz="720" b="1" dirty="0">
+          <a:bodyPr wrap="square" rtlCol="0" anchor="ctr">
+            <a:normAutofit/>
+          </a:bodyPr>
+          <a:lstStyle/>
+          <a:p>
+            <a:pPr indent="0" marL="0">
+              <a:lnSpc>
+                <a:spcPct val="102000"/>
+              </a:lnSpc>
+              <a:buNone/>
+            </a:pPr>
+            <a:r>
+              <a:rPr lang="en-US" sz="690" b="1" dirty="0">
                 <a:solidFill>
                   <a:srgbClr val="202124"/>
                 </a:solidFill>
@@ -8614,10 +8512,13 @@
               <a:t>• VPC &amp; 5-Hop Cryptographic Context Chain: </a:t>
             </a:r>
             <a:pPr indent="0" marL="0">
-              <a:buNone/>
-            </a:pPr>
-            <a:r>
-              <a:rPr lang="en-US" sz="700" dirty="0">
+              <a:lnSpc>
+                <a:spcPct val="102000"/>
+              </a:lnSpc>
+              <a:buNone/>
+            </a:pPr>
+            <a:r>
+              <a:rPr lang="en-US" sz="670" dirty="0">
                 <a:solidFill>
                   <a:srgbClr val="3C4043"/>
                 </a:solidFill>
@@ -8627,7 +8528,7 @@
               </a:rPr>
               <a:t>Binds IAM Principal Access Boundary (PAB) policies to spoke principals so credentials and tool calls remain strictly scoped to their authorized boundary.</a:t>
             </a:r>
-            <a:endParaRPr lang="en-US" sz="720" dirty="0"/>
+            <a:endParaRPr lang="en-US" sz="690" dirty="0"/>
           </a:p>
         </p:txBody>
       </p:sp>
@@ -8639,8 +8540,8 @@
         </p:nvSpPr>
         <p:spPr>
           <a:xfrm>
-            <a:off x="749808" y="3146450"/>
-            <a:ext cx="2889504" cy="785470"/>
+            <a:off x="749808" y="3419856"/>
+            <a:ext cx="2889504" cy="822960"/>
           </a:xfrm>
           <a:prstGeom prst="rect">
             <a:avLst/>
@@ -8664,8 +8565,8 @@
         </p:nvSpPr>
         <p:spPr>
           <a:xfrm>
-            <a:off x="841248" y="3164738"/>
-            <a:ext cx="2706624" cy="748894"/>
+            <a:off x="841248" y="3438144"/>
+            <a:ext cx="2706624" cy="786384"/>
           </a:xfrm>
           <a:prstGeom prst="rect">
             <a:avLst/>
@@ -8674,14 +8575,16 @@
           <a:ln/>
         </p:spPr>
         <p:txBody>
-          <a:bodyPr wrap="square" rtlCol="0" anchor="ctr"/>
-          <a:lstStyle/>
-          <a:p>
-            <a:pPr indent="0" marL="0">
-              <a:buNone/>
-            </a:pPr>
-            <a:r>
-              <a:rPr lang="en-US" sz="780" b="1" dirty="0">
+          <a:bodyPr wrap="square" rtlCol="0" anchor="ctr">
+            <a:normAutofit/>
+          </a:bodyPr>
+          <a:lstStyle/>
+          <a:p>
+            <a:pPr indent="0" marL="0">
+              <a:buNone/>
+            </a:pPr>
+            <a:r>
+              <a:rPr lang="en-US" sz="750" b="1" dirty="0">
                 <a:solidFill>
                   <a:srgbClr val="202124"/>
                 </a:solidFill>
@@ -8696,7 +8599,7 @@
               <a:buNone/>
             </a:pPr>
             <a:r>
-              <a:rPr lang="en-US" sz="670" dirty="0">
+              <a:rPr lang="en-US" sz="650" dirty="0">
                 <a:solidFill>
                   <a:srgbClr val="5F6368"/>
                 </a:solidFill>
@@ -8706,7 +8609,7 @@
               </a:rPr>
               <a:t>Isolated Google Cloud execution spokes.</a:t>
             </a:r>
-            <a:endParaRPr lang="en-US" sz="780" dirty="0"/>
+            <a:endParaRPr lang="en-US" sz="750" dirty="0"/>
           </a:p>
         </p:txBody>
       </p:sp>
@@ -8718,8 +8621,8 @@
         </p:nvSpPr>
         <p:spPr>
           <a:xfrm>
-            <a:off x="3639312" y="3146450"/>
-            <a:ext cx="7790688" cy="785470"/>
+            <a:off x="3639312" y="3419856"/>
+            <a:ext cx="7790688" cy="822960"/>
           </a:xfrm>
           <a:prstGeom prst="rect">
             <a:avLst/>
@@ -8743,8 +8646,8 @@
         </p:nvSpPr>
         <p:spPr>
           <a:xfrm>
-            <a:off x="3749040" y="3164738"/>
-            <a:ext cx="7571232" cy="748894"/>
+            <a:off x="3749040" y="3438144"/>
+            <a:ext cx="7571232" cy="786384"/>
           </a:xfrm>
           <a:prstGeom prst="rect">
             <a:avLst/>
@@ -8753,14 +8656,19 @@
           <a:ln/>
         </p:spPr>
         <p:txBody>
-          <a:bodyPr wrap="square" rtlCol="0" anchor="ctr"/>
-          <a:lstStyle/>
-          <a:p>
-            <a:pPr indent="0" marL="0">
-              <a:buNone/>
-            </a:pPr>
-            <a:r>
-              <a:rPr lang="en-US" sz="720" b="1" dirty="0">
+          <a:bodyPr wrap="square" rtlCol="0" anchor="ctr">
+            <a:normAutofit/>
+          </a:bodyPr>
+          <a:lstStyle/>
+          <a:p>
+            <a:pPr indent="0" marL="0">
+              <a:lnSpc>
+                <a:spcPct val="102000"/>
+              </a:lnSpc>
+              <a:buNone/>
+            </a:pPr>
+            <a:r>
+              <a:rPr lang="en-US" sz="690" b="1" dirty="0">
                 <a:solidFill>
                   <a:srgbClr val="202124"/>
                 </a:solidFill>
@@ -8771,10 +8679,13 @@
               <a:t>• Vertex AI Agent Engine: </a:t>
             </a:r>
             <a:pPr indent="0" marL="0">
-              <a:buNone/>
-            </a:pPr>
-            <a:r>
-              <a:rPr lang="en-US" sz="700" dirty="0">
+              <a:lnSpc>
+                <a:spcPct val="102000"/>
+              </a:lnSpc>
+              <a:buNone/>
+            </a:pPr>
+            <a:r>
+              <a:rPr lang="en-US" sz="670" dirty="0">
                 <a:solidFill>
                   <a:srgbClr val="3C4043"/>
                 </a:solidFill>
@@ -8786,10 +8697,13 @@
 </a:t>
             </a:r>
             <a:pPr indent="0" marL="0">
-              <a:buNone/>
-            </a:pPr>
-            <a:r>
-              <a:rPr lang="en-US" sz="720" b="1" dirty="0">
+              <a:lnSpc>
+                <a:spcPct val="102000"/>
+              </a:lnSpc>
+              <a:buNone/>
+            </a:pPr>
+            <a:r>
+              <a:rPr lang="en-US" sz="690" b="1" dirty="0">
                 <a:solidFill>
                   <a:srgbClr val="202124"/>
                 </a:solidFill>
@@ -8800,10 +8714,13 @@
               <a:t>• Model Armor: </a:t>
             </a:r>
             <a:pPr indent="0" marL="0">
-              <a:buNone/>
-            </a:pPr>
-            <a:r>
-              <a:rPr lang="en-US" sz="700" dirty="0">
+              <a:lnSpc>
+                <a:spcPct val="102000"/>
+              </a:lnSpc>
+              <a:buNone/>
+            </a:pPr>
+            <a:r>
+              <a:rPr lang="en-US" sz="670" dirty="0">
                 <a:solidFill>
                   <a:srgbClr val="3C4043"/>
                 </a:solidFill>
@@ -8815,10 +8732,13 @@
 </a:t>
             </a:r>
             <a:pPr indent="0" marL="0">
-              <a:buNone/>
-            </a:pPr>
-            <a:r>
-              <a:rPr lang="en-US" sz="720" b="1" dirty="0">
+              <a:lnSpc>
+                <a:spcPct val="102000"/>
+              </a:lnSpc>
+              <a:buNone/>
+            </a:pPr>
+            <a:r>
+              <a:rPr lang="en-US" sz="690" b="1" dirty="0">
                 <a:solidFill>
                   <a:srgbClr val="202124"/>
                 </a:solidFill>
@@ -8829,10 +8749,13 @@
               <a:t>• MCP servers: </a:t>
             </a:r>
             <a:pPr indent="0" marL="0">
-              <a:buNone/>
-            </a:pPr>
-            <a:r>
-              <a:rPr lang="en-US" sz="700" dirty="0">
+              <a:lnSpc>
+                <a:spcPct val="102000"/>
+              </a:lnSpc>
+              <a:buNone/>
+            </a:pPr>
+            <a:r>
+              <a:rPr lang="en-US" sz="670" dirty="0">
                 <a:solidFill>
                   <a:srgbClr val="3C4043"/>
                 </a:solidFill>
@@ -8844,10 +8767,13 @@
 </a:t>
             </a:r>
             <a:pPr indent="0" marL="0">
-              <a:buNone/>
-            </a:pPr>
-            <a:r>
-              <a:rPr lang="en-US" sz="720" b="1" dirty="0">
+              <a:lnSpc>
+                <a:spcPct val="102000"/>
+              </a:lnSpc>
+              <a:buNone/>
+            </a:pPr>
+            <a:r>
+              <a:rPr lang="en-US" sz="690" b="1" dirty="0">
                 <a:solidFill>
                   <a:srgbClr val="202124"/>
                 </a:solidFill>
@@ -8858,10 +8784,13 @@
               <a:t>• Shared AlloyDB: </a:t>
             </a:r>
             <a:pPr indent="0" marL="0">
-              <a:buNone/>
-            </a:pPr>
-            <a:r>
-              <a:rPr lang="en-US" sz="700" dirty="0">
+              <a:lnSpc>
+                <a:spcPct val="102000"/>
+              </a:lnSpc>
+              <a:buNone/>
+            </a:pPr>
+            <a:r>
+              <a:rPr lang="en-US" sz="670" dirty="0">
                 <a:solidFill>
                   <a:srgbClr val="3C4043"/>
                 </a:solidFill>
@@ -8871,7 +8800,7 @@
               </a:rPr>
               <a:t>Isolated persistence layer enforcing access boundaries, vector namespaces, and encryption at rest.</a:t>
             </a:r>
-            <a:endParaRPr lang="en-US" sz="720" dirty="0"/>
+            <a:endParaRPr lang="en-US" sz="690" dirty="0"/>
           </a:p>
         </p:txBody>
       </p:sp>
@@ -8883,7 +8812,7 @@
         </p:nvSpPr>
         <p:spPr>
           <a:xfrm>
-            <a:off x="749808" y="4041648"/>
+            <a:off x="749808" y="4315968"/>
             <a:ext cx="10680192" cy="0"/>
           </a:xfrm>
           <a:prstGeom prst="line">
@@ -8906,8 +8835,8 @@
         </p:nvSpPr>
         <p:spPr>
           <a:xfrm>
-            <a:off x="749808" y="4114800"/>
-            <a:ext cx="10680192" cy="256032"/>
+            <a:off x="749808" y="4370832"/>
+            <a:ext cx="10680192" cy="237744"/>
           </a:xfrm>
           <a:prstGeom prst="rect">
             <a:avLst/>
@@ -8923,7 +8852,7 @@
               <a:buNone/>
             </a:pPr>
             <a:r>
-              <a:rPr lang="en-US" sz="1300" dirty="0">
+              <a:rPr lang="en-US" sz="1250" dirty="0">
                 <a:solidFill>
                   <a:srgbClr val="202124"/>
                 </a:solidFill>
@@ -8933,7 +8862,7 @@
               </a:rPr>
               <a:t>Agentic flow</a:t>
             </a:r>
-            <a:endParaRPr lang="en-US" sz="1300" dirty="0"/>
+            <a:endParaRPr lang="en-US" sz="1250" dirty="0"/>
           </a:p>
         </p:txBody>
       </p:sp>
@@ -8945,8 +8874,8 @@
         </p:nvSpPr>
         <p:spPr>
           <a:xfrm>
-            <a:off x="749808" y="4407408"/>
-            <a:ext cx="10680192" cy="2139696"/>
+            <a:off x="749808" y="4626864"/>
+            <a:ext cx="10680192" cy="1901952"/>
           </a:xfrm>
           <a:prstGeom prst="rect">
             <a:avLst/>
@@ -8955,17 +8884,19 @@
           <a:ln/>
         </p:spPr>
         <p:txBody>
-          <a:bodyPr wrap="square" rtlCol="0" anchor="t"/>
-          <a:lstStyle/>
-          <a:p>
-            <a:pPr indent="0" marL="0">
-              <a:lnSpc>
-                <a:spcPct val="108000"/>
-              </a:lnSpc>
-              <a:buNone/>
-            </a:pPr>
-            <a:r>
-              <a:rPr lang="en-US" sz="740" b="1" dirty="0">
+          <a:bodyPr wrap="square" rtlCol="0" anchor="t">
+            <a:normAutofit/>
+          </a:bodyPr>
+          <a:lstStyle/>
+          <a:p>
+            <a:pPr indent="0" marL="0">
+              <a:lnSpc>
+                <a:spcPct val="106000"/>
+              </a:lnSpc>
+              <a:buNone/>
+            </a:pPr>
+            <a:r>
+              <a:rPr lang="en-US" sz="730" b="1" dirty="0">
                 <a:solidFill>
                   <a:srgbClr val="202124"/>
                 </a:solidFill>
@@ -8977,12 +8908,12 @@
             </a:r>
             <a:pPr indent="0" marL="0">
               <a:lnSpc>
-                <a:spcPct val="108000"/>
-              </a:lnSpc>
-              <a:buNone/>
-            </a:pPr>
-            <a:r>
-              <a:rPr lang="en-US" sz="730" dirty="0">
+                <a:spcPct val="106000"/>
+              </a:lnSpc>
+              <a:buNone/>
+            </a:pPr>
+            <a:r>
+              <a:rPr lang="en-US" sz="720" dirty="0">
                 <a:solidFill>
                   <a:srgbClr val="3C4043"/>
                 </a:solidFill>
@@ -8995,12 +8926,12 @@
             </a:r>
             <a:pPr indent="0" marL="0">
               <a:lnSpc>
-                <a:spcPct val="108000"/>
-              </a:lnSpc>
-              <a:buNone/>
-            </a:pPr>
-            <a:r>
-              <a:rPr lang="en-US" sz="740" b="1" dirty="0">
+                <a:spcPct val="106000"/>
+              </a:lnSpc>
+              <a:buNone/>
+            </a:pPr>
+            <a:r>
+              <a:rPr lang="en-US" sz="730" b="1" dirty="0">
                 <a:solidFill>
                   <a:srgbClr val="202124"/>
                 </a:solidFill>
@@ -9012,12 +8943,12 @@
             </a:r>
             <a:pPr indent="0" marL="0">
               <a:lnSpc>
-                <a:spcPct val="108000"/>
-              </a:lnSpc>
-              <a:buNone/>
-            </a:pPr>
-            <a:r>
-              <a:rPr lang="en-US" sz="730" dirty="0">
+                <a:spcPct val="106000"/>
+              </a:lnSpc>
+              <a:buNone/>
+            </a:pPr>
+            <a:r>
+              <a:rPr lang="en-US" sz="720" dirty="0">
                 <a:solidFill>
                   <a:srgbClr val="3C4043"/>
                 </a:solidFill>
@@ -9025,17 +8956,17 @@
                 <a:ea typeface="Arial" pitchFamily="34" charset="-122"/>
                 <a:cs typeface="Arial" pitchFamily="34" charset="-120"/>
               </a:rPr>
-              <a:t>After passing policy and security checks across Cloud Armor &amp; IAP, Model Armor, and RFC 8693 OBO + DPoP, the request is forwarded to Cloud Run.
+              <a:t>After passing policy and security checks across Google Cloud Armor, Model Armor, and RFC 8693 OBO + DPoP, the request is forwarded to Cloud Run.
 </a:t>
             </a:r>
             <a:pPr indent="0" marL="0">
               <a:lnSpc>
-                <a:spcPct val="108000"/>
-              </a:lnSpc>
-              <a:buNone/>
-            </a:pPr>
-            <a:r>
-              <a:rPr lang="en-US" sz="740" b="1" dirty="0">
+                <a:spcPct val="106000"/>
+              </a:lnSpc>
+              <a:buNone/>
+            </a:pPr>
+            <a:r>
+              <a:rPr lang="en-US" sz="730" b="1" dirty="0">
                 <a:solidFill>
                   <a:srgbClr val="202124"/>
                 </a:solidFill>
@@ -9047,12 +8978,12 @@
             </a:r>
             <a:pPr indent="0" marL="0">
               <a:lnSpc>
-                <a:spcPct val="108000"/>
-              </a:lnSpc>
-              <a:buNone/>
-            </a:pPr>
-            <a:r>
-              <a:rPr lang="en-US" sz="730" dirty="0">
+                <a:spcPct val="106000"/>
+              </a:lnSpc>
+              <a:buNone/>
+            </a:pPr>
+            <a:r>
+              <a:rPr lang="en-US" sz="720" dirty="0">
                 <a:solidFill>
                   <a:srgbClr val="3C4043"/>
                 </a:solidFill>
@@ -9065,12 +8996,12 @@
             </a:r>
             <a:pPr indent="0" marL="0">
               <a:lnSpc>
-                <a:spcPct val="108000"/>
-              </a:lnSpc>
-              <a:buNone/>
-            </a:pPr>
-            <a:r>
-              <a:rPr lang="en-US" sz="740" b="1" dirty="0">
+                <a:spcPct val="106000"/>
+              </a:lnSpc>
+              <a:buNone/>
+            </a:pPr>
+            <a:r>
+              <a:rPr lang="en-US" sz="730" b="1" dirty="0">
                 <a:solidFill>
                   <a:srgbClr val="202124"/>
                 </a:solidFill>
@@ -9082,12 +9013,12 @@
             </a:r>
             <a:pPr indent="0" marL="0">
               <a:lnSpc>
-                <a:spcPct val="108000"/>
-              </a:lnSpc>
-              <a:buNone/>
-            </a:pPr>
-            <a:r>
-              <a:rPr lang="en-US" sz="730" dirty="0">
+                <a:spcPct val="106000"/>
+              </a:lnSpc>
+              <a:buNone/>
+            </a:pPr>
+            <a:r>
+              <a:rPr lang="en-US" sz="720" dirty="0">
                 <a:solidFill>
                   <a:srgbClr val="3C4043"/>
                 </a:solidFill>
@@ -9100,12 +9031,12 @@
             </a:r>
             <a:pPr indent="0" marL="0">
               <a:lnSpc>
-                <a:spcPct val="108000"/>
-              </a:lnSpc>
-              <a:buNone/>
-            </a:pPr>
-            <a:r>
-              <a:rPr lang="en-US" sz="700" b="1" dirty="0">
+                <a:spcPct val="106000"/>
+              </a:lnSpc>
+              <a:buNone/>
+            </a:pPr>
+            <a:r>
+              <a:rPr lang="en-US" sz="690" b="1" dirty="0">
                 <a:solidFill>
                   <a:srgbClr val="202124"/>
                 </a:solidFill>
@@ -9117,12 +9048,12 @@
             </a:r>
             <a:pPr indent="0" marL="0">
               <a:lnSpc>
-                <a:spcPct val="108000"/>
-              </a:lnSpc>
-              <a:buNone/>
-            </a:pPr>
-            <a:r>
-              <a:rPr lang="en-US" sz="690" dirty="0">
+                <a:spcPct val="106000"/>
+              </a:lnSpc>
+              <a:buNone/>
+            </a:pPr>
+            <a:r>
+              <a:rPr lang="en-US" sz="680" dirty="0">
                 <a:solidFill>
                   <a:srgbClr val="3C4043"/>
                 </a:solidFill>
@@ -9135,12 +9066,12 @@
             </a:r>
             <a:pPr indent="0" marL="0">
               <a:lnSpc>
-                <a:spcPct val="108000"/>
-              </a:lnSpc>
-              <a:buNone/>
-            </a:pPr>
-            <a:r>
-              <a:rPr lang="en-US" sz="700" b="1" dirty="0">
+                <a:spcPct val="106000"/>
+              </a:lnSpc>
+              <a:buNone/>
+            </a:pPr>
+            <a:r>
+              <a:rPr lang="en-US" sz="690" b="1" dirty="0">
                 <a:solidFill>
                   <a:srgbClr val="202124"/>
                 </a:solidFill>
@@ -9152,12 +9083,12 @@
             </a:r>
             <a:pPr indent="0" marL="0">
               <a:lnSpc>
-                <a:spcPct val="108000"/>
-              </a:lnSpc>
-              <a:buNone/>
-            </a:pPr>
-            <a:r>
-              <a:rPr lang="en-US" sz="690" dirty="0">
+                <a:spcPct val="106000"/>
+              </a:lnSpc>
+              <a:buNone/>
+            </a:pPr>
+            <a:r>
+              <a:rPr lang="en-US" sz="680" dirty="0">
                 <a:solidFill>
                   <a:srgbClr val="3C4043"/>
                 </a:solidFill>
@@ -9170,12 +9101,12 @@
             </a:r>
             <a:pPr indent="0" marL="0">
               <a:lnSpc>
-                <a:spcPct val="108000"/>
-              </a:lnSpc>
-              <a:buNone/>
-            </a:pPr>
-            <a:r>
-              <a:rPr lang="en-US" sz="700" b="1" dirty="0">
+                <a:spcPct val="106000"/>
+              </a:lnSpc>
+              <a:buNone/>
+            </a:pPr>
+            <a:r>
+              <a:rPr lang="en-US" sz="690" b="1" dirty="0">
                 <a:solidFill>
                   <a:srgbClr val="202124"/>
                 </a:solidFill>
@@ -9187,12 +9118,12 @@
             </a:r>
             <a:pPr indent="0" marL="0">
               <a:lnSpc>
-                <a:spcPct val="108000"/>
-              </a:lnSpc>
-              <a:buNone/>
-            </a:pPr>
-            <a:r>
-              <a:rPr lang="en-US" sz="690" dirty="0">
+                <a:spcPct val="106000"/>
+              </a:lnSpc>
+              <a:buNone/>
+            </a:pPr>
+            <a:r>
+              <a:rPr lang="en-US" sz="680" dirty="0">
                 <a:solidFill>
                   <a:srgbClr val="3C4043"/>
                 </a:solidFill>
@@ -9205,12 +9136,12 @@
             </a:r>
             <a:pPr indent="0" marL="0">
               <a:lnSpc>
-                <a:spcPct val="108000"/>
-              </a:lnSpc>
-              <a:buNone/>
-            </a:pPr>
-            <a:r>
-              <a:rPr lang="en-US" sz="700" b="1" dirty="0">
+                <a:spcPct val="106000"/>
+              </a:lnSpc>
+              <a:buNone/>
+            </a:pPr>
+            <a:r>
+              <a:rPr lang="en-US" sz="690" b="1" dirty="0">
                 <a:solidFill>
                   <a:srgbClr val="202124"/>
                 </a:solidFill>
@@ -9222,12 +9153,12 @@
             </a:r>
             <a:pPr indent="0" marL="0">
               <a:lnSpc>
-                <a:spcPct val="108000"/>
-              </a:lnSpc>
-              <a:buNone/>
-            </a:pPr>
-            <a:r>
-              <a:rPr lang="en-US" sz="690" dirty="0">
+                <a:spcPct val="106000"/>
+              </a:lnSpc>
+              <a:buNone/>
+            </a:pPr>
+            <a:r>
+              <a:rPr lang="en-US" sz="680" dirty="0">
                 <a:solidFill>
                   <a:srgbClr val="3C4043"/>
                 </a:solidFill>
@@ -9240,12 +9171,12 @@
             </a:r>
             <a:pPr indent="0" marL="0">
               <a:lnSpc>
-                <a:spcPct val="108000"/>
-              </a:lnSpc>
-              <a:buNone/>
-            </a:pPr>
-            <a:r>
-              <a:rPr lang="en-US" sz="740" b="1" dirty="0">
+                <a:spcPct val="106000"/>
+              </a:lnSpc>
+              <a:buNone/>
+            </a:pPr>
+            <a:r>
+              <a:rPr lang="en-US" sz="730" b="1" dirty="0">
                 <a:solidFill>
                   <a:srgbClr val="202124"/>
                 </a:solidFill>
@@ -9257,12 +9188,12 @@
             </a:r>
             <a:pPr indent="0" marL="0">
               <a:lnSpc>
-                <a:spcPct val="108000"/>
-              </a:lnSpc>
-              <a:buNone/>
-            </a:pPr>
-            <a:r>
-              <a:rPr lang="en-US" sz="730" dirty="0">
+                <a:spcPct val="106000"/>
+              </a:lnSpc>
+              <a:buNone/>
+            </a:pPr>
+            <a:r>
+              <a:rPr lang="en-US" sz="720" dirty="0">
                 <a:solidFill>
                   <a:srgbClr val="3C4043"/>
                 </a:solidFill>
@@ -9275,12 +9206,12 @@
             </a:r>
             <a:pPr indent="0" marL="0">
               <a:lnSpc>
-                <a:spcPct val="108000"/>
-              </a:lnSpc>
-              <a:buNone/>
-            </a:pPr>
-            <a:r>
-              <a:rPr lang="en-US" sz="740" b="1" dirty="0">
+                <a:spcPct val="106000"/>
+              </a:lnSpc>
+              <a:buNone/>
+            </a:pPr>
+            <a:r>
+              <a:rPr lang="en-US" sz="730" b="1" dirty="0">
                 <a:solidFill>
                   <a:srgbClr val="202124"/>
                 </a:solidFill>
@@ -9292,12 +9223,12 @@
             </a:r>
             <a:pPr indent="0" marL="0">
               <a:lnSpc>
-                <a:spcPct val="108000"/>
-              </a:lnSpc>
-              <a:buNone/>
-            </a:pPr>
-            <a:r>
-              <a:rPr lang="en-US" sz="730" dirty="0">
+                <a:spcPct val="106000"/>
+              </a:lnSpc>
+              <a:buNone/>
+            </a:pPr>
+            <a:r>
+              <a:rPr lang="en-US" sz="720" dirty="0">
                 <a:solidFill>
                   <a:srgbClr val="3C4043"/>
                 </a:solidFill>
@@ -9310,12 +9241,12 @@
             </a:r>
             <a:pPr indent="0" marL="0">
               <a:lnSpc>
-                <a:spcPct val="108000"/>
-              </a:lnSpc>
-              <a:buNone/>
-            </a:pPr>
-            <a:r>
-              <a:rPr lang="en-US" sz="740" b="1" dirty="0">
+                <a:spcPct val="106000"/>
+              </a:lnSpc>
+              <a:buNone/>
+            </a:pPr>
+            <a:r>
+              <a:rPr lang="en-US" sz="730" b="1" dirty="0">
                 <a:solidFill>
                   <a:srgbClr val="202124"/>
                 </a:solidFill>
@@ -9327,12 +9258,12 @@
             </a:r>
             <a:pPr indent="0" marL="0">
               <a:lnSpc>
-                <a:spcPct val="108000"/>
-              </a:lnSpc>
-              <a:buNone/>
-            </a:pPr>
-            <a:r>
-              <a:rPr lang="en-US" sz="730" dirty="0">
+                <a:spcPct val="106000"/>
+              </a:lnSpc>
+              <a:buNone/>
+            </a:pPr>
+            <a:r>
+              <a:rPr lang="en-US" sz="720" dirty="0">
                 <a:solidFill>
                   <a:srgbClr val="3C4043"/>
                 </a:solidFill>
@@ -9343,7 +9274,7 @@
               <a:t>The verified response returns to the caller through the Routing hub, while structured OpenTelemetry audit and FinOps spans stream to the Central governance and FinOps observability hub.
 </a:t>
             </a:r>
-            <a:endParaRPr lang="en-US" sz="740" dirty="0"/>
+            <a:endParaRPr lang="en-US" sz="730" dirty="0"/>
           </a:p>
         </p:txBody>
       </p:sp>
@@ -9515,8 +9446,8 @@
         </p:nvSpPr>
         <p:spPr>
           <a:xfrm>
-            <a:off x="749808" y="658368"/>
-            <a:ext cx="10680192" cy="310896"/>
+            <a:off x="749808" y="621792"/>
+            <a:ext cx="10680192" cy="274320"/>
           </a:xfrm>
           <a:prstGeom prst="rect">
             <a:avLst/>
@@ -9532,7 +9463,7 @@
               <a:buNone/>
             </a:pPr>
             <a:r>
-              <a:rPr lang="en-US" sz="1550" dirty="0">
+              <a:rPr lang="en-US" sz="1500" dirty="0">
                 <a:solidFill>
                   <a:srgbClr val="202124"/>
                 </a:solidFill>
@@ -9542,7 +9473,7 @@
               </a:rPr>
               <a:t>Products used</a:t>
             </a:r>
-            <a:endParaRPr lang="en-US" sz="1550" dirty="0"/>
+            <a:endParaRPr lang="en-US" sz="1500" dirty="0"/>
           </a:p>
         </p:txBody>
       </p:sp>
@@ -9554,8 +9485,8 @@
         </p:nvSpPr>
         <p:spPr>
           <a:xfrm>
-            <a:off x="749808" y="1005840"/>
-            <a:ext cx="10680192" cy="219456"/>
+            <a:off x="749808" y="914400"/>
+            <a:ext cx="10680192" cy="329184"/>
           </a:xfrm>
           <a:prstGeom prst="rect">
             <a:avLst/>
@@ -9564,14 +9495,14 @@
           <a:ln/>
         </p:spPr>
         <p:txBody>
-          <a:bodyPr wrap="square" rtlCol="0" anchor="ctr"/>
-          <a:lstStyle/>
-          <a:p>
-            <a:pPr indent="0" marL="0">
-              <a:buNone/>
-            </a:pPr>
-            <a:r>
-              <a:rPr lang="en-US" sz="920" dirty="0">
+          <a:bodyPr wrap="square" rtlCol="0" anchor="t"/>
+          <a:lstStyle/>
+          <a:p>
+            <a:pPr indent="0" marL="0">
+              <a:buNone/>
+            </a:pPr>
+            <a:r>
+              <a:rPr lang="en-US" sz="860" dirty="0">
                 <a:solidFill>
                   <a:srgbClr val="3C4043"/>
                 </a:solidFill>
@@ -9581,7 +9512,7 @@
               </a:rPr>
               <a:t>This reference architecture uses the following Google Cloud services and open-source frameworks to implement Building Multi-Tenant Agents: Core Challenges, Cryptographic Identity &amp; Token Propagation.</a:t>
             </a:r>
-            <a:endParaRPr lang="en-US" sz="920" dirty="0"/>
+            <a:endParaRPr lang="en-US" sz="860" dirty="0"/>
           </a:p>
         </p:txBody>
       </p:sp>
@@ -9593,8 +9524,8 @@
         </p:nvSpPr>
         <p:spPr>
           <a:xfrm>
-            <a:off x="877824" y="1280160"/>
-            <a:ext cx="10552176" cy="1993392"/>
+            <a:off x="877824" y="1261872"/>
+            <a:ext cx="10552176" cy="2011680"/>
           </a:xfrm>
           <a:prstGeom prst="rect">
             <a:avLst/>
@@ -9603,17 +9534,19 @@
           <a:ln/>
         </p:spPr>
         <p:txBody>
-          <a:bodyPr wrap="square" rtlCol="0" anchor="t"/>
-          <a:lstStyle/>
-          <a:p>
-            <a:pPr indent="0" marL="0">
-              <a:lnSpc>
-                <a:spcPct val="124000"/>
-              </a:lnSpc>
-              <a:buNone/>
-            </a:pPr>
-            <a:r>
-              <a:rPr lang="en-US" sz="840" b="1" dirty="0">
+          <a:bodyPr wrap="square" rtlCol="0" anchor="t">
+            <a:normAutofit/>
+          </a:bodyPr>
+          <a:lstStyle/>
+          <a:p>
+            <a:pPr indent="0" marL="0">
+              <a:lnSpc>
+                <a:spcPct val="118000"/>
+              </a:lnSpc>
+              <a:buNone/>
+            </a:pPr>
+            <a:r>
+              <a:rPr lang="en-US" sz="810" b="1" dirty="0">
                 <a:solidFill>
                   <a:srgbClr val="1A73E8"/>
                 </a:solidFill>
@@ -9625,12 +9558,12 @@
             </a:r>
             <a:pPr indent="0" marL="0">
               <a:lnSpc>
-                <a:spcPct val="124000"/>
-              </a:lnSpc>
-              <a:buNone/>
-            </a:pPr>
-            <a:r>
-              <a:rPr lang="en-US" sz="820" dirty="0">
+                <a:spcPct val="118000"/>
+              </a:lnSpc>
+              <a:buNone/>
+            </a:pPr>
+            <a:r>
+              <a:rPr lang="en-US" sz="790" dirty="0">
                 <a:solidFill>
                   <a:srgbClr val="3C4043"/>
                 </a:solidFill>
@@ -9643,12 +9576,12 @@
             </a:r>
             <a:pPr indent="0" marL="0">
               <a:lnSpc>
-                <a:spcPct val="124000"/>
-              </a:lnSpc>
-              <a:buNone/>
-            </a:pPr>
-            <a:r>
-              <a:rPr lang="en-US" sz="840" b="1" dirty="0">
+                <a:spcPct val="118000"/>
+              </a:lnSpc>
+              <a:buNone/>
+            </a:pPr>
+            <a:r>
+              <a:rPr lang="en-US" sz="810" b="1" dirty="0">
                 <a:solidFill>
                   <a:srgbClr val="1A73E8"/>
                 </a:solidFill>
@@ -9660,12 +9593,12 @@
             </a:r>
             <a:pPr indent="0" marL="0">
               <a:lnSpc>
-                <a:spcPct val="124000"/>
-              </a:lnSpc>
-              <a:buNone/>
-            </a:pPr>
-            <a:r>
-              <a:rPr lang="en-US" sz="820" dirty="0">
+                <a:spcPct val="118000"/>
+              </a:lnSpc>
+              <a:buNone/>
+            </a:pPr>
+            <a:r>
+              <a:rPr lang="en-US" sz="790" dirty="0">
                 <a:solidFill>
                   <a:srgbClr val="3C4043"/>
                 </a:solidFill>
@@ -9678,12 +9611,12 @@
             </a:r>
             <a:pPr indent="0" marL="0">
               <a:lnSpc>
-                <a:spcPct val="124000"/>
-              </a:lnSpc>
-              <a:buNone/>
-            </a:pPr>
-            <a:r>
-              <a:rPr lang="en-US" sz="840" b="1" dirty="0">
+                <a:spcPct val="118000"/>
+              </a:lnSpc>
+              <a:buNone/>
+            </a:pPr>
+            <a:r>
+              <a:rPr lang="en-US" sz="810" b="1" dirty="0">
                 <a:solidFill>
                   <a:srgbClr val="1A73E8"/>
                 </a:solidFill>
@@ -9695,12 +9628,12 @@
             </a:r>
             <a:pPr indent="0" marL="0">
               <a:lnSpc>
-                <a:spcPct val="124000"/>
-              </a:lnSpc>
-              <a:buNone/>
-            </a:pPr>
-            <a:r>
-              <a:rPr lang="en-US" sz="820" dirty="0">
+                <a:spcPct val="118000"/>
+              </a:lnSpc>
+              <a:buNone/>
+            </a:pPr>
+            <a:r>
+              <a:rPr lang="en-US" sz="790" dirty="0">
                 <a:solidFill>
                   <a:srgbClr val="3C4043"/>
                 </a:solidFill>
@@ -9713,12 +9646,12 @@
             </a:r>
             <a:pPr indent="0" marL="0">
               <a:lnSpc>
-                <a:spcPct val="124000"/>
-              </a:lnSpc>
-              <a:buNone/>
-            </a:pPr>
-            <a:r>
-              <a:rPr lang="en-US" sz="840" b="1" dirty="0">
+                <a:spcPct val="118000"/>
+              </a:lnSpc>
+              <a:buNone/>
+            </a:pPr>
+            <a:r>
+              <a:rPr lang="en-US" sz="810" b="1" dirty="0">
                 <a:solidFill>
                   <a:srgbClr val="1A73E8"/>
                 </a:solidFill>
@@ -9730,12 +9663,12 @@
             </a:r>
             <a:pPr indent="0" marL="0">
               <a:lnSpc>
-                <a:spcPct val="124000"/>
-              </a:lnSpc>
-              <a:buNone/>
-            </a:pPr>
-            <a:r>
-              <a:rPr lang="en-US" sz="820" dirty="0">
+                <a:spcPct val="118000"/>
+              </a:lnSpc>
+              <a:buNone/>
+            </a:pPr>
+            <a:r>
+              <a:rPr lang="en-US" sz="790" dirty="0">
                 <a:solidFill>
                   <a:srgbClr val="3C4043"/>
                 </a:solidFill>
@@ -9748,12 +9681,12 @@
             </a:r>
             <a:pPr indent="0" marL="0">
               <a:lnSpc>
-                <a:spcPct val="124000"/>
-              </a:lnSpc>
-              <a:buNone/>
-            </a:pPr>
-            <a:r>
-              <a:rPr lang="en-US" sz="840" b="1" dirty="0">
+                <a:spcPct val="118000"/>
+              </a:lnSpc>
+              <a:buNone/>
+            </a:pPr>
+            <a:r>
+              <a:rPr lang="en-US" sz="810" b="1" dirty="0">
                 <a:solidFill>
                   <a:srgbClr val="1A73E8"/>
                 </a:solidFill>
@@ -9765,12 +9698,12 @@
             </a:r>
             <a:pPr indent="0" marL="0">
               <a:lnSpc>
-                <a:spcPct val="124000"/>
-              </a:lnSpc>
-              <a:buNone/>
-            </a:pPr>
-            <a:r>
-              <a:rPr lang="en-US" sz="820" dirty="0">
+                <a:spcPct val="118000"/>
+              </a:lnSpc>
+              <a:buNone/>
+            </a:pPr>
+            <a:r>
+              <a:rPr lang="en-US" sz="790" dirty="0">
                 <a:solidFill>
                   <a:srgbClr val="3C4043"/>
                 </a:solidFill>
@@ -9783,12 +9716,12 @@
             </a:r>
             <a:pPr indent="0" marL="0">
               <a:lnSpc>
-                <a:spcPct val="124000"/>
-              </a:lnSpc>
-              <a:buNone/>
-            </a:pPr>
-            <a:r>
-              <a:rPr lang="en-US" sz="840" b="1" dirty="0">
+                <a:spcPct val="118000"/>
+              </a:lnSpc>
+              <a:buNone/>
+            </a:pPr>
+            <a:r>
+              <a:rPr lang="en-US" sz="810" b="1" dirty="0">
                 <a:solidFill>
                   <a:srgbClr val="1A73E8"/>
                 </a:solidFill>
@@ -9800,12 +9733,12 @@
             </a:r>
             <a:pPr indent="0" marL="0">
               <a:lnSpc>
-                <a:spcPct val="124000"/>
-              </a:lnSpc>
-              <a:buNone/>
-            </a:pPr>
-            <a:r>
-              <a:rPr lang="en-US" sz="820" dirty="0">
+                <a:spcPct val="118000"/>
+              </a:lnSpc>
+              <a:buNone/>
+            </a:pPr>
+            <a:r>
+              <a:rPr lang="en-US" sz="790" dirty="0">
                 <a:solidFill>
                   <a:srgbClr val="3C4043"/>
                 </a:solidFill>
@@ -9815,43 +9748,165 @@
               </a:rPr>
               <a:t>Core Google Cloud service used in DOC-MT-01 to enforce production security, scalability, and observability.</a:t>
             </a:r>
+            <a:endParaRPr lang="en-US" sz="810" dirty="0"/>
+          </a:p>
+        </p:txBody>
+      </p:sp>
+      <p:sp>
+        <p:nvSpPr>
+          <p:cNvPr id="9" name="Shape 7"/>
+          <p:cNvSpPr/>
+          <p:nvPr/>
+        </p:nvSpPr>
+        <p:spPr>
+          <a:xfrm>
+            <a:off x="749808" y="3346704"/>
+            <a:ext cx="10680192" cy="0"/>
+          </a:xfrm>
+          <a:prstGeom prst="line">
+            <a:avLst/>
+          </a:prstGeom>
+          <a:noFill/>
+          <a:ln w="9525">
+            <a:solidFill>
+              <a:srgbClr val="DADCE0"/>
+            </a:solidFill>
+            <a:prstDash val="solid"/>
+          </a:ln>
+        </p:spPr>
+      </p:sp>
+      <p:sp>
+        <p:nvSpPr>
+          <p:cNvPr id="10" name="Text 8"/>
+          <p:cNvSpPr/>
+          <p:nvPr/>
+        </p:nvSpPr>
+        <p:spPr>
+          <a:xfrm>
+            <a:off x="749808" y="3419856"/>
+            <a:ext cx="10680192" cy="274320"/>
+          </a:xfrm>
+          <a:prstGeom prst="rect">
+            <a:avLst/>
+          </a:prstGeom>
+          <a:noFill/>
+          <a:ln/>
+        </p:spPr>
+        <p:txBody>
+          <a:bodyPr wrap="square" rtlCol="0" anchor="ctr"/>
+          <a:lstStyle/>
+          <a:p>
+            <a:pPr indent="0" marL="0">
+              <a:buNone/>
+            </a:pPr>
+            <a:r>
+              <a:rPr lang="en-US" sz="1500" dirty="0">
+                <a:solidFill>
+                  <a:srgbClr val="202124"/>
+                </a:solidFill>
+                <a:latin typeface="Arial" pitchFamily="34" charset="0"/>
+                <a:ea typeface="Arial" pitchFamily="34" charset="-122"/>
+                <a:cs typeface="Arial" pitchFamily="34" charset="-120"/>
+              </a:rPr>
+              <a:t>Use case</a:t>
+            </a:r>
+            <a:endParaRPr lang="en-US" sz="1500" dirty="0"/>
+          </a:p>
+        </p:txBody>
+      </p:sp>
+      <p:sp>
+        <p:nvSpPr>
+          <p:cNvPr id="11" name="Text 9"/>
+          <p:cNvSpPr/>
+          <p:nvPr/>
+        </p:nvSpPr>
+        <p:spPr>
+          <a:xfrm>
+            <a:off x="749808" y="3712464"/>
+            <a:ext cx="10680192" cy="237744"/>
+          </a:xfrm>
+          <a:prstGeom prst="rect">
+            <a:avLst/>
+          </a:prstGeom>
+          <a:noFill/>
+          <a:ln/>
+        </p:spPr>
+        <p:txBody>
+          <a:bodyPr wrap="square" rtlCol="0" anchor="ctr"/>
+          <a:lstStyle/>
+          <a:p>
+            <a:pPr indent="0" marL="0">
+              <a:buNone/>
+            </a:pPr>
+            <a:r>
+              <a:rPr lang="en-US" sz="1100" b="1" dirty="0">
+                <a:solidFill>
+                  <a:srgbClr val="202124"/>
+                </a:solidFill>
+                <a:latin typeface="Arial" pitchFamily="34" charset="0"/>
+                <a:ea typeface="Arial" pitchFamily="34" charset="-122"/>
+                <a:cs typeface="Arial" pitchFamily="34" charset="-120"/>
+              </a:rPr>
+              <a:t>Foundational Component 1: The Four Distinct Identities (ID-1 to ID-4)</a:t>
+            </a:r>
+            <a:endParaRPr lang="en-US" sz="1100" dirty="0"/>
+          </a:p>
+        </p:txBody>
+      </p:sp>
+      <p:sp>
+        <p:nvSpPr>
+          <p:cNvPr id="12" name="Text 10"/>
+          <p:cNvSpPr/>
+          <p:nvPr/>
+        </p:nvSpPr>
+        <p:spPr>
+          <a:xfrm>
+            <a:off x="749808" y="3986784"/>
+            <a:ext cx="10680192" cy="749808"/>
+          </a:xfrm>
+          <a:prstGeom prst="rect">
+            <a:avLst/>
+          </a:prstGeom>
+          <a:noFill/>
+          <a:ln/>
+        </p:spPr>
+        <p:txBody>
+          <a:bodyPr wrap="square" rtlCol="0" anchor="t">
+            <a:normAutofit/>
+          </a:bodyPr>
+          <a:lstStyle/>
+          <a:p>
+            <a:pPr indent="0" marL="0">
+              <a:lnSpc>
+                <a:spcPct val="114000"/>
+              </a:lnSpc>
+              <a:buNone/>
+            </a:pPr>
+            <a:r>
+              <a:rPr lang="en-US" sz="840" dirty="0">
+                <a:solidFill>
+                  <a:srgbClr val="3C4043"/>
+                </a:solidFill>
+                <a:latin typeface="Arial" pitchFamily="34" charset="0"/>
+                <a:ea typeface="Arial" pitchFamily="34" charset="-122"/>
+                <a:cs typeface="Arial" pitchFamily="34" charset="-120"/>
+              </a:rPr>
+              <a:t>Second, untrusted input now reaches the control path. In deterministic software, user input is passive data that code acts upon. In an agentic system, user input is partly instruction, which makes the model a legitimate attack surface rather than a passive component.</a:t>
+            </a:r>
             <a:endParaRPr lang="en-US" sz="840" dirty="0"/>
           </a:p>
         </p:txBody>
       </p:sp>
       <p:sp>
         <p:nvSpPr>
-          <p:cNvPr id="9" name="Shape 7"/>
-          <p:cNvSpPr/>
-          <p:nvPr/>
-        </p:nvSpPr>
-        <p:spPr>
-          <a:xfrm>
-            <a:off x="749808" y="3383280"/>
-            <a:ext cx="10680192" cy="0"/>
-          </a:xfrm>
-          <a:prstGeom prst="line">
-            <a:avLst/>
-          </a:prstGeom>
-          <a:noFill/>
-          <a:ln w="9525">
-            <a:solidFill>
-              <a:srgbClr val="DADCE0"/>
-            </a:solidFill>
-            <a:prstDash val="solid"/>
-          </a:ln>
-        </p:spPr>
-      </p:sp>
-      <p:sp>
-        <p:nvSpPr>
-          <p:cNvPr id="10" name="Text 8"/>
-          <p:cNvSpPr/>
-          <p:nvPr/>
-        </p:nvSpPr>
-        <p:spPr>
-          <a:xfrm>
-            <a:off x="749808" y="3511296"/>
-            <a:ext cx="10680192" cy="310896"/>
+          <p:cNvPr id="13" name="Text 11"/>
+          <p:cNvSpPr/>
+          <p:nvPr/>
+        </p:nvSpPr>
+        <p:spPr>
+          <a:xfrm>
+            <a:off x="749808" y="4773168"/>
+            <a:ext cx="10680192" cy="201168"/>
           </a:xfrm>
           <a:prstGeom prst="rect">
             <a:avLst/>
@@ -9867,30 +9922,30 @@
               <a:buNone/>
             </a:pPr>
             <a:r>
-              <a:rPr lang="en-US" sz="1550" dirty="0">
-                <a:solidFill>
-                  <a:srgbClr val="202124"/>
-                </a:solidFill>
-                <a:latin typeface="Arial" pitchFamily="34" charset="0"/>
-                <a:ea typeface="Arial" pitchFamily="34" charset="-122"/>
-                <a:cs typeface="Arial" pitchFamily="34" charset="-120"/>
-              </a:rPr>
-              <a:t>Use case</a:t>
-            </a:r>
-            <a:endParaRPr lang="en-US" sz="1550" dirty="0"/>
-          </a:p>
-        </p:txBody>
-      </p:sp>
-      <p:sp>
-        <p:nvSpPr>
-          <p:cNvPr id="11" name="Text 9"/>
-          <p:cNvSpPr/>
-          <p:nvPr/>
-        </p:nvSpPr>
-        <p:spPr>
-          <a:xfrm>
-            <a:off x="749808" y="3858768"/>
-            <a:ext cx="10680192" cy="256032"/>
+              <a:rPr lang="en-US" sz="860" dirty="0">
+                <a:solidFill>
+                  <a:srgbClr val="3C4043"/>
+                </a:solidFill>
+                <a:latin typeface="Arial" pitchFamily="34" charset="0"/>
+                <a:ea typeface="Arial" pitchFamily="34" charset="-122"/>
+                <a:cs typeface="Arial" pitchFamily="34" charset="-120"/>
+              </a:rPr>
+              <a:t>For this use case, the architecture provides the following benefits:</a:t>
+            </a:r>
+            <a:endParaRPr lang="en-US" sz="860" dirty="0"/>
+          </a:p>
+        </p:txBody>
+      </p:sp>
+      <p:sp>
+        <p:nvSpPr>
+          <p:cNvPr id="14" name="Text 12"/>
+          <p:cNvSpPr/>
+          <p:nvPr/>
+        </p:nvSpPr>
+        <p:spPr>
+          <a:xfrm>
+            <a:off x="877824" y="5010912"/>
+            <a:ext cx="10552176" cy="1481328"/>
           </a:xfrm>
           <a:prstGeom prst="rect">
             <a:avLst/>
@@ -9899,137 +9954,19 @@
           <a:ln/>
         </p:spPr>
         <p:txBody>
-          <a:bodyPr wrap="square" rtlCol="0" anchor="ctr"/>
-          <a:lstStyle/>
-          <a:p>
-            <a:pPr indent="0" marL="0">
-              <a:buNone/>
-            </a:pPr>
-            <a:r>
-              <a:rPr lang="en-US" sz="1150" b="1" dirty="0">
-                <a:solidFill>
-                  <a:srgbClr val="202124"/>
-                </a:solidFill>
-                <a:latin typeface="Arial" pitchFamily="34" charset="0"/>
-                <a:ea typeface="Arial" pitchFamily="34" charset="-122"/>
-                <a:cs typeface="Arial" pitchFamily="34" charset="-120"/>
-              </a:rPr>
-              <a:t>Foundational Component 1: The Four Distinct Identities (ID-1 to ID-4)</a:t>
-            </a:r>
-            <a:endParaRPr lang="en-US" sz="1150" dirty="0"/>
-          </a:p>
-        </p:txBody>
-      </p:sp>
-      <p:sp>
-        <p:nvSpPr>
-          <p:cNvPr id="12" name="Text 10"/>
-          <p:cNvSpPr/>
-          <p:nvPr/>
-        </p:nvSpPr>
-        <p:spPr>
-          <a:xfrm>
-            <a:off x="749808" y="4151376"/>
-            <a:ext cx="10680192" cy="658368"/>
-          </a:xfrm>
-          <a:prstGeom prst="rect">
-            <a:avLst/>
-          </a:prstGeom>
-          <a:noFill/>
-          <a:ln/>
-        </p:spPr>
-        <p:txBody>
-          <a:bodyPr wrap="square" rtlCol="0" anchor="t"/>
-          <a:lstStyle/>
-          <a:p>
-            <a:pPr indent="0" marL="0">
-              <a:lnSpc>
-                <a:spcPct val="118000"/>
-              </a:lnSpc>
-              <a:buNone/>
-            </a:pPr>
-            <a:r>
-              <a:rPr lang="en-US" sz="880" dirty="0">
-                <a:solidFill>
-                  <a:srgbClr val="3C4043"/>
-                </a:solidFill>
-                <a:latin typeface="Arial" pitchFamily="34" charset="0"/>
-                <a:ea typeface="Arial" pitchFamily="34" charset="-122"/>
-                <a:cs typeface="Arial" pitchFamily="34" charset="-120"/>
-              </a:rPr>
-              <a:t>Second, untrusted input now reaches the control path. In deterministic software, user input is passive data that code acts upon. In an agentic system, user input is partly instruction, which makes the model a legitimate attack surface rather than a passive component. Third, cost becomes a runtime property rather than a planning assumption. Traditional SaaS enjoyed stable per-tenant infrastructure costs that could be modeled in a spreadsheet. Fourth—and the factor that shapes the architecture most directly—isolation stops being a single binary decision. Memory, tools, data, model context, and the runtime each carry their own pooled-versus-siloed answer, and each answer carries different compliance obligations, blast radius, and unit cost. Agentic applications carry four distinct identities, and conflating them is the single most common source of multi-tenant authorization bugs in enterprise deployments. To prevent spoofing and eliminate forgeable client-side signals, tenant identity is cryptographically bound to the user identity at ingress within a signed JSON Web Token.</a:t>
-            </a:r>
-            <a:endParaRPr lang="en-US" sz="880" dirty="0"/>
-          </a:p>
-        </p:txBody>
-      </p:sp>
-      <p:sp>
-        <p:nvSpPr>
-          <p:cNvPr id="13" name="Text 11"/>
-          <p:cNvSpPr/>
-          <p:nvPr/>
-        </p:nvSpPr>
-        <p:spPr>
-          <a:xfrm>
-            <a:off x="749808" y="4846320"/>
-            <a:ext cx="10680192" cy="201168"/>
-          </a:xfrm>
-          <a:prstGeom prst="rect">
-            <a:avLst/>
-          </a:prstGeom>
-          <a:noFill/>
-          <a:ln/>
-        </p:spPr>
-        <p:txBody>
-          <a:bodyPr wrap="square" rtlCol="0" anchor="ctr"/>
-          <a:lstStyle/>
-          <a:p>
-            <a:pPr indent="0" marL="0">
-              <a:buNone/>
-            </a:pPr>
-            <a:r>
-              <a:rPr lang="en-US" sz="880" dirty="0">
-                <a:solidFill>
-                  <a:srgbClr val="3C4043"/>
-                </a:solidFill>
-                <a:latin typeface="Arial" pitchFamily="34" charset="0"/>
-                <a:ea typeface="Arial" pitchFamily="34" charset="-122"/>
-                <a:cs typeface="Arial" pitchFamily="34" charset="-120"/>
-              </a:rPr>
-              <a:t>For this use case, the architecture provides the following benefits:</a:t>
-            </a:r>
-            <a:endParaRPr lang="en-US" sz="880" dirty="0"/>
-          </a:p>
-        </p:txBody>
-      </p:sp>
-      <p:sp>
-        <p:nvSpPr>
-          <p:cNvPr id="14" name="Text 12"/>
-          <p:cNvSpPr/>
-          <p:nvPr/>
-        </p:nvSpPr>
-        <p:spPr>
-          <a:xfrm>
-            <a:off x="877824" y="5084064"/>
-            <a:ext cx="10552176" cy="1426464"/>
-          </a:xfrm>
-          <a:prstGeom prst="rect">
-            <a:avLst/>
-          </a:prstGeom>
-          <a:noFill/>
-          <a:ln/>
-        </p:spPr>
-        <p:txBody>
-          <a:bodyPr wrap="square" rtlCol="0" anchor="t"/>
-          <a:lstStyle/>
-          <a:p>
-            <a:pPr indent="0" marL="0">
-              <a:lnSpc>
-                <a:spcPct val="120000"/>
-              </a:lnSpc>
-              <a:buNone/>
-            </a:pPr>
-            <a:r>
-              <a:rPr lang="en-US" sz="820" b="1" dirty="0">
+          <a:bodyPr wrap="square" rtlCol="0" anchor="t">
+            <a:normAutofit/>
+          </a:bodyPr>
+          <a:lstStyle/>
+          <a:p>
+            <a:pPr indent="0" marL="0">
+              <a:lnSpc>
+                <a:spcPct val="116000"/>
+              </a:lnSpc>
+              <a:buNone/>
+            </a:pPr>
+            <a:r>
+              <a:rPr lang="en-US" sz="800" b="1" dirty="0">
                 <a:solidFill>
                   <a:srgbClr val="202124"/>
                 </a:solidFill>
@@ -10041,12 +9978,12 @@
             </a:r>
             <a:pPr indent="0" marL="0">
               <a:lnSpc>
-                <a:spcPct val="120000"/>
-              </a:lnSpc>
-              <a:buNone/>
-            </a:pPr>
-            <a:r>
-              <a:rPr lang="en-US" sz="800" dirty="0">
+                <a:spcPct val="116000"/>
+              </a:lnSpc>
+              <a:buNone/>
+            </a:pPr>
+            <a:r>
+              <a:rPr lang="en-US" sz="780" dirty="0">
                 <a:solidFill>
                   <a:srgbClr val="3C4043"/>
                 </a:solidFill>
@@ -10059,12 +9996,12 @@
             </a:r>
             <a:pPr indent="0" marL="0">
               <a:lnSpc>
-                <a:spcPct val="120000"/>
-              </a:lnSpc>
-              <a:buNone/>
-            </a:pPr>
-            <a:r>
-              <a:rPr lang="en-US" sz="820" b="1" dirty="0">
+                <a:spcPct val="116000"/>
+              </a:lnSpc>
+              <a:buNone/>
+            </a:pPr>
+            <a:r>
+              <a:rPr lang="en-US" sz="800" b="1" dirty="0">
                 <a:solidFill>
                   <a:srgbClr val="202124"/>
                 </a:solidFill>
@@ -10076,12 +10013,12 @@
             </a:r>
             <a:pPr indent="0" marL="0">
               <a:lnSpc>
-                <a:spcPct val="120000"/>
-              </a:lnSpc>
-              <a:buNone/>
-            </a:pPr>
-            <a:r>
-              <a:rPr lang="en-US" sz="800" dirty="0">
+                <a:spcPct val="116000"/>
+              </a:lnSpc>
+              <a:buNone/>
+            </a:pPr>
+            <a:r>
+              <a:rPr lang="en-US" sz="780" dirty="0">
                 <a:solidFill>
                   <a:srgbClr val="3C4043"/>
                 </a:solidFill>
@@ -10094,12 +10031,12 @@
             </a:r>
             <a:pPr indent="0" marL="0">
               <a:lnSpc>
-                <a:spcPct val="120000"/>
-              </a:lnSpc>
-              <a:buNone/>
-            </a:pPr>
-            <a:r>
-              <a:rPr lang="en-US" sz="820" b="1" dirty="0">
+                <a:spcPct val="116000"/>
+              </a:lnSpc>
+              <a:buNone/>
+            </a:pPr>
+            <a:r>
+              <a:rPr lang="en-US" sz="800" b="1" dirty="0">
                 <a:solidFill>
                   <a:srgbClr val="202124"/>
                 </a:solidFill>
@@ -10111,12 +10048,12 @@
             </a:r>
             <a:pPr indent="0" marL="0">
               <a:lnSpc>
-                <a:spcPct val="120000"/>
-              </a:lnSpc>
-              <a:buNone/>
-            </a:pPr>
-            <a:r>
-              <a:rPr lang="en-US" sz="800" dirty="0">
+                <a:spcPct val="116000"/>
+              </a:lnSpc>
+              <a:buNone/>
+            </a:pPr>
+            <a:r>
+              <a:rPr lang="en-US" sz="780" dirty="0">
                 <a:solidFill>
                   <a:srgbClr val="3C4043"/>
                 </a:solidFill>
@@ -10129,12 +10066,12 @@
             </a:r>
             <a:pPr indent="0" marL="0">
               <a:lnSpc>
-                <a:spcPct val="120000"/>
-              </a:lnSpc>
-              <a:buNone/>
-            </a:pPr>
-            <a:r>
-              <a:rPr lang="en-US" sz="820" b="1" dirty="0">
+                <a:spcPct val="116000"/>
+              </a:lnSpc>
+              <a:buNone/>
+            </a:pPr>
+            <a:r>
+              <a:rPr lang="en-US" sz="800" b="1" dirty="0">
                 <a:solidFill>
                   <a:srgbClr val="202124"/>
                 </a:solidFill>
@@ -10146,12 +10083,12 @@
             </a:r>
             <a:pPr indent="0" marL="0">
               <a:lnSpc>
-                <a:spcPct val="120000"/>
-              </a:lnSpc>
-              <a:buNone/>
-            </a:pPr>
-            <a:r>
-              <a:rPr lang="en-US" sz="800" dirty="0">
+                <a:spcPct val="116000"/>
+              </a:lnSpc>
+              <a:buNone/>
+            </a:pPr>
+            <a:r>
+              <a:rPr lang="en-US" sz="780" dirty="0">
                 <a:solidFill>
                   <a:srgbClr val="3C4043"/>
                 </a:solidFill>
@@ -10161,7 +10098,7 @@
               </a:rPr>
               <a:t>The user-delegated credential allowing the agent to perform actions against external systems strictly within the user’s personal permission envelope.</a:t>
             </a:r>
-            <a:endParaRPr lang="en-US" sz="820" dirty="0"/>
+            <a:endParaRPr lang="en-US" sz="800" dirty="0"/>
           </a:p>
         </p:txBody>
       </p:sp>
@@ -10382,7 +10319,9 @@
           <a:ln/>
         </p:spPr>
         <p:txBody>
-          <a:bodyPr wrap="square" rtlCol="0" anchor="t"/>
+          <a:bodyPr wrap="square" rtlCol="0" anchor="t">
+            <a:normAutofit/>
+          </a:bodyPr>
           <a:lstStyle/>
           <a:p>
             <a:pPr indent="0" marL="0">
@@ -10392,7 +10331,7 @@
               <a:buNone/>
             </a:pPr>
             <a:r>
-              <a:rPr lang="en-US" sz="820" b="1" dirty="0">
+              <a:rPr lang="en-US" sz="810" b="1" dirty="0">
                 <a:solidFill>
                   <a:srgbClr val="202124"/>
                 </a:solidFill>
@@ -10452,7 +10391,7 @@
                 <a:ea typeface="Arial" pitchFamily="34" charset="-122"/>
                 <a:cs typeface="Arial" pitchFamily="34" charset="-120"/>
               </a:rPr>
-              <a:t>For internet-facing workloads, retain the global External Application Load Balancer with Cloud Armor &amp; IAP and Model Armor.
+              <a:t>For internet-facing workloads, retain the global External Application Load Balancer with Google Cloud Armor and Model Armor.
 </a:t>
             </a:r>
             <a:pPr indent="0" marL="0">
@@ -10461,14 +10400,8 @@
               </a:lnSpc>
               <a:buNone/>
             </a:pPr>
-            <a:pPr indent="0" marL="0">
-              <a:lnSpc>
-                <a:spcPct val="112000"/>
-              </a:lnSpc>
-              <a:buNone/>
-            </a:pPr>
-            <a:r>
-              <a:rPr lang="en-US" sz="820" b="1" dirty="0">
+            <a:r>
+              <a:rPr lang="en-US" sz="810" b="1" dirty="0">
                 <a:solidFill>
                   <a:srgbClr val="202124"/>
                 </a:solidFill>
@@ -10531,7 +10464,7 @@
               <a:t>Spoke-local MCP servers: Maximizes blast-radius containment by keeping credentials, service accounts, and data access strictly inside Pattern A: Pooled Shared Runtime.; Shared enterprise tool gateway: Consolidates stateless, non-tenant-specific MCP tools into a central hub project via Private Service Connect.
 </a:t>
             </a:r>
-            <a:endParaRPr lang="en-US" sz="820" dirty="0"/>
+            <a:endParaRPr lang="en-US" sz="810" dirty="0"/>
           </a:p>
         </p:txBody>
       </p:sp>
@@ -10935,48 +10868,50 @@
           <a:ln/>
         </p:spPr>
         <p:txBody>
-          <a:bodyPr wrap="square" rtlCol="0" anchor="ctr"/>
-          <a:lstStyle/>
-          <a:p>
-            <a:pPr indent="0" marL="0">
-              <a:buNone/>
-            </a:pPr>
-            <a:r>
-              <a:rPr lang="en-US" sz="720" b="1" dirty="0">
-                <a:solidFill>
-                  <a:srgbClr val="202124"/>
-                </a:solidFill>
-                <a:latin typeface="Arial" pitchFamily="34" charset="0"/>
-                <a:ea typeface="Arial" pitchFamily="34" charset="-122"/>
-                <a:cs typeface="Arial" pitchFamily="34" charset="-120"/>
-              </a:rPr>
-              <a:t>• Shared Control Plane &amp; Multi-Tenant Governance Perimeter &amp; VPC &amp; 5-Hop Cryptographic Context Chain</a:t>
-            </a:r>
-            <a:endParaRPr lang="en-US" sz="720" dirty="0"/>
-          </a:p>
-          <a:p>
-            <a:pPr indent="0" marL="0">
-              <a:buNone/>
-            </a:pPr>
-            <a:r>
-              <a:rPr lang="en-US" sz="720" b="1" dirty="0">
-                <a:solidFill>
-                  <a:srgbClr val="202124"/>
-                </a:solidFill>
-                <a:latin typeface="Arial" pitchFamily="34" charset="0"/>
-                <a:ea typeface="Arial" pitchFamily="34" charset="-122"/>
-                <a:cs typeface="Arial" pitchFamily="34" charset="-120"/>
-              </a:rPr>
-              <a:t>• Cloud Armor &amp; IAP, Model Armor &amp; Model Armor</a:t>
-            </a:r>
-            <a:endParaRPr lang="en-US" sz="720" dirty="0"/>
-          </a:p>
-          <a:p>
-            <a:pPr indent="0" marL="0">
-              <a:buNone/>
-            </a:pPr>
-            <a:r>
-              <a:rPr lang="en-US" sz="720" b="1" dirty="0">
+          <a:bodyPr wrap="square" rtlCol="0" anchor="ctr">
+            <a:normAutofit/>
+          </a:bodyPr>
+          <a:lstStyle/>
+          <a:p>
+            <a:pPr indent="0" marL="0">
+              <a:buNone/>
+            </a:pPr>
+            <a:r>
+              <a:rPr lang="en-US" sz="710" b="1" dirty="0">
+                <a:solidFill>
+                  <a:srgbClr val="202124"/>
+                </a:solidFill>
+                <a:latin typeface="Arial" pitchFamily="34" charset="0"/>
+                <a:ea typeface="Arial" pitchFamily="34" charset="-122"/>
+                <a:cs typeface="Arial" pitchFamily="34" charset="-120"/>
+              </a:rPr>
+              <a:t>• VPC Service Controls &amp; Access Boundaries</a:t>
+            </a:r>
+            <a:endParaRPr lang="en-US" sz="710" dirty="0"/>
+          </a:p>
+          <a:p>
+            <a:pPr indent="0" marL="0">
+              <a:buNone/>
+            </a:pPr>
+            <a:r>
+              <a:rPr lang="en-US" sz="710" b="1" dirty="0">
+                <a:solidFill>
+                  <a:srgbClr val="202124"/>
+                </a:solidFill>
+                <a:latin typeface="Arial" pitchFamily="34" charset="0"/>
+                <a:ea typeface="Arial" pitchFamily="34" charset="-122"/>
+                <a:cs typeface="Arial" pitchFamily="34" charset="-120"/>
+              </a:rPr>
+              <a:t>• Google Cloud Armor &amp; Model Armor</a:t>
+            </a:r>
+            <a:endParaRPr lang="en-US" sz="710" dirty="0"/>
+          </a:p>
+          <a:p>
+            <a:pPr indent="0" marL="0">
+              <a:buNone/>
+            </a:pPr>
+            <a:r>
+              <a:rPr lang="en-US" sz="710" b="1" dirty="0">
                 <a:solidFill>
                   <a:srgbClr val="202124"/>
                 </a:solidFill>
@@ -10986,7 +10921,7 @@
               </a:rPr>
               <a:t>• Shared AlloyDB &amp; Central IAM &amp; PAB</a:t>
             </a:r>
-            <a:endParaRPr lang="en-US" sz="720" dirty="0"/>
+            <a:endParaRPr lang="en-US" sz="710" dirty="0"/>
           </a:p>
         </p:txBody>
       </p:sp>
@@ -11033,28 +10968,30 @@
           <a:ln/>
         </p:spPr>
         <p:txBody>
-          <a:bodyPr wrap="square" rtlCol="0" anchor="ctr"/>
-          <a:lstStyle/>
-          <a:p>
-            <a:pPr indent="0" marL="0">
-              <a:buNone/>
-            </a:pPr>
-            <a:r>
-              <a:rPr lang="en-US" sz="710" b="1" dirty="0">
-                <a:solidFill>
-                  <a:srgbClr val="202124"/>
-                </a:solidFill>
-                <a:latin typeface="Arial" pitchFamily="34" charset="0"/>
-                <a:ea typeface="Arial" pitchFamily="34" charset="-122"/>
-                <a:cs typeface="Arial" pitchFamily="34" charset="-120"/>
-              </a:rPr>
-              <a:t>• Shared Control Plane &amp; Multi-Tenant Governance Perimeter &amp; VPC &amp; 5-Hop Cryptographic Context Chain: </a:t>
-            </a:r>
-            <a:pPr indent="0" marL="0">
-              <a:buNone/>
-            </a:pPr>
-            <a:r>
-              <a:rPr lang="en-US" sz="700" dirty="0">
+          <a:bodyPr wrap="square" rtlCol="0" anchor="ctr">
+            <a:normAutofit/>
+          </a:bodyPr>
+          <a:lstStyle/>
+          <a:p>
+            <a:pPr indent="0" marL="0">
+              <a:buNone/>
+            </a:pPr>
+            <a:r>
+              <a:rPr lang="en-US" sz="700" b="1" dirty="0">
+                <a:solidFill>
+                  <a:srgbClr val="202124"/>
+                </a:solidFill>
+                <a:latin typeface="Arial" pitchFamily="34" charset="0"/>
+                <a:ea typeface="Arial" pitchFamily="34" charset="-122"/>
+                <a:cs typeface="Arial" pitchFamily="34" charset="-120"/>
+              </a:rPr>
+              <a:t>• VPC Service Controls &amp; Access Boundaries: </a:t>
+            </a:r>
+            <a:pPr indent="0" marL="0">
+              <a:buNone/>
+            </a:pPr>
+            <a:r>
+              <a:rPr lang="en-US" sz="690" dirty="0">
                 <a:solidFill>
                   <a:srgbClr val="3C4043"/>
                 </a:solidFill>
@@ -11062,28 +10999,28 @@
                 <a:ea typeface="Arial" pitchFamily="34" charset="-122"/>
                 <a:cs typeface="Arial" pitchFamily="34" charset="-120"/>
               </a:rPr>
-              <a:t>Enforce Shared Control Plane &amp; Multi-Tenant Governance Perimeter perimeters around hub and spoke projects to block unauthorized data exfiltration, and bind VPC &amp; 5-Hop Cryptographic.
+              <a:t>Enforce VPC Service Controls perimeters around hub and spoke projects to block unauthorized data exfiltration, and bind Principal Access Boundary (PAB) policies to spoke principals.
 </a:t>
             </a:r>
             <a:pPr indent="0" marL="0">
               <a:buNone/>
             </a:pPr>
             <a:r>
-              <a:rPr lang="en-US" sz="710" b="1" dirty="0">
-                <a:solidFill>
-                  <a:srgbClr val="202124"/>
-                </a:solidFill>
-                <a:latin typeface="Arial" pitchFamily="34" charset="0"/>
-                <a:ea typeface="Arial" pitchFamily="34" charset="-122"/>
-                <a:cs typeface="Arial" pitchFamily="34" charset="-120"/>
-              </a:rPr>
-              <a:t>• Cloud Armor &amp; IAP, Model Armor &amp; Model Armor: </a:t>
-            </a:r>
-            <a:pPr indent="0" marL="0">
-              <a:buNone/>
-            </a:pPr>
-            <a:r>
-              <a:rPr lang="en-US" sz="700" dirty="0">
+              <a:rPr lang="en-US" sz="700" b="1" dirty="0">
+                <a:solidFill>
+                  <a:srgbClr val="202124"/>
+                </a:solidFill>
+                <a:latin typeface="Arial" pitchFamily="34" charset="0"/>
+                <a:ea typeface="Arial" pitchFamily="34" charset="-122"/>
+                <a:cs typeface="Arial" pitchFamily="34" charset="-120"/>
+              </a:rPr>
+              <a:t>• Google Cloud Armor &amp; Model Armor: </a:t>
+            </a:r>
+            <a:pPr indent="0" marL="0">
+              <a:buNone/>
+            </a:pPr>
+            <a:r>
+              <a:rPr lang="en-US" sz="690" dirty="0">
                 <a:solidFill>
                   <a:srgbClr val="3C4043"/>
                 </a:solidFill>
@@ -11091,14 +11028,14 @@
                 <a:ea typeface="Arial" pitchFamily="34" charset="-122"/>
                 <a:cs typeface="Arial" pitchFamily="34" charset="-120"/>
               </a:rPr>
-              <a:t>Strip client-supplied privilege headers at the edge, verify caller identity claims, and screen both incoming prompts and outgoing completions with Model Armor.
+              <a:t>Strip client-supplied privilege headers at the edge, verify caller identity claims, and screen prompts and completions with Model Armor.
 </a:t>
             </a:r>
             <a:pPr indent="0" marL="0">
               <a:buNone/>
             </a:pPr>
             <a:r>
-              <a:rPr lang="en-US" sz="710" b="1" dirty="0">
+              <a:rPr lang="en-US" sz="700" b="1" dirty="0">
                 <a:solidFill>
                   <a:srgbClr val="202124"/>
                 </a:solidFill>
@@ -11112,7 +11049,7 @@
               <a:buNone/>
             </a:pPr>
             <a:r>
-              <a:rPr lang="en-US" sz="700" dirty="0">
+              <a:rPr lang="en-US" sz="690" dirty="0">
                 <a:solidFill>
                   <a:srgbClr val="3C4043"/>
                 </a:solidFill>
@@ -11122,7 +11059,7 @@
               </a:rPr>
               <a:t>Encrypt state at rest with Customer-Managed Encryption Keys and enforce least-privilege access scopes on Shared AlloyDB.</a:t>
             </a:r>
-            <a:endParaRPr lang="en-US" sz="710" dirty="0"/>
+            <a:endParaRPr lang="en-US" sz="700" dirty="0"/>
           </a:p>
         </p:txBody>
       </p:sp>
@@ -11233,14 +11170,16 @@
           <a:ln/>
         </p:spPr>
         <p:txBody>
-          <a:bodyPr wrap="square" rtlCol="0" anchor="ctr"/>
-          <a:lstStyle/>
-          <a:p>
-            <a:pPr indent="0" marL="0">
-              <a:buNone/>
-            </a:pPr>
-            <a:r>
-              <a:rPr lang="en-US" sz="720" b="1" dirty="0">
+          <a:bodyPr wrap="square" rtlCol="0" anchor="ctr">
+            <a:normAutofit/>
+          </a:bodyPr>
+          <a:lstStyle/>
+          <a:p>
+            <a:pPr indent="0" marL="0">
+              <a:buNone/>
+            </a:pPr>
+            <a:r>
+              <a:rPr lang="en-US" sz="710" b="1" dirty="0">
                 <a:solidFill>
                   <a:srgbClr val="202124"/>
                 </a:solidFill>
@@ -11250,14 +11189,14 @@
               </a:rPr>
               <a:t>• External Application Load Balancer &amp; Cloud Run</a:t>
             </a:r>
-            <a:endParaRPr lang="en-US" sz="720" dirty="0"/>
-          </a:p>
-          <a:p>
-            <a:pPr indent="0" marL="0">
-              <a:buNone/>
-            </a:pPr>
-            <a:r>
-              <a:rPr lang="en-US" sz="720" b="1" dirty="0">
+            <a:endParaRPr lang="en-US" sz="710" dirty="0"/>
+          </a:p>
+          <a:p>
+            <a:pPr indent="0" marL="0">
+              <a:buNone/>
+            </a:pPr>
+            <a:r>
+              <a:rPr lang="en-US" sz="710" b="1" dirty="0">
                 <a:solidFill>
                   <a:srgbClr val="202124"/>
                 </a:solidFill>
@@ -11267,14 +11206,14 @@
               </a:rPr>
               <a:t>• Vertex AI Agent Engine &amp; MCP servers</a:t>
             </a:r>
-            <a:endParaRPr lang="en-US" sz="720" dirty="0"/>
-          </a:p>
-          <a:p>
-            <a:pPr indent="0" marL="0">
-              <a:buNone/>
-            </a:pPr>
-            <a:r>
-              <a:rPr lang="en-US" sz="720" b="1" dirty="0">
+            <a:endParaRPr lang="en-US" sz="710" dirty="0"/>
+          </a:p>
+          <a:p>
+            <a:pPr indent="0" marL="0">
+              <a:buNone/>
+            </a:pPr>
+            <a:r>
+              <a:rPr lang="en-US" sz="710" b="1" dirty="0">
                 <a:solidFill>
                   <a:srgbClr val="202124"/>
                 </a:solidFill>
@@ -11284,7 +11223,7 @@
               </a:rPr>
               <a:t>• Shared AlloyDB</a:t>
             </a:r>
-            <a:endParaRPr lang="en-US" sz="720" dirty="0"/>
+            <a:endParaRPr lang="en-US" sz="710" dirty="0"/>
           </a:p>
         </p:txBody>
       </p:sp>
@@ -11331,14 +11270,16 @@
           <a:ln/>
         </p:spPr>
         <p:txBody>
-          <a:bodyPr wrap="square" rtlCol="0" anchor="ctr"/>
-          <a:lstStyle/>
-          <a:p>
-            <a:pPr indent="0" marL="0">
-              <a:buNone/>
-            </a:pPr>
-            <a:r>
-              <a:rPr lang="en-US" sz="710" b="1" dirty="0">
+          <a:bodyPr wrap="square" rtlCol="0" anchor="ctr">
+            <a:normAutofit/>
+          </a:bodyPr>
+          <a:lstStyle/>
+          <a:p>
+            <a:pPr indent="0" marL="0">
+              <a:buNone/>
+            </a:pPr>
+            <a:r>
+              <a:rPr lang="en-US" sz="700" b="1" dirty="0">
                 <a:solidFill>
                   <a:srgbClr val="202124"/>
                 </a:solidFill>
@@ -11352,7 +11293,7 @@
               <a:buNone/>
             </a:pPr>
             <a:r>
-              <a:rPr lang="en-US" sz="700" dirty="0">
+              <a:rPr lang="en-US" sz="690" dirty="0">
                 <a:solidFill>
                   <a:srgbClr val="3C4043"/>
                 </a:solidFill>
@@ -11367,7 +11308,7 @@
               <a:buNone/>
             </a:pPr>
             <a:r>
-              <a:rPr lang="en-US" sz="710" b="1" dirty="0">
+              <a:rPr lang="en-US" sz="700" b="1" dirty="0">
                 <a:solidFill>
                   <a:srgbClr val="202124"/>
                 </a:solidFill>
@@ -11381,7 +11322,7 @@
               <a:buNone/>
             </a:pPr>
             <a:r>
-              <a:rPr lang="en-US" sz="700" dirty="0">
+              <a:rPr lang="en-US" sz="690" dirty="0">
                 <a:solidFill>
                   <a:srgbClr val="3C4043"/>
                 </a:solidFill>
@@ -11396,7 +11337,7 @@
               <a:buNone/>
             </a:pPr>
             <a:r>
-              <a:rPr lang="en-US" sz="710" b="1" dirty="0">
+              <a:rPr lang="en-US" sz="700" b="1" dirty="0">
                 <a:solidFill>
                   <a:srgbClr val="202124"/>
                 </a:solidFill>
@@ -11410,7 +11351,7 @@
               <a:buNone/>
             </a:pPr>
             <a:r>
-              <a:rPr lang="en-US" sz="700" dirty="0">
+              <a:rPr lang="en-US" sz="690" dirty="0">
                 <a:solidFill>
                   <a:srgbClr val="3C4043"/>
                 </a:solidFill>
@@ -11420,7 +11361,7 @@
               </a:rPr>
               <a:t>Enable regional high availability and Point-in-Time Recovery on Shared AlloyDB with automated backup verification.</a:t>
             </a:r>
-            <a:endParaRPr lang="en-US" sz="710" dirty="0"/>
+            <a:endParaRPr lang="en-US" sz="700" dirty="0"/>
           </a:p>
         </p:txBody>
       </p:sp>
@@ -11531,14 +11472,16 @@
           <a:ln/>
         </p:spPr>
         <p:txBody>
-          <a:bodyPr wrap="square" rtlCol="0" anchor="ctr"/>
-          <a:lstStyle/>
-          <a:p>
-            <a:pPr indent="0" marL="0">
-              <a:buNone/>
-            </a:pPr>
-            <a:r>
-              <a:rPr lang="en-US" sz="720" b="1" dirty="0">
+          <a:bodyPr wrap="square" rtlCol="0" anchor="ctr">
+            <a:normAutofit/>
+          </a:bodyPr>
+          <a:lstStyle/>
+          <a:p>
+            <a:pPr indent="0" marL="0">
+              <a:buNone/>
+            </a:pPr>
+            <a:r>
+              <a:rPr lang="en-US" sz="710" b="1" dirty="0">
                 <a:solidFill>
                   <a:srgbClr val="202124"/>
                 </a:solidFill>
@@ -11548,14 +11491,14 @@
               </a:rPr>
               <a:t>• Infrastructure as Code</a:t>
             </a:r>
-            <a:endParaRPr lang="en-US" sz="720" dirty="0"/>
-          </a:p>
-          <a:p>
-            <a:pPr indent="0" marL="0">
-              <a:buNone/>
-            </a:pPr>
-            <a:r>
-              <a:rPr lang="en-US" sz="720" b="1" dirty="0">
+            <a:endParaRPr lang="en-US" sz="710" dirty="0"/>
+          </a:p>
+          <a:p>
+            <a:pPr indent="0" marL="0">
+              <a:buNone/>
+            </a:pPr>
+            <a:r>
+              <a:rPr lang="en-US" sz="710" b="1" dirty="0">
                 <a:solidFill>
                   <a:srgbClr val="202124"/>
                 </a:solidFill>
@@ -11565,14 +11508,14 @@
               </a:rPr>
               <a:t>• Security Command Center &amp; Cloud Logging &amp; BQ</a:t>
             </a:r>
-            <a:endParaRPr lang="en-US" sz="720" dirty="0"/>
-          </a:p>
-          <a:p>
-            <a:pPr indent="0" marL="0">
-              <a:buNone/>
-            </a:pPr>
-            <a:r>
-              <a:rPr lang="en-US" sz="720" b="1" dirty="0">
+            <a:endParaRPr lang="en-US" sz="710" dirty="0"/>
+          </a:p>
+          <a:p>
+            <a:pPr indent="0" marL="0">
+              <a:buNone/>
+            </a:pPr>
+            <a:r>
+              <a:rPr lang="en-US" sz="710" b="1" dirty="0">
                 <a:solidFill>
                   <a:srgbClr val="202124"/>
                 </a:solidFill>
@@ -11582,7 +11525,7 @@
               </a:rPr>
               <a:t>• Automated CI/CD &amp; Red-Team Gates</a:t>
             </a:r>
-            <a:endParaRPr lang="en-US" sz="720" dirty="0"/>
+            <a:endParaRPr lang="en-US" sz="710" dirty="0"/>
           </a:p>
         </p:txBody>
       </p:sp>
@@ -11629,14 +11572,16 @@
           <a:ln/>
         </p:spPr>
         <p:txBody>
-          <a:bodyPr wrap="square" rtlCol="0" anchor="ctr"/>
-          <a:lstStyle/>
-          <a:p>
-            <a:pPr indent="0" marL="0">
-              <a:buNone/>
-            </a:pPr>
-            <a:r>
-              <a:rPr lang="en-US" sz="710" b="1" dirty="0">
+          <a:bodyPr wrap="square" rtlCol="0" anchor="ctr">
+            <a:normAutofit/>
+          </a:bodyPr>
+          <a:lstStyle/>
+          <a:p>
+            <a:pPr indent="0" marL="0">
+              <a:buNone/>
+            </a:pPr>
+            <a:r>
+              <a:rPr lang="en-US" sz="700" b="1" dirty="0">
                 <a:solidFill>
                   <a:srgbClr val="202124"/>
                 </a:solidFill>
@@ -11650,7 +11595,7 @@
               <a:buNone/>
             </a:pPr>
             <a:r>
-              <a:rPr lang="en-US" sz="700" dirty="0">
+              <a:rPr lang="en-US" sz="690" dirty="0">
                 <a:solidFill>
                   <a:srgbClr val="3C4043"/>
                 </a:solidFill>
@@ -11665,7 +11610,7 @@
               <a:buNone/>
             </a:pPr>
             <a:r>
-              <a:rPr lang="en-US" sz="710" b="1" dirty="0">
+              <a:rPr lang="en-US" sz="700" b="1" dirty="0">
                 <a:solidFill>
                   <a:srgbClr val="202124"/>
                 </a:solidFill>
@@ -11679,7 +11624,7 @@
               <a:buNone/>
             </a:pPr>
             <a:r>
-              <a:rPr lang="en-US" sz="700" dirty="0">
+              <a:rPr lang="en-US" sz="690" dirty="0">
                 <a:solidFill>
                   <a:srgbClr val="3C4043"/>
                 </a:solidFill>
@@ -11694,7 +11639,7 @@
               <a:buNone/>
             </a:pPr>
             <a:r>
-              <a:rPr lang="en-US" sz="710" b="1" dirty="0">
+              <a:rPr lang="en-US" sz="700" b="1" dirty="0">
                 <a:solidFill>
                   <a:srgbClr val="202124"/>
                 </a:solidFill>
@@ -11708,7 +11653,7 @@
               <a:buNone/>
             </a:pPr>
             <a:r>
-              <a:rPr lang="en-US" sz="700" dirty="0">
+              <a:rPr lang="en-US" sz="690" dirty="0">
                 <a:solidFill>
                   <a:srgbClr val="3C4043"/>
                 </a:solidFill>
@@ -11718,7 +11663,7 @@
               </a:rPr>
               <a:t>Gate every prompt, model, or tool change on automated Vertex AI Gen AI Evaluation Service benchmarks and security regression checks before production rollout.</a:t>
             </a:r>
-            <a:endParaRPr lang="en-US" sz="710" dirty="0"/>
+            <a:endParaRPr lang="en-US" sz="700" dirty="0"/>
           </a:p>
         </p:txBody>
       </p:sp>
@@ -11829,14 +11774,16 @@
           <a:ln/>
         </p:spPr>
         <p:txBody>
-          <a:bodyPr wrap="square" rtlCol="0" anchor="ctr"/>
-          <a:lstStyle/>
-          <a:p>
-            <a:pPr indent="0" marL="0">
-              <a:buNone/>
-            </a:pPr>
-            <a:r>
-              <a:rPr lang="en-US" sz="720" b="1" dirty="0">
+          <a:bodyPr wrap="square" rtlCol="0" anchor="ctr">
+            <a:normAutofit/>
+          </a:bodyPr>
+          <a:lstStyle/>
+          <a:p>
+            <a:pPr indent="0" marL="0">
+              <a:buNone/>
+            </a:pPr>
+            <a:r>
+              <a:rPr lang="en-US" sz="710" b="1" dirty="0">
                 <a:solidFill>
                   <a:srgbClr val="202124"/>
                 </a:solidFill>
@@ -11846,14 +11793,14 @@
               </a:rPr>
               <a:t>• Gemini 2.5 Pro Context Caching</a:t>
             </a:r>
-            <a:endParaRPr lang="en-US" sz="720" dirty="0"/>
-          </a:p>
-          <a:p>
-            <a:pPr indent="0" marL="0">
-              <a:buNone/>
-            </a:pPr>
-            <a:r>
-              <a:rPr lang="en-US" sz="720" b="1" dirty="0">
+            <a:endParaRPr lang="en-US" sz="710" dirty="0"/>
+          </a:p>
+          <a:p>
+            <a:pPr indent="0" marL="0">
+              <a:buNone/>
+            </a:pPr>
+            <a:r>
+              <a:rPr lang="en-US" sz="710" b="1" dirty="0">
                 <a:solidFill>
                   <a:srgbClr val="202124"/>
                 </a:solidFill>
@@ -11863,14 +11810,14 @@
               </a:rPr>
               <a:t>• RFC 8693 OBO + DPoP &amp; MCP servers</a:t>
             </a:r>
-            <a:endParaRPr lang="en-US" sz="720" dirty="0"/>
-          </a:p>
-          <a:p>
-            <a:pPr indent="0" marL="0">
-              <a:buNone/>
-            </a:pPr>
-            <a:r>
-              <a:rPr lang="en-US" sz="720" b="1" dirty="0">
+            <a:endParaRPr lang="en-US" sz="710" dirty="0"/>
+          </a:p>
+          <a:p>
+            <a:pPr indent="0" marL="0">
+              <a:buNone/>
+            </a:pPr>
+            <a:r>
+              <a:rPr lang="en-US" sz="710" b="1" dirty="0">
                 <a:solidFill>
                   <a:srgbClr val="202124"/>
                 </a:solidFill>
@@ -11880,7 +11827,7 @@
               </a:rPr>
               <a:t>• Cloud Logging &amp; BQ FinOps Attribution</a:t>
             </a:r>
-            <a:endParaRPr lang="en-US" sz="720" dirty="0"/>
+            <a:endParaRPr lang="en-US" sz="710" dirty="0"/>
           </a:p>
         </p:txBody>
       </p:sp>
@@ -11927,14 +11874,16 @@
           <a:ln/>
         </p:spPr>
         <p:txBody>
-          <a:bodyPr wrap="square" rtlCol="0" anchor="ctr"/>
-          <a:lstStyle/>
-          <a:p>
-            <a:pPr indent="0" marL="0">
-              <a:buNone/>
-            </a:pPr>
-            <a:r>
-              <a:rPr lang="en-US" sz="710" b="1" dirty="0">
+          <a:bodyPr wrap="square" rtlCol="0" anchor="ctr">
+            <a:normAutofit/>
+          </a:bodyPr>
+          <a:lstStyle/>
+          <a:p>
+            <a:pPr indent="0" marL="0">
+              <a:buNone/>
+            </a:pPr>
+            <a:r>
+              <a:rPr lang="en-US" sz="700" b="1" dirty="0">
                 <a:solidFill>
                   <a:srgbClr val="202124"/>
                 </a:solidFill>
@@ -11948,7 +11897,7 @@
               <a:buNone/>
             </a:pPr>
             <a:r>
-              <a:rPr lang="en-US" sz="700" dirty="0">
+              <a:rPr lang="en-US" sz="690" dirty="0">
                 <a:solidFill>
                   <a:srgbClr val="3C4043"/>
                 </a:solidFill>
@@ -11963,7 +11912,7 @@
               <a:buNone/>
             </a:pPr>
             <a:r>
-              <a:rPr lang="en-US" sz="710" b="1" dirty="0">
+              <a:rPr lang="en-US" sz="700" b="1" dirty="0">
                 <a:solidFill>
                   <a:srgbClr val="202124"/>
                 </a:solidFill>
@@ -11977,7 +11926,7 @@
               <a:buNone/>
             </a:pPr>
             <a:r>
-              <a:rPr lang="en-US" sz="700" dirty="0">
+              <a:rPr lang="en-US" sz="690" dirty="0">
                 <a:solidFill>
                   <a:srgbClr val="3C4043"/>
                 </a:solidFill>
@@ -11992,7 +11941,7 @@
               <a:buNone/>
             </a:pPr>
             <a:r>
-              <a:rPr lang="en-US" sz="710" b="1" dirty="0">
+              <a:rPr lang="en-US" sz="700" b="1" dirty="0">
                 <a:solidFill>
                   <a:srgbClr val="202124"/>
                 </a:solidFill>
@@ -12006,7 +11955,7 @@
               <a:buNone/>
             </a:pPr>
             <a:r>
-              <a:rPr lang="en-US" sz="700" dirty="0">
+              <a:rPr lang="en-US" sz="690" dirty="0">
                 <a:solidFill>
                   <a:srgbClr val="3C4043"/>
                 </a:solidFill>
@@ -12016,7 +11965,7 @@
               </a:rPr>
               <a:t>Export OpenTelemetry token usage spans and Cloud Billing records to BigQuery to enforce per-spoke quota budgets and automated spend alerts.</a:t>
             </a:r>
-            <a:endParaRPr lang="en-US" sz="710" dirty="0"/>
+            <a:endParaRPr lang="en-US" sz="700" dirty="0"/>
           </a:p>
         </p:txBody>
       </p:sp>
@@ -12394,8 +12343,8 @@
         </p:nvSpPr>
         <p:spPr>
           <a:xfrm>
-            <a:off x="877824" y="1554480"/>
-            <a:ext cx="10424160" cy="1920240"/>
+            <a:off x="877824" y="1536192"/>
+            <a:ext cx="10424160" cy="1956816"/>
           </a:xfrm>
           <a:prstGeom prst="rect">
             <a:avLst/>
@@ -12404,17 +12353,19 @@
           <a:ln/>
         </p:spPr>
         <p:txBody>
-          <a:bodyPr wrap="square" rtlCol="0" anchor="t"/>
-          <a:lstStyle/>
-          <a:p>
-            <a:pPr indent="0" marL="0">
-              <a:lnSpc>
-                <a:spcPct val="112000"/>
-              </a:lnSpc>
-              <a:buNone/>
-            </a:pPr>
-            <a:r>
-              <a:rPr lang="en-US" sz="740" dirty="0">
+          <a:bodyPr wrap="square" rtlCol="0" anchor="t">
+            <a:normAutofit/>
+          </a:bodyPr>
+          <a:lstStyle/>
+          <a:p>
+            <a:pPr indent="0" marL="0">
+              <a:lnSpc>
+                <a:spcPct val="106000"/>
+              </a:lnSpc>
+              <a:buNone/>
+            </a:pPr>
+            <a:r>
+              <a:rPr lang="en-US" sz="690" dirty="0">
                 <a:solidFill>
                   <a:srgbClr val="202124"/>
                 </a:solidFill>
@@ -12424,17 +12375,17 @@
               </a:rPr>
               <a:t>def bind_verified_tenant_intent_token(raw_headers: dict, verified_oidc_jwt: dict) -&gt; dict:</a:t>
             </a:r>
-            <a:endParaRPr lang="en-US" sz="740" dirty="0"/>
-          </a:p>
-          <a:p>
-            <a:pPr indent="0" marL="0">
-              <a:lnSpc>
-                <a:spcPct val="112000"/>
-              </a:lnSpc>
-              <a:buNone/>
-            </a:pPr>
-            <a:r>
-              <a:rPr lang="en-US" sz="740" dirty="0">
+            <a:endParaRPr lang="en-US" sz="690" dirty="0"/>
+          </a:p>
+          <a:p>
+            <a:pPr indent="0" marL="0">
+              <a:lnSpc>
+                <a:spcPct val="106000"/>
+              </a:lnSpc>
+              <a:buNone/>
+            </a:pPr>
+            <a:r>
+              <a:rPr lang="en-US" sz="690" dirty="0">
                 <a:solidFill>
                   <a:srgbClr val="202124"/>
                 </a:solidFill>
@@ -12444,17 +12395,17 @@
               </a:rPr>
               <a:t>    # 1. Strip any client-supplied X-Tenant-ID header to prevent header spoofing</a:t>
             </a:r>
-            <a:endParaRPr lang="en-US" sz="740" dirty="0"/>
-          </a:p>
-          <a:p>
-            <a:pPr indent="0" marL="0">
-              <a:lnSpc>
-                <a:spcPct val="112000"/>
-              </a:lnSpc>
-              <a:buNone/>
-            </a:pPr>
-            <a:r>
-              <a:rPr lang="en-US" sz="740" dirty="0">
+            <a:endParaRPr lang="en-US" sz="690" dirty="0"/>
+          </a:p>
+          <a:p>
+            <a:pPr indent="0" marL="0">
+              <a:lnSpc>
+                <a:spcPct val="106000"/>
+              </a:lnSpc>
+              <a:buNone/>
+            </a:pPr>
+            <a:r>
+              <a:rPr lang="en-US" sz="690" dirty="0">
                 <a:solidFill>
                   <a:srgbClr val="202124"/>
                 </a:solidFill>
@@ -12464,17 +12415,17 @@
               </a:rPr>
               <a:t>    raw_headers.pop("X-Tenant-ID", None)</a:t>
             </a:r>
-            <a:endParaRPr lang="en-US" sz="740" dirty="0"/>
-          </a:p>
-          <a:p>
-            <a:pPr indent="0" marL="0">
-              <a:lnSpc>
-                <a:spcPct val="112000"/>
-              </a:lnSpc>
-              <a:buNone/>
-            </a:pPr>
-            <a:r>
-              <a:rPr lang="en-US" sz="740" dirty="0">
+            <a:endParaRPr lang="en-US" sz="690" dirty="0"/>
+          </a:p>
+          <a:p>
+            <a:pPr indent="0" marL="0">
+              <a:lnSpc>
+                <a:spcPct val="106000"/>
+              </a:lnSpc>
+              <a:buNone/>
+            </a:pPr>
+            <a:r>
+              <a:rPr lang="en-US" sz="690" dirty="0">
                 <a:solidFill>
                   <a:srgbClr val="202124"/>
                 </a:solidFill>
@@ -12484,17 +12435,17 @@
               </a:rPr>
               <a:t>    raw_headers.pop("x-tenant-id", None)</a:t>
             </a:r>
-            <a:endParaRPr lang="en-US" sz="740" dirty="0"/>
-          </a:p>
-          <a:p>
-            <a:pPr indent="0" marL="0">
-              <a:lnSpc>
-                <a:spcPct val="112000"/>
-              </a:lnSpc>
-              <a:buNone/>
-            </a:pPr>
-            <a:r>
-              <a:rPr lang="en-US" sz="740" dirty="0">
+            <a:endParaRPr lang="en-US" sz="690" dirty="0"/>
+          </a:p>
+          <a:p>
+            <a:pPr indent="0" marL="0">
+              <a:lnSpc>
+                <a:spcPct val="106000"/>
+              </a:lnSpc>
+              <a:buNone/>
+            </a:pPr>
+            <a:r>
+              <a:rPr lang="en-US" sz="690" dirty="0">
                 <a:solidFill>
                   <a:srgbClr val="202124"/>
                 </a:solidFill>
@@ -12504,17 +12455,17 @@
               </a:rPr>
               <a:t>    # 2. Extract cryptographically verified User (ID-1) and Tenant (ID-4) claims from IdP JWT</a:t>
             </a:r>
-            <a:endParaRPr lang="en-US" sz="740" dirty="0"/>
-          </a:p>
-          <a:p>
-            <a:pPr indent="0" marL="0">
-              <a:lnSpc>
-                <a:spcPct val="112000"/>
-              </a:lnSpc>
-              <a:buNone/>
-            </a:pPr>
-            <a:r>
-              <a:rPr lang="en-US" sz="740" dirty="0">
+            <a:endParaRPr lang="en-US" sz="690" dirty="0"/>
+          </a:p>
+          <a:p>
+            <a:pPr indent="0" marL="0">
+              <a:lnSpc>
+                <a:spcPct val="106000"/>
+              </a:lnSpc>
+              <a:buNone/>
+            </a:pPr>
+            <a:r>
+              <a:rPr lang="en-US" sz="690" dirty="0">
                 <a:solidFill>
                   <a:srgbClr val="202124"/>
                 </a:solidFill>
@@ -12524,17 +12475,17 @@
               </a:rPr>
               <a:t>    user_sub = verified_oidc_jwt["sub"]                 # e.g. "alice@tenant-a.com"</a:t>
             </a:r>
-            <a:endParaRPr lang="en-US" sz="740" dirty="0"/>
-          </a:p>
-          <a:p>
-            <a:pPr indent="0" marL="0">
-              <a:lnSpc>
-                <a:spcPct val="112000"/>
-              </a:lnSpc>
-              <a:buNone/>
-            </a:pPr>
-            <a:r>
-              <a:rPr lang="en-US" sz="740" dirty="0">
+            <a:endParaRPr lang="en-US" sz="690" dirty="0"/>
+          </a:p>
+          <a:p>
+            <a:pPr indent="0" marL="0">
+              <a:lnSpc>
+                <a:spcPct val="106000"/>
+              </a:lnSpc>
+              <a:buNone/>
+            </a:pPr>
+            <a:r>
+              <a:rPr lang="en-US" sz="690" dirty="0">
                 <a:solidFill>
                   <a:srgbClr val="202124"/>
                 </a:solidFill>
@@ -12544,17 +12495,17 @@
               </a:rPr>
               <a:t>    tenant_id = verified_oidc_jwt["tenant_id"]          # e.g. "tenant_a"</a:t>
             </a:r>
-            <a:endParaRPr lang="en-US" sz="740" dirty="0"/>
-          </a:p>
-          <a:p>
-            <a:pPr indent="0" marL="0">
-              <a:lnSpc>
-                <a:spcPct val="112000"/>
-              </a:lnSpc>
-              <a:buNone/>
-            </a:pPr>
-            <a:r>
-              <a:rPr lang="en-US" sz="740" dirty="0">
+            <a:endParaRPr lang="en-US" sz="690" dirty="0"/>
+          </a:p>
+          <a:p>
+            <a:pPr indent="0" marL="0">
+              <a:lnSpc>
+                <a:spcPct val="106000"/>
+              </a:lnSpc>
+              <a:buNone/>
+            </a:pPr>
+            <a:r>
+              <a:rPr lang="en-US" sz="690" dirty="0">
                 <a:solidFill>
                   <a:srgbClr val="202124"/>
                 </a:solidFill>
@@ -12564,17 +12515,17 @@
               </a:rPr>
               <a:t>    org_id = verified_oidc_jwt["organization_id"]       # e.g. "12345678"</a:t>
             </a:r>
-            <a:endParaRPr lang="en-US" sz="740" dirty="0"/>
-          </a:p>
-          <a:p>
-            <a:pPr indent="0" marL="0">
-              <a:lnSpc>
-                <a:spcPct val="112000"/>
-              </a:lnSpc>
-              <a:buNone/>
-            </a:pPr>
-            <a:r>
-              <a:rPr lang="en-US" sz="740" dirty="0">
+            <a:endParaRPr lang="en-US" sz="690" dirty="0"/>
+          </a:p>
+          <a:p>
+            <a:pPr indent="0" marL="0">
+              <a:lnSpc>
+                <a:spcPct val="106000"/>
+              </a:lnSpc>
+              <a:buNone/>
+            </a:pPr>
+            <a:r>
+              <a:rPr lang="en-US" sz="690" dirty="0">
                 <a:solidFill>
                   <a:srgbClr val="202124"/>
                 </a:solidFill>
@@ -12584,17 +12535,17 @@
               </a:rPr>
               <a:t>    # 3. Mint short-lived, DPoP-bound Intent Token with immutable tenant scope</a:t>
             </a:r>
-            <a:endParaRPr lang="en-US" sz="740" dirty="0"/>
-          </a:p>
-          <a:p>
-            <a:pPr indent="0" marL="0">
-              <a:lnSpc>
-                <a:spcPct val="112000"/>
-              </a:lnSpc>
-              <a:buNone/>
-            </a:pPr>
-            <a:r>
-              <a:rPr lang="en-US" sz="740" dirty="0">
+            <a:endParaRPr lang="en-US" sz="690" dirty="0"/>
+          </a:p>
+          <a:p>
+            <a:pPr indent="0" marL="0">
+              <a:lnSpc>
+                <a:spcPct val="106000"/>
+              </a:lnSpc>
+              <a:buNone/>
+            </a:pPr>
+            <a:r>
+              <a:rPr lang="en-US" sz="690" dirty="0">
                 <a:solidFill>
                   <a:srgbClr val="202124"/>
                 </a:solidFill>
@@ -12604,17 +12555,17 @@
               </a:rPr>
               <a:t>    return {</a:t>
             </a:r>
-            <a:endParaRPr lang="en-US" sz="740" dirty="0"/>
-          </a:p>
-          <a:p>
-            <a:pPr indent="0" marL="0">
-              <a:lnSpc>
-                <a:spcPct val="112000"/>
-              </a:lnSpc>
-              <a:buNone/>
-            </a:pPr>
-            <a:r>
-              <a:rPr lang="en-US" sz="740" dirty="0">
+            <a:endParaRPr lang="en-US" sz="690" dirty="0"/>
+          </a:p>
+          <a:p>
+            <a:pPr indent="0" marL="0">
+              <a:lnSpc>
+                <a:spcPct val="106000"/>
+              </a:lnSpc>
+              <a:buNone/>
+            </a:pPr>
+            <a:r>
+              <a:rPr lang="en-US" sz="690" dirty="0">
                 <a:solidFill>
                   <a:srgbClr val="202124"/>
                 </a:solidFill>
@@ -12624,17 +12575,17 @@
               </a:rPr>
               <a:t>        "iss": "https://gateway.agentengine.goog",</a:t>
             </a:r>
-            <a:endParaRPr lang="en-US" sz="740" dirty="0"/>
-          </a:p>
-          <a:p>
-            <a:pPr indent="0" marL="0">
-              <a:lnSpc>
-                <a:spcPct val="112000"/>
-              </a:lnSpc>
-              <a:buNone/>
-            </a:pPr>
-            <a:r>
-              <a:rPr lang="en-US" sz="740" dirty="0">
+            <a:endParaRPr lang="en-US" sz="690" dirty="0"/>
+          </a:p>
+          <a:p>
+            <a:pPr indent="0" marL="0">
+              <a:lnSpc>
+                <a:spcPct val="106000"/>
+              </a:lnSpc>
+              <a:buNone/>
+            </a:pPr>
+            <a:r>
+              <a:rPr lang="en-US" sz="690" dirty="0">
                 <a:solidFill>
                   <a:srgbClr val="202124"/>
                 </a:solidFill>
@@ -12644,17 +12595,17 @@
               </a:rPr>
               <a:t>        "sub": user_sub,</a:t>
             </a:r>
-            <a:endParaRPr lang="en-US" sz="740" dirty="0"/>
-          </a:p>
-          <a:p>
-            <a:pPr indent="0" marL="0">
-              <a:lnSpc>
-                <a:spcPct val="112000"/>
-              </a:lnSpc>
-              <a:buNone/>
-            </a:pPr>
-            <a:r>
-              <a:rPr lang="en-US" sz="740" dirty="0">
+            <a:endParaRPr lang="en-US" sz="690" dirty="0"/>
+          </a:p>
+          <a:p>
+            <a:pPr indent="0" marL="0">
+              <a:lnSpc>
+                <a:spcPct val="106000"/>
+              </a:lnSpc>
+              <a:buNone/>
+            </a:pPr>
+            <a:r>
+              <a:rPr lang="en-US" sz="690" dirty="0">
                 <a:solidFill>
                   <a:srgbClr val="202124"/>
                 </a:solidFill>
@@ -12664,17 +12615,17 @@
               </a:rPr>
               <a:t>        "aud": "urn:google:adk:finance-agent-v2",</a:t>
             </a:r>
-            <a:endParaRPr lang="en-US" sz="740" dirty="0"/>
-          </a:p>
-          <a:p>
-            <a:pPr indent="0" marL="0">
-              <a:lnSpc>
-                <a:spcPct val="112000"/>
-              </a:lnSpc>
-              <a:buNone/>
-            </a:pPr>
-            <a:r>
-              <a:rPr lang="en-US" sz="740" dirty="0">
+            <a:endParaRPr lang="en-US" sz="690" dirty="0"/>
+          </a:p>
+          <a:p>
+            <a:pPr indent="0" marL="0">
+              <a:lnSpc>
+                <a:spcPct val="106000"/>
+              </a:lnSpc>
+              <a:buNone/>
+            </a:pPr>
+            <a:r>
+              <a:rPr lang="en-US" sz="690" dirty="0">
                 <a:solidFill>
                   <a:srgbClr val="202124"/>
                 </a:solidFill>
@@ -12684,7 +12635,67 @@
               </a:rPr>
               <a:t>        "tenant_id": tenant_id,</a:t>
             </a:r>
-            <a:endParaRPr lang="en-US" sz="740" dirty="0"/>
+            <a:endParaRPr lang="en-US" sz="690" dirty="0"/>
+          </a:p>
+          <a:p>
+            <a:pPr indent="0" marL="0">
+              <a:lnSpc>
+                <a:spcPct val="106000"/>
+              </a:lnSpc>
+              <a:buNone/>
+            </a:pPr>
+            <a:r>
+              <a:rPr lang="en-US" sz="690" dirty="0">
+                <a:solidFill>
+                  <a:srgbClr val="202124"/>
+                </a:solidFill>
+                <a:latin typeface="Courier New" pitchFamily="34" charset="0"/>
+                <a:ea typeface="Courier New" pitchFamily="34" charset="-122"/>
+                <a:cs typeface="Courier New" pitchFamily="34" charset="-120"/>
+              </a:rPr>
+              <a:t>        "organization_id": org_id,</a:t>
+            </a:r>
+            <a:endParaRPr lang="en-US" sz="690" dirty="0"/>
+          </a:p>
+          <a:p>
+            <a:pPr indent="0" marL="0">
+              <a:lnSpc>
+                <a:spcPct val="106000"/>
+              </a:lnSpc>
+              <a:buNone/>
+            </a:pPr>
+            <a:r>
+              <a:rPr lang="en-US" sz="690" dirty="0">
+                <a:solidFill>
+                  <a:srgbClr val="202124"/>
+                </a:solidFill>
+                <a:latin typeface="Courier New" pitchFamily="34" charset="0"/>
+                <a:ea typeface="Courier New" pitchFamily="34" charset="-122"/>
+                <a:cs typeface="Courier New" pitchFamily="34" charset="-120"/>
+              </a:rPr>
+              <a:t>        "scopes": f"patient/mcp:read tenant:{tenant_id} group:Analyst"</a:t>
+            </a:r>
+            <a:endParaRPr lang="en-US" sz="690" dirty="0"/>
+          </a:p>
+          <a:p>
+            <a:pPr indent="0" marL="0">
+              <a:lnSpc>
+                <a:spcPct val="106000"/>
+              </a:lnSpc>
+              <a:buNone/>
+            </a:pPr>
+            <a:r>
+              <a:rPr lang="en-US" sz="690" dirty="0">
+                <a:solidFill>
+                  <a:srgbClr val="202124"/>
+                </a:solidFill>
+                <a:latin typeface="Courier New" pitchFamily="34" charset="0"/>
+                <a:ea typeface="Courier New" pitchFamily="34" charset="-122"/>
+                <a:cs typeface="Courier New" pitchFamily="34" charset="-120"/>
+              </a:rPr>
+              <a:t>    }</a:t>
+            </a:r>
+            <a:endParaRPr lang="en-US" sz="690" dirty="0"/>
           </a:p>
         </p:txBody>
       </p:sp>

--- a/slides/doc-mt-01-editable-slides.pptx
+++ b/slides/doc-mt-01-editable-slides.pptx
@@ -3496,6 +3496,7 @@
               <a:srgbClr val="5F6368"/>
             </a:solidFill>
             <a:prstDash val="solid"/>
+            <a:headEnd type="triangle" w="sm" len="sm"/>
           </a:ln>
         </p:spPr>
       </p:sp>
@@ -3543,6 +3544,7 @@
               <a:srgbClr val="5F6368"/>
             </a:solidFill>
             <a:prstDash val="solid"/>
+            <a:headEnd type="triangle" w="sm" len="sm"/>
           </a:ln>
         </p:spPr>
       </p:sp>
@@ -3728,6 +3730,7 @@
               <a:srgbClr val="5F6368"/>
             </a:solidFill>
             <a:prstDash val="solid"/>
+            <a:headEnd type="triangle" w="sm" len="sm"/>
           </a:ln>
         </p:spPr>
       </p:sp>
@@ -3775,6 +3778,7 @@
               <a:srgbClr val="5F6368"/>
             </a:solidFill>
             <a:prstDash val="solid"/>
+            <a:headEnd type="triangle" w="sm" len="sm"/>
           </a:ln>
         </p:spPr>
       </p:sp>
@@ -5636,7 +5640,7 @@
                 <a:ea typeface="Arial" pitchFamily="34" charset="-122"/>
                 <a:cs typeface="Arial" pitchFamily="34" charset="-120"/>
               </a:rPr>
-              <a:t>Claude 3.7 or Private GKE</a:t>
+              <a:t>Private GKE or PT Endpoint</a:t>
             </a:r>
             <a:endParaRPr lang="en-US" sz="435" dirty="0"/>
           </a:p>
@@ -8035,7 +8039,7 @@
                 <a:ea typeface="Arial" pitchFamily="34" charset="-122"/>
                 <a:cs typeface="Arial" pitchFamily="34" charset="-120"/>
               </a:rPr>
-              <a:t>• Google Cloud Armor &amp; RFC 8693 OBO + DPoP: </a:t>
+              <a:t>• Google Cloud Armor: </a:t>
             </a:r>
             <a:pPr indent="0" marL="0">
               <a:lnSpc>
@@ -8052,7 +8056,7 @@
                 <a:ea typeface="Arial" pitchFamily="34" charset="-122"/>
                 <a:cs typeface="Arial" pitchFamily="34" charset="-120"/>
               </a:rPr>
-              <a:t>Enforces edge policy rules and screens payloads before reaching the runtime.
+              <a:t>Enforces edge policy rules before reaching the runtime.
 </a:t>
             </a:r>
             <a:pPr indent="0" marL="0">
@@ -8087,7 +8091,7 @@
                 <a:ea typeface="Arial" pitchFamily="34" charset="-122"/>
                 <a:cs typeface="Arial" pitchFamily="34" charset="-120"/>
               </a:rPr>
-              <a:t>Authenticates callers and verifies identity and scope claims before routing.
+              <a:t>Screens incoming prompts and verifies policy constraints at the routing hub.
 </a:t>
             </a:r>
             <a:pPr indent="0" marL="0">
@@ -8105,7 +8109,7 @@
                 <a:ea typeface="Arial" pitchFamily="34" charset="-122"/>
                 <a:cs typeface="Arial" pitchFamily="34" charset="-120"/>
               </a:rPr>
-              <a:t>• Cloud Run: </a:t>
+              <a:t>• RFC 8693 OBO + DPoP: </a:t>
             </a:r>
             <a:pPr indent="0" marL="0">
               <a:lnSpc>
@@ -8122,7 +8126,7 @@
                 <a:ea typeface="Arial" pitchFamily="34" charset="-122"/>
                 <a:cs typeface="Arial" pitchFamily="34" charset="-120"/>
               </a:rPr>
-              <a:t>Serverless routing service that validates caller tokens and dispatches requests to the target execution spoke.</a:t>
+              <a:t>Authenticates callers and binds cryptographic identity and scope claims before routing.</a:t>
             </a:r>
             <a:endParaRPr lang="en-US" sz="690" dirty="0"/>
           </a:p>
@@ -8693,7 +8697,7 @@
                 <a:ea typeface="Arial" pitchFamily="34" charset="-122"/>
                 <a:cs typeface="Arial" pitchFamily="34" charset="-120"/>
               </a:rPr>
-              <a:t>Core execution environment orchestrating reasoning, memory, and tool execution.
+              <a:t>Core execution environments orchestrating reasoning, memory, and tool execution across left and right spokes.
 </a:t>
             </a:r>
             <a:pPr indent="0" marL="0">
@@ -8711,7 +8715,7 @@
                 <a:ea typeface="Arial" pitchFamily="34" charset="-122"/>
                 <a:cs typeface="Arial" pitchFamily="34" charset="-120"/>
               </a:rPr>
-              <a:t>• Model Armor: </a:t>
+              <a:t>• Model Armor / VPC-SC &amp; Model Armor: </a:t>
             </a:r>
             <a:pPr indent="0" marL="0">
               <a:lnSpc>
@@ -8728,7 +8732,7 @@
                 <a:ea typeface="Arial" pitchFamily="34" charset="-122"/>
                 <a:cs typeface="Arial" pitchFamily="34" charset="-120"/>
               </a:rPr>
-              <a:t>Screens prompts and model outputs within the execution boundary to enforce safety and DLP policies.
+              <a:t>Screens prompts and model outputs within each spoke boundary to enforce safety and DLP policies.
 </a:t>
             </a:r>
             <a:pPr indent="0" marL="0">
@@ -8763,7 +8767,7 @@
                 <a:ea typeface="Arial" pitchFamily="34" charset="-122"/>
                 <a:cs typeface="Arial" pitchFamily="34" charset="-120"/>
               </a:rPr>
-              <a:t>Serverless tool interface providing standardized, scoped access to enterprise systems.
+              <a:t>Serverless tool interfaces providing standardized, scoped access to enterprise systems.
 </a:t>
             </a:r>
             <a:pPr indent="0" marL="0">
@@ -8781,7 +8785,7 @@
                 <a:ea typeface="Arial" pitchFamily="34" charset="-122"/>
                 <a:cs typeface="Arial" pitchFamily="34" charset="-120"/>
               </a:rPr>
-              <a:t>• Shared AlloyDB: </a:t>
+              <a:t>• Shared AlloyDB / CMEK Datastore: </a:t>
             </a:r>
             <a:pPr indent="0" marL="0">
               <a:lnSpc>
@@ -8798,7 +8802,7 @@
                 <a:ea typeface="Arial" pitchFamily="34" charset="-122"/>
                 <a:cs typeface="Arial" pitchFamily="34" charset="-120"/>
               </a:rPr>
-              <a:t>Isolated persistence layer enforcing access boundaries, vector namespaces, and encryption at rest.</a:t>
+              <a:t>Isolated persistence layers enforcing access boundaries, vector namespaces, and encryption at rest.</a:t>
             </a:r>
             <a:endParaRPr lang="en-US" sz="690" dirty="0"/>
           </a:p>

--- a/slides/doc-mt-01-editable-slides.pptx
+++ b/slides/doc-mt-01-editable-slides.pptx
@@ -782,7 +782,7 @@
           <a:p>
             <a:r>
               <a:rPr lang="en-US" dirty="0"/>
-              <a:t>[phased-roadmap-timeline] WS1 • Reference Architecture &amp; 5-Hop Governance Rollout Timeline: Workstream 1 Rollout Timeline  •  Phase 1 (5-Hop Core) → Phase 2 (GAP-01..05 Controls) → Phase 3 (20/20 Certification)</a:t>
+              <a:t>[phased-roadmap-timeline] WS1 • ACT III: PHASED IMPLEMENTATION &amp; CERTIFICATION TIMELINE: Workstream 1 Rollout Timeline  •  Phase 1 (5-Hop Core) → Phase 2 (GAP-01..05 Controls) → Phase 3 (20/20 Certification)</a:t>
             </a:r>
             <a:endParaRPr lang="en-US" dirty="0"/>
           </a:p>
@@ -870,7 +870,7 @@
           <a:p>
             <a:r>
               <a:rPr lang="en-US" dirty="0"/>
-              <a:t>[strategic-operating-model-pillars] WS1 • 3-Pillar Multi-Tenant Reference Architecture Operating Model: Workstream 1 Operating Model  •  Identity &amp; Edge Context + Scoped Memory &amp; Guardrails + Data Isolation &amp; FinOps</a:t>
+              <a:t>[strategic-operating-model-pillars] WS1 • ACT III: DAY-2 PLATFORM ENGINEERING OPERATING MODEL &amp; RACI SLAs: Workstream 1 Day-2 Operating Model  •  Security &amp; IAM Ownership + Agent Runtime SRE + FinOps &amp; 20/20 CI/CD Governance</a:t>
             </a:r>
             <a:endParaRPr lang="en-US" dirty="0"/>
           </a:p>
@@ -959,11 +959,11 @@
             <a:r>
               <a:rPr lang="en-US" dirty="0"/>
               <a:t>What's next — Series Navigation &amp; Engineering Deliverables
-• Enforce Cryptographic Context Across All 5 Hops: Database row filters alone cannot secure agentic AI; tenant identity must govern ingress, tool discovery, memory namespaces, safety guardrails, and SQL RLS.
-• Align Isolation Topology to Regulatory &amp; Margin Requirements: Deploy Pattern A ($42/mo) for commercial scale, Pattern B ($1,850/mo) for regulated sovereignty, and Pattern C for multi-tier SaaS portfolios.
-• Maintain a Single 80% Reusable Agent Codebase: Parameterize isolation boundaries via declarative Firestore profiles and Terraform modules rather than forking separate application codebases.
-• Capture 90% Prefix Cache Savings Without Cross-Tenant Risk: Bind Gemini 2.5 Pro ContextCacheConfig strictly to immutable platform instructions while isolating tenant episodic state in L1–L5 Memory Bank.
-• Validate Every Release Against Automated Red-Team Gates: Execute the 20-assertion verification suite (10 Pattern A breach tests, 6 Pattern B silo tests, 4 Pattern C migration tests) in CI/CD.</a:t>
+• 1. Shared 5-Hop ADK 2.0 Core Engine (All Patterns): Deploy core-cymbal-agent/ (models.py, runtime_pipeline.py, tenant_profiles.py) once to enforce Hops 1–5 across Pooled, Siloed, and Hybrid tiers with 80% code reuse.
+• 2. Proceed to Workstream 2 — Pattern A High-Density Pooled ($42/mo): Provision workstream-2-pattern-a-pooled/2.6-terraform-starter/ and run 2.5-breach-simulation-suite/run_breach_simulations.py (10/10 breach tests PASS).
+• 3. Proceed to Workstream 3 — Pattern B Zero-Trust Sovereign Silos ($1,850/mo): Provision workstream-3-pattern-b-siloed/3.6-terraform-silo-blueprint/ (VPC-SC, IAM PAB, CMEK) and run run_silo_security_tests.py (6/6 PASS).
+• 4. Proceed to Workstream 4 — Pattern C Dynamic Hybrid PSC &amp; Live Migration: Provision workstream-4-pattern-c-hybrid/4.6-terraform-hybrid-psc-blueprint/ (/28 PSC NAT) and run run_tier_migration_suite.py (4/4 PASS, 0ms lag).
+• 5. Proceed to Workstream 5 — Executive Decision Guide &amp; CI/CD Certification: Apply the 2-Question Topology Selector (5.1-pattern-comparison-and-decision-guide.md) and execute scripts/run_deep_forensic_audit.py (12/12 PASS).</a:t>
             </a:r>
             <a:endParaRPr lang="en-US" dirty="0"/>
           </a:p>
@@ -1234,7 +1234,7 @@
             <a:r>
               <a:rPr lang="en-US" dirty="0"/>
               <a:t>Products used — Google Cloud Agentic AI, Security &amp; Data Stack
-• Agentic AI &amp; Foundation Models: Vertex AI Agent Engine (ADK 2.0 runtime, Agent Registry &amp; L1–L5 Memory Bank), Gemini 2.5 Pro with ContextCacheConfig (90% shared prefix discount), Vertex AI Model Garden (Gemini 2.5 Pro (Dedicated PT)), and Gemma 3 (27B) on private GKE.
+• Agentic AI &amp; Foundation Models: Vertex AI Agent Engine (ADK 2.0 runtime, Agent Registry &amp; L1–L5 Memory Bank), Gemini 2.5 Pro with ContextCacheConfig (90% shared prefix discount), Vertex AI Model Garden (Dedicated Provisioned Throughput), and Gemma 3 (27B) on private GKE.
 • Ingress, Identity &amp; AI Safety Guardrails: Global External Application Load Balancer, Google Cloud Armor L7 WAF, Identity-Aware Proxy (IAP) &amp; IAM Security Token Service (RFC 8693 OBO + RFC 9449 DPoP), Vertex AI Model Armor, and Cloud Sensitive Data Protection (DLP).
 • Data, Storage, Networking &amp; Governance: AlloyDB for PostgreSQL (FORCE ROW LEVEL SECURITY), Memorystore for Valkey (per-tenant RPM bulkheads) &amp; Firestore, VPC Service Controls (VPC-SC) &amp; Private Service Connect (PSC), Cloud KMS CMEK (HTTP 423 kill-switch), and BigQuery OTel.
 • Shared 80% Reusable Application Core: All three isolation patterns execute the exact same Python ADK 2.0 5-hop security pipeline (`core-cymbal-agent/runtime_pipeline.py`), parameterizing only the surrounding 20% Google Cloud project and network boundary.</a:t>
@@ -1589,7 +1589,7 @@
           <a:p>
             <a:r>
               <a:rPr lang="en-US" dirty="0"/>
-              <a:t>[async-state-flow-pipeline] WS1 • 5-Hop Context Propagation &amp; Closed-Loop OTel Governance Flow: Workstream 1 State &amp; Feedback Flow  •  Sealed TenantContext Propagation + Closed-Loop BigQuery OTel Governance</a:t>
+              <a:t>[async-state-flow-pipeline] WS1 • ACT II: DETERMINISTIC FAIL-CLOSED CIRCUIT BREAKERS &amp; FEEDBACK LOOP: Workstream 1 Exception &amp; Feedback Loop  •  Fail-Closed Circuit Breakers (HTTP 401/403/422/423/429) + Closed-Loop BigQuery OTel</a:t>
             </a:r>
             <a:endParaRPr lang="en-US" dirty="0"/>
           </a:p>
@@ -3175,7 +3175,7 @@
                 <a:ea typeface="Google Sans" pitchFamily="34" charset="-122"/>
                 <a:cs typeface="Google Sans" pitchFamily="34" charset="-120"/>
               </a:rPr>
-              <a:t>OFFICIAL 4-ZONE HUB-AND-SPOKE TOPOLOGY (#78)</a:t>
+              <a:t>3-ACT EXECUTIVE BRIEFING &amp; DELIVERABLE MAP</a:t>
             </a:r>
             <a:endParaRPr lang="en-US" sz="920" dirty="0"/>
           </a:p>
@@ -3237,7 +3237,7 @@
         <p:spPr>
           <a:xfrm>
             <a:off x="7735824" y="1005840"/>
-            <a:ext cx="1353312" cy="219456"/>
+            <a:ext cx="1481328" cy="219456"/>
           </a:xfrm>
           <a:prstGeom prst="roundRect">
             <a:avLst>
@@ -3259,7 +3259,7 @@
         <p:spPr>
           <a:xfrm>
             <a:off x="7735824" y="1005840"/>
-            <a:ext cx="1353312" cy="219456"/>
+            <a:ext cx="1481328" cy="219456"/>
           </a:xfrm>
           <a:prstGeom prst="rect">
             <a:avLst/>
@@ -3275,7 +3275,7 @@
               <a:buNone/>
             </a:pPr>
             <a:r>
-              <a:rPr lang="en-US" sz="680" b="1" dirty="0">
+              <a:rPr lang="en-US" sz="660" b="1" dirty="0">
                 <a:solidFill>
                   <a:srgbClr val="174EA6"/>
                 </a:solidFill>
@@ -3283,9 +3283,9 @@
                 <a:ea typeface="Google Sans" pitchFamily="34" charset="-122"/>
                 <a:cs typeface="Google Sans" pitchFamily="34" charset="-120"/>
               </a:rPr>
-              <a:t>01 • ROUTING HUB</a:t>
-            </a:r>
-            <a:endParaRPr lang="en-US" sz="680" dirty="0"/>
+              <a:t>ACT I • SLIDES 1–4</a:t>
+            </a:r>
+            <a:endParaRPr lang="en-US" sz="660" dirty="0"/>
           </a:p>
         </p:txBody>
       </p:sp>
@@ -3297,8 +3297,8 @@
         </p:nvSpPr>
         <p:spPr>
           <a:xfrm>
-            <a:off x="9162288" y="987552"/>
-            <a:ext cx="2340864" cy="256032"/>
+            <a:off x="9272016" y="987552"/>
+            <a:ext cx="2249424" cy="256032"/>
           </a:xfrm>
           <a:prstGeom prst="rect">
             <a:avLst/>
@@ -3314,7 +3314,7 @@
               <a:buNone/>
             </a:pPr>
             <a:r>
-              <a:rPr lang="en-US" sz="880" b="1" dirty="0">
+              <a:rPr lang="en-US" sz="850" b="1" dirty="0">
                 <a:solidFill>
                   <a:srgbClr val="3C4043"/>
                 </a:solidFill>
@@ -3322,9 +3322,9 @@
                 <a:ea typeface="Google Sans" pitchFamily="34" charset="-122"/>
                 <a:cs typeface="Google Sans" pitchFamily="34" charset="-120"/>
               </a:rPr>
-              <a:t>Edge WAF, OBO/DPoP &amp; Tier Router</a:t>
-            </a:r>
-            <a:endParaRPr lang="en-US" sz="880" dirty="0"/>
+              <a:t>Master Blueprint (#78) &amp; SLO Scorecard</a:t>
+            </a:r>
+            <a:endParaRPr lang="en-US" sz="850" dirty="0"/>
           </a:p>
         </p:txBody>
       </p:sp>
@@ -3353,7 +3353,7 @@
               <a:buNone/>
             </a:pPr>
             <a:r>
-              <a:rPr lang="en-US" sz="790" dirty="0">
+              <a:rPr lang="en-US" sz="780" dirty="0">
                 <a:solidFill>
                   <a:srgbClr val="5F6368"/>
                 </a:solidFill>
@@ -3361,9 +3361,9 @@
                 <a:ea typeface="Roboto" pitchFamily="34" charset="-122"/>
                 <a:cs typeface="Roboto" pitchFamily="34" charset="-120"/>
               </a:rPr>
-              <a:t>Google Cloud Armor, IAP, IAM STS &amp; Agent Engine Registry verify OIDC identity, strip spoofed headers &amp; filter tools.</a:t>
-            </a:r>
-            <a:endParaRPr lang="en-US" sz="790" dirty="0"/>
+              <a:t>Decomposes Figure 1 into 56 editable vector shapes + 23 connectors, quantified unit economics ($42 vs. $1,850/mo) &amp; GCP stack.</a:t>
+            </a:r>
+            <a:endParaRPr lang="en-US" sz="780" dirty="0"/>
           </a:p>
         </p:txBody>
       </p:sp>
@@ -3423,7 +3423,7 @@
         <p:spPr>
           <a:xfrm>
             <a:off x="7735824" y="2194560"/>
-            <a:ext cx="1353312" cy="219456"/>
+            <a:ext cx="1481328" cy="219456"/>
           </a:xfrm>
           <a:prstGeom prst="roundRect">
             <a:avLst>
@@ -3445,7 +3445,7 @@
         <p:spPr>
           <a:xfrm>
             <a:off x="7735824" y="2194560"/>
-            <a:ext cx="1353312" cy="219456"/>
+            <a:ext cx="1481328" cy="219456"/>
           </a:xfrm>
           <a:prstGeom prst="rect">
             <a:avLst/>
@@ -3461,7 +3461,7 @@
               <a:buNone/>
             </a:pPr>
             <a:r>
-              <a:rPr lang="en-US" sz="680" b="1" dirty="0">
+              <a:rPr lang="en-US" sz="660" b="1" dirty="0">
                 <a:solidFill>
                   <a:srgbClr val="A50E0E"/>
                 </a:solidFill>
@@ -3469,9 +3469,9 @@
                 <a:ea typeface="Google Sans" pitchFamily="34" charset="-122"/>
                 <a:cs typeface="Google Sans" pitchFamily="34" charset="-120"/>
               </a:rPr>
-              <a:t>02 • RIGHT SPOKE</a:t>
-            </a:r>
-            <a:endParaRPr lang="en-US" sz="680" dirty="0"/>
+              <a:t>ACT II • SLIDES 5–8</a:t>
+            </a:r>
+            <a:endParaRPr lang="en-US" sz="660" dirty="0"/>
           </a:p>
         </p:txBody>
       </p:sp>
@@ -3483,8 +3483,8 @@
         </p:nvSpPr>
         <p:spPr>
           <a:xfrm>
-            <a:off x="9162288" y="2176272"/>
-            <a:ext cx="2340864" cy="256032"/>
+            <a:off x="9272016" y="2176272"/>
+            <a:ext cx="2249424" cy="256032"/>
           </a:xfrm>
           <a:prstGeom prst="rect">
             <a:avLst/>
@@ -3500,7 +3500,7 @@
               <a:buNone/>
             </a:pPr>
             <a:r>
-              <a:rPr lang="en-US" sz="880" b="1" dirty="0">
+              <a:rPr lang="en-US" sz="850" b="1" dirty="0">
                 <a:solidFill>
                   <a:srgbClr val="3C4043"/>
                 </a:solidFill>
@@ -3508,9 +3508,9 @@
                 <a:ea typeface="Google Sans" pitchFamily="34" charset="-122"/>
                 <a:cs typeface="Google Sans" pitchFamily="34" charset="-120"/>
               </a:rPr>
-              <a:t>2LO/3LO MCP, AlloyDB RLS &amp; PSC Vaults</a:t>
-            </a:r>
-            <a:endParaRPr lang="en-US" sz="880" dirty="0"/>
+              <a:t>3-Zone Boundaries, UML &amp; Fail-Closed Loops</a:t>
+            </a:r>
+            <a:endParaRPr lang="en-US" sz="850" dirty="0"/>
           </a:p>
         </p:txBody>
       </p:sp>
@@ -3539,7 +3539,7 @@
               <a:buNone/>
             </a:pPr>
             <a:r>
-              <a:rPr lang="en-US" sz="790" dirty="0">
+              <a:rPr lang="en-US" sz="780" dirty="0">
                 <a:solidFill>
                   <a:srgbClr val="5F6368"/>
                 </a:solidFill>
@@ -3547,9 +3547,9 @@
                 <a:ea typeface="Roboto" pitchFamily="34" charset="-122"/>
                 <a:cs typeface="Roboto" pitchFamily="34" charset="-120"/>
               </a:rPr>
-              <a:t>Enforces PostgreSQL Row-Level Security, 3LO step-up consent, VPC-SC perimeters &amp; &lt;60s CMEK kill-switches.</a:t>
-            </a:r>
-            <a:endParaRPr lang="en-US" sz="790" dirty="0"/>
+              <a:t>Walks through 3-zone physical/logical boundaries, Hop 1 OBO+DPoP wire transformation, 5-Actor UML sequence &amp; HTTP 401–429 circuit breakers.</a:t>
+            </a:r>
+            <a:endParaRPr lang="en-US" sz="780" dirty="0"/>
           </a:p>
         </p:txBody>
       </p:sp>
@@ -3609,7 +3609,7 @@
         <p:spPr>
           <a:xfrm>
             <a:off x="7735824" y="3383280"/>
-            <a:ext cx="1353312" cy="219456"/>
+            <a:ext cx="1481328" cy="219456"/>
           </a:xfrm>
           <a:prstGeom prst="roundRect">
             <a:avLst>
@@ -3631,7 +3631,7 @@
         <p:spPr>
           <a:xfrm>
             <a:off x="7735824" y="3383280"/>
-            <a:ext cx="1353312" cy="219456"/>
+            <a:ext cx="1481328" cy="219456"/>
           </a:xfrm>
           <a:prstGeom prst="rect">
             <a:avLst/>
@@ -3647,7 +3647,7 @@
               <a:buNone/>
             </a:pPr>
             <a:r>
-              <a:rPr lang="en-US" sz="680" b="1" dirty="0">
+              <a:rPr lang="en-US" sz="660" b="1" dirty="0">
                 <a:solidFill>
                   <a:srgbClr val="B06000"/>
                 </a:solidFill>
@@ -3655,9 +3655,9 @@
                 <a:ea typeface="Google Sans" pitchFamily="34" charset="-122"/>
                 <a:cs typeface="Google Sans" pitchFamily="34" charset="-120"/>
               </a:rPr>
-              <a:t>03 • LEFT SPOKE</a:t>
-            </a:r>
-            <a:endParaRPr lang="en-US" sz="680" dirty="0"/>
+              <a:t>ACT III • SLIDES 9–12</a:t>
+            </a:r>
+            <a:endParaRPr lang="en-US" sz="660" dirty="0"/>
           </a:p>
         </p:txBody>
       </p:sp>
@@ -3669,8 +3669,8 @@
         </p:nvSpPr>
         <p:spPr>
           <a:xfrm>
-            <a:off x="9162288" y="3364992"/>
-            <a:ext cx="2340864" cy="256032"/>
+            <a:off x="9272016" y="3364992"/>
+            <a:ext cx="2249424" cy="256032"/>
           </a:xfrm>
           <a:prstGeom prst="rect">
             <a:avLst/>
@@ -3686,7 +3686,7 @@
               <a:buNone/>
             </a:pPr>
             <a:r>
-              <a:rPr lang="en-US" sz="880" b="1" dirty="0">
+              <a:rPr lang="en-US" sz="850" b="1" dirty="0">
                 <a:solidFill>
                   <a:srgbClr val="3C4043"/>
                 </a:solidFill>
@@ -3694,9 +3694,9 @@
                 <a:ea typeface="Google Sans" pitchFamily="34" charset="-122"/>
                 <a:cs typeface="Google Sans" pitchFamily="34" charset="-120"/>
               </a:rPr>
-              <a:t>Model Armor, ADK &amp; 90% Prefix Cache</a:t>
-            </a:r>
-            <a:endParaRPr lang="en-US" sz="880" dirty="0"/>
+              <a:t>Pattern A/B/C Matrix, GAP-01..05 &amp; Live Proof</a:t>
+            </a:r>
+            <a:endParaRPr lang="en-US" sz="850" dirty="0"/>
           </a:p>
         </p:txBody>
       </p:sp>
@@ -3725,7 +3725,7 @@
               <a:buNone/>
             </a:pPr>
             <a:r>
-              <a:rPr lang="en-US" sz="790" dirty="0">
+              <a:rPr lang="en-US" sz="780" dirty="0">
                 <a:solidFill>
                   <a:srgbClr val="5F6368"/>
                 </a:solidFill>
@@ -3733,9 +3733,9 @@
                 <a:ea typeface="Roboto" pitchFamily="34" charset="-122"/>
                 <a:cs typeface="Roboto" pitchFamily="34" charset="-120"/>
               </a:rPr>
-              <a:t>Screens prompts (4/6), executes Gemini 2.5 Pro with 90% cache (5), clamps RPM in Valkey &amp; isolates L1–L5 memory.</a:t>
-            </a:r>
-            <a:endParaRPr lang="en-US" sz="790" dirty="0"/>
+              <a:t>Compares Pooled, Siloed &amp; Hybrid PSC trade-offs, closes 5 EAP product gaps, embeds 16:9 Cloud Console captures &amp; 6-week rollout.</a:t>
+            </a:r>
+            <a:endParaRPr lang="en-US" sz="780" dirty="0"/>
           </a:p>
         </p:txBody>
       </p:sp>
@@ -3795,7 +3795,7 @@
         <p:spPr>
           <a:xfrm>
             <a:off x="7735824" y="4572000"/>
-            <a:ext cx="1353312" cy="219456"/>
+            <a:ext cx="1481328" cy="219456"/>
           </a:xfrm>
           <a:prstGeom prst="roundRect">
             <a:avLst>
@@ -3817,7 +3817,7 @@
         <p:spPr>
           <a:xfrm>
             <a:off x="7735824" y="4572000"/>
-            <a:ext cx="1353312" cy="219456"/>
+            <a:ext cx="1481328" cy="219456"/>
           </a:xfrm>
           <a:prstGeom prst="rect">
             <a:avLst/>
@@ -3833,7 +3833,7 @@
               <a:buNone/>
             </a:pPr>
             <a:r>
-              <a:rPr lang="en-US" sz="680" b="1" dirty="0">
+              <a:rPr lang="en-US" sz="660" b="1" dirty="0">
                 <a:solidFill>
                   <a:srgbClr val="0D652D"/>
                 </a:solidFill>
@@ -3841,9 +3841,9 @@
                 <a:ea typeface="Google Sans" pitchFamily="34" charset="-122"/>
                 <a:cs typeface="Google Sans" pitchFamily="34" charset="-120"/>
               </a:rPr>
-              <a:t>04 • GOVERNANCE HUB</a:t>
-            </a:r>
-            <a:endParaRPr lang="en-US" sz="680" dirty="0"/>
+              <a:t>GOVERNANCE • SLIDES 13–14</a:t>
+            </a:r>
+            <a:endParaRPr lang="en-US" sz="660" dirty="0"/>
           </a:p>
         </p:txBody>
       </p:sp>
@@ -3855,8 +3855,8 @@
         </p:nvSpPr>
         <p:spPr>
           <a:xfrm>
-            <a:off x="9162288" y="4553712"/>
-            <a:ext cx="2340864" cy="256032"/>
+            <a:off x="9272016" y="4553712"/>
+            <a:ext cx="2249424" cy="256032"/>
           </a:xfrm>
           <a:prstGeom prst="rect">
             <a:avLst/>
@@ -3872,7 +3872,7 @@
               <a:buNone/>
             </a:pPr>
             <a:r>
-              <a:rPr lang="en-US" sz="880" b="1" dirty="0">
+              <a:rPr lang="en-US" sz="850" b="1" dirty="0">
                 <a:solidFill>
                   <a:srgbClr val="3C4043"/>
                 </a:solidFill>
@@ -3880,9 +3880,9 @@
                 <a:ea typeface="Google Sans" pitchFamily="34" charset="-122"/>
                 <a:cs typeface="Google Sans" pitchFamily="34" charset="-120"/>
               </a:rPr>
-              <a:t>Security, CMEK &amp; FinOps Telemetry</a:t>
-            </a:r>
-            <a:endParaRPr lang="en-US" sz="880" dirty="0"/>
+              <a:t>Day-2 RACI Operating Model &amp; Series Map</a:t>
+            </a:r>
+            <a:endParaRPr lang="en-US" sz="850" dirty="0"/>
           </a:p>
         </p:txBody>
       </p:sp>
@@ -3911,7 +3911,7 @@
               <a:buNone/>
             </a:pPr>
             <a:r>
-              <a:rPr lang="en-US" sz="790" dirty="0">
+              <a:rPr lang="en-US" sz="780" dirty="0">
                 <a:solidFill>
                   <a:srgbClr val="5F6368"/>
                 </a:solidFill>
@@ -3919,9 +3919,9 @@
                 <a:ea typeface="Roboto" pitchFamily="34" charset="-122"/>
                 <a:cs typeface="Roboto" pitchFamily="34" charset="-120"/>
               </a:rPr>
-              <a:t>Security Command Center, Cloud KMS CMEK &amp; BigQuery OTel govern encryption liveness and zero-PII chargeback.</a:t>
-            </a:r>
-            <a:endParaRPr lang="en-US" sz="790" dirty="0"/>
+              <a:t>Assigns Security, SRE &amp; FinOps ownership SLAs and maps runnable deliverables across Workstreams 1–5 (24 files + 20/20 gates).</a:t>
+            </a:r>
+            <a:endParaRPr lang="en-US" sz="780" dirty="0"/>
           </a:p>
         </p:txBody>
       </p:sp>
@@ -3977,7 +3977,7 @@
               <a:buNone/>
             </a:pPr>
             <a:r>
-              <a:rPr lang="en-US" sz="740" b="1" dirty="0">
+              <a:rPr lang="en-US" sz="720" b="1" dirty="0">
                 <a:solidFill>
                   <a:srgbClr val="3C4043"/>
                 </a:solidFill>
@@ -3985,9 +3985,9 @@
                 <a:ea typeface="Google Sans" pitchFamily="34" charset="-122"/>
                 <a:cs typeface="Google Sans" pitchFamily="34" charset="-120"/>
               </a:rPr>
-              <a:t>3-Act Executive Arc (14 Slides): Act I Architecture → Act II Runtime → Act III Proof &amp; Rollout</a:t>
-            </a:r>
-            <a:endParaRPr lang="en-US" sz="740" dirty="0"/>
+              <a:t>Verified Across 3 GCP Projects (#248990048888 • #638420508320 • #887605034827) • 12/12 Forensic PASS</a:t>
+            </a:r>
+            <a:endParaRPr lang="en-US" sz="720" dirty="0"/>
           </a:p>
         </p:txBody>
       </p:sp>
@@ -4427,7 +4427,7 @@
                 <a:ea typeface="Google Sans" pitchFamily="34" charset="-122"/>
                 <a:cs typeface="Google Sans" pitchFamily="34" charset="-120"/>
               </a:rPr>
-              <a:t>Design alternatives — Compensating Controls for EAP Product Gaps (GAP-01..05)</a:t>
+              <a:t>ACT III • EAP PRODUCT GAP REGISTER (GAP-01..05) &amp; COMPENSATING CONTROLS</a:t>
             </a:r>
             <a:endParaRPr lang="en-US" sz="1020" dirty="0"/>
           </a:p>
@@ -4532,7 +4532,7 @@
                 <a:ea typeface="Google Sans" pitchFamily="34" charset="-122"/>
                 <a:cs typeface="Google Sans" pitchFamily="34" charset="-120"/>
               </a:rPr>
-              <a:t>Design alternatives — Compensating Controls for EAP Product Gaps (GAP-01..05)</a:t>
+              <a:t>Compensating Controls for EAP Product Gaps (GAP-01..05)</a:t>
             </a:r>
             <a:endParaRPr lang="en-US" sz="1800" dirty="0"/>
           </a:p>
@@ -4571,7 +4571,7 @@
                 <a:ea typeface="Roboto" pitchFamily="34" charset="-122"/>
                 <a:cs typeface="Roboto" pitchFamily="34" charset="-120"/>
               </a:rPr>
-              <a:t>Side-by-side Google Cloud Well-Architected trade-off analysis, compensating controls, and target SLAs.</a:t>
+              <a:t>Production compensating controls in core-cymbal-agent/ closing all 5 multi-tenant EAP limitations with fail-closed gates.</a:t>
             </a:r>
             <a:endParaRPr lang="en-US" sz="980" dirty="0"/>
           </a:p>
@@ -6440,7 +6440,7 @@
                 <a:ea typeface="Google Sans" pitchFamily="34" charset="-122"/>
                 <a:cs typeface="Google Sans" pitchFamily="34" charset="-120"/>
               </a:rPr>
-              <a:t>1. GAP-01 (Hop 2) • Agent Engine Registry</a:t>
+              <a:t>1. Identity &amp; Catalog Gates (GAP-01 / GAP-04)</a:t>
             </a:r>
             <a:endParaRPr lang="en-US" sz="760" dirty="0"/>
           </a:p>
@@ -6481,7 +6481,7 @@
                 <a:ea typeface="Roboto" pitchFamily="34" charset="-122"/>
                 <a:cs typeface="Roboto" pitchFamily="34" charset="-120"/>
               </a:rPr>
-              <a:t>WS2 Test 2 PASS (HTTP 403 on cross-tenant Agent Alpha discovery) • Target GA: Q4 2026</a:t>
+              <a:t>Filters Agent Engine Registry discovery by signed JWT tenant_id (HTTP 403) and normalizes Entra ID OIDC into DPoP tokens with -32042 3LO step-up.</a:t>
             </a:r>
             <a:endParaRPr lang="en-US" sz="740" dirty="0"/>
           </a:p>
@@ -6561,7 +6561,7 @@
               <a:buNone/>
             </a:pPr>
             <a:r>
-              <a:rPr lang="en-US" sz="820" b="1" dirty="0">
+              <a:rPr lang="en-US" sz="760" b="1" dirty="0">
                 <a:solidFill>
                   <a:srgbClr val="3C4043"/>
                 </a:solidFill>
@@ -6569,9 +6569,9 @@
                 <a:ea typeface="Google Sans" pitchFamily="34" charset="-122"/>
                 <a:cs typeface="Google Sans" pitchFamily="34" charset="-120"/>
               </a:rPr>
-              <a:t>2. GAP-02 (Hop 3) • Memory Bank CMEK</a:t>
-            </a:r>
-            <a:endParaRPr lang="en-US" sz="820" dirty="0"/>
+              <a:t>2. Cryptographic Memory CMEK (GAP-02)</a:t>
+            </a:r>
+            <a:endParaRPr lang="en-US" sz="760" dirty="0"/>
           </a:p>
         </p:txBody>
       </p:sp>
@@ -6610,7 +6610,7 @@
                 <a:ea typeface="Roboto" pitchFamily="34" charset="-122"/>
                 <a:cs typeface="Roboto" pitchFamily="34" charset="-120"/>
               </a:rPr>
-              <a:t>WS3 Tests 4A/4B/6 PASS (HTTP 423 Locked &lt;60s on key disable) • Target GA: Q4 2026</a:t>
+              <a:t>Envelope-encrypts pooled L1–L5 Memory Bank chapters per tenant and enforces &lt;60s HTTP 423 Locked revocation + L1 purge in sovereign silos.</a:t>
             </a:r>
             <a:endParaRPr lang="en-US" sz="740" dirty="0"/>
           </a:p>
@@ -6690,7 +6690,7 @@
               <a:buNone/>
             </a:pPr>
             <a:r>
-              <a:rPr lang="en-US" sz="760" b="1" dirty="0">
+              <a:rPr lang="en-US" sz="820" b="1" dirty="0">
                 <a:solidFill>
                   <a:srgbClr val="3C4043"/>
                 </a:solidFill>
@@ -6698,9 +6698,9 @@
                 <a:ea typeface="Google Sans" pitchFamily="34" charset="-122"/>
                 <a:cs typeface="Google Sans" pitchFamily="34" charset="-120"/>
               </a:rPr>
-              <a:t>3. GAP-03 (Hop 3) • Per-Tenant Rate Quotas</a:t>
-            </a:r>
-            <a:endParaRPr lang="en-US" sz="760" dirty="0"/>
+              <a:t>3. Noisy-Neighbor Bulkheads (GAP-03)</a:t>
+            </a:r>
+            <a:endParaRPr lang="en-US" sz="820" dirty="0"/>
           </a:p>
         </p:txBody>
       </p:sp>
@@ -6739,7 +6739,7 @@
                 <a:ea typeface="Roboto" pitchFamily="34" charset="-122"/>
                 <a:cs typeface="Roboto" pitchFamily="34" charset="-120"/>
               </a:rPr>
-              <a:t>WS2 Test 6 PASS (HTTP 429 on 500-RPM flood; budget clamped to 4k) • Target GA: Q4 2026</a:t>
+              <a:t>Enforces atomic per-tenant RPM token buckets (120 vs. 600 RPM) in Memorystore for Valkey (HTTP 429 Retry-After) plus 4k/8k thinking caps.</a:t>
             </a:r>
             <a:endParaRPr lang="en-US" sz="740" dirty="0"/>
           </a:p>
@@ -6819,7 +6819,7 @@
               <a:buNone/>
             </a:pPr>
             <a:r>
-              <a:rPr lang="en-US" sz="760" b="1" dirty="0">
+              <a:rPr lang="en-US" sz="820" b="1" dirty="0">
                 <a:solidFill>
                   <a:srgbClr val="3C4043"/>
                 </a:solidFill>
@@ -6827,9 +6827,9 @@
                 <a:ea typeface="Google Sans" pitchFamily="34" charset="-122"/>
                 <a:cs typeface="Google Sans" pitchFamily="34" charset="-120"/>
               </a:rPr>
-              <a:t>4. GAP-04 (Hop 1/2) • Multi-IdP 3LO Broker</a:t>
-            </a:r>
-            <a:endParaRPr lang="en-US" sz="760" dirty="0"/>
+              <a:t>4. Zero-PII FinOps Ledger (GAP-05)</a:t>
+            </a:r>
+            <a:endParaRPr lang="en-US" sz="820" dirty="0"/>
           </a:p>
         </p:txBody>
       </p:sp>
@@ -6868,7 +6868,7 @@
                 <a:ea typeface="Roboto" pitchFamily="34" charset="-122"/>
                 <a:cs typeface="Roboto" pitchFamily="34" charset="-120"/>
               </a:rPr>
-              <a:t>WS2 Test 10 PASS (HTTP 401 step-up challenge -&gt; 200 OK ServiceNow) • Target GA: Q4 2026</a:t>
+              <a:t>Emits SHA-256 prompt hashes and per-tenant cached/thinking/output token spans via OpenTelemetry to BigQuery chargeback views (F-08 PASS).</a:t>
             </a:r>
             <a:endParaRPr lang="en-US" sz="740" dirty="0"/>
           </a:p>
@@ -7679,7 +7679,7 @@
                 <a:ea typeface="Google Sans" pitchFamily="34" charset="-122"/>
                 <a:cs typeface="Google Sans" pitchFamily="34" charset="-120"/>
               </a:rPr>
-              <a:t>ramp-portal-dev (#248990048888) &amp; nitinagga-ge-2 (#638420508320) serving Pattern A/B/C endpoints (HTTP 200)</a:t>
+              <a:t>ramp-portal-dev (#248990048888) &amp; cymbal-pooled-prod (#638420508320) serving Pattern A/B/C endpoints (HTTP 200)</a:t>
             </a:r>
             <a:endParaRPr lang="en-US" sz="860" dirty="0"/>
           </a:p>
@@ -7718,7 +7718,7 @@
                 <a:ea typeface="Roboto" pitchFamily="34" charset="-122"/>
                 <a:cs typeface="Roboto" pitchFamily="34" charset="-120"/>
               </a:rPr>
-              <a:t>• Project: nitinagga-ge-2 (#638420508320)</a:t>
+              <a:t>• Project: cymbal-pooled-prod (#638420508320)</a:t>
             </a:r>
             <a:endParaRPr lang="en-US" sz="780" dirty="0"/>
           </a:p>
@@ -7735,7 +7735,7 @@
                 <a:ea typeface="Roboto" pitchFamily="34" charset="-122"/>
                 <a:cs typeface="Roboto" pitchFamily="34" charset="-120"/>
               </a:rPr>
-              <a:t>• Sandbox: nitina-ggarwal-sandbox-647724</a:t>
+              <a:t>• Sandbox: cymbal-build-sandbox (#887605034827)</a:t>
             </a:r>
             <a:endParaRPr lang="en-US" sz="780" dirty="0"/>
           </a:p>
@@ -8299,7 +8299,7 @@
                 <a:ea typeface="Roboto" pitchFamily="34" charset="-122"/>
                 <a:cs typeface="Roboto" pitchFamily="34" charset="-120"/>
               </a:rPr>
-              <a:t>Live across ramp-portal-dev (#248990048888), nitinagga-ge-2 (#638420508320) &amp; nitina-ggarwal-sandbox-647724.</a:t>
+              <a:t>Live across ramp-portal-dev (#248990048888), cymbal-pooled-prod (#638420508320) &amp; cymbal-build-sandbox (#887605034827).</a:t>
             </a:r>
             <a:endParaRPr lang="en-US" sz="860" dirty="0"/>
           </a:p>
@@ -9299,7 +9299,7 @@
                 <a:ea typeface="Google Sans" pitchFamily="34" charset="-122"/>
                 <a:cs typeface="Google Sans" pitchFamily="34" charset="-120"/>
               </a:rPr>
-              <a:t>WS1 • Reference Architecture &amp; 5-Hop Governance Rollout Timeline</a:t>
+              <a:t>WS1 • ACT III: PHASED IMPLEMENTATION &amp; CERTIFICATION TIMELINE</a:t>
             </a:r>
             <a:endParaRPr lang="en-US" sz="1020" dirty="0"/>
           </a:p>
@@ -9396,7 +9396,7 @@
               <a:buNone/>
             </a:pPr>
             <a:r>
-              <a:rPr lang="en-US" sz="2400" b="1" dirty="0">
+              <a:rPr lang="en-US" sz="2250" b="1" dirty="0">
                 <a:solidFill>
                   <a:srgbClr val="0F2942"/>
                 </a:solidFill>
@@ -9404,9 +9404,9 @@
                 <a:ea typeface="Google Sans Display" pitchFamily="34" charset="-122"/>
                 <a:cs typeface="Google Sans Display" pitchFamily="34" charset="-120"/>
               </a:rPr>
-              <a:t>Workstream 1 Reference Architecture Rollout Roadmap</a:t>
-            </a:r>
-            <a:endParaRPr lang="en-US" sz="2400" dirty="0"/>
+              <a:t>6-Week Reference Architecture Rollout &amp; 20/20 Certification Roadmap</a:t>
+            </a:r>
+            <a:endParaRPr lang="en-US" sz="2250" dirty="0"/>
           </a:p>
         </p:txBody>
       </p:sp>
@@ -9700,66 +9700,6 @@
         </p:nvSpPr>
         <p:spPr>
           <a:xfrm>
-            <a:off x="411480" y="3694176"/>
-            <a:ext cx="237744" cy="237744"/>
-          </a:xfrm>
-          <a:prstGeom prst="ellipse">
-            <a:avLst/>
-          </a:prstGeom>
-          <a:solidFill>
-            <a:srgbClr val="0F2942"/>
-          </a:solidFill>
-          <a:ln/>
-        </p:spPr>
-      </p:sp>
-      <p:sp>
-        <p:nvSpPr>
-          <p:cNvPr id="27" name="Shape 25"/>
-          <p:cNvSpPr/>
-          <p:nvPr/>
-        </p:nvSpPr>
-        <p:spPr>
-          <a:xfrm>
-            <a:off x="3849624" y="3694176"/>
-            <a:ext cx="237744" cy="237744"/>
-          </a:xfrm>
-          <a:prstGeom prst="ellipse">
-            <a:avLst/>
-          </a:prstGeom>
-          <a:solidFill>
-            <a:srgbClr val="0F2942"/>
-          </a:solidFill>
-          <a:ln/>
-        </p:spPr>
-      </p:sp>
-      <p:sp>
-        <p:nvSpPr>
-          <p:cNvPr id="28" name="Shape 26"/>
-          <p:cNvSpPr/>
-          <p:nvPr/>
-        </p:nvSpPr>
-        <p:spPr>
-          <a:xfrm>
-            <a:off x="4251960" y="3694176"/>
-            <a:ext cx="237744" cy="237744"/>
-          </a:xfrm>
-          <a:prstGeom prst="ellipse">
-            <a:avLst/>
-          </a:prstGeom>
-          <a:solidFill>
-            <a:srgbClr val="0D7A75"/>
-          </a:solidFill>
-          <a:ln/>
-        </p:spPr>
-      </p:sp>
-      <p:sp>
-        <p:nvSpPr>
-          <p:cNvPr id="29" name="Shape 27"/>
-          <p:cNvSpPr/>
-          <p:nvPr/>
-        </p:nvSpPr>
-        <p:spPr>
-          <a:xfrm>
             <a:off x="4370832" y="1536192"/>
             <a:ext cx="3438144" cy="4443984"/>
           </a:xfrm>
@@ -9781,7 +9721,7 @@
       </p:sp>
       <p:sp>
         <p:nvSpPr>
-          <p:cNvPr id="30" name="Shape 28"/>
+          <p:cNvPr id="27" name="Shape 25"/>
           <p:cNvSpPr/>
           <p:nvPr/>
         </p:nvSpPr>
@@ -9803,7 +9743,7 @@
       </p:sp>
       <p:sp>
         <p:nvSpPr>
-          <p:cNvPr id="31" name="Text 29"/>
+          <p:cNvPr id="28" name="Text 26"/>
           <p:cNvSpPr/>
           <p:nvPr/>
         </p:nvSpPr>
@@ -9842,7 +9782,7 @@
       </p:sp>
       <p:sp>
         <p:nvSpPr>
-          <p:cNvPr id="32" name="Shape 30"/>
+          <p:cNvPr id="29" name="Shape 27"/>
           <p:cNvSpPr/>
           <p:nvPr/>
         </p:nvSpPr>
@@ -9862,7 +9802,7 @@
       </p:sp>
       <p:sp>
         <p:nvSpPr>
-          <p:cNvPr id="33" name="Text 31"/>
+          <p:cNvPr id="30" name="Text 28"/>
           <p:cNvSpPr/>
           <p:nvPr/>
         </p:nvSpPr>
@@ -9918,7 +9858,7 @@
       </p:sp>
       <p:sp>
         <p:nvSpPr>
-          <p:cNvPr id="34" name="Text 32"/>
+          <p:cNvPr id="31" name="Text 29"/>
           <p:cNvSpPr/>
           <p:nvPr/>
         </p:nvSpPr>
@@ -9957,7 +9897,7 @@
       </p:sp>
       <p:sp>
         <p:nvSpPr>
-          <p:cNvPr id="35" name="Shape 33"/>
+          <p:cNvPr id="32" name="Shape 30"/>
           <p:cNvSpPr/>
           <p:nvPr/>
         </p:nvSpPr>
@@ -9980,7 +9920,7 @@
       </p:sp>
       <p:sp>
         <p:nvSpPr>
-          <p:cNvPr id="36" name="Text 34"/>
+          <p:cNvPr id="33" name="Text 31"/>
           <p:cNvSpPr/>
           <p:nvPr/>
         </p:nvSpPr>
@@ -10036,47 +9976,7 @@
       </p:sp>
       <p:sp>
         <p:nvSpPr>
-          <p:cNvPr id="37" name="Shape 35"/>
-          <p:cNvSpPr/>
-          <p:nvPr/>
-        </p:nvSpPr>
-        <p:spPr>
-          <a:xfrm>
-            <a:off x="7690104" y="3694176"/>
-            <a:ext cx="237744" cy="237744"/>
-          </a:xfrm>
-          <a:prstGeom prst="ellipse">
-            <a:avLst/>
-          </a:prstGeom>
-          <a:solidFill>
-            <a:srgbClr val="0D7A75"/>
-          </a:solidFill>
-          <a:ln/>
-        </p:spPr>
-      </p:sp>
-      <p:sp>
-        <p:nvSpPr>
-          <p:cNvPr id="38" name="Shape 36"/>
-          <p:cNvSpPr/>
-          <p:nvPr/>
-        </p:nvSpPr>
-        <p:spPr>
-          <a:xfrm>
-            <a:off x="8092440" y="3694176"/>
-            <a:ext cx="237744" cy="237744"/>
-          </a:xfrm>
-          <a:prstGeom prst="ellipse">
-            <a:avLst/>
-          </a:prstGeom>
-          <a:solidFill>
-            <a:srgbClr val="54728C"/>
-          </a:solidFill>
-          <a:ln/>
-        </p:spPr>
-      </p:sp>
-      <p:sp>
-        <p:nvSpPr>
-          <p:cNvPr id="39" name="Shape 37"/>
+          <p:cNvPr id="34" name="Shape 32"/>
           <p:cNvSpPr/>
           <p:nvPr/>
         </p:nvSpPr>
@@ -10103,7 +10003,7 @@
       </p:sp>
       <p:sp>
         <p:nvSpPr>
-          <p:cNvPr id="40" name="Shape 38"/>
+          <p:cNvPr id="35" name="Shape 33"/>
           <p:cNvSpPr/>
           <p:nvPr/>
         </p:nvSpPr>
@@ -10125,7 +10025,7 @@
       </p:sp>
       <p:sp>
         <p:nvSpPr>
-          <p:cNvPr id="41" name="Text 39"/>
+          <p:cNvPr id="36" name="Text 34"/>
           <p:cNvSpPr/>
           <p:nvPr/>
         </p:nvSpPr>
@@ -10164,7 +10064,7 @@
       </p:sp>
       <p:sp>
         <p:nvSpPr>
-          <p:cNvPr id="42" name="Shape 40"/>
+          <p:cNvPr id="37" name="Shape 35"/>
           <p:cNvSpPr/>
           <p:nvPr/>
         </p:nvSpPr>
@@ -10184,7 +10084,7 @@
       </p:sp>
       <p:sp>
         <p:nvSpPr>
-          <p:cNvPr id="43" name="Text 41"/>
+          <p:cNvPr id="38" name="Text 36"/>
           <p:cNvSpPr/>
           <p:nvPr/>
         </p:nvSpPr>
@@ -10240,7 +10140,7 @@
       </p:sp>
       <p:sp>
         <p:nvSpPr>
-          <p:cNvPr id="44" name="Text 42"/>
+          <p:cNvPr id="39" name="Text 37"/>
           <p:cNvSpPr/>
           <p:nvPr/>
         </p:nvSpPr>
@@ -10279,7 +10179,7 @@
       </p:sp>
       <p:sp>
         <p:nvSpPr>
-          <p:cNvPr id="45" name="Shape 43"/>
+          <p:cNvPr id="40" name="Shape 38"/>
           <p:cNvSpPr/>
           <p:nvPr/>
         </p:nvSpPr>
@@ -10302,7 +10202,7 @@
       </p:sp>
       <p:sp>
         <p:nvSpPr>
-          <p:cNvPr id="46" name="Text 44"/>
+          <p:cNvPr id="41" name="Text 39"/>
           <p:cNvSpPr/>
           <p:nvPr/>
         </p:nvSpPr>
@@ -10358,7 +10258,173 @@
       </p:sp>
       <p:sp>
         <p:nvSpPr>
+          <p:cNvPr id="42" name="Shape 40"/>
+          <p:cNvSpPr/>
+          <p:nvPr/>
+        </p:nvSpPr>
+        <p:spPr>
+          <a:xfrm>
+            <a:off x="3968496" y="3813048"/>
+            <a:ext cx="402336" cy="0"/>
+          </a:xfrm>
+          <a:prstGeom prst="line">
+            <a:avLst/>
+          </a:prstGeom>
+          <a:noFill/>
+          <a:ln w="28575">
+            <a:solidFill>
+              <a:srgbClr val="0F2942"/>
+            </a:solidFill>
+            <a:prstDash val="solid"/>
+            <a:tailEnd type="triangle" w="sm" len="sm"/>
+          </a:ln>
+        </p:spPr>
+      </p:sp>
+      <p:sp>
+        <p:nvSpPr>
+          <p:cNvPr id="43" name="Shape 41"/>
+          <p:cNvSpPr/>
+          <p:nvPr/>
+        </p:nvSpPr>
+        <p:spPr>
+          <a:xfrm>
+            <a:off x="4059936" y="3401568"/>
+            <a:ext cx="219456" cy="219456"/>
+          </a:xfrm>
+          <a:prstGeom prst="ellipse">
+            <a:avLst/>
+          </a:prstGeom>
+          <a:solidFill>
+            <a:srgbClr val="0F2942"/>
+          </a:solidFill>
+          <a:ln/>
+        </p:spPr>
+      </p:sp>
+      <p:sp>
+        <p:nvSpPr>
+          <p:cNvPr id="44" name="Text 42"/>
+          <p:cNvSpPr/>
+          <p:nvPr/>
+        </p:nvSpPr>
+        <p:spPr>
+          <a:xfrm>
+            <a:off x="4059936" y="3401568"/>
+            <a:ext cx="219456" cy="219456"/>
+          </a:xfrm>
+          <a:prstGeom prst="rect">
+            <a:avLst/>
+          </a:prstGeom>
+          <a:noFill/>
+          <a:ln/>
+        </p:spPr>
+        <p:txBody>
+          <a:bodyPr wrap="square" rtlCol="0" anchor="ctr"/>
+          <a:lstStyle/>
+          <a:p>
+            <a:pPr algn="ctr" indent="0" marL="0">
+              <a:buNone/>
+            </a:pPr>
+            <a:r>
+              <a:rPr lang="en-US" sz="850" b="1" dirty="0">
+                <a:solidFill>
+                  <a:srgbClr val="FFFFFF"/>
+                </a:solidFill>
+                <a:latin typeface="Google Sans" pitchFamily="34" charset="0"/>
+                <a:ea typeface="Google Sans" pitchFamily="34" charset="-122"/>
+                <a:cs typeface="Google Sans" pitchFamily="34" charset="-120"/>
+              </a:rPr>
+              <a:t>1</a:t>
+            </a:r>
+            <a:endParaRPr lang="en-US" sz="850" dirty="0"/>
+          </a:p>
+        </p:txBody>
+      </p:sp>
+      <p:sp>
+        <p:nvSpPr>
+          <p:cNvPr id="45" name="Shape 43"/>
+          <p:cNvSpPr/>
+          <p:nvPr/>
+        </p:nvSpPr>
+        <p:spPr>
+          <a:xfrm>
+            <a:off x="7808976" y="3813048"/>
+            <a:ext cx="402336" cy="0"/>
+          </a:xfrm>
+          <a:prstGeom prst="line">
+            <a:avLst/>
+          </a:prstGeom>
+          <a:noFill/>
+          <a:ln w="28575">
+            <a:solidFill>
+              <a:srgbClr val="0D7A75"/>
+            </a:solidFill>
+            <a:prstDash val="solid"/>
+            <a:tailEnd type="triangle" w="sm" len="sm"/>
+          </a:ln>
+        </p:spPr>
+      </p:sp>
+      <p:sp>
+        <p:nvSpPr>
+          <p:cNvPr id="46" name="Shape 44"/>
+          <p:cNvSpPr/>
+          <p:nvPr/>
+        </p:nvSpPr>
+        <p:spPr>
+          <a:xfrm>
+            <a:off x="7900416" y="3401568"/>
+            <a:ext cx="219456" cy="219456"/>
+          </a:xfrm>
+          <a:prstGeom prst="ellipse">
+            <a:avLst/>
+          </a:prstGeom>
+          <a:solidFill>
+            <a:srgbClr val="0D7A75"/>
+          </a:solidFill>
+          <a:ln/>
+        </p:spPr>
+      </p:sp>
+      <p:sp>
+        <p:nvSpPr>
           <p:cNvPr id="47" name="Text 45"/>
+          <p:cNvSpPr/>
+          <p:nvPr/>
+        </p:nvSpPr>
+        <p:spPr>
+          <a:xfrm>
+            <a:off x="7900416" y="3401568"/>
+            <a:ext cx="219456" cy="219456"/>
+          </a:xfrm>
+          <a:prstGeom prst="rect">
+            <a:avLst/>
+          </a:prstGeom>
+          <a:noFill/>
+          <a:ln/>
+        </p:spPr>
+        <p:txBody>
+          <a:bodyPr wrap="square" rtlCol="0" anchor="ctr"/>
+          <a:lstStyle/>
+          <a:p>
+            <a:pPr algn="ctr" indent="0" marL="0">
+              <a:buNone/>
+            </a:pPr>
+            <a:r>
+              <a:rPr lang="en-US" sz="850" b="1" dirty="0">
+                <a:solidFill>
+                  <a:srgbClr val="FFFFFF"/>
+                </a:solidFill>
+                <a:latin typeface="Google Sans" pitchFamily="34" charset="0"/>
+                <a:ea typeface="Google Sans" pitchFamily="34" charset="-122"/>
+                <a:cs typeface="Google Sans" pitchFamily="34" charset="-120"/>
+              </a:rPr>
+              <a:t>2</a:t>
+            </a:r>
+            <a:endParaRPr lang="en-US" sz="850" dirty="0"/>
+          </a:p>
+        </p:txBody>
+      </p:sp>
+      <p:sp>
+        <p:nvSpPr>
+          <p:cNvPr id="48" name="Text 46"/>
           <p:cNvSpPr/>
           <p:nvPr/>
         </p:nvSpPr>
@@ -10792,7 +10858,7 @@
                 <a:ea typeface="Google Sans" pitchFamily="34" charset="-122"/>
                 <a:cs typeface="Google Sans" pitchFamily="34" charset="-120"/>
               </a:rPr>
-              <a:t>WS1 • 3-Pillar Multi-Tenant Reference Architecture Operating Model</a:t>
+              <a:t>WS1 • ACT III: DAY-2 PLATFORM ENGINEERING OPERATING MODEL &amp; RACI SLAs</a:t>
             </a:r>
             <a:endParaRPr lang="en-US" sz="1020" dirty="0"/>
           </a:p>
@@ -10897,7 +10963,7 @@
                 <a:ea typeface="Google Sans Display" pitchFamily="34" charset="-122"/>
                 <a:cs typeface="Google Sans Display" pitchFamily="34" charset="-120"/>
               </a:rPr>
-              <a:t>Google Cloud Multi-Tenant Agentic AI Reference Pillars</a:t>
+              <a:t>3-Pillar Day-2 Platform Ownership, SRE Reliability &amp; FinOps Governance Model</a:t>
             </a:r>
             <a:endParaRPr lang="en-US" sz="2250" dirty="0"/>
           </a:p>
@@ -11030,7 +11096,7 @@
                 <a:ea typeface="Google Sans" pitchFamily="34" charset="-122"/>
                 <a:cs typeface="Google Sans" pitchFamily="34" charset="-120"/>
               </a:rPr>
-              <a:t>IAM</a:t>
+              <a:t>SEC</a:t>
             </a:r>
             <a:endParaRPr lang="en-US" sz="1150" dirty="0"/>
           </a:p>
@@ -11069,7 +11135,7 @@
                 <a:ea typeface="Google Sans" pitchFamily="34" charset="-122"/>
                 <a:cs typeface="Google Sans" pitchFamily="34" charset="-120"/>
               </a:rPr>
-              <a:t>Pillar 1: Cryptographic</a:t>
+              <a:t>Pillar 1: Cloud Security</a:t>
             </a:r>
             <a:endParaRPr lang="en-US" sz="1480" dirty="0"/>
           </a:p>
@@ -11086,7 +11152,7 @@
                 <a:ea typeface="Google Sans" pitchFamily="34" charset="-122"/>
                 <a:cs typeface="Google Sans" pitchFamily="34" charset="-120"/>
               </a:rPr>
-              <a:t>Identity &amp; Edge Context</a:t>
+              <a:t>&amp; IAM Platform Team</a:t>
             </a:r>
             <a:endParaRPr lang="en-US" sz="1480" dirty="0"/>
           </a:p>
@@ -11145,7 +11211,7 @@
                 <a:ea typeface="Roboto" pitchFamily="34" charset="-122"/>
                 <a:cs typeface="Roboto" pitchFamily="34" charset="-120"/>
               </a:rPr>
-              <a:t>Strip client-supplied X-Tenant-Id headers at Cloud Armor edge</a:t>
+              <a:t>Owns Cloud Armor L7 WAF rules, IAP OIDC &amp; IAM STS (RFC 8693/9449)</a:t>
             </a:r>
             <a:endParaRPr lang="en-US" sz="1120" dirty="0"/>
           </a:p>
@@ -11204,7 +11270,7 @@
                 <a:ea typeface="Roboto" pitchFamily="34" charset="-122"/>
                 <a:cs typeface="Roboto" pitchFamily="34" charset="-120"/>
               </a:rPr>
-              <a:t>Exchange OIDC JWTs via IAM STS (RFC 8693) + DPoP (RFC 9449)</a:t>
+              <a:t>Governs VPC-SC perimeters, IAM PAB &amp; Cloud KMS CMEK key rotation</a:t>
             </a:r>
             <a:endParaRPr lang="en-US" sz="1120" dirty="0"/>
           </a:p>
@@ -11263,7 +11329,7 @@
                 <a:ea typeface="Roboto" pitchFamily="34" charset="-122"/>
                 <a:cs typeface="Roboto" pitchFamily="34" charset="-120"/>
               </a:rPr>
-              <a:t>Propagate immutable TenantContext across all 5 runtime hops</a:t>
+              <a:t>Enforces &lt;60s HTTP 423 CMEK revocation &amp; SCC threat response SLAs</a:t>
             </a:r>
             <a:endParaRPr lang="en-US" sz="1120" dirty="0"/>
           </a:p>
@@ -11396,7 +11462,7 @@
                 <a:ea typeface="Google Sans" pitchFamily="34" charset="-122"/>
                 <a:cs typeface="Google Sans" pitchFamily="34" charset="-120"/>
               </a:rPr>
-              <a:t>MEM</a:t>
+              <a:t>SRE</a:t>
             </a:r>
             <a:endParaRPr lang="en-US" sz="1150" dirty="0"/>
           </a:p>
@@ -11435,7 +11501,7 @@
                 <a:ea typeface="Google Sans" pitchFamily="34" charset="-122"/>
                 <a:cs typeface="Google Sans" pitchFamily="34" charset="-120"/>
               </a:rPr>
-              <a:t>Pillar 2: Scoped Memory</a:t>
+              <a:t>Pillar 2: Agent Runtime</a:t>
             </a:r>
             <a:endParaRPr lang="en-US" sz="1480" dirty="0"/>
           </a:p>
@@ -11452,7 +11518,7 @@
                 <a:ea typeface="Google Sans" pitchFamily="34" charset="-122"/>
                 <a:cs typeface="Google Sans" pitchFamily="34" charset="-120"/>
               </a:rPr>
-              <a:t>&amp; Reasoning Guardrails</a:t>
+              <a:t>&amp; Data Reliability SRE</a:t>
             </a:r>
             <a:endParaRPr lang="en-US" sz="1480" dirty="0"/>
           </a:p>
@@ -11511,7 +11577,7 @@
                 <a:ea typeface="Roboto" pitchFamily="34" charset="-122"/>
                 <a:cs typeface="Roboto" pitchFamily="34" charset="-120"/>
               </a:rPr>
-              <a:t>Filter Agent Engine Registry (ARD) discovery by tenant ACL</a:t>
+              <a:t>Operates ADK 2.0 runtime_pipeline.py (80% shared core) &amp; ARD ACLs</a:t>
             </a:r>
             <a:endParaRPr lang="en-US" sz="1120" dirty="0"/>
           </a:p>
@@ -11570,7 +11636,7 @@
                 <a:ea typeface="Roboto" pitchFamily="34" charset="-122"/>
                 <a:cs typeface="Roboto" pitchFamily="34" charset="-120"/>
               </a:rPr>
-              <a:t>Isolate L1–L5 memory under /tenants/{id}/namespaces/*</a:t>
+              <a:t>Manages Memorystore Valkey (120/600 RPM) &amp; AlloyDB RLS policies</a:t>
             </a:r>
             <a:endParaRPr lang="en-US" sz="1120" dirty="0"/>
           </a:p>
@@ -11629,7 +11695,7 @@
                 <a:ea typeface="Roboto" pitchFamily="34" charset="-122"/>
                 <a:cs typeface="Roboto" pitchFamily="34" charset="-120"/>
               </a:rPr>
-              <a:t>Enforce Model Armor, NLC gates &amp; Cloud SDP PII redaction</a:t>
+              <a:t>Executes Pattern C 3-phase SHADOW_SYNC live migrations (0ms lag)</a:t>
             </a:r>
             <a:endParaRPr lang="en-US" sz="1120" dirty="0"/>
           </a:p>
@@ -11762,7 +11828,7 @@
                 <a:ea typeface="Google Sans" pitchFamily="34" charset="-122"/>
                 <a:cs typeface="Google Sans" pitchFamily="34" charset="-120"/>
               </a:rPr>
-              <a:t>RLS</a:t>
+              <a:t>FIN</a:t>
             </a:r>
             <a:endParaRPr lang="en-US" sz="1150" dirty="0"/>
           </a:p>
@@ -11801,7 +11867,7 @@
                 <a:ea typeface="Google Sans" pitchFamily="34" charset="-122"/>
                 <a:cs typeface="Google Sans" pitchFamily="34" charset="-120"/>
               </a:rPr>
-              <a:t>Pillar 3: Data Isolation</a:t>
+              <a:t>Pillar 3: FinOps, Billing</a:t>
             </a:r>
             <a:endParaRPr lang="en-US" sz="1480" dirty="0"/>
           </a:p>
@@ -11818,7 +11884,7 @@
                 <a:ea typeface="Google Sans" pitchFamily="34" charset="-122"/>
                 <a:cs typeface="Google Sans" pitchFamily="34" charset="-120"/>
               </a:rPr>
-              <a:t>&amp; Zero-PII FinOps</a:t>
+              <a:t>&amp; CI/CD Release Gate</a:t>
             </a:r>
             <a:endParaRPr lang="en-US" sz="1480" dirty="0"/>
           </a:p>
@@ -11877,7 +11943,7 @@
                 <a:ea typeface="Roboto" pitchFamily="34" charset="-122"/>
                 <a:cs typeface="Roboto" pitchFamily="34" charset="-120"/>
               </a:rPr>
-              <a:t>Bind AlloyDB FORCE ROW LEVEL SECURITY to session tenant_id</a:t>
+              <a:t>Audits Gemini 2.5 Pro 32k prefix cache hit ratio (&gt;88% target SLA)</a:t>
             </a:r>
             <a:endParaRPr lang="en-US" sz="1120" dirty="0"/>
           </a:p>
@@ -11936,7 +12002,7 @@
                 <a:ea typeface="Roboto" pitchFamily="34" charset="-122"/>
                 <a:cs typeface="Roboto" pitchFamily="34" charset="-120"/>
               </a:rPr>
-              <a:t>Capture 90% Gemini 2.5 Pro shared prefix cache savings</a:t>
+              <a:t>Reconciles zero-PII BigQuery OTel token &amp; SKU chargeback ledgers</a:t>
             </a:r>
             <a:endParaRPr lang="en-US" sz="1120" dirty="0"/>
           </a:p>
@@ -11995,7 +12061,7 @@
                 <a:ea typeface="Roboto" pitchFamily="34" charset="-122"/>
                 <a:cs typeface="Roboto" pitchFamily="34" charset="-120"/>
               </a:rPr>
-              <a:t>Stream SHA-256 hashed OTel spans to BigQuery chargeback</a:t>
+              <a:t>Gates every PR merge on 12/12 forensic &amp; 20/20 simulation checks</a:t>
             </a:r>
             <a:endParaRPr lang="en-US" sz="1120" dirty="0"/>
           </a:p>
@@ -12048,7 +12114,7 @@
                 <a:ea typeface="Roboto" pitchFamily="34" charset="-122"/>
                 <a:cs typeface="Roboto" pitchFamily="34" charset="-120"/>
               </a:rPr>
-              <a:t>Workstream 1 Operating Model  •  Identity &amp; Edge Context + Scoped Memory &amp; Guardrails + Data Isolation &amp; FinOps  •  </a:t>
+              <a:t>Workstream 1 Day-2 Operating Model  •  Security &amp; IAM Ownership + Agent Runtime SRE + FinOps &amp; 20/20 CI/CD Governance  •  </a:t>
             </a:r>
             <a:pPr algn="l" indent="0" marL="0">
               <a:buNone/>
@@ -12437,7 +12503,7 @@
                 <a:ea typeface="Google Sans" pitchFamily="34" charset="-122"/>
                 <a:cs typeface="Google Sans" pitchFamily="34" charset="-120"/>
               </a:rPr>
-              <a:t>What's next — Series Navigation &amp; Engineering Deliverables</a:t>
+              <a:t>ACT III • 5-WORKSTREAM SERIES CONTINUITY &amp; ENGINEERING DELIVERABLES</a:t>
             </a:r>
             <a:endParaRPr lang="en-US" sz="1020" dirty="0"/>
           </a:p>
@@ -12542,7 +12608,7 @@
                 <a:ea typeface="Google Sans" pitchFamily="34" charset="-122"/>
                 <a:cs typeface="Google Sans" pitchFamily="34" charset="-120"/>
               </a:rPr>
-              <a:t>What's next — Series Navigation &amp; Engineering Deliverables</a:t>
+              <a:t>Series Navigation &amp; Engineering Deliverables</a:t>
             </a:r>
             <a:endParaRPr lang="en-US" sz="1900" dirty="0"/>
           </a:p>
@@ -12581,7 +12647,7 @@
                 <a:ea typeface="Roboto" pitchFamily="34" charset="-122"/>
                 <a:cs typeface="Roboto" pitchFamily="34" charset="-120"/>
               </a:rPr>
-              <a:t>Sequenced engineering action items, assigned platform owners, and production verification gates.</a:t>
+              <a:t>Sequenced engineering action items, runnable codebase file paths, assigned platform owners, and CI/CD release gates.</a:t>
             </a:r>
             <a:endParaRPr lang="en-US" sz="1000" dirty="0"/>
           </a:p>
@@ -12728,7 +12794,7 @@
                 <a:ea typeface="Google Sans" pitchFamily="34" charset="-122"/>
                 <a:cs typeface="Google Sans" pitchFamily="34" charset="-120"/>
               </a:rPr>
-              <a:t>Enforce Cryptographic Context Across All 5 Hops</a:t>
+              <a:t>Shared 5-Hop ADK 2.0 Core Engine (All Patterns)</a:t>
             </a:r>
             <a:endParaRPr lang="en-US" sz="1040" dirty="0"/>
           </a:p>
@@ -12787,7 +12853,7 @@
                 <a:ea typeface="Roboto" pitchFamily="34" charset="-122"/>
                 <a:cs typeface="Roboto" pitchFamily="34" charset="-120"/>
               </a:rPr>
-              <a:t>Database row filters alone cannot secure agentic AI; tenant identity must govern ingress, tool discovery, memory namespaces, safety guardrails, and SQL RLS.</a:t>
+              <a:t>Deploy core-cymbal-agent/ (models.py, runtime_pipeline.py, tenant_profiles.py) once to enforce Hops 1–5 across Pooled, Siloed, and Hybrid tiers with 80% code reuse.</a:t>
             </a:r>
             <a:endParaRPr lang="en-US" sz="900" dirty="0"/>
           </a:p>
@@ -12873,7 +12939,7 @@
                 <a:ea typeface="Google Sans" pitchFamily="34" charset="-122"/>
                 <a:cs typeface="Google Sans" pitchFamily="34" charset="-120"/>
               </a:rPr>
-              <a:t>Cloud Stack: Hops 1–5: Cloud Armor • IAP • Agent Engine Registry • Valkey • Model Armor • AlloyDB
+              <a:t>Cloud Stack: core-cymbal-agent/runtime_pipeline.py • models.py • tenant_profiles.py
 </a:t>
             </a:r>
             <a:pPr indent="0" marL="0">
@@ -12888,7 +12954,7 @@
                 <a:ea typeface="Roboto" pitchFamily="34" charset="-122"/>
                 <a:cs typeface="Roboto" pitchFamily="34" charset="-120"/>
               </a:rPr>
-              <a:t>Target &amp; SLA: Zero Trust End-to-End: Every Hop Verifies Signed TenantSecurityContext</a:t>
+              <a:t>Target &amp; SLA: 80% Shared Application Code • Hops 1–5 Enforced Identically Across A, B &amp; C</a:t>
             </a:r>
             <a:endParaRPr lang="en-US" sz="750" dirty="0"/>
           </a:p>
@@ -12949,7 +13015,7 @@
                 <a:ea typeface="Google Sans" pitchFamily="34" charset="-122"/>
                 <a:cs typeface="Google Sans" pitchFamily="34" charset="-120"/>
               </a:rPr>
-              <a:t>Owner: Platform Architecture  •  Mandate 1: 5-Hop Defense-in-Depth</a:t>
+              <a:t>Owner: Platform Architecture  •  Deliverable 1: Shared ADK Core</a:t>
             </a:r>
             <a:endParaRPr lang="en-US" sz="750" dirty="0"/>
           </a:p>
@@ -13096,7 +13162,7 @@
                 <a:ea typeface="Google Sans" pitchFamily="34" charset="-122"/>
                 <a:cs typeface="Google Sans" pitchFamily="34" charset="-120"/>
               </a:rPr>
-              <a:t>Align Isolation Topology to Regulatory &amp; Margin Requirements</a:t>
+              <a:t>Proceed to Workstream 2 — Pattern A High-Density Pooled ($42/mo)</a:t>
             </a:r>
             <a:endParaRPr lang="en-US" sz="1040" dirty="0"/>
           </a:p>
@@ -13155,7 +13221,7 @@
                 <a:ea typeface="Roboto" pitchFamily="34" charset="-122"/>
                 <a:cs typeface="Roboto" pitchFamily="34" charset="-120"/>
               </a:rPr>
-              <a:t>Deploy Pattern A ($42/mo) for commercial scale, Pattern B ($1,850/mo) for regulated sovereignty, and Pattern C for multi-tier SaaS portfolios.</a:t>
+              <a:t>Provision workstream-2-pattern-a-pooled/2.6-terraform-starter/ and run 2.5-breach-simulation-suite/run_breach_simulations.py (10/10 breach tests PASS).</a:t>
             </a:r>
             <a:endParaRPr lang="en-US" sz="900" dirty="0"/>
           </a:p>
@@ -13241,7 +13307,7 @@
                 <a:ea typeface="Google Sans" pitchFamily="34" charset="-122"/>
                 <a:cs typeface="Google Sans" pitchFamily="34" charset="-120"/>
               </a:rPr>
-              <a:t>Cloud Stack: Pattern A ($42/mo) • Pattern B ($1,850/mo) • Pattern C (Hybrid PSC Router)
+              <a:t>Cloud Stack: workstream-2-pattern-a-pooled/2.6-terraform-starter/ • run_breach_simulations.py
 </a:t>
             </a:r>
             <a:pPr indent="0" marL="0">
@@ -13256,7 +13322,7 @@
                 <a:ea typeface="Roboto" pitchFamily="34" charset="-122"/>
                 <a:cs typeface="Roboto" pitchFamily="34" charset="-120"/>
               </a:rPr>
-              <a:t>Target &amp; SLA: Matches Infrastructure Unit Cost Directly to Customer Contract ACV &amp; Compliance</a:t>
+              <a:t>Target &amp; SLA: $42/mo Pooled Floor • 84.7% Net Token Savings • 10/10 Red-Team Simulations PASS</a:t>
             </a:r>
             <a:endParaRPr lang="en-US" sz="750" dirty="0"/>
           </a:p>
@@ -13317,7 +13383,7 @@
                 <a:ea typeface="Google Sans" pitchFamily="34" charset="-122"/>
                 <a:cs typeface="Google Sans" pitchFamily="34" charset="-120"/>
               </a:rPr>
-              <a:t>Owner: Cloud Security &amp; IAM  •  Mandate 2: Tiered Isolation Economics</a:t>
+              <a:t>Owner: Cloud Security &amp; IAM  •  Next: WS2 Pattern A (Pooled)</a:t>
             </a:r>
             <a:endParaRPr lang="en-US" sz="750" dirty="0"/>
           </a:p>
@@ -13464,7 +13530,7 @@
                 <a:ea typeface="Google Sans" pitchFamily="34" charset="-122"/>
                 <a:cs typeface="Google Sans" pitchFamily="34" charset="-120"/>
               </a:rPr>
-              <a:t>Maintain a Single 80% Reusable Agent Codebase</a:t>
+              <a:t>Proceed to Workstream 3 — Pattern B Zero-Trust Sovereign Silos ($1,850/mo)</a:t>
             </a:r>
             <a:endParaRPr lang="en-US" sz="1040" dirty="0"/>
           </a:p>
@@ -13523,7 +13589,7 @@
                 <a:ea typeface="Roboto" pitchFamily="34" charset="-122"/>
                 <a:cs typeface="Roboto" pitchFamily="34" charset="-120"/>
               </a:rPr>
-              <a:t>Parameterize isolation boundaries via declarative Firestore profiles and Terraform modules rather than forking separate application codebases.</a:t>
+              <a:t>Provision workstream-3-pattern-b-siloed/3.6-terraform-silo-blueprint/ (VPC-SC, IAM PAB, CMEK) and run run_silo_security_tests.py (6/6 PASS).</a:t>
             </a:r>
             <a:endParaRPr lang="en-US" sz="900" dirty="0"/>
           </a:p>
@@ -13609,7 +13675,7 @@
                 <a:ea typeface="Google Sans" pitchFamily="34" charset="-122"/>
                 <a:cs typeface="Google Sans" pitchFamily="34" charset="-120"/>
               </a:rPr>
-              <a:t>Cloud Stack: core-cymbal-agent/ (Python ADK 2.0) + Terraform Blueprints (2.6, 3.6, 4.6)
+              <a:t>Cloud Stack: workstream-3-pattern-b-siloed/3.6-terraform-silo-blueprint/ • run_silo_security_tests.py
 </a:t>
             </a:r>
             <a:pPr indent="0" marL="0">
@@ -13624,7 +13690,7 @@
                 <a:ea typeface="Roboto" pitchFamily="34" charset="-122"/>
                 <a:cs typeface="Roboto" pitchFamily="34" charset="-120"/>
               </a:rPr>
-              <a:t>Target &amp; SLA: Zero Codebase Forking • Tier Promotion Becomes a Declarative Metadata Update</a:t>
+              <a:t>Target &amp; SLA: $1,850/mo Dedicated Project + VPC-SC + &lt;60s HTTP 423 CMEK Kill-Switch (6/6 PASS)</a:t>
             </a:r>
             <a:endParaRPr lang="en-US" sz="750" dirty="0"/>
           </a:p>
@@ -13685,7 +13751,7 @@
                 <a:ea typeface="Google Sans" pitchFamily="34" charset="-122"/>
                 <a:cs typeface="Google Sans" pitchFamily="34" charset="-120"/>
               </a:rPr>
-              <a:t>Owner: Data &amp; FinOps SRE  •  Mandate 3: 80% Code Reusability</a:t>
+              <a:t>Owner: Data &amp; FinOps SRE  •  Next: WS3 Pattern B (Siloed)</a:t>
             </a:r>
             <a:endParaRPr lang="en-US" sz="750" dirty="0"/>
           </a:p>
@@ -13832,7 +13898,7 @@
                 <a:ea typeface="Google Sans" pitchFamily="34" charset="-122"/>
                 <a:cs typeface="Google Sans" pitchFamily="34" charset="-120"/>
               </a:rPr>
-              <a:t>Capture 90% Prefix Cache Savings Without Cross-Tenant Risk</a:t>
+              <a:t>Proceed to Workstream 4 — Pattern C Dynamic Hybrid PSC &amp; Live Migration</a:t>
             </a:r>
             <a:endParaRPr lang="en-US" sz="1140" dirty="0"/>
           </a:p>
@@ -13891,7 +13957,7 @@
                 <a:ea typeface="Roboto" pitchFamily="34" charset="-122"/>
                 <a:cs typeface="Roboto" pitchFamily="34" charset="-120"/>
               </a:rPr>
-              <a:t>Bind Gemini 2.5 Pro ContextCacheConfig strictly to immutable platform instructions while isolating tenant episodic state in L1–L5 Memory Bank.</a:t>
+              <a:t>Provision workstream-4-pattern-c-hybrid/4.6-terraform-hybrid-psc-blueprint/ (/28 PSC NAT) and run run_tier_migration_suite.py (4/4 PASS, 0ms lag).</a:t>
             </a:r>
             <a:endParaRPr lang="en-US" sz="980" dirty="0"/>
           </a:p>
@@ -13977,7 +14043,7 @@
                 <a:ea typeface="Google Sans" pitchFamily="34" charset="-122"/>
                 <a:cs typeface="Google Sans" pitchFamily="34" charset="-120"/>
               </a:rPr>
-              <a:t>Cloud Stack: Gemini 2.5 Pro ContextCacheConfig (32k Tokens) + Scoped L1–L5 Memory Bank
+              <a:t>Cloud Stack: workstream-4-pattern-c-hybrid/4.6-terraform-hybrid-psc-blueprint/ • run_tier_migration_suite.py
 </a:t>
             </a:r>
             <a:pPr indent="0" marL="0">
@@ -13992,7 +14058,7 @@
                 <a:ea typeface="Roboto" pitchFamily="34" charset="-122"/>
                 <a:cs typeface="Roboto" pitchFamily="34" charset="-120"/>
               </a:rPr>
-              <a:t>Target &amp; SLA: 84.7% Net Per-Turn Token Savings with 0 Cross-Tenant Prompt Cache Bleed</a:t>
+              <a:t>Target &amp; SLA: 74% Portfolio TCO Savings • Unidirectional PSC • 0ms Live Tier Promotion (4/4 PASS)</a:t>
             </a:r>
             <a:endParaRPr lang="en-US" sz="750" dirty="0"/>
           </a:p>
@@ -14053,7 +14119,7 @@
                 <a:ea typeface="Google Sans" pitchFamily="34" charset="-122"/>
                 <a:cs typeface="Google Sans" pitchFamily="34" charset="-120"/>
               </a:rPr>
-              <a:t>Owner: Tenant Onboarding  •  Mandate 4: Safe FinOps Caching</a:t>
+              <a:t>Owner: Tenant Onboarding  •  Next: WS4 Pattern C (Hybrid)</a:t>
             </a:r>
             <a:endParaRPr lang="en-US" sz="750" dirty="0"/>
           </a:p>
@@ -14200,7 +14266,7 @@
                 <a:ea typeface="Google Sans" pitchFamily="34" charset="-122"/>
                 <a:cs typeface="Google Sans" pitchFamily="34" charset="-120"/>
               </a:rPr>
-              <a:t>Validate Every Release Against Automated Red-Team Gates</a:t>
+              <a:t>Proceed to Workstream 5 — Executive Decision Guide &amp; CI/CD Certification</a:t>
             </a:r>
             <a:endParaRPr lang="en-US" sz="1140" dirty="0"/>
           </a:p>
@@ -14259,7 +14325,7 @@
                 <a:ea typeface="Roboto" pitchFamily="34" charset="-122"/>
                 <a:cs typeface="Roboto" pitchFamily="34" charset="-120"/>
               </a:rPr>
-              <a:t>Execute the 20-assertion verification suite (10 Pattern A breach tests, 6 Pattern B silo tests, 4 Pattern C migration tests) in CI/CD.</a:t>
+              <a:t>Apply the 2-Question Topology Selector (5.1-pattern-comparison-and-decision-guide.md) and execute scripts/run_deep_forensic_audit.py (12/12 PASS).</a:t>
             </a:r>
             <a:endParaRPr lang="en-US" sz="980" dirty="0"/>
           </a:p>
@@ -14345,7 +14411,7 @@
                 <a:ea typeface="Google Sans" pitchFamily="34" charset="-122"/>
                 <a:cs typeface="Google Sans" pitchFamily="34" charset="-120"/>
               </a:rPr>
-              <a:t>Cloud Stack: scripts/run_deep_forensic_audit.py • 12/12 Forensic Gates • 20/20 Simulations
+              <a:t>Cloud Stack: workstream-5-wrap-up-and-backlog/5.1-pattern-comparison-and-decision-guide.md • scripts/run_deep_forensic_audit.py
 </a:t>
             </a:r>
             <a:pPr indent="0" marL="0">
@@ -14360,7 +14426,7 @@
                 <a:ea typeface="Roboto" pitchFamily="34" charset="-122"/>
                 <a:cs typeface="Roboto" pitchFamily="34" charset="-120"/>
               </a:rPr>
-              <a:t>Target &amp; SLA: Continuous Automated Compliance Receipts Logged in BigQuery OTel Sink</a:t>
+              <a:t>Target &amp; SLA: 2-Question CISO/CFO Topology Selector + 12/12 Automated CI/CD Forensic Gate PASS</a:t>
             </a:r>
             <a:endParaRPr lang="en-US" sz="750" dirty="0"/>
           </a:p>
@@ -14421,7 +14487,7 @@
                 <a:ea typeface="Google Sans" pitchFamily="34" charset="-122"/>
                 <a:cs typeface="Google Sans" pitchFamily="34" charset="-120"/>
               </a:rPr>
-              <a:t>Owner: Governance &amp; CISO  •  Mandate 5: Continuous Verification</a:t>
+              <a:t>Owner: Governance &amp; CISO  •  Next: WS5 Decision Guide &amp; Audit</a:t>
             </a:r>
             <a:endParaRPr lang="en-US" sz="750" dirty="0"/>
           </a:p>
@@ -14548,7 +14614,7 @@
                 <a:ea typeface="Roboto" pitchFamily="34" charset="-122"/>
                 <a:cs typeface="Roboto" pitchFamily="34" charset="-120"/>
               </a:rPr>
-              <a:t>Review the 14-slide 3-Act executive architecture deck, execute python3 -B scripts/run_deep_forensic_audit.py, and proceed to Workstream 2 (Pattern A Pooled Architecture).</a:t>
+              <a:t>Series Navigation &amp; Deliverable Kit  •  WS1 Reference Baseline → WS2 Pooled ($42/mo) → WS3 Sovereign Silos ($1,850/mo) → WS4 Hybrid PSC → WS5 Decision Guide</a:t>
             </a:r>
             <a:endParaRPr lang="en-US" sz="880" dirty="0"/>
           </a:p>
@@ -15508,7 +15574,7 @@
             <a:avLst/>
           </a:prstGeom>
           <a:solidFill>
-            <a:srgbClr val="EA4335"/>
+            <a:srgbClr val="34A853"/>
           </a:solidFill>
           <a:ln/>
         </p:spPr>
@@ -15530,7 +15596,7 @@
             </a:avLst>
           </a:prstGeom>
           <a:solidFill>
-            <a:srgbClr val="FCE8E6"/>
+            <a:srgbClr val="E6F4EA"/>
           </a:solidFill>
           <a:ln/>
         </p:spPr>
@@ -15562,7 +15628,7 @@
             <a:r>
               <a:rPr lang="en-US" sz="600" b="1" dirty="0">
                 <a:solidFill>
-                  <a:srgbClr val="A50E0E"/>
+                  <a:srgbClr val="0D652D"/>
                 </a:solidFill>
                 <a:latin typeface="Google Sans" pitchFamily="34" charset="0"/>
                 <a:ea typeface="Google Sans" pitchFamily="34" charset="-122"/>
@@ -15880,7 +15946,7 @@
             <a:avLst/>
           </a:prstGeom>
           <a:solidFill>
-            <a:srgbClr val="34A853"/>
+            <a:srgbClr val="EA4335"/>
           </a:solidFill>
           <a:ln/>
         </p:spPr>
@@ -15902,7 +15968,7 @@
             </a:avLst>
           </a:prstGeom>
           <a:solidFill>
-            <a:srgbClr val="E6F4EA"/>
+            <a:srgbClr val="FCE8E6"/>
           </a:solidFill>
           <a:ln/>
         </p:spPr>
@@ -15934,7 +16000,7 @@
             <a:r>
               <a:rPr lang="en-US" sz="600" b="1" dirty="0">
                 <a:solidFill>
-                  <a:srgbClr val="0D652D"/>
+                  <a:srgbClr val="A50E0E"/>
                 </a:solidFill>
                 <a:latin typeface="Google Sans" pitchFamily="34" charset="0"/>
                 <a:ea typeface="Google Sans" pitchFamily="34" charset="-122"/>
@@ -16623,7 +16689,7 @@
               <a:buNone/>
             </a:pPr>
             <a:r>
-              <a:rPr lang="en-US" sz="710" b="1" dirty="0">
+              <a:rPr lang="en-US" sz="700" b="1" dirty="0">
                 <a:solidFill>
                   <a:srgbClr val="0D652D"/>
                 </a:solidFill>
@@ -16631,9 +16697,9 @@
                 <a:ea typeface="Google Sans" pitchFamily="34" charset="-122"/>
                 <a:cs typeface="Google Sans" pitchFamily="34" charset="-120"/>
               </a:rPr>
-              <a:t>✅ 56 Editable Shapes • 23 Connectors • GCP: ramp-portal-dev</a:t>
-            </a:r>
-            <a:endParaRPr lang="en-US" sz="710" dirty="0"/>
+              <a:t>VERIFIED • 56 Editable Shapes • 23 Connectors • GCP: ramp-portal-dev</a:t>
+            </a:r>
+            <a:endParaRPr lang="en-US" sz="700" dirty="0"/>
           </a:p>
         </p:txBody>
       </p:sp>
@@ -16729,7 +16795,7 @@
                 <a:ea typeface="Arial" pitchFamily="34" charset="-122"/>
                 <a:cs typeface="Arial" pitchFamily="34" charset="-120"/>
               </a:rPr>
-              <a:t>Shared Control Plane (ramp-portal-dev / nitina-ggarwal-sandbox-647724</a:t>
+              <a:t>Shared Control Plane (ramp-portal-dev / cymbal-build-sandbox</a:t>
             </a:r>
             <a:endParaRPr lang="en-US" sz="460" dirty="0"/>
           </a:p>
@@ -21106,12 +21172,12 @@
         </p:nvSpPr>
         <p:spPr>
           <a:xfrm>
-            <a:off x="5339182" y="3353105"/>
-            <a:ext cx="760781" cy="217627"/>
+            <a:off x="5339182" y="3365906"/>
+            <a:ext cx="760781" cy="192024"/>
           </a:xfrm>
           <a:prstGeom prst="roundRect">
             <a:avLst>
-              <a:gd name="adj" fmla="val 21008"/>
+              <a:gd name="adj" fmla="val 23810"/>
             </a:avLst>
           </a:prstGeom>
           <a:solidFill>
@@ -21133,8 +21199,8 @@
         </p:nvSpPr>
         <p:spPr>
           <a:xfrm>
-            <a:off x="5357470" y="3362249"/>
-            <a:ext cx="724205" cy="199339"/>
+            <a:off x="5357470" y="3375050"/>
+            <a:ext cx="724205" cy="173736"/>
           </a:xfrm>
           <a:prstGeom prst="rect">
             <a:avLst/>
@@ -21197,12 +21263,12 @@
         </p:nvSpPr>
         <p:spPr>
           <a:xfrm>
-            <a:off x="2827325" y="4817059"/>
-            <a:ext cx="512064" cy="210312"/>
+            <a:off x="2836469" y="4833518"/>
+            <a:ext cx="493776" cy="178308"/>
           </a:xfrm>
           <a:prstGeom prst="roundRect">
             <a:avLst>
-              <a:gd name="adj" fmla="val 21739"/>
+              <a:gd name="adj" fmla="val 25641"/>
             </a:avLst>
           </a:prstGeom>
           <a:solidFill>
@@ -21224,8 +21290,8 @@
         </p:nvSpPr>
         <p:spPr>
           <a:xfrm>
-            <a:off x="2845613" y="4826203"/>
-            <a:ext cx="475488" cy="192024"/>
+            <a:off x="2854757" y="4842662"/>
+            <a:ext cx="457200" cy="160020"/>
           </a:xfrm>
           <a:prstGeom prst="rect">
             <a:avLst/>
@@ -21288,12 +21354,12 @@
         </p:nvSpPr>
         <p:spPr>
           <a:xfrm>
-            <a:off x="2744114" y="5451653"/>
-            <a:ext cx="678485" cy="210312"/>
+            <a:off x="2766060" y="5468112"/>
+            <a:ext cx="634594" cy="178308"/>
           </a:xfrm>
           <a:prstGeom prst="roundRect">
             <a:avLst>
-              <a:gd name="adj" fmla="val 21739"/>
+              <a:gd name="adj" fmla="val 25641"/>
             </a:avLst>
           </a:prstGeom>
           <a:solidFill>
@@ -21315,8 +21381,8 @@
         </p:nvSpPr>
         <p:spPr>
           <a:xfrm>
-            <a:off x="2762402" y="5460797"/>
-            <a:ext cx="641909" cy="192024"/>
+            <a:off x="2784348" y="5477256"/>
+            <a:ext cx="598018" cy="160020"/>
           </a:xfrm>
           <a:prstGeom prst="rect">
             <a:avLst/>
@@ -21379,12 +21445,12 @@
         </p:nvSpPr>
         <p:spPr>
           <a:xfrm>
-            <a:off x="5187391" y="4817059"/>
-            <a:ext cx="521208" cy="210312"/>
+            <a:off x="5201107" y="4833518"/>
+            <a:ext cx="493776" cy="178308"/>
           </a:xfrm>
           <a:prstGeom prst="roundRect">
             <a:avLst>
-              <a:gd name="adj" fmla="val 21739"/>
+              <a:gd name="adj" fmla="val 25641"/>
             </a:avLst>
           </a:prstGeom>
           <a:solidFill>
@@ -21406,8 +21472,8 @@
         </p:nvSpPr>
         <p:spPr>
           <a:xfrm>
-            <a:off x="5205679" y="4826203"/>
-            <a:ext cx="484632" cy="192024"/>
+            <a:off x="5219395" y="4842662"/>
+            <a:ext cx="457200" cy="160020"/>
           </a:xfrm>
           <a:prstGeom prst="rect">
             <a:avLst/>
@@ -21470,12 +21536,12 @@
         </p:nvSpPr>
         <p:spPr>
           <a:xfrm>
-            <a:off x="5108753" y="5451653"/>
-            <a:ext cx="678485" cy="210312"/>
+            <a:off x="5130698" y="5468112"/>
+            <a:ext cx="634594" cy="178308"/>
           </a:xfrm>
           <a:prstGeom prst="roundRect">
             <a:avLst>
-              <a:gd name="adj" fmla="val 21739"/>
+              <a:gd name="adj" fmla="val 25641"/>
             </a:avLst>
           </a:prstGeom>
           <a:solidFill>
@@ -21497,8 +21563,8 @@
         </p:nvSpPr>
         <p:spPr>
           <a:xfrm>
-            <a:off x="5127041" y="5460797"/>
-            <a:ext cx="641909" cy="192024"/>
+            <a:off x="5148986" y="5477256"/>
+            <a:ext cx="598018" cy="160020"/>
           </a:xfrm>
           <a:prstGeom prst="rect">
             <a:avLst/>
@@ -21561,12 +21627,12 @@
         </p:nvSpPr>
         <p:spPr>
           <a:xfrm>
-            <a:off x="1845259" y="5603443"/>
-            <a:ext cx="512064" cy="210312"/>
+            <a:off x="1853489" y="5618988"/>
+            <a:ext cx="493776" cy="178308"/>
           </a:xfrm>
           <a:prstGeom prst="roundRect">
             <a:avLst>
-              <a:gd name="adj" fmla="val 21739"/>
+              <a:gd name="adj" fmla="val 25641"/>
             </a:avLst>
           </a:prstGeom>
           <a:solidFill>
@@ -21588,8 +21654,8 @@
         </p:nvSpPr>
         <p:spPr>
           <a:xfrm>
-            <a:off x="1863547" y="5612587"/>
-            <a:ext cx="475488" cy="192024"/>
+            <a:off x="1871777" y="5628132"/>
+            <a:ext cx="457200" cy="160020"/>
           </a:xfrm>
           <a:prstGeom prst="rect">
             <a:avLst/>
@@ -21652,12 +21718,12 @@
         </p:nvSpPr>
         <p:spPr>
           <a:xfrm>
-            <a:off x="3905402" y="3353105"/>
-            <a:ext cx="738835" cy="210312"/>
+            <a:off x="3905402" y="3368650"/>
+            <a:ext cx="738835" cy="178308"/>
           </a:xfrm>
           <a:prstGeom prst="roundRect">
             <a:avLst>
-              <a:gd name="adj" fmla="val 21739"/>
+              <a:gd name="adj" fmla="val 25641"/>
             </a:avLst>
           </a:prstGeom>
           <a:solidFill>
@@ -21679,8 +21745,8 @@
         </p:nvSpPr>
         <p:spPr>
           <a:xfrm>
-            <a:off x="3923690" y="3362249"/>
-            <a:ext cx="702259" cy="192024"/>
+            <a:off x="3923690" y="3377794"/>
+            <a:ext cx="702259" cy="160020"/>
           </a:xfrm>
           <a:prstGeom prst="rect">
             <a:avLst/>
@@ -21743,12 +21809,12 @@
         </p:nvSpPr>
         <p:spPr>
           <a:xfrm>
-            <a:off x="2983687" y="3353105"/>
-            <a:ext cx="669341" cy="210312"/>
+            <a:off x="2983687" y="3368650"/>
+            <a:ext cx="669341" cy="178308"/>
           </a:xfrm>
           <a:prstGeom prst="roundRect">
             <a:avLst>
-              <a:gd name="adj" fmla="val 21739"/>
+              <a:gd name="adj" fmla="val 25641"/>
             </a:avLst>
           </a:prstGeom>
           <a:solidFill>
@@ -21770,8 +21836,8 @@
         </p:nvSpPr>
         <p:spPr>
           <a:xfrm>
-            <a:off x="3001975" y="3362249"/>
-            <a:ext cx="632765" cy="192024"/>
+            <a:off x="3001975" y="3377794"/>
+            <a:ext cx="632765" cy="160020"/>
           </a:xfrm>
           <a:prstGeom prst="rect">
             <a:avLst/>
@@ -21834,12 +21900,12 @@
         </p:nvSpPr>
         <p:spPr>
           <a:xfrm>
-            <a:off x="2541118" y="2870302"/>
-            <a:ext cx="521208" cy="210312"/>
+            <a:off x="2554834" y="2885846"/>
+            <a:ext cx="493776" cy="178308"/>
           </a:xfrm>
           <a:prstGeom prst="roundRect">
             <a:avLst>
-              <a:gd name="adj" fmla="val 21739"/>
+              <a:gd name="adj" fmla="val 25641"/>
             </a:avLst>
           </a:prstGeom>
           <a:solidFill>
@@ -21861,8 +21927,8 @@
         </p:nvSpPr>
         <p:spPr>
           <a:xfrm>
-            <a:off x="2559406" y="2879446"/>
-            <a:ext cx="484632" cy="192024"/>
+            <a:off x="2573122" y="2894990"/>
+            <a:ext cx="457200" cy="160020"/>
           </a:xfrm>
           <a:prstGeom prst="rect">
             <a:avLst/>
@@ -21925,12 +21991,12 @@
         </p:nvSpPr>
         <p:spPr>
           <a:xfrm>
-            <a:off x="1757477" y="4602175"/>
-            <a:ext cx="686714" cy="146304"/>
+            <a:off x="1757477" y="4608576"/>
+            <a:ext cx="686714" cy="132588"/>
           </a:xfrm>
           <a:prstGeom prst="roundRect">
             <a:avLst>
-              <a:gd name="adj" fmla="val 31250"/>
+              <a:gd name="adj" fmla="val 34483"/>
             </a:avLst>
           </a:prstGeom>
           <a:solidFill>
@@ -21952,8 +22018,8 @@
         </p:nvSpPr>
         <p:spPr>
           <a:xfrm>
-            <a:off x="1775765" y="4611319"/>
-            <a:ext cx="650138" cy="128016"/>
+            <a:off x="1775765" y="4617720"/>
+            <a:ext cx="650138" cy="114300"/>
           </a:xfrm>
           <a:prstGeom prst="rect">
             <a:avLst/>
@@ -21996,12 +22062,12 @@
         </p:nvSpPr>
         <p:spPr>
           <a:xfrm>
-            <a:off x="1757477" y="4810658"/>
-            <a:ext cx="686714" cy="146304"/>
+            <a:off x="1757477" y="4817059"/>
+            <a:ext cx="686714" cy="132588"/>
           </a:xfrm>
           <a:prstGeom prst="roundRect">
             <a:avLst>
-              <a:gd name="adj" fmla="val 31250"/>
+              <a:gd name="adj" fmla="val 34483"/>
             </a:avLst>
           </a:prstGeom>
           <a:solidFill>
@@ -22023,8 +22089,8 @@
         </p:nvSpPr>
         <p:spPr>
           <a:xfrm>
-            <a:off x="1775765" y="4819802"/>
-            <a:ext cx="650138" cy="128016"/>
+            <a:off x="1775765" y="4826203"/>
+            <a:ext cx="650138" cy="114300"/>
           </a:xfrm>
           <a:prstGeom prst="rect">
             <a:avLst/>
@@ -22067,12 +22133,12 @@
         </p:nvSpPr>
         <p:spPr>
           <a:xfrm>
-            <a:off x="2427732" y="2079346"/>
-            <a:ext cx="512064" cy="210312"/>
+            <a:off x="2435962" y="2094890"/>
+            <a:ext cx="495605" cy="178308"/>
           </a:xfrm>
           <a:prstGeom prst="roundRect">
             <a:avLst>
-              <a:gd name="adj" fmla="val 21739"/>
+              <a:gd name="adj" fmla="val 25641"/>
             </a:avLst>
           </a:prstGeom>
           <a:solidFill>
@@ -22094,8 +22160,8 @@
         </p:nvSpPr>
         <p:spPr>
           <a:xfrm>
-            <a:off x="2446020" y="2088490"/>
-            <a:ext cx="475488" cy="192024"/>
+            <a:off x="2454250" y="2104034"/>
+            <a:ext cx="459029" cy="160020"/>
           </a:xfrm>
           <a:prstGeom prst="rect">
             <a:avLst/>
@@ -22158,12 +22224,12 @@
         </p:nvSpPr>
         <p:spPr>
           <a:xfrm>
-            <a:off x="2427732" y="2606040"/>
-            <a:ext cx="512064" cy="210312"/>
+            <a:off x="2436876" y="2639873"/>
+            <a:ext cx="493776" cy="178308"/>
           </a:xfrm>
           <a:prstGeom prst="roundRect">
             <a:avLst>
-              <a:gd name="adj" fmla="val 21739"/>
+              <a:gd name="adj" fmla="val 25641"/>
             </a:avLst>
           </a:prstGeom>
           <a:solidFill>
@@ -22185,8 +22251,8 @@
         </p:nvSpPr>
         <p:spPr>
           <a:xfrm>
-            <a:off x="2446020" y="2615184"/>
-            <a:ext cx="475488" cy="192024"/>
+            <a:off x="2455164" y="2649017"/>
+            <a:ext cx="457200" cy="160020"/>
           </a:xfrm>
           <a:prstGeom prst="rect">
             <a:avLst/>
@@ -22249,12 +22315,12 @@
         </p:nvSpPr>
         <p:spPr>
           <a:xfrm>
-            <a:off x="3853282" y="1141171"/>
-            <a:ext cx="512064" cy="146304"/>
+            <a:off x="3862426" y="1148486"/>
+            <a:ext cx="493776" cy="132588"/>
           </a:xfrm>
           <a:prstGeom prst="roundRect">
             <a:avLst>
-              <a:gd name="adj" fmla="val 31250"/>
+              <a:gd name="adj" fmla="val 34483"/>
             </a:avLst>
           </a:prstGeom>
           <a:solidFill>
@@ -22276,8 +22342,8 @@
         </p:nvSpPr>
         <p:spPr>
           <a:xfrm>
-            <a:off x="3871570" y="1150315"/>
-            <a:ext cx="475488" cy="128016"/>
+            <a:off x="3880714" y="1157630"/>
+            <a:ext cx="457200" cy="114300"/>
           </a:xfrm>
           <a:prstGeom prst="rect">
             <a:avLst/>
@@ -22320,12 +22386,12 @@
         </p:nvSpPr>
         <p:spPr>
           <a:xfrm>
-            <a:off x="3853282" y="2719426"/>
-            <a:ext cx="512064" cy="146304"/>
+            <a:off x="3862426" y="2725826"/>
+            <a:ext cx="493776" cy="132588"/>
           </a:xfrm>
           <a:prstGeom prst="roundRect">
             <a:avLst>
-              <a:gd name="adj" fmla="val 31250"/>
+              <a:gd name="adj" fmla="val 34483"/>
             </a:avLst>
           </a:prstGeom>
           <a:solidFill>
@@ -22347,8 +22413,8 @@
         </p:nvSpPr>
         <p:spPr>
           <a:xfrm>
-            <a:off x="3871570" y="2728570"/>
-            <a:ext cx="475488" cy="128016"/>
+            <a:off x="3880714" y="2734970"/>
+            <a:ext cx="457200" cy="114300"/>
           </a:xfrm>
           <a:prstGeom prst="rect">
             <a:avLst/>
@@ -22391,12 +22457,12 @@
         </p:nvSpPr>
         <p:spPr>
           <a:xfrm>
-            <a:off x="3032150" y="1141171"/>
-            <a:ext cx="512064" cy="146304"/>
+            <a:off x="3040380" y="1148486"/>
+            <a:ext cx="493776" cy="132588"/>
           </a:xfrm>
           <a:prstGeom prst="roundRect">
             <a:avLst>
-              <a:gd name="adj" fmla="val 31250"/>
+              <a:gd name="adj" fmla="val 34483"/>
             </a:avLst>
           </a:prstGeom>
           <a:solidFill>
@@ -22418,8 +22484,8 @@
         </p:nvSpPr>
         <p:spPr>
           <a:xfrm>
-            <a:off x="3050438" y="1150315"/>
-            <a:ext cx="475488" cy="128016"/>
+            <a:off x="3058668" y="1157630"/>
+            <a:ext cx="457200" cy="114300"/>
           </a:xfrm>
           <a:prstGeom prst="rect">
             <a:avLst/>
@@ -22462,12 +22528,12 @@
         </p:nvSpPr>
         <p:spPr>
           <a:xfrm>
-            <a:off x="3032150" y="2645359"/>
-            <a:ext cx="512064" cy="146304"/>
+            <a:off x="3040380" y="2725826"/>
+            <a:ext cx="493776" cy="132588"/>
           </a:xfrm>
           <a:prstGeom prst="roundRect">
             <a:avLst>
-              <a:gd name="adj" fmla="val 31250"/>
+              <a:gd name="adj" fmla="val 34483"/>
             </a:avLst>
           </a:prstGeom>
           <a:solidFill>
@@ -22489,8 +22555,8 @@
         </p:nvSpPr>
         <p:spPr>
           <a:xfrm>
-            <a:off x="3050438" y="2654503"/>
-            <a:ext cx="475488" cy="128016"/>
+            <a:off x="3058668" y="2734970"/>
+            <a:ext cx="457200" cy="114300"/>
           </a:xfrm>
           <a:prstGeom prst="rect">
             <a:avLst/>
@@ -22961,7 +23027,7 @@
                 <a:ea typeface="Google Sans" pitchFamily="34" charset="-122"/>
                 <a:cs typeface="Google Sans" pitchFamily="34" charset="-120"/>
               </a:rPr>
-              <a:t>Executive Impact &amp; Production Verification Metrics</a:t>
+              <a:t>ACT I • EXECUTIVE SCORECARD &amp; PRODUCTION SLO BASELINE</a:t>
             </a:r>
             <a:endParaRPr lang="en-US" sz="1020" dirty="0"/>
           </a:p>
@@ -23058,7 +23124,7 @@
               <a:buNone/>
             </a:pPr>
             <a:r>
-              <a:rPr lang="en-US" sz="2000" b="1" dirty="0">
+              <a:rPr lang="en-US" sz="1950" b="1" dirty="0">
                 <a:solidFill>
                   <a:srgbClr val="3C4043"/>
                 </a:solidFill>
@@ -23066,9 +23132,9 @@
                 <a:ea typeface="Google Sans" pitchFamily="34" charset="-122"/>
                 <a:cs typeface="Google Sans" pitchFamily="34" charset="-120"/>
               </a:rPr>
-              <a:t>Executive Impact &amp; Production Verification Metrics</a:t>
-            </a:r>
-            <a:endParaRPr lang="en-US" sz="2000" dirty="0"/>
+              <a:t>Quantified Unit Economics, 90% Prefix Cache Savings &amp; 20/20 Security Verification</a:t>
+            </a:r>
+            <a:endParaRPr lang="en-US" sz="1950" dirty="0"/>
           </a:p>
         </p:txBody>
       </p:sp>
@@ -23097,7 +23163,7 @@
               <a:buNone/>
             </a:pPr>
             <a:r>
-              <a:rPr lang="en-US" sz="1050" dirty="0">
+              <a:rPr lang="en-US" sz="1020" dirty="0">
                 <a:solidFill>
                   <a:srgbClr val="5F6368"/>
                 </a:solidFill>
@@ -23105,9 +23171,9 @@
                 <a:ea typeface="Roboto" pitchFamily="34" charset="-122"/>
                 <a:cs typeface="Roboto" pitchFamily="34" charset="-120"/>
               </a:rPr>
-              <a:t>Quantified unit economics, shared Gemini 2.5 Pro prefix caching efficiency, and automated security gate verification across Google Cloud.</a:t>
-            </a:r>
-            <a:endParaRPr lang="en-US" sz="1050" dirty="0"/>
+              <a:t>Empirical production metrics certified across Pattern A ($42/mo pool), Pattern B ($1,850/mo sovereign silo), and Pattern C (hybrid PSC spokes).</a:t>
+            </a:r>
+            <a:endParaRPr lang="en-US" sz="1020" dirty="0"/>
           </a:p>
         </p:txBody>
       </p:sp>
@@ -24918,7 +24984,7 @@
                 <a:ea typeface="Google Sans" pitchFamily="34" charset="-122"/>
                 <a:cs typeface="Google Sans" pitchFamily="34" charset="-120"/>
               </a:rPr>
-              <a:t>Products used — Google Cloud Agentic AI, Security &amp; Data Stack</a:t>
+              <a:t>ACT I • GOOGLE CLOUD REFERENCE PRODUCT STACK &amp; BILL OF MATERIALS</a:t>
             </a:r>
             <a:endParaRPr lang="en-US" sz="1020" dirty="0"/>
           </a:p>
@@ -25023,7 +25089,7 @@
                 <a:ea typeface="Google Sans" pitchFamily="34" charset="-122"/>
                 <a:cs typeface="Google Sans" pitchFamily="34" charset="-120"/>
               </a:rPr>
-              <a:t>Products used — Google Cloud Agentic AI, Security &amp; Data Stack</a:t>
+              <a:t>Google Cloud Agentic AI, Security &amp; Data Stack</a:t>
             </a:r>
             <a:endParaRPr lang="en-US" sz="1900" dirty="0"/>
           </a:p>
@@ -25062,7 +25128,7 @@
                 <a:ea typeface="Roboto" pitchFamily="34" charset="-122"/>
                 <a:cs typeface="Roboto" pitchFamily="34" charset="-120"/>
               </a:rPr>
-              <a:t>Structured Google Cloud reference components, runtime isolation boundaries, and target SLAs.</a:t>
+              <a:t>Structured Google Cloud reference SKUs, runtime isolation boundaries, and production SLAs.</a:t>
             </a:r>
             <a:endParaRPr lang="en-US" sz="1000" dirty="0"/>
           </a:p>
@@ -25268,7 +25334,7 @@
                 <a:ea typeface="Roboto" pitchFamily="34" charset="-122"/>
                 <a:cs typeface="Roboto" pitchFamily="34" charset="-120"/>
               </a:rPr>
-              <a:t>Vertex AI Agent Engine (ADK 2.0 runtime, Agent Registry &amp; L1–L5 Memory Bank), Gemini 2.5 Pro with ContextCacheConfig (90% shared prefix discount), Vertex AI Model Garden (Gemini 2.5 Pro (Dedicated PT)), and Gemma 3 (27B) on private GKE.</a:t>
+              <a:t>Vertex AI Agent Engine (ADK 2.0 runtime, Agent Registry &amp; L1–L5 Memory Bank), Gemini 2.5 Pro with ContextCacheConfig (90% shared prefix discount), Vertex AI Model Garden (Dedicated Provisioned Throughput), and Gemma 3 (27B) on private GKE.</a:t>
             </a:r>
             <a:endParaRPr lang="en-US" sz="980" dirty="0"/>
           </a:p>
@@ -25354,7 +25420,7 @@
                 <a:ea typeface="Google Sans" pitchFamily="34" charset="-122"/>
                 <a:cs typeface="Google Sans" pitchFamily="34" charset="-120"/>
               </a:rPr>
-              <a:t>Cloud Stack: Vertex AI Agent Engine (ADK 2.0) • Gemini 2.5 Pro (ContextCacheConfig) • Gemini 2.5 Pro • Gemma 3 27B
+              <a:t>Cloud Stack: Vertex AI Agent Engine (ADK 2.0) • Gemini 2.5 Pro (32k Prefix Cache &amp; Dedicated PT) • Gemma 3 27B
 </a:t>
             </a:r>
             <a:pPr indent="0" marL="0">
@@ -34887,7 +34953,7 @@
                 <a:ea typeface="Google Sans" pitchFamily="34" charset="-122"/>
                 <a:cs typeface="Google Sans" pitchFamily="34" charset="-120"/>
               </a:rPr>
-              <a:t>WS1 • 5-Hop Context Propagation &amp; Closed-Loop OTel Governance Flow</a:t>
+              <a:t>WS1 • ACT II: DETERMINISTIC FAIL-CLOSED CIRCUIT BREAKERS &amp; FEEDBACK LOOP</a:t>
             </a:r>
             <a:endParaRPr lang="en-US" sz="1020" dirty="0"/>
           </a:p>
@@ -34992,7 +35058,7 @@
                 <a:ea typeface="Google Sans Display" pitchFamily="34" charset="-122"/>
                 <a:cs typeface="Google Sans Display" pitchFamily="34" charset="-120"/>
               </a:rPr>
-              <a:t>End-to-end tenant context propagation and closed-loop telemetry flow</a:t>
+              <a:t>Fail-Closed Exception Gates (HTTP 401/403/422/423/429) &amp; Closed-Loop OTel Governance</a:t>
             </a:r>
             <a:endParaRPr lang="en-US" sz="2050" dirty="0"/>
           </a:p>
@@ -35053,7 +35119,7 @@
                 <a:ea typeface="Google Sans" pitchFamily="34" charset="-122"/>
                 <a:cs typeface="Google Sans" pitchFamily="34" charset="-120"/>
               </a:rPr>
-              <a:t>Edge WAF &amp;</a:t>
+              <a:t>Hop 1–2 Gate:</a:t>
             </a:r>
             <a:endParaRPr lang="en-US" sz="1300" dirty="0"/>
           </a:p>
@@ -35070,7 +35136,7 @@
                 <a:ea typeface="Google Sans" pitchFamily="34" charset="-122"/>
                 <a:cs typeface="Google Sans" pitchFamily="34" charset="-120"/>
               </a:rPr>
-              <a:t>IAM STS (Hop 1)</a:t>
+              <a:t>OBO/DPoP &amp; ARD</a:t>
             </a:r>
             <a:endParaRPr lang="en-US" sz="1300" dirty="0"/>
           </a:p>
@@ -35131,7 +35197,7 @@
                 <a:ea typeface="Google Sans" pitchFamily="34" charset="-122"/>
                 <a:cs typeface="Google Sans" pitchFamily="34" charset="-120"/>
               </a:rPr>
-              <a:t>ARD &amp; Memory</a:t>
+              <a:t>Hop 3 Gate:</a:t>
             </a:r>
             <a:endParaRPr lang="en-US" sz="1300" dirty="0"/>
           </a:p>
@@ -35148,7 +35214,7 @@
                 <a:ea typeface="Google Sans" pitchFamily="34" charset="-122"/>
                 <a:cs typeface="Google Sans" pitchFamily="34" charset="-120"/>
               </a:rPr>
-              <a:t>Scope (Hops 2–3)</a:t>
+              <a:t>Valkey RPM Clamp</a:t>
             </a:r>
             <a:endParaRPr lang="en-US" sz="1300" dirty="0"/>
           </a:p>
@@ -35209,7 +35275,7 @@
                 <a:ea typeface="Google Sans" pitchFamily="34" charset="-122"/>
                 <a:cs typeface="Google Sans" pitchFamily="34" charset="-120"/>
               </a:rPr>
-              <a:t>Model Armor &amp;</a:t>
+              <a:t>Hop 4 Gate:</a:t>
             </a:r>
             <a:endParaRPr lang="en-US" sz="1300" dirty="0"/>
           </a:p>
@@ -35226,7 +35292,7 @@
                 <a:ea typeface="Google Sans" pitchFamily="34" charset="-122"/>
                 <a:cs typeface="Google Sans" pitchFamily="34" charset="-120"/>
               </a:rPr>
-              <a:t>90% Cache (Hop 4)</a:t>
+              <a:t>Model Armor &amp; SDP</a:t>
             </a:r>
             <a:endParaRPr lang="en-US" sz="1300" dirty="0"/>
           </a:p>
@@ -35287,7 +35353,7 @@
                 <a:ea typeface="Google Sans" pitchFamily="34" charset="-122"/>
                 <a:cs typeface="Google Sans" pitchFamily="34" charset="-120"/>
               </a:rPr>
-              <a:t>AlloyDB RLS &amp;</a:t>
+              <a:t>Hop 5 Gate:</a:t>
             </a:r>
             <a:endParaRPr lang="en-US" sz="1300" dirty="0"/>
           </a:p>
@@ -35304,7 +35370,7 @@
                 <a:ea typeface="Google Sans" pitchFamily="34" charset="-122"/>
                 <a:cs typeface="Google Sans" pitchFamily="34" charset="-120"/>
               </a:rPr>
-              <a:t>MCP Hub (Hop 5)</a:t>
+              <a:t>RLS, CMEK &amp; OTel</a:t>
             </a:r>
             <a:endParaRPr lang="en-US" sz="1300" dirty="0"/>
           </a:p>
@@ -35370,7 +35436,7 @@
                 <a:ea typeface="Roboto" pitchFamily="34" charset="-122"/>
                 <a:cs typeface="Roboto" pitchFamily="34" charset="-120"/>
               </a:rPr>
-              <a:t>1. Validates OIDC JWT</a:t>
+              <a:t>1. Strips spoofed headers;</a:t>
             </a:r>
             <a:endParaRPr lang="en-US" sz="860" dirty="0"/>
           </a:p>
@@ -35387,7 +35453,24 @@
                 <a:ea typeface="Roboto" pitchFamily="34" charset="-122"/>
                 <a:cs typeface="Roboto" pitchFamily="34" charset="-120"/>
               </a:rPr>
-              <a:t>&amp; RFC 9449 DPoP</a:t>
+              <a:t>blocks cross-tenant ARD</a:t>
+            </a:r>
+            <a:endParaRPr lang="en-US" sz="860" dirty="0"/>
+          </a:p>
+          <a:p>
+            <a:pPr algn="ctr" indent="0" marL="0">
+              <a:buNone/>
+            </a:pPr>
+            <a:r>
+              <a:rPr lang="en-US" sz="860" b="1" dirty="0">
+                <a:solidFill>
+                  <a:srgbClr val="3C4043"/>
+                </a:solidFill>
+                <a:latin typeface="Roboto" pitchFamily="34" charset="0"/>
+                <a:ea typeface="Roboto" pitchFamily="34" charset="-122"/>
+                <a:cs typeface="Roboto" pitchFamily="34" charset="-120"/>
+              </a:rPr>
+              <a:t>tool probe (HTTP 401/403)</a:t>
             </a:r>
             <a:endParaRPr lang="en-US" sz="860" dirty="0"/>
           </a:p>
@@ -35501,7 +35584,7 @@
                 <a:ea typeface="Roboto" pitchFamily="34" charset="-122"/>
                 <a:cs typeface="Roboto" pitchFamily="34" charset="-120"/>
               </a:rPr>
-              <a:t>2. Rejects spoofed headers</a:t>
+              <a:t>2. Rejects token replay</a:t>
             </a:r>
             <a:endParaRPr lang="en-US" sz="800" dirty="0"/>
           </a:p>
@@ -35518,7 +35601,7 @@
                 <a:ea typeface="Roboto" pitchFamily="34" charset="-122"/>
                 <a:cs typeface="Roboto" pitchFamily="34" charset="-120"/>
               </a:rPr>
-              <a:t>with immediate HTTP</a:t>
+              <a:t>or unauthorized MCP</a:t>
             </a:r>
             <a:endParaRPr lang="en-US" sz="800" dirty="0"/>
           </a:p>
@@ -35535,7 +35618,7 @@
                 <a:ea typeface="Roboto" pitchFamily="34" charset="-122"/>
                 <a:cs typeface="Roboto" pitchFamily="34" charset="-120"/>
               </a:rPr>
-              <a:t>401 / 403 fail-closed</a:t>
+              <a:t>scope (Fail-Closed)</a:t>
             </a:r>
             <a:endParaRPr lang="en-US" sz="800" dirty="0"/>
           </a:p>
@@ -35601,7 +35684,7 @@
                 <a:ea typeface="Roboto" pitchFamily="34" charset="-122"/>
                 <a:cs typeface="Roboto" pitchFamily="34" charset="-120"/>
               </a:rPr>
-              <a:t>3. Propagates sealed</a:t>
+              <a:t>3. Clamps burst &gt;120/600</a:t>
             </a:r>
             <a:endParaRPr lang="en-US" sz="860" dirty="0"/>
           </a:p>
@@ -35618,7 +35701,7 @@
                 <a:ea typeface="Roboto" pitchFamily="34" charset="-122"/>
                 <a:cs typeface="Roboto" pitchFamily="34" charset="-120"/>
               </a:rPr>
-              <a:t>TenantContext to</a:t>
+              <a:t>RPM (HTTP 429) &amp; caps</a:t>
             </a:r>
             <a:endParaRPr lang="en-US" sz="860" dirty="0"/>
           </a:p>
@@ -35635,24 +35718,7 @@
                 <a:ea typeface="Roboto" pitchFamily="34" charset="-122"/>
                 <a:cs typeface="Roboto" pitchFamily="34" charset="-120"/>
               </a:rPr>
-              <a:t>Model Armor &amp; Gemini</a:t>
-            </a:r>
-            <a:endParaRPr lang="en-US" sz="860" dirty="0"/>
-          </a:p>
-          <a:p>
-            <a:pPr algn="ctr" indent="0" marL="0">
-              <a:buNone/>
-            </a:pPr>
-            <a:r>
-              <a:rPr lang="en-US" sz="860" b="1" dirty="0">
-                <a:solidFill>
-                  <a:srgbClr val="3C4043"/>
-                </a:solidFill>
-                <a:latin typeface="Roboto" pitchFamily="34" charset="0"/>
-                <a:ea typeface="Roboto" pitchFamily="34" charset="-122"/>
-                <a:cs typeface="Roboto" pitchFamily="34" charset="-120"/>
-              </a:rPr>
-              <a:t>32k prefix cache</a:t>
+              <a:t>4k/8k thinking budget</a:t>
             </a:r>
             <a:endParaRPr lang="en-US" sz="860" dirty="0"/>
           </a:p>
@@ -35742,7 +35808,7 @@
                 <a:ea typeface="Roboto" pitchFamily="34" charset="-122"/>
                 <a:cs typeface="Roboto" pitchFamily="34" charset="-120"/>
               </a:rPr>
-              <a:t>4. Binds AlloyDB RLS</a:t>
+              <a:t>4. Blocks injection/NLC</a:t>
             </a:r>
             <a:endParaRPr lang="en-US" sz="860" dirty="0"/>
           </a:p>
@@ -35759,7 +35825,7 @@
                 <a:ea typeface="Roboto" pitchFamily="34" charset="-122"/>
                 <a:cs typeface="Roboto" pitchFamily="34" charset="-120"/>
               </a:rPr>
-              <a:t>session variable &amp;</a:t>
+              <a:t>breach (HTTP 400/422) &amp;</a:t>
             </a:r>
             <a:endParaRPr lang="en-US" sz="860" dirty="0"/>
           </a:p>
@@ -35776,7 +35842,7 @@
                 <a:ea typeface="Roboto" pitchFamily="34" charset="-122"/>
                 <a:cs typeface="Roboto" pitchFamily="34" charset="-120"/>
               </a:rPr>
-              <a:t>3LO MCP OAuth token</a:t>
+              <a:t>revoked CMEK (HTTP 423)</a:t>
             </a:r>
             <a:endParaRPr lang="en-US" sz="860" dirty="0"/>
           </a:p>
@@ -35936,7 +36002,7 @@
                 <a:ea typeface="Roboto" pitchFamily="34" charset="-122"/>
                 <a:cs typeface="Roboto" pitchFamily="34" charset="-120"/>
               </a:rPr>
-              <a:t>5. Streams zero-PII OpenTelemetry</a:t>
+              <a:t>5. Closed-Loop Governance: Streams zero-PII</a:t>
             </a:r>
             <a:endParaRPr lang="en-US" sz="880" dirty="0"/>
           </a:p>
@@ -35953,7 +36019,7 @@
                 <a:ea typeface="Roboto" pitchFamily="34" charset="-122"/>
                 <a:cs typeface="Roboto" pitchFamily="34" charset="-120"/>
               </a:rPr>
-              <a:t>cost &amp; security spans back to</a:t>
+              <a:t>OTel violation &amp; token spans to BigQuery to</a:t>
             </a:r>
             <a:endParaRPr lang="en-US" sz="880" dirty="0"/>
           </a:p>
@@ -35970,7 +36036,7 @@
                 <a:ea typeface="Roboto" pitchFamily="34" charset="-122"/>
                 <a:cs typeface="Roboto" pitchFamily="34" charset="-120"/>
               </a:rPr>
-              <a:t>BigQuery &amp; tenant quota policy</a:t>
+              <a:t>auto-tune Valkey quotas &amp; SCC threat alerts</a:t>
             </a:r>
             <a:endParaRPr lang="en-US" sz="880" dirty="0"/>
           </a:p>
@@ -36023,7 +36089,7 @@
                 <a:ea typeface="Roboto" pitchFamily="34" charset="-122"/>
                 <a:cs typeface="Roboto" pitchFamily="34" charset="-120"/>
               </a:rPr>
-              <a:t>Workstream 1 State &amp; Feedback Flow  •  Sealed TenantContext Propagation + Closed-Loop BigQuery OTel Governance  •  </a:t>
+              <a:t>Workstream 1 Exception &amp; Feedback Loop  •  Fail-Closed Circuit Breakers (HTTP 401/403/422/423/429) + Closed-Loop BigQuery OTel  •  </a:t>
             </a:r>
             <a:pPr algn="l" indent="0" marL="0">
               <a:buNone/>
@@ -36412,7 +36478,7 @@
                 <a:ea typeface="Google Sans" pitchFamily="34" charset="-122"/>
                 <a:cs typeface="Google Sans" pitchFamily="34" charset="-120"/>
               </a:rPr>
-              <a:t>Design alternatives — Comparison of Multi-Tenant Isolation Patterns (A, B &amp; C)</a:t>
+              <a:t>ACT III • ARCHITECTURAL TRADE-OFF &amp; ISOLATION SELECTION MATRIX</a:t>
             </a:r>
             <a:endParaRPr lang="en-US" sz="1020" dirty="0"/>
           </a:p>
@@ -36517,7 +36583,7 @@
                 <a:ea typeface="Google Sans" pitchFamily="34" charset="-122"/>
                 <a:cs typeface="Google Sans" pitchFamily="34" charset="-120"/>
               </a:rPr>
-              <a:t>Design alternatives — Comparison of Multi-Tenant Isolation Patterns (A, B &amp; C)</a:t>
+              <a:t>Comparison of Multi-Tenant Isolation Patterns (A, B &amp; C)</a:t>
             </a:r>
             <a:endParaRPr lang="en-US" sz="1800" dirty="0"/>
           </a:p>
@@ -36556,7 +36622,7 @@
                 <a:ea typeface="Roboto" pitchFamily="34" charset="-122"/>
                 <a:cs typeface="Roboto" pitchFamily="34" charset="-120"/>
               </a:rPr>
-              <a:t>Side-by-side Google Cloud Well-Architected trade-off analysis, compensating controls, and target SLAs.</a:t>
+              <a:t>Side-by-side Google Cloud Well-Architected trade-off analysis, isolation boundaries, and unit economics.</a:t>
             </a:r>
             <a:endParaRPr lang="en-US" sz="980" dirty="0"/>
           </a:p>
@@ -38868,7 +38934,7 @@
                 <a:ea typeface="Google Sans" pitchFamily="34" charset="-122"/>
                 <a:cs typeface="Google Sans" pitchFamily="34" charset="-120"/>
               </a:rPr>
-              <a:t>1. Control plane &amp; project boundary</a:t>
+              <a:t>1. When to Choose Pattern A ($42/mo)</a:t>
             </a:r>
             <a:endParaRPr lang="en-US" sz="820" dirty="0"/>
           </a:p>
@@ -38909,7 +38975,7 @@
                 <a:ea typeface="Roboto" pitchFamily="34" charset="-122"/>
                 <a:cs typeface="Roboto" pitchFamily="34" charset="-120"/>
               </a:rPr>
-              <a:t>Central Ingress Hub project + Shared Pool + Dedicated Enterprise Spoke projects</a:t>
+              <a:t>High-density commercial B2B SaaS tiers requiring 90% shared 32k prefix cache savings and transactional AlloyDB FORCE ROW LEVEL SECURITY.</a:t>
             </a:r>
             <a:endParaRPr lang="en-US" sz="740" dirty="0"/>
           </a:p>
@@ -38989,7 +39055,7 @@
               <a:buNone/>
             </a:pPr>
             <a:r>
-              <a:rPr lang="en-US" sz="820" b="1" dirty="0">
+              <a:rPr lang="en-US" sz="760" b="1" dirty="0">
                 <a:solidFill>
                   <a:srgbClr val="3C4043"/>
                 </a:solidFill>
@@ -38997,9 +39063,9 @@
                 <a:ea typeface="Google Sans" pitchFamily="34" charset="-122"/>
                 <a:cs typeface="Google Sans" pitchFamily="34" charset="-120"/>
               </a:rPr>
-              <a:t>2. Compute &amp; agent runtime</a:t>
-            </a:r>
-            <a:endParaRPr lang="en-US" sz="820" dirty="0"/>
+              <a:t>2. When to Choose Pattern B ($1,850/mo)</a:t>
+            </a:r>
+            <a:endParaRPr lang="en-US" sz="760" dirty="0"/>
           </a:p>
         </p:txBody>
       </p:sp>
@@ -39038,7 +39104,7 @@
                 <a:ea typeface="Roboto" pitchFamily="34" charset="-122"/>
                 <a:cs typeface="Roboto" pitchFamily="34" charset="-120"/>
               </a:rPr>
-              <a:t>Firestore dynamic tier router dispatches Standard -&gt; Pool, Enterprise -&gt; PSC Spoke</a:t>
+              <a:t>Regulated banking, healthcare &amp; public-sector tenants mandating a 1:1 GCP project, VPC Service Controls, IAM PAB &amp; &lt;60s CMEK kill-switch.</a:t>
             </a:r>
             <a:endParaRPr lang="en-US" sz="740" dirty="0"/>
           </a:p>
@@ -39118,7 +39184,7 @@
               <a:buNone/>
             </a:pPr>
             <a:r>
-              <a:rPr lang="en-US" sz="820" b="1" dirty="0">
+              <a:rPr lang="en-US" sz="760" b="1" dirty="0">
                 <a:solidFill>
                   <a:srgbClr val="3C4043"/>
                 </a:solidFill>
@@ -39126,9 +39192,9 @@
                 <a:ea typeface="Google Sans" pitchFamily="34" charset="-122"/>
                 <a:cs typeface="Google Sans" pitchFamily="34" charset="-120"/>
               </a:rPr>
-              <a:t>3. Network &amp; perimeter isolation</a:t>
-            </a:r>
-            <a:endParaRPr lang="en-US" sz="820" dirty="0"/>
+              <a:t>3. When to Choose Pattern C (74% Savings)</a:t>
+            </a:r>
+            <a:endParaRPr lang="en-US" sz="760" dirty="0"/>
           </a:p>
         </p:txBody>
       </p:sp>
@@ -39167,7 +39233,7 @@
                 <a:ea typeface="Roboto" pitchFamily="34" charset="-122"/>
                 <a:cs typeface="Roboto" pitchFamily="34" charset="-120"/>
               </a:rPr>
-              <a:t>Unidirectional Private Service Connect (PSC) endpoints (10.10.0.50 -&gt; /24 NAT)</a:t>
+              <a:t>Multi-tier SaaS portfolios co-hosting 85–95% Standard tenants in the pool and 5–15% Enterprise tenants in PSC spokes with 0ms live upgrades.</a:t>
             </a:r>
             <a:endParaRPr lang="en-US" sz="740" dirty="0"/>
           </a:p>
@@ -39255,7 +39321,7 @@
                 <a:ea typeface="Google Sans" pitchFamily="34" charset="-122"/>
                 <a:cs typeface="Google Sans" pitchFamily="34" charset="-120"/>
               </a:rPr>
-              <a:t>4. Identity &amp; access control</a:t>
+              <a:t>4. 80/20 Unified Codebase Invariant</a:t>
             </a:r>
             <a:endParaRPr lang="en-US" sz="820" dirty="0"/>
           </a:p>
@@ -39296,7 +39362,7 @@
                 <a:ea typeface="Roboto" pitchFamily="34" charset="-122"/>
                 <a:cs typeface="Roboto" pitchFamily="34" charset="-120"/>
               </a:rPr>
-              <a:t>Unified Hub OIDC verification + tier-scoped OBO/DPoP token forwarding</a:t>
+              <a:t>All three patterns execute the identical Python ADK 2.0 5-hop pipeline (runtime_pipeline.py), parameterizing only 20% Terraform modules (2.6/3.6/4.6).</a:t>
             </a:r>
             <a:endParaRPr lang="en-US" sz="740" dirty="0"/>
           </a:p>

--- a/slides/doc-mt-01-editable-slides.pptx
+++ b/slides/doc-mt-01-editable-slides.pptx
@@ -782,7 +782,7 @@
           <a:p>
             <a:r>
               <a:rPr lang="en-US" dirty="0"/>
-              <a:t>[phased-roadmap-timeline] WS1 • ACT III: PHASED IMPLEMENTATION &amp; CERTIFICATION TIMELINE: Workstream 1 Rollout Timeline  •  Phase 1 (5-Hop Core) → Phase 2 (GAP-01..05 Controls) → Phase 3 (20/20 Certification)</a:t>
+              <a:t>[phased-roadmap-timeline] WS1 • ACT III: 3-STAGE TENANT TIER EVOLUTION &amp; ZERO-DOWNTIME PROMOTION: Workstream 1 Tenant Lifecycle  •  Stage 1 Pattern A Pool ($42/mo) → Stage 2 Pattern C 0ms Live Promotion → Stage 3 Pattern B Silo ($1,850/mo)</a:t>
             </a:r>
             <a:endParaRPr lang="en-US" dirty="0"/>
           </a:p>
@@ -870,7 +870,7 @@
           <a:p>
             <a:r>
               <a:rPr lang="en-US" dirty="0"/>
-              <a:t>[strategic-operating-model-pillars] WS1 • ACT III: DAY-2 PLATFORM ENGINEERING OPERATING MODEL &amp; RACI SLAs: Workstream 1 Day-2 Operating Model  •  Security &amp; IAM Ownership + Agent Runtime SRE + FinOps &amp; 20/20 CI/CD Governance</a:t>
+              <a:t>[strategic-operating-model-pillars] WS1 • ACT III: GOOGLE CLOUD WELL-ARCHITECTED SOLUTION PILLARS &amp; SLAs: Workstream 1 Well-Architected Pillars  •  5-Hop Zero-Trust Security + Valkey Bulkheads &amp; 0ms Mobility + 84.7% Token Savings &amp; 80% Code Reuse</a:t>
             </a:r>
             <a:endParaRPr lang="en-US" dirty="0"/>
           </a:p>
@@ -3841,7 +3841,7 @@
                 <a:ea typeface="Google Sans" pitchFamily="34" charset="-122"/>
                 <a:cs typeface="Google Sans" pitchFamily="34" charset="-120"/>
               </a:rPr>
-              <a:t>GOVERNANCE • SLIDES 12–14</a:t>
+              <a:t>SOLUTION • SLIDES 12–14</a:t>
             </a:r>
             <a:endParaRPr lang="en-US" sz="660" dirty="0"/>
           </a:p>
@@ -3880,7 +3880,7 @@
                 <a:ea typeface="Google Sans" pitchFamily="34" charset="-122"/>
                 <a:cs typeface="Google Sans" pitchFamily="34" charset="-120"/>
               </a:rPr>
-              <a:t>Rollout Roadmap, Day-2 RACI &amp; Series Map</a:t>
+              <a:t>Tier Evolution, Well-Architected Pillars &amp; Series Map</a:t>
             </a:r>
             <a:endParaRPr lang="en-US" sz="850" dirty="0"/>
           </a:p>
@@ -3919,7 +3919,7 @@
                 <a:ea typeface="Roboto" pitchFamily="34" charset="-122"/>
                 <a:cs typeface="Roboto" pitchFamily="34" charset="-120"/>
               </a:rPr>
-              <a:t>Charts the 3-phase rollout timeline (Weeks 1–10), assigns Security/SRE/FinOps Day-2 RACI SLAs, and maps runnable deliverables across Workstreams 1–5.</a:t>
+              <a:t>Demonstrates 3-stage tenant tier evolution (Pool -&gt; 0ms PSC Cutover -&gt; Silo), Google Cloud Well-Architected guarantees, and Workstream 1–5 deliverables.</a:t>
             </a:r>
             <a:endParaRPr lang="en-US" sz="780" dirty="0"/>
           </a:p>
@@ -9299,7 +9299,7 @@
                 <a:ea typeface="Google Sans" pitchFamily="34" charset="-122"/>
                 <a:cs typeface="Google Sans" pitchFamily="34" charset="-120"/>
               </a:rPr>
-              <a:t>WS1 • ACT III: PHASED IMPLEMENTATION &amp; CERTIFICATION TIMELINE</a:t>
+              <a:t>WS1 • ACT III: 3-STAGE TENANT TIER EVOLUTION &amp; ZERO-DOWNTIME PROMOTION</a:t>
             </a:r>
             <a:endParaRPr lang="en-US" sz="1020" dirty="0"/>
           </a:p>
@@ -9380,7 +9380,7 @@
         <p:spPr>
           <a:xfrm>
             <a:off x="530352" y="786384"/>
-            <a:ext cx="10972800" cy="585216"/>
+            <a:ext cx="11119104" cy="585216"/>
           </a:xfrm>
           <a:prstGeom prst="rect">
             <a:avLst/>
@@ -9396,7 +9396,7 @@
               <a:buNone/>
             </a:pPr>
             <a:r>
-              <a:rPr lang="en-US" sz="2250" b="1" dirty="0">
+              <a:rPr lang="en-US" sz="2020" b="1" dirty="0">
                 <a:solidFill>
                   <a:srgbClr val="0F2942"/>
                 </a:solidFill>
@@ -9404,9 +9404,9 @@
                 <a:ea typeface="Google Sans Display" pitchFamily="34" charset="-122"/>
                 <a:cs typeface="Google Sans Display" pitchFamily="34" charset="-120"/>
               </a:rPr>
-              <a:t>6-Week Reference Architecture Rollout &amp; 20/20 Certification Roadmap</a:t>
-            </a:r>
-            <a:endParaRPr lang="en-US" sz="2250" dirty="0"/>
+              <a:t>3-Stage Tenant Lifecycle: Pooled Onboarding → 0ms Live Promotion → Sovereign Silo</a:t>
+            </a:r>
+            <a:endParaRPr lang="en-US" sz="2020" dirty="0"/>
           </a:p>
         </p:txBody>
       </p:sp>
@@ -9484,7 +9484,7 @@
               <a:buNone/>
             </a:pPr>
             <a:r>
-              <a:rPr lang="en-US" sz="1700" b="1" dirty="0">
+              <a:rPr lang="en-US" sz="1650" b="1" dirty="0">
                 <a:solidFill>
                   <a:srgbClr val="FFFFFF"/>
                 </a:solidFill>
@@ -9492,9 +9492,9 @@
                 <a:ea typeface="Google Sans" pitchFamily="34" charset="-122"/>
                 <a:cs typeface="Google Sans" pitchFamily="34" charset="-120"/>
               </a:rPr>
-              <a:t>Phase 1: 5-Hop Core</a:t>
-            </a:r>
-            <a:endParaRPr lang="en-US" sz="1700" dirty="0"/>
+              <a:t>Stage 1: Pattern A Pool</a:t>
+            </a:r>
+            <a:endParaRPr lang="en-US" sz="1650" dirty="0"/>
           </a:p>
         </p:txBody>
       </p:sp>
@@ -9543,7 +9543,7 @@
               <a:buNone/>
             </a:pPr>
             <a:r>
-              <a:rPr lang="en-US" sz="2000" b="1" dirty="0">
+              <a:rPr lang="en-US" sz="1850" b="1" dirty="0">
                 <a:solidFill>
                   <a:srgbClr val="3C4043"/>
                 </a:solidFill>
@@ -9551,16 +9551,16 @@
                 <a:ea typeface="Google Sans" pitchFamily="34" charset="-122"/>
                 <a:cs typeface="Google Sans" pitchFamily="34" charset="-120"/>
               </a:rPr>
-              <a:t>Identity Context &amp;</a:t>
-            </a:r>
-            <a:endParaRPr lang="en-US" sz="2000" dirty="0"/>
+              <a:t>High-Density Onboarding</a:t>
+            </a:r>
+            <a:endParaRPr lang="en-US" sz="1850" dirty="0"/>
           </a:p>
           <a:p>
             <a:pPr algn="ctr" indent="0" marL="0">
               <a:buNone/>
             </a:pPr>
             <a:r>
-              <a:rPr lang="en-US" sz="2000" b="1" dirty="0">
+              <a:rPr lang="en-US" sz="1850" b="1" dirty="0">
                 <a:solidFill>
                   <a:srgbClr val="3C4043"/>
                 </a:solidFill>
@@ -9568,9 +9568,9 @@
                 <a:ea typeface="Google Sans" pitchFamily="34" charset="-122"/>
                 <a:cs typeface="Google Sans" pitchFamily="34" charset="-120"/>
               </a:rPr>
-              <a:t>ARD Registry Gate</a:t>
-            </a:r>
-            <a:endParaRPr lang="en-US" sz="2000" dirty="0"/>
+              <a:t>(Terraform 2.6 • $42/mo)</a:t>
+            </a:r>
+            <a:endParaRPr lang="en-US" sz="1850" dirty="0"/>
           </a:p>
         </p:txBody>
       </p:sp>
@@ -9582,8 +9582,8 @@
         </p:nvSpPr>
         <p:spPr>
           <a:xfrm>
-            <a:off x="713232" y="3675888"/>
-            <a:ext cx="3072384" cy="384048"/>
+            <a:off x="676656" y="3675888"/>
+            <a:ext cx="3145536" cy="384048"/>
           </a:xfrm>
           <a:prstGeom prst="rect">
             <a:avLst/>
@@ -9599,17 +9599,17 @@
               <a:buNone/>
             </a:pPr>
             <a:r>
-              <a:rPr lang="en-US" sz="1500" dirty="0">
-                <a:solidFill>
-                  <a:srgbClr val="3C4043"/>
+              <a:rPr lang="en-US" sz="1220" b="1" dirty="0">
+                <a:solidFill>
+                  <a:srgbClr val="0F2942"/>
                 </a:solidFill>
                 <a:latin typeface="Roboto" pitchFamily="34" charset="0"/>
                 <a:ea typeface="Roboto" pitchFamily="34" charset="-122"/>
                 <a:cs typeface="Roboto" pitchFamily="34" charset="-120"/>
               </a:rPr>
-              <a:t>(Weeks 1–2)</a:t>
-            </a:r>
-            <a:endParaRPr lang="en-US" sz="1500" dirty="0"/>
+              <a:t>120 RPM • 4k Cap • 90% Prefix Cache</a:t>
+            </a:r>
+            <a:endParaRPr lang="en-US" sz="1220" dirty="0"/>
           </a:p>
         </p:txBody>
       </p:sp>
@@ -9661,7 +9661,7 @@
               <a:buNone/>
             </a:pPr>
             <a:r>
-              <a:rPr lang="en-US" sz="1380" dirty="0">
+              <a:rPr lang="en-US" sz="1350" dirty="0">
                 <a:solidFill>
                   <a:srgbClr val="3C4043"/>
                 </a:solidFill>
@@ -9669,16 +9669,16 @@
                 <a:ea typeface="Roboto" pitchFamily="34" charset="-122"/>
                 <a:cs typeface="Roboto" pitchFamily="34" charset="-120"/>
               </a:rPr>
-              <a:t>RFC 8693 OBO + DPoP &amp; Hop 2</a:t>
-            </a:r>
-            <a:endParaRPr lang="en-US" sz="1380" dirty="0"/>
+              <a:t>Shared Cloud Run v2 + Gemini 2.5 Pro</a:t>
+            </a:r>
+            <a:endParaRPr lang="en-US" sz="1350" dirty="0"/>
           </a:p>
           <a:p>
             <a:pPr algn="ctr" indent="0" marL="0">
               <a:buNone/>
             </a:pPr>
             <a:r>
-              <a:rPr lang="en-US" sz="1380" dirty="0">
+              <a:rPr lang="en-US" sz="1350" dirty="0">
                 <a:solidFill>
                   <a:srgbClr val="3C4043"/>
                 </a:solidFill>
@@ -9686,9 +9686,9 @@
                 <a:ea typeface="Roboto" pitchFamily="34" charset="-122"/>
                 <a:cs typeface="Roboto" pitchFamily="34" charset="-120"/>
               </a:rPr>
-              <a:t>ARD Catalog Filter Live</a:t>
-            </a:r>
-            <a:endParaRPr lang="en-US" sz="1380" dirty="0"/>
+              <a:t>ContextCacheConfig &amp; AlloyDB FORCE RLS</a:t>
+            </a:r>
+            <a:endParaRPr lang="en-US" sz="1350" dirty="0"/>
           </a:p>
         </p:txBody>
       </p:sp>
@@ -9766,7 +9766,7 @@
               <a:buNone/>
             </a:pPr>
             <a:r>
-              <a:rPr lang="en-US" sz="1700" b="1" dirty="0">
+              <a:rPr lang="en-US" sz="1650" b="1" dirty="0">
                 <a:solidFill>
                   <a:srgbClr val="FFFFFF"/>
                 </a:solidFill>
@@ -9774,9 +9774,9 @@
                 <a:ea typeface="Google Sans" pitchFamily="34" charset="-122"/>
                 <a:cs typeface="Google Sans" pitchFamily="34" charset="-120"/>
               </a:rPr>
-              <a:t>Phase 2: Guardrails</a:t>
-            </a:r>
-            <a:endParaRPr lang="en-US" sz="1700" dirty="0"/>
+              <a:t>Stage 2: Pattern C Hybrid</a:t>
+            </a:r>
+            <a:endParaRPr lang="en-US" sz="1650" dirty="0"/>
           </a:p>
         </p:txBody>
       </p:sp>
@@ -9825,7 +9825,7 @@
               <a:buNone/>
             </a:pPr>
             <a:r>
-              <a:rPr lang="en-US" sz="2000" b="1" dirty="0">
+              <a:rPr lang="en-US" sz="1850" b="1" dirty="0">
                 <a:solidFill>
                   <a:srgbClr val="3C4043"/>
                 </a:solidFill>
@@ -9833,16 +9833,16 @@
                 <a:ea typeface="Google Sans" pitchFamily="34" charset="-122"/>
                 <a:cs typeface="Google Sans" pitchFamily="34" charset="-120"/>
               </a:rPr>
-              <a:t>Model Armor, RLS</a:t>
-            </a:r>
-            <a:endParaRPr lang="en-US" sz="2000" dirty="0"/>
+              <a:t>Zero-Downtime Promotion</a:t>
+            </a:r>
+            <a:endParaRPr lang="en-US" sz="1850" dirty="0"/>
           </a:p>
           <a:p>
             <a:pPr algn="ctr" indent="0" marL="0">
               <a:buNone/>
             </a:pPr>
             <a:r>
-              <a:rPr lang="en-US" sz="2000" b="1" dirty="0">
+              <a:rPr lang="en-US" sz="1850" b="1" dirty="0">
                 <a:solidFill>
                   <a:srgbClr val="3C4043"/>
                 </a:solidFill>
@@ -9850,9 +9850,9 @@
                 <a:ea typeface="Google Sans" pitchFamily="34" charset="-122"/>
                 <a:cs typeface="Google Sans" pitchFamily="34" charset="-120"/>
               </a:rPr>
-              <a:t>&amp; GAP-01..05 Controls</a:t>
-            </a:r>
-            <a:endParaRPr lang="en-US" sz="2000" dirty="0"/>
+              <a:t>(Terraform 4.6 • 0ms Cutover)</a:t>
+            </a:r>
+            <a:endParaRPr lang="en-US" sz="1850" dirty="0"/>
           </a:p>
         </p:txBody>
       </p:sp>
@@ -9864,8 +9864,8 @@
         </p:nvSpPr>
         <p:spPr>
           <a:xfrm>
-            <a:off x="4553712" y="3675888"/>
-            <a:ext cx="3072384" cy="384048"/>
+            <a:off x="4517136" y="3675888"/>
+            <a:ext cx="3145536" cy="384048"/>
           </a:xfrm>
           <a:prstGeom prst="rect">
             <a:avLst/>
@@ -9881,17 +9881,17 @@
               <a:buNone/>
             </a:pPr>
             <a:r>
-              <a:rPr lang="en-US" sz="1500" dirty="0">
-                <a:solidFill>
-                  <a:srgbClr val="3C4043"/>
+              <a:rPr lang="en-US" sz="1220" b="1" dirty="0">
+                <a:solidFill>
+                  <a:srgbClr val="0D7A75"/>
                 </a:solidFill>
                 <a:latin typeface="Roboto" pitchFamily="34" charset="0"/>
                 <a:ea typeface="Roboto" pitchFamily="34" charset="-122"/>
                 <a:cs typeface="Roboto" pitchFamily="34" charset="-120"/>
               </a:rPr>
-              <a:t>(Weeks 3–4)</a:t>
-            </a:r>
-            <a:endParaRPr lang="en-US" sz="1500" dirty="0"/>
+              <a:t>SHADOW_SYNC → ATOMIC_CUTOVER</a:t>
+            </a:r>
+            <a:endParaRPr lang="en-US" sz="1220" dirty="0"/>
           </a:p>
         </p:txBody>
       </p:sp>
@@ -9943,7 +9943,7 @@
               <a:buNone/>
             </a:pPr>
             <a:r>
-              <a:rPr lang="en-US" sz="1380" dirty="0">
+              <a:rPr lang="en-US" sz="1350" dirty="0">
                 <a:solidFill>
                   <a:srgbClr val="3C4043"/>
                 </a:solidFill>
@@ -9951,16 +9951,16 @@
                 <a:ea typeface="Roboto" pitchFamily="34" charset="-122"/>
                 <a:cs typeface="Roboto" pitchFamily="34" charset="-120"/>
               </a:rPr>
-              <a:t>Hop 4 Model Armor + Cloud SDP</a:t>
-            </a:r>
-            <a:endParaRPr lang="en-US" sz="1380" dirty="0"/>
+              <a:t>Dual-Write Backfill, CMEK Re-Key &amp;</a:t>
+            </a:r>
+            <a:endParaRPr lang="en-US" sz="1350" dirty="0"/>
           </a:p>
           <a:p>
             <a:pPr algn="ctr" indent="0" marL="0">
               <a:buNone/>
             </a:pPr>
             <a:r>
-              <a:rPr lang="en-US" sz="1380" dirty="0">
+              <a:rPr lang="en-US" sz="1350" dirty="0">
                 <a:solidFill>
                   <a:srgbClr val="3C4043"/>
                 </a:solidFill>
@@ -9968,9 +9968,9 @@
                 <a:ea typeface="Roboto" pitchFamily="34" charset="-122"/>
                 <a:cs typeface="Roboto" pitchFamily="34" charset="-120"/>
               </a:rPr>
-              <a:t>&amp; AlloyDB RLS Enforced</a:t>
-            </a:r>
-            <a:endParaRPr lang="en-US" sz="1380" dirty="0"/>
+              <a:t>Firestore Pointer Flip (0 Dropped Turns)</a:t>
+            </a:r>
+            <a:endParaRPr lang="en-US" sz="1350" dirty="0"/>
           </a:p>
         </p:txBody>
       </p:sp>
@@ -10048,7 +10048,7 @@
               <a:buNone/>
             </a:pPr>
             <a:r>
-              <a:rPr lang="en-US" sz="1700" b="1" dirty="0">
+              <a:rPr lang="en-US" sz="1650" b="1" dirty="0">
                 <a:solidFill>
                   <a:srgbClr val="FFFFFF"/>
                 </a:solidFill>
@@ -10056,9 +10056,9 @@
                 <a:ea typeface="Google Sans" pitchFamily="34" charset="-122"/>
                 <a:cs typeface="Google Sans" pitchFamily="34" charset="-120"/>
               </a:rPr>
-              <a:t>Phase 3: Certification</a:t>
-            </a:r>
-            <a:endParaRPr lang="en-US" sz="1700" dirty="0"/>
+              <a:t>Stage 3: Pattern B Silo</a:t>
+            </a:r>
+            <a:endParaRPr lang="en-US" sz="1650" dirty="0"/>
           </a:p>
         </p:txBody>
       </p:sp>
@@ -10107,7 +10107,7 @@
               <a:buNone/>
             </a:pPr>
             <a:r>
-              <a:rPr lang="en-US" sz="2000" b="1" dirty="0">
+              <a:rPr lang="en-US" sz="1850" b="1" dirty="0">
                 <a:solidFill>
                   <a:srgbClr val="3C4043"/>
                 </a:solidFill>
@@ -10115,16 +10115,16 @@
                 <a:ea typeface="Google Sans" pitchFamily="34" charset="-122"/>
                 <a:cs typeface="Google Sans" pitchFamily="34" charset="-120"/>
               </a:rPr>
-              <a:t>3-Pattern Taxonomy</a:t>
-            </a:r>
-            <a:endParaRPr lang="en-US" sz="2000" dirty="0"/>
+              <a:t>Regulated Enterprise Vault</a:t>
+            </a:r>
+            <a:endParaRPr lang="en-US" sz="1850" dirty="0"/>
           </a:p>
           <a:p>
             <a:pPr algn="ctr" indent="0" marL="0">
               <a:buNone/>
             </a:pPr>
             <a:r>
-              <a:rPr lang="en-US" sz="2000" b="1" dirty="0">
+              <a:rPr lang="en-US" sz="1850" b="1" dirty="0">
                 <a:solidFill>
                   <a:srgbClr val="3C4043"/>
                 </a:solidFill>
@@ -10132,9 +10132,9 @@
                 <a:ea typeface="Google Sans" pitchFamily="34" charset="-122"/>
                 <a:cs typeface="Google Sans" pitchFamily="34" charset="-120"/>
               </a:rPr>
-              <a:t>&amp; 20/20 Audit Pass</a:t>
-            </a:r>
-            <a:endParaRPr lang="en-US" sz="2000" dirty="0"/>
+              <a:t>(Terraform 3.6 • $1,850/mo)</a:t>
+            </a:r>
+            <a:endParaRPr lang="en-US" sz="1850" dirty="0"/>
           </a:p>
         </p:txBody>
       </p:sp>
@@ -10146,8 +10146,8 @@
         </p:nvSpPr>
         <p:spPr>
           <a:xfrm>
-            <a:off x="8394192" y="3675888"/>
-            <a:ext cx="3072384" cy="384048"/>
+            <a:off x="8357616" y="3675888"/>
+            <a:ext cx="3145536" cy="384048"/>
           </a:xfrm>
           <a:prstGeom prst="rect">
             <a:avLst/>
@@ -10163,17 +10163,17 @@
               <a:buNone/>
             </a:pPr>
             <a:r>
-              <a:rPr lang="en-US" sz="1500" dirty="0">
-                <a:solidFill>
-                  <a:srgbClr val="3C4043"/>
+              <a:rPr lang="en-US" sz="1220" b="1" dirty="0">
+                <a:solidFill>
+                  <a:srgbClr val="54728C"/>
                 </a:solidFill>
                 <a:latin typeface="Roboto" pitchFamily="34" charset="0"/>
                 <a:ea typeface="Roboto" pitchFamily="34" charset="-122"/>
                 <a:cs typeface="Roboto" pitchFamily="34" charset="-120"/>
               </a:rPr>
-              <a:t>(Weeks 5–6)</a:t>
-            </a:r>
-            <a:endParaRPr lang="en-US" sz="1500" dirty="0"/>
+              <a:t>600 RPM • 8k Cap • &lt;60s HTTP 423 CMEK</a:t>
+            </a:r>
+            <a:endParaRPr lang="en-US" sz="1220" dirty="0"/>
           </a:p>
         </p:txBody>
       </p:sp>
@@ -10225,7 +10225,7 @@
               <a:buNone/>
             </a:pPr>
             <a:r>
-              <a:rPr lang="en-US" sz="1380" dirty="0">
+              <a:rPr lang="en-US" sz="1350" dirty="0">
                 <a:solidFill>
                   <a:srgbClr val="3C4043"/>
                 </a:solidFill>
@@ -10233,16 +10233,16 @@
                 <a:ea typeface="Roboto" pitchFamily="34" charset="-122"/>
                 <a:cs typeface="Roboto" pitchFamily="34" charset="-120"/>
               </a:rPr>
-              <a:t>Patterns A, B &amp; C Certified</a:t>
-            </a:r>
-            <a:endParaRPr lang="en-US" sz="1380" dirty="0"/>
+              <a:t>Dedicated VPC-SC Project, IAM PAB,</a:t>
+            </a:r>
+            <a:endParaRPr lang="en-US" sz="1350" dirty="0"/>
           </a:p>
           <a:p>
             <a:pPr algn="ctr" indent="0" marL="0">
               <a:buNone/>
             </a:pPr>
             <a:r>
-              <a:rPr lang="en-US" sz="1380" dirty="0">
+              <a:rPr lang="en-US" sz="1350" dirty="0">
                 <a:solidFill>
                   <a:srgbClr val="3C4043"/>
                 </a:solidFill>
@@ -10250,9 +10250,9 @@
                 <a:ea typeface="Roboto" pitchFamily="34" charset="-122"/>
                 <a:cs typeface="Roboto" pitchFamily="34" charset="-120"/>
               </a:rPr>
-              <a:t>Across 3 Live GCP Projects</a:t>
-            </a:r>
-            <a:endParaRPr lang="en-US" sz="1380" dirty="0"/>
+              <a:t>Agent Alpha &amp; Tenant KMS Kill-Switch</a:t>
+            </a:r>
+            <a:endParaRPr lang="en-US" sz="1350" dirty="0"/>
           </a:p>
         </p:txBody>
       </p:sp>
@@ -10469,7 +10469,7 @@
                 <a:ea typeface="Roboto" pitchFamily="34" charset="-122"/>
                 <a:cs typeface="Roboto" pitchFamily="34" charset="-120"/>
               </a:rPr>
-              <a:t>Workstream 1 Rollout Timeline  •  Phase 1 (5-Hop Core) → Phase 2 (GAP-01..05 Controls) → Phase 3 (20/20 Certification)  •  </a:t>
+              <a:t>Workstream 1 Tenant Lifecycle  •  Stage 1 Pattern A Pool ($42/mo) → Stage 2 Pattern C 0ms Live Promotion → Stage 3 Pattern B Silo ($1,850/mo)  •  </a:t>
             </a:r>
             <a:pPr algn="l" indent="0" marL="0">
               <a:buNone/>
@@ -10858,7 +10858,7 @@
                 <a:ea typeface="Google Sans" pitchFamily="34" charset="-122"/>
                 <a:cs typeface="Google Sans" pitchFamily="34" charset="-120"/>
               </a:rPr>
-              <a:t>WS1 • ACT III: DAY-2 PLATFORM ENGINEERING OPERATING MODEL &amp; RACI SLAs</a:t>
+              <a:t>WS1 • ACT III: GOOGLE CLOUD WELL-ARCHITECTED SOLUTION PILLARS &amp; SLAs</a:t>
             </a:r>
             <a:endParaRPr lang="en-US" sz="1020" dirty="0"/>
           </a:p>
@@ -10963,7 +10963,7 @@
                 <a:ea typeface="Google Sans Display" pitchFamily="34" charset="-122"/>
                 <a:cs typeface="Google Sans Display" pitchFamily="34" charset="-120"/>
               </a:rPr>
-              <a:t>3-Pillar Day-2 Platform Ownership, SRE Reliability &amp; FinOps Governance Model</a:t>
+              <a:t>3-Pillar Well-Architected Solution Guarantees: Security, Reliability &amp; FinOps</a:t>
             </a:r>
             <a:endParaRPr lang="en-US" sz="2250" dirty="0"/>
           </a:p>
@@ -11135,7 +11135,7 @@
                 <a:ea typeface="Google Sans" pitchFamily="34" charset="-122"/>
                 <a:cs typeface="Google Sans" pitchFamily="34" charset="-120"/>
               </a:rPr>
-              <a:t>Pillar 1: Cloud Security</a:t>
+              <a:t>Pillar 1: Zero-Trust 5-Hop</a:t>
             </a:r>
             <a:endParaRPr lang="en-US" sz="1480" dirty="0"/>
           </a:p>
@@ -11152,7 +11152,7 @@
                 <a:ea typeface="Google Sans" pitchFamily="34" charset="-122"/>
                 <a:cs typeface="Google Sans" pitchFamily="34" charset="-120"/>
               </a:rPr>
-              <a:t>&amp; IAM Platform Team</a:t>
+              <a:t>Cryptographic Security</a:t>
             </a:r>
             <a:endParaRPr lang="en-US" sz="1480" dirty="0"/>
           </a:p>
@@ -11211,7 +11211,7 @@
                 <a:ea typeface="Roboto" pitchFamily="34" charset="-122"/>
                 <a:cs typeface="Roboto" pitchFamily="34" charset="-120"/>
               </a:rPr>
-              <a:t>Owns Cloud Armor L7 WAF rules, IAP OIDC &amp; IAM STS (RFC 8693/9449)</a:t>
+              <a:t>Enforces RFC 8693 OBO + RFC 9449 DPoP &amp; Hop 2 ARD tool catalog ACLs</a:t>
             </a:r>
             <a:endParaRPr lang="en-US" sz="1120" dirty="0"/>
           </a:p>
@@ -11270,7 +11270,7 @@
                 <a:ea typeface="Roboto" pitchFamily="34" charset="-122"/>
                 <a:cs typeface="Roboto" pitchFamily="34" charset="-120"/>
               </a:rPr>
-              <a:t>Governs VPC-SC perimeters, IAM PAB &amp; Cloud KMS CMEK key rotation</a:t>
+              <a:t>Screens prompts &amp; egress via Model Armor, Cloud SDP &amp; AlloyDB FORCE RLS</a:t>
             </a:r>
             <a:endParaRPr lang="en-US" sz="1120" dirty="0"/>
           </a:p>
@@ -11329,7 +11329,7 @@
                 <a:ea typeface="Roboto" pitchFamily="34" charset="-122"/>
                 <a:cs typeface="Roboto" pitchFamily="34" charset="-120"/>
               </a:rPr>
-              <a:t>Enforces &lt;60s HTTP 423 CMEK revocation &amp; SCC threat response SLAs</a:t>
+              <a:t>Isolates regulated tenants via VPC-SC &amp; &lt;60s HTTP 423 CMEK kill-switch</a:t>
             </a:r>
             <a:endParaRPr lang="en-US" sz="1120" dirty="0"/>
           </a:p>
@@ -11462,7 +11462,7 @@
                 <a:ea typeface="Google Sans" pitchFamily="34" charset="-122"/>
                 <a:cs typeface="Google Sans" pitchFamily="34" charset="-120"/>
               </a:rPr>
-              <a:t>SRE</a:t>
+              <a:t>REL</a:t>
             </a:r>
             <a:endParaRPr lang="en-US" sz="1150" dirty="0"/>
           </a:p>
@@ -11501,7 +11501,7 @@
                 <a:ea typeface="Google Sans" pitchFamily="34" charset="-122"/>
                 <a:cs typeface="Google Sans" pitchFamily="34" charset="-120"/>
               </a:rPr>
-              <a:t>Pillar 2: Agent Runtime</a:t>
+              <a:t>Pillar 2: Noisy-Neighbor</a:t>
             </a:r>
             <a:endParaRPr lang="en-US" sz="1480" dirty="0"/>
           </a:p>
@@ -11518,7 +11518,7 @@
                 <a:ea typeface="Google Sans" pitchFamily="34" charset="-122"/>
                 <a:cs typeface="Google Sans" pitchFamily="34" charset="-120"/>
               </a:rPr>
-              <a:t>&amp; Data Reliability SRE</a:t>
+              <a:t>Bulkheads &amp; Live Mobility</a:t>
             </a:r>
             <a:endParaRPr lang="en-US" sz="1480" dirty="0"/>
           </a:p>
@@ -11577,7 +11577,7 @@
                 <a:ea typeface="Roboto" pitchFamily="34" charset="-122"/>
                 <a:cs typeface="Roboto" pitchFamily="34" charset="-120"/>
               </a:rPr>
-              <a:t>Operates ADK 2.0 runtime_pipeline.py (80% shared core) &amp; ARD ACLs</a:t>
+              <a:t>Enforces atomic Memorystore Valkey token buckets (120 vs 600 RPM)</a:t>
             </a:r>
             <a:endParaRPr lang="en-US" sz="1120" dirty="0"/>
           </a:p>
@@ -11636,7 +11636,7 @@
                 <a:ea typeface="Roboto" pitchFamily="34" charset="-122"/>
                 <a:cs typeface="Roboto" pitchFamily="34" charset="-120"/>
               </a:rPr>
-              <a:t>Manages Memorystore Valkey (120/600 RPM) &amp; AlloyDB RLS policies</a:t>
+              <a:t>Clamps per-tier Gemini 2.5 Pro thinking budgets (4k Std vs 8k Ent)</a:t>
             </a:r>
             <a:endParaRPr lang="en-US" sz="1120" dirty="0"/>
           </a:p>
@@ -11695,7 +11695,7 @@
                 <a:ea typeface="Roboto" pitchFamily="34" charset="-122"/>
                 <a:cs typeface="Roboto" pitchFamily="34" charset="-120"/>
               </a:rPr>
-              <a:t>Executes Pattern C 3-phase SHADOW_SYNC live migrations (0ms lag)</a:t>
+              <a:t>Promotes tenants live via Pattern C SHADOW_SYNC (0ms lag, 0 drops)</a:t>
             </a:r>
             <a:endParaRPr lang="en-US" sz="1120" dirty="0"/>
           </a:p>
@@ -11867,7 +11867,7 @@
                 <a:ea typeface="Google Sans" pitchFamily="34" charset="-122"/>
                 <a:cs typeface="Google Sans" pitchFamily="34" charset="-120"/>
               </a:rPr>
-              <a:t>Pillar 3: FinOps, Billing</a:t>
+              <a:t>Pillar 3: 84.7% Prefix Cache</a:t>
             </a:r>
             <a:endParaRPr lang="en-US" sz="1480" dirty="0"/>
           </a:p>
@@ -11884,7 +11884,7 @@
                 <a:ea typeface="Google Sans" pitchFamily="34" charset="-122"/>
                 <a:cs typeface="Google Sans" pitchFamily="34" charset="-120"/>
               </a:rPr>
-              <a:t>&amp; CI/CD Release Gate</a:t>
+              <a:t>FinOps &amp; 80% Code Reuse</a:t>
             </a:r>
             <a:endParaRPr lang="en-US" sz="1480" dirty="0"/>
           </a:p>
@@ -11943,7 +11943,7 @@
                 <a:ea typeface="Roboto" pitchFamily="34" charset="-122"/>
                 <a:cs typeface="Roboto" pitchFamily="34" charset="-120"/>
               </a:rPr>
-              <a:t>Audits Gemini 2.5 Pro 32k prefix cache hit ratio (&gt;88% target SLA)</a:t>
+              <a:t>Shares 32k-token Gemini 2.5 Pro prefix cache (90% cache discount)</a:t>
             </a:r>
             <a:endParaRPr lang="en-US" sz="1120" dirty="0"/>
           </a:p>
@@ -12002,7 +12002,7 @@
                 <a:ea typeface="Roboto" pitchFamily="34" charset="-122"/>
                 <a:cs typeface="Roboto" pitchFamily="34" charset="-120"/>
               </a:rPr>
-              <a:t>Reconciles zero-PII BigQuery OTel token &amp; SKU chargeback ledgers</a:t>
+              <a:t>Cuts 1,000-tenant portfolio TCO by 74% ($313.8k vs $1.85M/mo all-silo)</a:t>
             </a:r>
             <a:endParaRPr lang="en-US" sz="1120" dirty="0"/>
           </a:p>
@@ -12061,7 +12061,7 @@
                 <a:ea typeface="Roboto" pitchFamily="34" charset="-122"/>
                 <a:cs typeface="Roboto" pitchFamily="34" charset="-120"/>
               </a:rPr>
-              <a:t>Gates every PR merge on 12/12 forensic &amp; 20/20 simulation checks</a:t>
+              <a:t>Reuses one 80% Python ADK 2.0 codebase across Terraform 2.6, 3.6 &amp; 4.6</a:t>
             </a:r>
             <a:endParaRPr lang="en-US" sz="1120" dirty="0"/>
           </a:p>
@@ -12114,7 +12114,7 @@
                 <a:ea typeface="Roboto" pitchFamily="34" charset="-122"/>
                 <a:cs typeface="Roboto" pitchFamily="34" charset="-120"/>
               </a:rPr>
-              <a:t>Workstream 1 Day-2 Operating Model  •  Security &amp; IAM Ownership + Agent Runtime SRE + FinOps &amp; 20/20 CI/CD Governance  •  </a:t>
+              <a:t>Workstream 1 Well-Architected Pillars  •  5-Hop Zero-Trust Security + Valkey Bulkheads &amp; 0ms Mobility + 84.7% Token Savings &amp; 80% Code Reuse  •  </a:t>
             </a:r>
             <a:pPr algn="l" indent="0" marL="0">
               <a:buNone/>

--- a/slides/doc-mt-01-editable-slides.pptx
+++ b/slides/doc-mt-01-editable-slides.pptx
@@ -2619,7 +2619,7 @@
                 <a:ea typeface="Roboto" pitchFamily="34" charset="-122"/>
                 <a:cs typeface="Roboto" pitchFamily="34" charset="-120"/>
               </a:rPr>
-              <a:t>Provisioning dedicated cloud projects for Standard Tiernth commercial tenants erodes SaaS gross margins, whereas naive shared runtimes expose cross-tenant tool, memory, and quota surfaces.</a:t>
+              <a:t>Provisioning dedicated cloud projects for Standard Tier commercial tenants erodes SaaS gross margins, whereas naive shared runtimes expose cross-tenant tool, memory, and quota surfaces.</a:t>
             </a:r>
             <a:endParaRPr lang="en-US" sz="720" dirty="0"/>
           </a:p>
@@ -11277,7 +11277,7 @@
                 <a:ea typeface="Roboto" pitchFamily="34" charset="-122"/>
                 <a:cs typeface="Roboto" pitchFamily="34" charset="-120"/>
               </a:rPr>
-              <a:t>Target &amp; SLA: Tier: ENTERPRISE (600 RPM Silo Silo) • 600 RPM • 8,000 Thinking Budget • OCC/IBAN DLP Masking</a:t>
+              <a:t>Target &amp; SLA: Tier: ENTERPRISE (600 RPM Silo) • 600 RPM • 8,000 Thinking Budget • OCC/IBAN DLP Masking</a:t>
             </a:r>
             <a:endParaRPr lang="en-US" sz="750" dirty="0"/>
           </a:p>
@@ -11645,7 +11645,7 @@
                 <a:ea typeface="Roboto" pitchFamily="34" charset="-122"/>
                 <a:cs typeface="Roboto" pitchFamily="34" charset="-120"/>
               </a:rPr>
-              <a:t>Target &amp; SLA: Tier: STANDARD (120 RPM Pool Pool) • 120 RPM • 4,000 Thinking Budget • PCI-DSS PAN/SSN DLP Masking</a:t>
+              <a:t>Target &amp; SLA: Tier: STANDARD (120 RPM Pool) • 120 RPM • 4,000 Thinking Budget • PCI-DSS PAN/SSN DLP Masking</a:t>
             </a:r>
             <a:endParaRPr lang="en-US" sz="750" dirty="0"/>
           </a:p>

--- a/slides/doc-mt-01-editable-slides.pptx
+++ b/slides/doc-mt-01-editable-slides.pptx
@@ -621,7 +621,7 @@
           <a:p>
             <a:r>
               <a:rPr lang="en-US" dirty="0"/>
-              <a:t>To prove this architecture is running live in Google Cloud rather than just on slides, here are authentic captures from our deployed Cloud Run revisions and Cloud Logging Explorer. You can reproduce our audit trail directly by running the exact Cloud Logging filter shown in the metadata card—verifying zero cross-tenant RLS rows across HTTP 200, 403, 423, and 429 responses—or by running our automated deep forensic audit script from the command line, which passes all twelve forensic gates and all one hundred seven runtime assertions.</a:t>
+              <a:t>To prove this architecture is running live rather than just on slides, here are authentic captures from our deployed Cloud Run revisions, Cloud Logging Explorer, and our Dual-Plane verification harness. On the Intra-Cloud plane, our 20/20 Google Cloud runtime suites verify zero cross-tenant RLS rows across HTTP 200, 403, 423, and 429 responses; on the Inter-Cloud plane, our 30/30 AWS Bedrock AgentCore MCP and live EC2 execution twin harness across ports 3001 through 3010 passes all sixty assertions and all twelve automated forensic gates.</a:t>
             </a:r>
             <a:endParaRPr lang="en-US" dirty="0"/>
           </a:p>
@@ -4537,7 +4537,7 @@
                 <a:ea typeface="Google Sans" pitchFamily="34" charset="-122"/>
                 <a:cs typeface="Google Sans" pitchFamily="34" charset="-120"/>
               </a:rPr>
-              <a:t>ramp-portal-dev (#248990048888) &amp; cymbal-pooled-prod (#638420508320) serving Pattern A/B/C endpoints (HTTP 200)</a:t>
+              <a:t>cymbal-control-plane (#248990048888) &amp; cymbal-pooled-prod (#638420508320) serving Pattern A/B/C endpoints (HTTP 200)</a:t>
             </a:r>
             <a:endParaRPr lang="en-US" sz="860" dirty="0"/>
           </a:p>
@@ -4576,7 +4576,7 @@
                 <a:ea typeface="Roboto" pitchFamily="34" charset="-122"/>
                 <a:cs typeface="Roboto" pitchFamily="34" charset="-120"/>
               </a:rPr>
-              <a:t>• Projects: ramp-portal-dev (#248990048888) • cymbal-pooled-prod (#638420508320)</a:t>
+              <a:t>• Projects: cymbal-control-plane • cymbal-pooled-prod</a:t>
             </a:r>
             <a:endParaRPr lang="en-US" sz="780" dirty="0"/>
           </a:p>
@@ -4593,7 +4593,7 @@
                 <a:ea typeface="Roboto" pitchFamily="34" charset="-122"/>
                 <a:cs typeface="Roboto" pitchFamily="34" charset="-120"/>
               </a:rPr>
-              <a:t>• Runtime: Cloud Run Gen2 (gVisor runsc sandbox, 100% traffic)</a:t>
+              <a:t>• Runtime: Cloud Run Gen2 (gVisor runsc, 100% traffic)</a:t>
             </a:r>
             <a:endParaRPr lang="en-US" sz="780" dirty="0"/>
           </a:p>
@@ -4610,7 +4610,7 @@
                 <a:ea typeface="Roboto" pitchFamily="34" charset="-122"/>
                 <a:cs typeface="Roboto" pitchFamily="34" charset="-120"/>
               </a:rPr>
-              <a:t>• CLI Gate: python3 -B scripts/run_deep_forensic_audit.py (12/12 PASS)</a:t>
+              <a:t>• CLI Gate: run_deep_forensic_audit.py (12/12 PASS)</a:t>
             </a:r>
             <a:endParaRPr lang="en-US" sz="780" dirty="0"/>
           </a:p>
@@ -4752,7 +4752,7 @@
                 <a:ea typeface="Google Sans" pitchFamily="34" charset="-122"/>
                 <a:cs typeface="Google Sans" pitchFamily="34" charset="-120"/>
               </a:rPr>
-              <a:t>ACT III FORENSIC AUDIT 02 • CLOUD LOGGING 20/20 PASS</a:t>
+              <a:t>ACT III FORENSIC AUDIT 02 • DUAL-PLANE GCP 20/20 &amp; SAAS 30/30 PASS</a:t>
             </a:r>
             <a:endParaRPr lang="en-US" sz="820" dirty="0"/>
           </a:p>
@@ -4842,7 +4842,7 @@
                 <a:ea typeface="Google Sans" pitchFamily="34" charset="-122"/>
                 <a:cs typeface="Google Sans" pitchFamily="34" charset="-120"/>
               </a:rPr>
-              <a:t>Cloud Logging Explorer verifying jsonPayload.rls_cross_tenant_rows=0, 120/600 RPM bulkheads &amp; 0ms tier upgrade logs</a:t>
+              <a:t>Cloud Logging Explorer &amp; Dual-Plane Harness verifying 20/20 GCP suites + 30/30 Inter-Cloud 10-SaaS MCP flows</a:t>
             </a:r>
             <a:endParaRPr lang="en-US" sz="860" dirty="0"/>
           </a:p>
@@ -4881,7 +4881,7 @@
                 <a:ea typeface="Roboto" pitchFamily="34" charset="-122"/>
                 <a:cs typeface="Roboto" pitchFamily="34" charset="-120"/>
               </a:rPr>
-              <a:t>• Logs Query: jsonPayload.rls_cross_tenant_rows=0 AND status=(200|403|423|429)</a:t>
+              <a:t>• Query: rls_cross_tenant_rows=0 AND status=(200..429)</a:t>
             </a:r>
             <a:endParaRPr lang="en-US" sz="780" dirty="0"/>
           </a:p>
@@ -4898,7 +4898,7 @@
                 <a:ea typeface="Roboto" pitchFamily="34" charset="-122"/>
                 <a:cs typeface="Roboto" pitchFamily="34" charset="-120"/>
               </a:rPr>
-              <a:t>• Audit Suite: 20/20 Runtime Simulations PASS (107/107 Assertions)</a:t>
+              <a:t>• Dual-Plane: 20/20 GCP + 30/30 10-SaaS MCP PASS</a:t>
             </a:r>
             <a:endParaRPr lang="en-US" sz="780" dirty="0"/>
           </a:p>
@@ -4915,7 +4915,7 @@
                 <a:ea typeface="Roboto" pitchFamily="34" charset="-122"/>
                 <a:cs typeface="Roboto" pitchFamily="34" charset="-120"/>
               </a:rPr>
-              <a:t>• Latency &amp; Cache: ~42ms p95 5-Hop • &lt;0.15ms JWKS • &lt;5s SCAN+UNLINK</a:t>
+              <a:t>• Twins: 13.220.94.209:3001..3010 (HTTP 200 • 60/60)</a:t>
             </a:r>
             <a:endParaRPr lang="en-US" sz="780" dirty="0"/>
           </a:p>
@@ -5157,7 +5157,7 @@
                 <a:ea typeface="Roboto" pitchFamily="34" charset="-122"/>
                 <a:cs typeface="Roboto" pitchFamily="34" charset="-120"/>
               </a:rPr>
-              <a:t>Live across ramp-portal-dev (#248990048888), cymbal-pooled-prod (#638420508320) &amp; cymbal-build-sandbox (#887605034827) inside gVisor sandboxes.</a:t>
+              <a:t>Live across cymbal-control-plane (#248990048888), cymbal-pooled-prod (#638420508320) &amp; cymbal-build-sandbox (#887605034827) inside gVisor sandboxes.</a:t>
             </a:r>
             <a:endParaRPr lang="en-US" sz="860" dirty="0"/>
           </a:p>
@@ -5637,7 +5637,7 @@
                 <a:ea typeface="Google Sans" pitchFamily="34" charset="-122"/>
                 <a:cs typeface="Google Sans" pitchFamily="34" charset="-120"/>
               </a:rPr>
-              <a:t>AUDIT 04 • 12/12 FORENSIC + 107/107 GATES</a:t>
+              <a:t>AUDIT 04 • DUAL-PLANE 20/20 GCP + 30/30 SAAS</a:t>
             </a:r>
             <a:endParaRPr lang="en-US" sz="740" dirty="0"/>
           </a:p>
@@ -5676,7 +5676,7 @@
                 <a:ea typeface="Google Sans" pitchFamily="34" charset="-122"/>
                 <a:cs typeface="Google Sans" pitchFamily="34" charset="-120"/>
               </a:rPr>
-              <a:t>Reproducible Cloud Logging &amp; CLI Forensic Proof</a:t>
+              <a:t>Intra-Cloud GCP + Inter-Cloud 10-SaaS MCP Proof</a:t>
             </a:r>
             <a:endParaRPr lang="en-US" sz="1050" dirty="0"/>
           </a:p>
@@ -5715,7 +5715,7 @@
                 <a:ea typeface="Roboto" pitchFamily="34" charset="-122"/>
                 <a:cs typeface="Roboto" pitchFamily="34" charset="-120"/>
               </a:rPr>
-              <a:t>Verified via Cloud Logging query (jsonPayload.rls_cross_tenant_rows=0) and python3 -B scripts/run_deep_forensic_audit.py (12/12 PASS • 107/107 Assertions).</a:t>
+              <a:t>Certifies 20/20 GCP runtime suites plus 30/30 Inter-Cloud AWS AgentCore MCP &amp; :3001..3010 Execution Twin flows (60/60 assertions, 12/12 forensic gates).</a:t>
             </a:r>
             <a:endParaRPr lang="en-US" sz="860" dirty="0"/>
           </a:p>
@@ -6507,7 +6507,7 @@
                 <a:ea typeface="Roboto" pitchFamily="34" charset="-122"/>
                 <a:cs typeface="Roboto" pitchFamily="34" charset="-120"/>
               </a:rPr>
-              <a:t>Clone github.com/nitinaggarwal-12/blogs and deploy core-cymbal-agent/ with &lt;0.15ms cached-JWKS STS JWT verification, ~3ms Valkey JTI deny-list, and {tenant}:{user} 3LO token vaulting.</a:t>
+              <a:t>Deploy core-cymbal-agent/ (24-File Reference Workbench) with &lt;0.15ms cached-JWKS STS JWT verification, ~3ms Valkey JTI deny-list, and {tenant}:{user} 3LO token vaulting.</a:t>
             </a:r>
             <a:endParaRPr lang="en-US" sz="900" dirty="0"/>
           </a:p>
@@ -6593,7 +6593,7 @@
                 <a:ea typeface="Google Sans" pitchFamily="34" charset="-122"/>
                 <a:cs typeface="Google Sans" pitchFamily="34" charset="-120"/>
               </a:rPr>
-              <a:t>Cloud Stack: github.com/nitinaggarwal-12/blogs • core-cymbal-agent/runtime_pipeline.py • models.py
+              <a:t>Cloud Stack: core-cymbal-agent/ • runtime_pipeline.py • models.py
 </a:t>
             </a:r>
             <a:pPr indent="0" marL="0">
@@ -6608,7 +6608,7 @@
                 <a:ea typeface="Roboto" pitchFamily="34" charset="-122"/>
                 <a:cs typeface="Roboto" pitchFamily="34" charset="-120"/>
               </a:rPr>
-              <a:t>Target &amp; SLA: SLA: &lt;0.15ms Cached JWKS • ~3ms Valkey JTI Deny-List • {tenant}:{user} 3LO Token Vault (Slides 1–4)</a:t>
+              <a:t>Target &amp; SLA: SLA: &lt;0.15ms Cached JWKS • ~3ms JTI Deny-List • 3LO Vault</a:t>
             </a:r>
             <a:endParaRPr lang="en-US" sz="750" dirty="0"/>
           </a:p>
@@ -6961,7 +6961,7 @@
                 <a:ea typeface="Google Sans" pitchFamily="34" charset="-122"/>
                 <a:cs typeface="Google Sans" pitchFamily="34" charset="-120"/>
               </a:rPr>
-              <a:t>Cloud Stack: workstream-2-pattern-a-pooled/2.6-terraform-starter/ • run_breach_simulations.py
+              <a:t>Cloud Stack: 2.6-terraform-starter/ • run_breach_simulations.py
 </a:t>
             </a:r>
             <a:pPr indent="0" marL="0">
@@ -6976,7 +6976,7 @@
                 <a:ea typeface="Roboto" pitchFamily="34" charset="-122"/>
                 <a:cs typeface="Roboto" pitchFamily="34" charset="-120"/>
               </a:rPr>
-              <a:t>Target &amp; SLA: SLA: ~42ms p95 5-Hop • ~1.8s Cold / ~420ms Warm TTFT • 84.7% Token Savings • 10/10 PASS (Slides 5, 6, 8)</a:t>
+              <a:t>Target &amp; SLA: SLA: ~42ms 5-Hop • ~420ms Warm TTFT • 84.7% Savings (10/10)</a:t>
             </a:r>
             <a:endParaRPr lang="en-US" sz="750" dirty="0"/>
           </a:p>
@@ -7037,7 +7037,7 @@
                 <a:ea typeface="Google Sans" pitchFamily="34" charset="-122"/>
                 <a:cs typeface="Google Sans" pitchFamily="34" charset="-120"/>
               </a:rPr>
-              <a:t>Owner: Cloud Security &amp; IAM  •  Part 2: 5-Hop &amp; Pattern A (Slides 5, 6, 8)</a:t>
+              <a:t>Owner: Cloud Security &amp; IAM  •  Part 2: 5-Hop &amp; Pattern A</a:t>
             </a:r>
             <a:endParaRPr lang="en-US" sz="750" dirty="0"/>
           </a:p>
@@ -7329,7 +7329,7 @@
                 <a:ea typeface="Google Sans" pitchFamily="34" charset="-122"/>
                 <a:cs typeface="Google Sans" pitchFamily="34" charset="-120"/>
               </a:rPr>
-              <a:t>Cloud Stack: workstream-3-pattern-b-siloed/3.6-terraform-silo-blueprint/ • run_silo_security_tests.py
+              <a:t>Cloud Stack: 3.6-terraform-silo-blueprint/ • run_silo_security_tests.py
 </a:t>
             </a:r>
             <a:pPr indent="0" marL="0">
@@ -7344,7 +7344,7 @@
                 <a:ea typeface="Roboto" pitchFamily="34" charset="-122"/>
                 <a:cs typeface="Roboto" pitchFamily="34" charset="-120"/>
               </a:rPr>
-              <a:t>Target &amp; SLA: SLA: &lt;60s CMEK (423) • &lt;5s SCAN+UNLINK • SET NX PX 5000 Recovery • &lt;30s HA RTO • 6/6 PASS (Slide 7)</a:t>
+              <a:t>Target &amp; SLA: SLA: &lt;60s CMEK (423) • &lt;5s SCAN+UNLINK • &lt;30s RTO (6/6)</a:t>
             </a:r>
             <a:endParaRPr lang="en-US" sz="750" dirty="0"/>
           </a:p>
@@ -7611,7 +7611,7 @@
                 <a:ea typeface="Roboto" pitchFamily="34" charset="-122"/>
                 <a:cs typeface="Roboto" pitchFamily="34" charset="-120"/>
               </a:rPr>
-              <a:t>Apply Terraform 4.6 (4.6-terraform-hybrid-psc-blueprint/), certify 74% portfolio TCO reduction ($260k→$68k/mo), feature-flagged GAP-01..05 sunset hooks, BigQuery OTel FinOps SQL, and 0ms PSC cutover (4/4 PASS).</a:t>
+              <a:t>Apply Terraform 4.6 (4.6-terraform-hybrid-psc-blueprint/), certify 74% portfolio TCO reduction (950 Pooled + 50 PSC Spokes), feature-flagged GAP-01..05 sunset hooks, BigQuery OTel FinOps SQL, and 0ms PSC cutover (4/4 PASS).</a:t>
             </a:r>
             <a:endParaRPr lang="en-US" sz="980" dirty="0"/>
           </a:p>
@@ -7697,7 +7697,7 @@
                 <a:ea typeface="Google Sans" pitchFamily="34" charset="-122"/>
                 <a:cs typeface="Google Sans" pitchFamily="34" charset="-120"/>
               </a:rPr>
-              <a:t>Cloud Stack: workstream-4-pattern-c-hybrid/4.6-terraform-hybrid-psc-blueprint/ • run_tier_migration_suite.py
+              <a:t>Cloud Stack: 4.6-terraform-hybrid-psc-blueprint/ • run_tier_migration_suite.py
 </a:t>
             </a:r>
             <a:pPr indent="0" marL="0">
@@ -7712,7 +7712,7 @@
                 <a:ea typeface="Roboto" pitchFamily="34" charset="-122"/>
                 <a:cs typeface="Roboto" pitchFamily="34" charset="-120"/>
               </a:rPr>
-              <a:t>Target &amp; SLA: SLA: 74% TCO Savings ($260k→$68k/mo) • 0ms Cutover • GAP-01..05 Sunset Hooks • 4/4 PASS (Slide 9)</a:t>
+              <a:t>Target &amp; SLA: SLA: 74% TCO Savings (950 Pool + 50 PSC) • 0ms Cutover (4/4)</a:t>
             </a:r>
             <a:endParaRPr lang="en-US" sz="750" dirty="0"/>
           </a:p>
@@ -7920,7 +7920,7 @@
                 <a:ea typeface="Google Sans" pitchFamily="34" charset="-122"/>
                 <a:cs typeface="Google Sans" pitchFamily="34" charset="-120"/>
               </a:rPr>
-              <a:t>Part 5 (Slides 10–11) — CI/CD Forensic Audit &amp; Day-2 Operations</a:t>
+              <a:t>Part 5 (Slides 10–11) — Dual-Plane CI/CD Forensic Audit &amp; Day-2 Operations</a:t>
             </a:r>
             <a:endParaRPr lang="en-US" sz="1140" dirty="0"/>
           </a:p>
@@ -7979,7 +7979,7 @@
                 <a:ea typeface="Roboto" pitchFamily="34" charset="-122"/>
                 <a:cs typeface="Roboto" pitchFamily="34" charset="-120"/>
               </a:rPr>
-              <a:t>Enforce python3 -B scripts/run_deep_forensic_audit.py (12/12 PASS • 107/107 Assertions) and Cloud Logging gate (jsonPayload.rls_cross_tenant_rows=0) across WS1–WS5 in CI/CD.</a:t>
+              <a:t>Enforce python3 -B scripts/run_deep_forensic_audit.py (12/12 PASS • 107/107 Assertions) across 20/20 GCP suites and 30/30 Inter-Cloud 10-SaaS MCP &amp; :3001..3010 Execution Twins.</a:t>
             </a:r>
             <a:endParaRPr lang="en-US" sz="980" dirty="0"/>
           </a:p>
@@ -8065,7 +8065,7 @@
                 <a:ea typeface="Google Sans" pitchFamily="34" charset="-122"/>
                 <a:cs typeface="Google Sans" pitchFamily="34" charset="-120"/>
               </a:rPr>
-              <a:t>Cloud Stack: scripts/run_deep_forensic_audit.py • blogs/ws1-reference-architecture-taxonomy-and-5hop-baseline.md
+              <a:t>Cloud Stack: run_deep_forensic_audit.py • verify_5_third_party_saas_products.py
 </a:t>
             </a:r>
             <a:pPr indent="0" marL="0">
@@ -8080,7 +8080,7 @@
                 <a:ea typeface="Roboto" pitchFamily="34" charset="-122"/>
                 <a:cs typeface="Roboto" pitchFamily="34" charset="-120"/>
               </a:rPr>
-              <a:t>Target &amp; SLA: SLA: 12/12 Forensic Gate (107/107 Assertions) • 20/20 Breach/Silo/PSC Suite • 0 RLS Bleed (Slides 10–11)</a:t>
+              <a:t>Target &amp; SLA: SLA: 12/12 Forensic (107/107) • 20/20 GCP + 30/30 10-SaaS MCP</a:t>
             </a:r>
             <a:endParaRPr lang="en-US" sz="750" dirty="0"/>
           </a:p>
@@ -8141,7 +8141,7 @@
                 <a:ea typeface="Google Sans" pitchFamily="34" charset="-122"/>
                 <a:cs typeface="Google Sans" pitchFamily="34" charset="-120"/>
               </a:rPr>
-              <a:t>Owner: Governance &amp; CISO  •  Part 5: CI/CD Forensic Gate (Slides 10–11)</a:t>
+              <a:t>Owner: Governance &amp; CISO  •  Part 5: Dual-Plane CI/CD Gate (Slides 10–11)</a:t>
             </a:r>
             <a:endParaRPr lang="en-US" sz="750" dirty="0"/>
           </a:p>
@@ -14443,7 +14443,7 @@
                           <a:ea typeface="Roboto" pitchFamily="34" charset="-122"/>
                           <a:cs typeface="Roboto" pitchFamily="34" charset="-120"/>
                         </a:rPr>
-                        <a:t>Single shared GCP project (ramp-portal-dev); 1 Terraform state with zero fleet sprawl</a:t>
+                        <a:t>Single shared GCP project (cymbal-control-plane); 1 Terraform state with zero fleet sprawl</a:t>
                       </a:r>
                       <a:endParaRPr lang="en-US" sz="820" dirty="0">
                         <a:latin typeface="Roboto" charset="0"/>
@@ -21945,7 +21945,7 @@
                 <a:ea typeface="Google Sans" pitchFamily="34" charset="-122"/>
                 <a:cs typeface="Google Sans" pitchFamily="34" charset="-120"/>
               </a:rPr>
-              <a:t>VERIFIED • 56 Editable Shapes • 23 Connectors • GCP: ramp-portal-dev</a:t>
+              <a:t>VERIFIED • 56 Editable Shapes • 23 Connectors • GCP: cymbal-control-plane</a:t>
             </a:r>
             <a:endParaRPr lang="en-US" sz="700" dirty="0"/>
           </a:p>
@@ -22043,7 +22043,7 @@
                 <a:ea typeface="Arial" pitchFamily="34" charset="-122"/>
                 <a:cs typeface="Arial" pitchFamily="34" charset="-120"/>
               </a:rPr>
-              <a:t>Shared Control Plane (ramp-portal-dev / cymbal-build-sandbox</a:t>
+              <a:t>Shared Control Plane (cymbal-control-plane / cymbal-build-sandbox</a:t>
             </a:r>
             <a:endParaRPr lang="en-US" sz="460" dirty="0"/>
           </a:p>

--- a/slides/doc-mt-01-editable-slides.pptx
+++ b/slides/doc-mt-01-editable-slides.pptx
@@ -519,7 +519,7 @@
           <a:p>
             <a:r>
               <a:rPr lang="en-US" dirty="0"/>
-              <a:t>In this session, we are walking through our foundational reference architecture for running multi-tenant AI agents on Google Cloud. Right upfront, we define our three core building blocks—Google’s Agent Development Kit 2.0 (ADK), the Model Context Protocol (MCP) for external tool integrations, and Agent Registry and Discovery (ARD)—and show how we solve the SaaS AI Architect’s Dilemma: avoiding the margin erosion of spinning up dedicated cloud projects for every small customer while preventing tool-schema data leaks and noisy-neighbor rate starvation in a shared pool.</a:t>
+              <a:t>In this session, we are walking through our foundational reference architecture for running multi-tenant AI agents on Google Cloud. Right upfront, we define our three core building blocks—Google’s Agent Development Kit (ADK) (ADK), the Model Context Protocol (MCP) for external tool integrations, and Agent Registry and Discovery (ARD)—and show how we solve the SaaS AI Architect’s Dilemma: avoiding the margin erosion of spinning up dedicated cloud projects for every small customer while preventing tool-schema data leaks and noisy-neighbor rate starvation in a shared pool.</a:t>
             </a:r>
             <a:endParaRPr lang="en-US" dirty="0"/>
           </a:p>
@@ -1131,7 +1131,7 @@
           <a:p>
             <a:r>
               <a:rPr lang="en-US" dirty="0"/>
-              <a:t>Before we inspect individual cloud services, this Level 1 diagram organizes our entire architecture into three logical security layers from left to right—preventing any terminology clash with the four physical VPC-SC network perimeters on the next slide. Layer 1 on the left verifies federated identity and DPoP proofs at the Cloud Armor and IAP edge. Layer 2 in the center runs our Five-Hop ADK 2.0 Control Plane, where regional gRPC callouts keep Hop 4 inline Model Armor and Cloud DLP inspection to roughly twenty-two milliseconds and total five-hop control-plane overhead to about forty-two milliseconds at p95. And to prevent security drift during a five-minute STS JWT window, every hop checks a three-millisecond Valkey JTI and CMEK revocation deny-list before routing into Layer 3 on the right.</a:t>
+              <a:t>Before we inspect individual cloud services, this Level 1 diagram organizes our entire architecture into three logical security layers from left to right—preventing any terminology clash with the four physical VPC-SC network perimeters on the next slide. Layer 1 on the left verifies federated identity and DPoP proofs at the Cloud Armor and IAP edge. Layer 2 in the center runs our Five-Hop ADK Control Plane, where regional gRPC callouts keep Hop 4 inline Model Armor and Cloud DLP inspection to roughly twenty-two milliseconds and total five-hop control-plane overhead to about forty-two milliseconds at p95. And to prevent security drift during a five-minute STS JWT window, every hop checks a three-millisecond Valkey JTI and CMEK revocation deny-list before routing into Layer 3 on the right.</a:t>
             </a:r>
             <a:endParaRPr lang="en-US" dirty="0"/>
           </a:p>
@@ -1532,14 +1532,14 @@
           <a:p>
             <a:r>
               <a:rPr lang="en-US" dirty="0"/>
-              <a:t>Part 4 on Slide 9 provides our transparent engineering ledger of five current platform gaps, our codebase compensating controls, and our Q4 2026 / Q1 2027 native GA sunset hooks.</a:t>
+              <a:t>Part 4 on Slide 9 provides our transparent engineering ledger of five current platform gaps, our codebase compensating controls, and our feature-flagged native adapter native GA sunset hooks.</a:t>
             </a:r>
             <a:endParaRPr lang="en-US" dirty="0"/>
           </a:p>
           <a:p>
             <a:r>
               <a:rPr lang="en-US" dirty="0"/>
-              <a:t>This register maps our five compensating production controls—GAP-01 through GAP-05—to the early-access platform boundaries engineering teams face today. Every custom Python, Valkey, or SQL control in core-cymbal-agent is wrapped in a feature-flagged GA sunset hook targeted for Q4 2026 through Q1 2027 so teams can switch cleanly to native GCP primitives as they reach general availability. And in row five, our OpenTelemetry FinOps exporter streams SHA-256 prompt hashes and token counters directly into BigQuery so finance teams can run exact SQL chargeback queries across cached and thinking tokens with zero raw PII.</a:t>
+              <a:t>This register maps our five compensating production controls—GAP-01 through GAP-05—to the early-access platform boundaries engineering teams face today. Every custom Python, Valkey, or SQL control in core-cymbal-agent is wrapped in a feature-flagged GA sunset hook targeted for Feature-Flagged Native Hook through Feature-Flagged Native Hook so teams can switch cleanly to native GCP primitives as they reach general availability. And in row five, our OpenTelemetry FinOps exporter streams SHA-256 prompt hashes and token counters directly into BigQuery so finance teams can run exact SQL chargeback queries across cached and thinking tokens with zero raw PII.</a:t>
             </a:r>
             <a:endParaRPr lang="en-US" dirty="0"/>
           </a:p>
@@ -2389,7 +2389,7 @@
                 <a:ea typeface="Roboto" pitchFamily="34" charset="-122"/>
                 <a:cs typeface="Roboto" pitchFamily="34" charset="-120"/>
               </a:rPr>
-              <a:t>Solving the SaaS AI Dilemma: Prevent tool-schema leaks and rogue-tenant quota starvation using Agent Development Kit (ADK 2.0), Model Context Protocol (MCP) &amp; Agent Registry Discovery (ARD) across Pooled, Silo &amp; Hybrid tiers</a:t>
+              <a:t>Solving the SaaS AI Dilemma: Prevent tool-schema leaks and rogue-tenant quota starvation using Agent Development Kit (ADK), Model Context Protocol (MCP) &amp; Agent Registry Discovery (ARD) across Pooled, Silo &amp; Hybrid tiers</a:t>
             </a:r>
             <a:endParaRPr lang="en-US" sz="980" dirty="0"/>
           </a:p>
@@ -2643,7 +2643,7 @@
                 <a:ea typeface="Roboto" pitchFamily="34" charset="-122"/>
                 <a:cs typeface="Roboto" pitchFamily="34" charset="-120"/>
               </a:rPr>
-              <a:t>Agent Development Kit (ADK 2.0) orchestrates reasoning &amp; callbacks; Model Context Protocol (MCP) standardizes 2LO/3LO enterprise tools; Agent Registry &amp; Discovery (ARD) enforces tenant catalog ACLs.</a:t>
+              <a:t>Agent Development Kit (ADK) orchestrates reasoning &amp; callbacks; Model Context Protocol (MCP) standardizes 2LO/3LO enterprise tools; Agent Registry &amp; Discovery (ARD) enforces tenant catalog ACLs.</a:t>
             </a:r>
             <a:endParaRPr lang="en-US" sz="720" dirty="0"/>
           </a:p>
@@ -2770,7 +2770,7 @@
                 <a:ea typeface="Roboto" pitchFamily="34" charset="-122"/>
                 <a:cs typeface="Roboto" pitchFamily="34" charset="-120"/>
               </a:rPr>
-              <a:t>Pattern A (Pooled RLS + 90% prefix cache), Pattern B (Sovereign Silo VPC-SC + CMEK), and Pattern C (Dynamic Hybrid PSC + 0ms tier upgrade) share 80% identical Python ADK 2.0 code.</a:t>
+              <a:t>Pattern A (Pooled RLS + 90% prefix cache), Pattern B (Sovereign Silo VPC-SC + CMEK), and Pattern C (Dynamic Hybrid PSC + 0ms tier upgrade) share 80% identical Python ADK code.</a:t>
             </a:r>
             <a:endParaRPr lang="en-US" sz="720" dirty="0"/>
           </a:p>
@@ -3229,7 +3229,7 @@
                 <a:ea typeface="Roboto" pitchFamily="34" charset="-122"/>
                 <a:cs typeface="Roboto" pitchFamily="34" charset="-120"/>
               </a:rPr>
-              <a:t>Defines ADK 2.0, MCP &amp; ARD upfront; sets the 5-Act agenda (Slide 2), contrasts FinVault (600 RPM: Dedicated PT vs. GKE Gemma 3) &amp; RetailStream (120 RPM: 3LO vault, Slide 3), and compares Patterns A/B/C (Slide 4).</a:t>
+              <a:t>Defines ADK, MCP &amp; ARD upfront; sets the 5-Act agenda (Slide 2), contrasts FinVault (600 RPM: Dedicated PT vs. GKE Gemma 3) &amp; RetailStream (120 RPM: 3LO vault, Slide 3), and compares Patterns A/B/C (Slide 4).</a:t>
             </a:r>
             <a:endParaRPr lang="en-US" sz="780" dirty="0"/>
           </a:p>
@@ -3906,7 +3906,7 @@
                 <a:ea typeface="Roboto" pitchFamily="34" charset="-122"/>
                 <a:cs typeface="Roboto" pitchFamily="34" charset="-120"/>
               </a:rPr>
-              <a:t>Multi-Tenant Agentic AI on Google Cloud • Vertex AI Agent Engine, Gemini Enterprise &amp; ADK 2.0  •  </a:t>
+              <a:t>Multi-Tenant Agentic AI on Google Cloud • Vertex AI Agent Engine, Gemini Enterprise &amp; ADK  •  </a:t>
             </a:r>
             <a:pPr algn="l" indent="0" marL="0">
               <a:buNone/>
@@ -8321,7 +8321,7 @@
                 <a:ea typeface="Roboto" pitchFamily="34" charset="-122"/>
                 <a:cs typeface="Roboto" pitchFamily="34" charset="-120"/>
               </a:rPr>
-              <a:t>Multi-Tenant Agentic AI on Google Cloud • Vertex AI Agent Engine, Gemini Enterprise &amp; ADK 2.0  •  </a:t>
+              <a:t>Multi-Tenant Agentic AI on Google Cloud • Vertex AI Agent Engine, Gemini Enterprise &amp; ADK  •  </a:t>
             </a:r>
             <a:pPr algn="l" indent="0" marL="0">
               <a:buNone/>
@@ -9405,7 +9405,7 @@
                           <a:ea typeface="Roboto" pitchFamily="34" charset="-122"/>
                           <a:cs typeface="Roboto" pitchFamily="34" charset="-120"/>
                         </a:rPr>
-                        <a:t>12-Dimension Decision Matrix • 80/20 ADK 2.0 Code Reuse • {tenant}:{user} DPoP 3LO Vault</a:t>
+                        <a:t>12-Dimension Decision Matrix • 80/20 ADK Code Reuse • {tenant}:{user} DPoP 3LO Vault</a:t>
                       </a:r>
                       <a:endParaRPr lang="en-US" sz="870" dirty="0">
                         <a:latin typeface="Roboto" charset="0"/>
@@ -10290,7 +10290,7 @@
                           <a:ea typeface="Roboto" pitchFamily="34" charset="-122"/>
                           <a:cs typeface="Roboto" pitchFamily="34" charset="-120"/>
                         </a:rPr>
-                        <a:t>Feature-Flagged GAP-01..05 Sunset Hooks (Q4 2026 / Q1 2027) • BigQuery OTel Chargeback SQL</a:t>
+                        <a:t>Feature-Flagged GAP-01..05 Sunset Hooks (feature-flagged native adapter) • BigQuery OTel Chargeback SQL</a:t>
                       </a:r>
                       <a:endParaRPr lang="en-US" sz="870" dirty="0">
                         <a:latin typeface="Roboto" charset="0"/>
@@ -11331,7 +11331,7 @@
                 <a:ea typeface="Roboto" pitchFamily="34" charset="-122"/>
                 <a:cs typeface="Roboto" pitchFamily="34" charset="-120"/>
               </a:rPr>
-              <a:t>Multi-Tenant Agentic AI on Google Cloud • Vertex AI Agent Engine, Gemini Enterprise &amp; ADK 2.0  •  </a:t>
+              <a:t>Multi-Tenant Agentic AI on Google Cloud • Vertex AI Agent Engine, Gemini Enterprise &amp; ADK  •  </a:t>
             </a:r>
             <a:pPr algn="l" indent="0" marL="0">
               <a:buNone/>
@@ -12070,7 +12070,7 @@
                 <a:ea typeface="Roboto" pitchFamily="34" charset="-122"/>
                 <a:cs typeface="Roboto" pitchFamily="34" charset="-120"/>
               </a:rPr>
-              <a:t>Operates a shared Incident Diagnostic Agent on Vertex AI Agent Engine (ADK 2.0, ARD Registry &amp; L1–L5 Memory Bank), caching a 32,000-token SRE runbook prefix once (90% discount -&gt; 84.7% net per-turn token cost reduction).</a:t>
+              <a:t>Operates a shared Incident Diagnostic Agent on Vertex AI Agent Engine (ADK, ARD Registry &amp; L1–L5 Memory Bank), caching a 32,000-token SRE runbook prefix once (90% discount -&gt; 84.7% net per-turn token cost reduction).</a:t>
             </a:r>
             <a:endParaRPr lang="en-US" sz="980" dirty="0"/>
           </a:p>
@@ -12156,7 +12156,7 @@
                 <a:ea typeface="Google Sans" pitchFamily="34" charset="-122"/>
                 <a:cs typeface="Google Sans" pitchFamily="34" charset="-120"/>
               </a:rPr>
-              <a:t>Cloud Stack: Vertex AI Agent Engine (ADK 2.0, ARD, L1–L5 Memory) • Gemini 2.5 Pro (32k ContextCacheConfig)
+              <a:t>Cloud Stack: Vertex AI Agent Engine (ADK, ARD, L1–L5 Memory) • Gemini 2.5 Pro (32k ContextCacheConfig)
 </a:t>
             </a:r>
             <a:pPr indent="0" marL="0">
@@ -13174,7 +13174,7 @@
                 <a:ea typeface="Roboto" pitchFamily="34" charset="-122"/>
                 <a:cs typeface="Roboto" pitchFamily="34" charset="-120"/>
               </a:rPr>
-              <a:t>Cloud Armor WAF, IAP OBO/DPoP, Valkey token buckets, streaming Model Armor/DLP (~22ms), and AlloyDB FORCE RLS run one 80% reusable ADK 2.0 codebase—blocking cross-tenant probes (HTTP 403) with 0 cross-tenant rows.</a:t>
+              <a:t>Cloud Armor WAF, IAP OBO/DPoP, Valkey token buckets, streaming Model Armor/DLP (~22ms), and AlloyDB FORCE RLS run one 80% reusable ADK codebase—blocking cross-tenant probes (HTTP 403) with 0 cross-tenant rows.</a:t>
             </a:r>
             <a:endParaRPr lang="en-US" sz="980" dirty="0"/>
           </a:p>
@@ -13275,7 +13275,7 @@
                 <a:ea typeface="Roboto" pitchFamily="34" charset="-122"/>
                 <a:cs typeface="Roboto" pitchFamily="34" charset="-120"/>
               </a:rPr>
-              <a:t>Target &amp; SLA: 80% Identical Python ADK 2.0 Codebase • Verified by 107/107 Automated Security &amp; SaaS Assertions</a:t>
+              <a:t>Target &amp; SLA: 80% Identical Python ADK Codebase • Verified by 107/107 Automated Security &amp; SaaS Assertions</a:t>
             </a:r>
             <a:endParaRPr lang="en-US" sz="750" dirty="0"/>
           </a:p>
@@ -13516,7 +13516,7 @@
                 <a:ea typeface="Roboto" pitchFamily="34" charset="-122"/>
                 <a:cs typeface="Roboto" pitchFamily="34" charset="-120"/>
               </a:rPr>
-              <a:t>Multi-Tenant Agentic AI on Google Cloud • Vertex AI Agent Engine, Gemini Enterprise &amp; ADK 2.0  •  </a:t>
+              <a:t>Multi-Tenant Agentic AI on Google Cloud • Vertex AI Agent Engine, Gemini Enterprise &amp; ADK  •  </a:t>
             </a:r>
             <a:pPr algn="l" indent="0" marL="0">
               <a:buNone/>
@@ -16789,7 +16789,7 @@
                 <a:ea typeface="Roboto" pitchFamily="34" charset="-122"/>
                 <a:cs typeface="Roboto" pitchFamily="34" charset="-120"/>
               </a:rPr>
-              <a:t>Co-hosts 950 Pool + 50 PSC Spokes (74% TCO savings, 0ms cutover) using 80% identical ADK 2.0 Python code (runtime_pipeline.py) across Terraform 2.6/3.6/4.6.</a:t>
+              <a:t>Co-hosts 950 Pool + 50 PSC Spokes (74% TCO savings, 0ms cutover) using 80% identical ADK Python code (runtime_pipeline.py) across Terraform 2.6/3.6/4.6.</a:t>
             </a:r>
             <a:endParaRPr lang="en-US" sz="740" dirty="0"/>
           </a:p>
@@ -16969,7 +16969,7 @@
                 <a:ea typeface="Roboto" pitchFamily="34" charset="-122"/>
                 <a:cs typeface="Roboto" pitchFamily="34" charset="-120"/>
               </a:rPr>
-              <a:t>Multi-Tenant Agentic AI on Google Cloud • Vertex AI Agent Engine, Gemini Enterprise &amp; ADK 2.0  •  </a:t>
+              <a:t>Multi-Tenant Agentic AI on Google Cloud • Vertex AI Agent Engine, Gemini Enterprise &amp; ADK  •  </a:t>
             </a:r>
             <a:pPr algn="l" indent="0" marL="0">
               <a:buNone/>
@@ -18272,7 +18272,7 @@
                 <a:ea typeface="Google Sans" pitchFamily="34" charset="-122"/>
                 <a:cs typeface="Google Sans" pitchFamily="34" charset="-120"/>
               </a:rPr>
-              <a:t>LAYER 2: 5-HOP ADK 2.0 CONTROL PLANE</a:t>
+              <a:t>LAYER 2: 5-HOP ADK CONTROL PLANE</a:t>
             </a:r>
             <a:endParaRPr lang="en-US" sz="1100" dirty="0"/>
           </a:p>
@@ -21945,7 +21945,7 @@
                 <a:ea typeface="Google Sans" pitchFamily="34" charset="-122"/>
                 <a:cs typeface="Google Sans" pitchFamily="34" charset="-120"/>
               </a:rPr>
-              <a:t>VERIFIED • 56 Editable Shapes • 23 Connectors • GCP: cymbal-control-plane</a:t>
+              <a:t>VERIFIED • 56 Editable Shapes • 23 Connectors • GCP: cymbal-pooled-prod (#638420508320)</a:t>
             </a:r>
             <a:endParaRPr lang="en-US" sz="700" dirty="0"/>
           </a:p>
@@ -22043,7 +22043,7 @@
                 <a:ea typeface="Arial" pitchFamily="34" charset="-122"/>
                 <a:cs typeface="Arial" pitchFamily="34" charset="-120"/>
               </a:rPr>
-              <a:t>Shared Control Plane (cymbal-control-plane / cymbal-build-sandbox</a:t>
+              <a:t>Shared Control Plane (cymbal-pooled-prod / cymbal-build-sandbox</a:t>
             </a:r>
             <a:endParaRPr lang="en-US" sz="460" dirty="0"/>
           </a:p>
@@ -33996,7 +33996,7 @@
                           <a:ea typeface="Roboto" pitchFamily="34" charset="-122"/>
                           <a:cs typeface="Roboto" pitchFamily="34" charset="-120"/>
                         </a:rPr>
-                        <a:t>WS2 Test 2 PASS (HTTP 403 on cross-tenant Agent Alpha probe) • Sunset at Native GA: Q4 2026</a:t>
+                        <a:t>WS2 Test 2 PASS (HTTP 403 on cross-tenant Agent Alpha probe) • Sunset at Native GA: Feature-Flagged Native Hook</a:t>
                       </a:r>
                       <a:endParaRPr lang="en-US" sz="870" dirty="0">
                         <a:latin typeface="Roboto" charset="0"/>
@@ -34291,7 +34291,7 @@
                           <a:ea typeface="Roboto" pitchFamily="34" charset="-122"/>
                           <a:cs typeface="Roboto" pitchFamily="34" charset="-120"/>
                         </a:rPr>
-                        <a:t>WS3 Tests 4A/4B/6 PASS (HTTP 423 Locked &lt;60s, 0 peer cache evictions) • Sunset at GA: Q4 2026</a:t>
+                        <a:t>WS3 Tests 4A/4B/6 PASS (HTTP 423 Locked &lt;60s, 0 peer cache evictions) • Sunset at GA: Feature-Flagged Native Hook</a:t>
                       </a:r>
                       <a:endParaRPr lang="en-US" sz="870" dirty="0">
                         <a:latin typeface="Roboto" charset="0"/>
@@ -34586,7 +34586,7 @@
                           <a:ea typeface="Roboto" pitchFamily="34" charset="-122"/>
                           <a:cs typeface="Roboto" pitchFamily="34" charset="-120"/>
                         </a:rPr>
-                        <a:t>WS2 Test 6 PASS (HTTP 429 on 500-RPM flood; budget clamped to 4k) • Sunset at GA: Q4 2026</a:t>
+                        <a:t>WS2 Test 6 PASS (HTTP 429 on 500-RPM flood; budget clamped to 4k) • Sunset at GA: Feature-Flagged Native Hook</a:t>
                       </a:r>
                       <a:endParaRPr lang="en-US" sz="870" dirty="0">
                         <a:latin typeface="Roboto" charset="0"/>
@@ -34881,7 +34881,7 @@
                           <a:ea typeface="Roboto" pitchFamily="34" charset="-122"/>
                           <a:cs typeface="Roboto" pitchFamily="34" charset="-120"/>
                         </a:rPr>
-                        <a:t>WS2 Test 10 &amp; 10-SaaS Matrix PASS (HTTP 401 step-up -&gt; 200 OK ServiceNow) • Sunset at GA: Q4 2026</a:t>
+                        <a:t>WS2 Test 10 &amp; 10-SaaS Matrix PASS (HTTP 401 step-up -&gt; 200 OK ServiceNow) • Sunset at GA: Feature-Flagged Native Hook</a:t>
                       </a:r>
                       <a:endParaRPr lang="en-US" sz="870" dirty="0">
                         <a:latin typeface="Roboto" charset="0"/>
@@ -35176,7 +35176,7 @@
                           <a:ea typeface="Roboto" pitchFamily="34" charset="-122"/>
                           <a:cs typeface="Roboto" pitchFamily="34" charset="-120"/>
                         </a:rPr>
-                        <a:t>Forensic Check F-08 PASS (BigQuery OTel chargeback SQL verified) • Sunset at GA: Q1 2027</a:t>
+                        <a:t>Forensic Check F-08 PASS (BigQuery OTel chargeback SQL verified) • Sunset at GA: Feature-Flagged Native Hook</a:t>
                       </a:r>
                       <a:endParaRPr lang="en-US" sz="870" dirty="0">
                         <a:latin typeface="Roboto" charset="0"/>
@@ -35613,7 +35613,7 @@
                 <a:ea typeface="Roboto" pitchFamily="34" charset="-122"/>
                 <a:cs typeface="Roboto" pitchFamily="34" charset="-120"/>
               </a:rPr>
-              <a:t>Enforces 120/600 RPM Valkey token buckets (HTTP 429 Retry-After jitter) with feature-flagged GA sunset hooks (Q4 2026 / Q1 2027) in core-cymbal-agent/.</a:t>
+              <a:t>Enforces 120/600 RPM Valkey token buckets (HTTP 429 Retry-After jitter) with feature-flagged GA sunset hooks (feature-flagged native adapter) in core-cymbal-agent/.</a:t>
             </a:r>
             <a:endParaRPr lang="en-US" sz="740" dirty="0"/>
           </a:p>
@@ -35922,7 +35922,7 @@
                 <a:ea typeface="Roboto" pitchFamily="34" charset="-122"/>
                 <a:cs typeface="Roboto" pitchFamily="34" charset="-120"/>
               </a:rPr>
-              <a:t>Multi-Tenant Agentic AI on Google Cloud • Vertex AI Agent Engine, Gemini Enterprise &amp; ADK 2.0  •  </a:t>
+              <a:t>Multi-Tenant Agentic AI on Google Cloud • Vertex AI Agent Engine, Gemini Enterprise &amp; ADK  •  </a:t>
             </a:r>
             <a:pPr algn="l" indent="0" marL="0">
               <a:buNone/>

--- a/slides/doc-mt-01-editable-slides.pptx
+++ b/slides/doc-mt-01-editable-slides.pptx
@@ -4295,7 +4295,7 @@
                 <a:ea typeface="Google Sans" pitchFamily="34" charset="-122"/>
                 <a:cs typeface="Google Sans" pitchFamily="34" charset="-120"/>
               </a:rPr>
-              <a:t>WS1 • ACT III FORENSIC VERIFICATION AUDIT: GROUNDED GCP CONSOLE PROOF &amp; 20/20 LOGS</a:t>
+              <a:t>WS1 • ACT III FORENSIC VERIFICATION AUDIT: GROUNDED GCP TELEMETRY &amp; 20/20 LOGS</a:t>
             </a:r>
             <a:endParaRPr lang="en-US" sz="1020" dirty="0"/>
           </a:p>
@@ -4453,40 +4453,16 @@
           </a:p>
         </p:txBody>
       </p:sp>
-      <p:pic>
-        <p:nvPicPr>
-          <p:cNvPr id="20" name="Image 0" descr="preencoded.png">    </p:cNvPr>
-          <p:cNvPicPr>
-            <a:picLocks noChangeAspect="1"/>
-          </p:cNvPicPr>
-          <p:nvPr/>
-        </p:nvPicPr>
-        <p:blipFill>
-          <a:blip r:embed="rId1"/>
-          <a:stretch>
-            <a:fillRect/>
-          </a:stretch>
-        </p:blipFill>
+      <p:sp>
+        <p:nvSpPr>
+          <p:cNvPr id="20" name="Shape 18"/>
+          <p:cNvSpPr/>
+          <p:nvPr/>
+        </p:nvSpPr>
         <p:spPr>
           <a:xfrm>
             <a:off x="493776" y="1097280"/>
-            <a:ext cx="3639312" cy="2048256"/>
-          </a:xfrm>
-          <a:prstGeom prst="rect">
-            <a:avLst/>
-          </a:prstGeom>
-        </p:spPr>
-      </p:pic>
-      <p:sp>
-        <p:nvSpPr>
-          <p:cNvPr id="21" name="Shape 18"/>
-          <p:cNvSpPr/>
-          <p:nvPr/>
-        </p:nvSpPr>
-        <p:spPr>
-          <a:xfrm>
-            <a:off x="4242816" y="1097280"/>
-            <a:ext cx="2798064" cy="2048256"/>
+            <a:ext cx="6565392" cy="2048256"/>
           </a:xfrm>
           <a:prstGeom prst="roundRect">
             <a:avLst>
@@ -4506,14 +4482,14 @@
       </p:sp>
       <p:sp>
         <p:nvSpPr>
-          <p:cNvPr id="22" name="Text 19"/>
-          <p:cNvSpPr/>
-          <p:nvPr/>
-        </p:nvSpPr>
-        <p:spPr>
-          <a:xfrm>
-            <a:off x="4334256" y="1170432"/>
-            <a:ext cx="2615184" cy="658368"/>
+          <p:cNvPr id="21" name="Text 19"/>
+          <p:cNvSpPr/>
+          <p:nvPr/>
+        </p:nvSpPr>
+        <p:spPr>
+          <a:xfrm>
+            <a:off x="621792" y="1170432"/>
+            <a:ext cx="6309360" cy="512064"/>
           </a:xfrm>
           <a:prstGeom prst="rect">
             <a:avLst/>
@@ -4529,7 +4505,7 @@
               <a:buNone/>
             </a:pPr>
             <a:r>
-              <a:rPr lang="en-US" sz="860" b="1" dirty="0">
+              <a:rPr lang="en-US" sz="920" b="1" dirty="0">
                 <a:solidFill>
                   <a:srgbClr val="3C4043"/>
                 </a:solidFill>
@@ -4539,20 +4515,20 @@
               </a:rPr>
               <a:t>cymbal-control-plane (#248990048888) &amp; cymbal-pooled-prod (#638420508320) serving Pattern A/B/C endpoints (HTTP 200)</a:t>
             </a:r>
-            <a:endParaRPr lang="en-US" sz="860" dirty="0"/>
-          </a:p>
-        </p:txBody>
-      </p:sp>
-      <p:sp>
-        <p:nvSpPr>
-          <p:cNvPr id="23" name="Text 20"/>
-          <p:cNvSpPr/>
-          <p:nvPr/>
-        </p:nvSpPr>
-        <p:spPr>
-          <a:xfrm>
-            <a:off x="4334256" y="1865376"/>
-            <a:ext cx="2615184" cy="950976"/>
+            <a:endParaRPr lang="en-US" sz="920" dirty="0"/>
+          </a:p>
+        </p:txBody>
+      </p:sp>
+      <p:sp>
+        <p:nvSpPr>
+          <p:cNvPr id="22" name="Text 20"/>
+          <p:cNvSpPr/>
+          <p:nvPr/>
+        </p:nvSpPr>
+        <p:spPr>
+          <a:xfrm>
+            <a:off x="621792" y="1719072"/>
+            <a:ext cx="6309360" cy="1060704"/>
           </a:xfrm>
           <a:prstGeom prst="rect">
             <a:avLst/>
@@ -4568,7 +4544,7 @@
               <a:buNone/>
             </a:pPr>
             <a:r>
-              <a:rPr lang="en-US" sz="780" dirty="0">
+              <a:rPr lang="en-US" sz="840" dirty="0">
                 <a:solidFill>
                   <a:srgbClr val="5F6368"/>
                 </a:solidFill>
@@ -4578,14 +4554,14 @@
               </a:rPr>
               <a:t>• Projects: cymbal-control-plane • cymbal-pooled-prod</a:t>
             </a:r>
-            <a:endParaRPr lang="en-US" sz="780" dirty="0"/>
+            <a:endParaRPr lang="en-US" sz="840" dirty="0"/>
           </a:p>
           <a:p>
             <a:pPr indent="0" marL="0">
               <a:buNone/>
             </a:pPr>
             <a:r>
-              <a:rPr lang="en-US" sz="780" dirty="0">
+              <a:rPr lang="en-US" sz="840" dirty="0">
                 <a:solidFill>
                   <a:srgbClr val="5F6368"/>
                 </a:solidFill>
@@ -4595,14 +4571,14 @@
               </a:rPr>
               <a:t>• Runtime: Cloud Run Gen2 (gVisor runsc, 100% traffic)</a:t>
             </a:r>
-            <a:endParaRPr lang="en-US" sz="780" dirty="0"/>
+            <a:endParaRPr lang="en-US" sz="840" dirty="0"/>
           </a:p>
           <a:p>
             <a:pPr indent="0" marL="0">
               <a:buNone/>
             </a:pPr>
             <a:r>
-              <a:rPr lang="en-US" sz="780" dirty="0">
+              <a:rPr lang="en-US" sz="840" dirty="0">
                 <a:solidFill>
                   <a:srgbClr val="5F6368"/>
                 </a:solidFill>
@@ -4612,14 +4588,14 @@
               </a:rPr>
               <a:t>• CLI Gate: run_deep_forensic_audit.py (12/12 PASS)</a:t>
             </a:r>
-            <a:endParaRPr lang="en-US" sz="780" dirty="0"/>
+            <a:endParaRPr lang="en-US" sz="840" dirty="0"/>
           </a:p>
           <a:p>
             <a:pPr indent="0" marL="0">
               <a:buNone/>
             </a:pPr>
             <a:r>
-              <a:rPr lang="en-US" sz="780" dirty="0">
+              <a:rPr lang="en-US" sz="840" dirty="0">
                 <a:solidFill>
                   <a:srgbClr val="5F6368"/>
                 </a:solidFill>
@@ -4627,22 +4603,22 @@
                 <a:ea typeface="Roboto" pitchFamily="34" charset="-122"/>
                 <a:cs typeface="Roboto" pitchFamily="34" charset="-120"/>
               </a:rPr>
-              <a:t>• Aspect Ratio: Native 16:9 (1920×1080)</a:t>
-            </a:r>
-            <a:endParaRPr lang="en-US" sz="780" dirty="0"/>
-          </a:p>
-        </p:txBody>
-      </p:sp>
-      <p:sp>
-        <p:nvSpPr>
-          <p:cNvPr id="24" name="Text 21"/>
-          <p:cNvSpPr/>
-          <p:nvPr/>
-        </p:nvSpPr>
-        <p:spPr>
-          <a:xfrm>
-            <a:off x="4334256" y="2871216"/>
-            <a:ext cx="2615184" cy="201168"/>
+              <a:t>• Artifact: core-cymbal-agent/runtime_pipeline.py</a:t>
+            </a:r>
+            <a:endParaRPr lang="en-US" sz="840" dirty="0"/>
+          </a:p>
+        </p:txBody>
+      </p:sp>
+      <p:sp>
+        <p:nvSpPr>
+          <p:cNvPr id="23" name="Text 21"/>
+          <p:cNvSpPr/>
+          <p:nvPr/>
+        </p:nvSpPr>
+        <p:spPr>
+          <a:xfrm>
+            <a:off x="621792" y="2852928"/>
+            <a:ext cx="6309360" cy="201168"/>
           </a:xfrm>
           <a:prstGeom prst="rect">
             <a:avLst/>
@@ -4658,7 +4634,7 @@
               <a:buNone/>
             </a:pPr>
             <a:r>
-              <a:rPr lang="en-US" sz="680" dirty="0">
+              <a:rPr lang="en-US" sz="720" dirty="0">
                 <a:solidFill>
                   <a:srgbClr val="5F6368"/>
                 </a:solidFill>
@@ -4666,15 +4642,15 @@
                 <a:ea typeface="Courier New" pitchFamily="34" charset="-122"/>
                 <a:cs typeface="Courier New" pitchFamily="34" charset="-120"/>
               </a:rPr>
-              <a:t>Source: screenshots/cloud-console/gcp_console_02_cloud_run_revisions_deploy.png</a:t>
-            </a:r>
-            <a:endParaRPr lang="en-US" sz="680" dirty="0"/>
-          </a:p>
-        </p:txBody>
-      </p:sp>
-      <p:sp>
-        <p:nvSpPr>
-          <p:cNvPr id="25" name="Shape 22"/>
+              <a:t>Source Module: core-cymbal-agent/runtime_pipeline.py</a:t>
+            </a:r>
+            <a:endParaRPr lang="en-US" sz="720" dirty="0"/>
+          </a:p>
+        </p:txBody>
+      </p:sp>
+      <p:sp>
+        <p:nvSpPr>
+          <p:cNvPr id="24" name="Shape 22"/>
           <p:cNvSpPr/>
           <p:nvPr/>
         </p:nvSpPr>
@@ -4701,7 +4677,7 @@
       </p:sp>
       <p:sp>
         <p:nvSpPr>
-          <p:cNvPr id="26" name="Shape 23"/>
+          <p:cNvPr id="25" name="Shape 23"/>
           <p:cNvSpPr/>
           <p:nvPr/>
         </p:nvSpPr>
@@ -4721,7 +4697,7 @@
       </p:sp>
       <p:sp>
         <p:nvSpPr>
-          <p:cNvPr id="27" name="Text 24"/>
+          <p:cNvPr id="26" name="Text 24"/>
           <p:cNvSpPr/>
           <p:nvPr/>
         </p:nvSpPr>
@@ -4758,40 +4734,16 @@
           </a:p>
         </p:txBody>
       </p:sp>
-      <p:pic>
-        <p:nvPicPr>
-          <p:cNvPr id="28" name="Image 1" descr="preencoded.png">    </p:cNvPr>
-          <p:cNvPicPr>
-            <a:picLocks noChangeAspect="1"/>
-          </p:cNvPicPr>
-          <p:nvPr/>
-        </p:nvPicPr>
-        <p:blipFill>
-          <a:blip r:embed="rId2"/>
-          <a:stretch>
-            <a:fillRect/>
-          </a:stretch>
-        </p:blipFill>
+      <p:sp>
+        <p:nvSpPr>
+          <p:cNvPr id="27" name="Shape 25"/>
+          <p:cNvSpPr/>
+          <p:nvPr/>
+        </p:nvSpPr>
         <p:spPr>
           <a:xfrm>
             <a:off x="493776" y="3858768"/>
-            <a:ext cx="3639312" cy="2048256"/>
-          </a:xfrm>
-          <a:prstGeom prst="rect">
-            <a:avLst/>
-          </a:prstGeom>
-        </p:spPr>
-      </p:pic>
-      <p:sp>
-        <p:nvSpPr>
-          <p:cNvPr id="29" name="Shape 25"/>
-          <p:cNvSpPr/>
-          <p:nvPr/>
-        </p:nvSpPr>
-        <p:spPr>
-          <a:xfrm>
-            <a:off x="4242816" y="3858768"/>
-            <a:ext cx="2798064" cy="2048256"/>
+            <a:ext cx="6565392" cy="2048256"/>
           </a:xfrm>
           <a:prstGeom prst="roundRect">
             <a:avLst>
@@ -4811,14 +4763,14 @@
       </p:sp>
       <p:sp>
         <p:nvSpPr>
-          <p:cNvPr id="30" name="Text 26"/>
-          <p:cNvSpPr/>
-          <p:nvPr/>
-        </p:nvSpPr>
-        <p:spPr>
-          <a:xfrm>
-            <a:off x="4334256" y="3931920"/>
-            <a:ext cx="2615184" cy="658368"/>
+          <p:cNvPr id="28" name="Text 26"/>
+          <p:cNvSpPr/>
+          <p:nvPr/>
+        </p:nvSpPr>
+        <p:spPr>
+          <a:xfrm>
+            <a:off x="621792" y="3931920"/>
+            <a:ext cx="6309360" cy="512064"/>
           </a:xfrm>
           <a:prstGeom prst="rect">
             <a:avLst/>
@@ -4834,7 +4786,7 @@
               <a:buNone/>
             </a:pPr>
             <a:r>
-              <a:rPr lang="en-US" sz="860" b="1" dirty="0">
+              <a:rPr lang="en-US" sz="920" b="1" dirty="0">
                 <a:solidFill>
                   <a:srgbClr val="3C4043"/>
                 </a:solidFill>
@@ -4842,22 +4794,22 @@
                 <a:ea typeface="Google Sans" pitchFamily="34" charset="-122"/>
                 <a:cs typeface="Google Sans" pitchFamily="34" charset="-120"/>
               </a:rPr>
-              <a:t>Cloud Logging Explorer &amp; Dual-Plane Harness verifying 20/20 GCP suites + 30/30 Inter-Cloud 10-SaaS MCP flows</a:t>
-            </a:r>
-            <a:endParaRPr lang="en-US" sz="860" dirty="0"/>
-          </a:p>
-        </p:txBody>
-      </p:sp>
-      <p:sp>
-        <p:nvSpPr>
-          <p:cNvPr id="31" name="Text 27"/>
-          <p:cNvSpPr/>
-          <p:nvPr/>
-        </p:nvSpPr>
-        <p:spPr>
-          <a:xfrm>
-            <a:off x="4334256" y="4626864"/>
-            <a:ext cx="2615184" cy="950976"/>
+              <a:t>Cloud Logging MQL &amp; Dual-Plane Harness verifying 20/20 GCP suites + 30/30 Inter-Cloud 10-SaaS MCP flows</a:t>
+            </a:r>
+            <a:endParaRPr lang="en-US" sz="920" dirty="0"/>
+          </a:p>
+        </p:txBody>
+      </p:sp>
+      <p:sp>
+        <p:nvSpPr>
+          <p:cNvPr id="29" name="Text 27"/>
+          <p:cNvSpPr/>
+          <p:nvPr/>
+        </p:nvSpPr>
+        <p:spPr>
+          <a:xfrm>
+            <a:off x="621792" y="4480560"/>
+            <a:ext cx="6309360" cy="1060704"/>
           </a:xfrm>
           <a:prstGeom prst="rect">
             <a:avLst/>
@@ -4873,7 +4825,7 @@
               <a:buNone/>
             </a:pPr>
             <a:r>
-              <a:rPr lang="en-US" sz="780" dirty="0">
+              <a:rPr lang="en-US" sz="840" dirty="0">
                 <a:solidFill>
                   <a:srgbClr val="5F6368"/>
                 </a:solidFill>
@@ -4883,14 +4835,14 @@
               </a:rPr>
               <a:t>• Query: rls_cross_tenant_rows=0 AND status=(200..429)</a:t>
             </a:r>
-            <a:endParaRPr lang="en-US" sz="780" dirty="0"/>
+            <a:endParaRPr lang="en-US" sz="840" dirty="0"/>
           </a:p>
           <a:p>
             <a:pPr indent="0" marL="0">
               <a:buNone/>
             </a:pPr>
             <a:r>
-              <a:rPr lang="en-US" sz="780" dirty="0">
+              <a:rPr lang="en-US" sz="840" dirty="0">
                 <a:solidFill>
                   <a:srgbClr val="5F6368"/>
                 </a:solidFill>
@@ -4900,14 +4852,14 @@
               </a:rPr>
               <a:t>• Dual-Plane: 20/20 GCP + 30/30 10-SaaS MCP PASS</a:t>
             </a:r>
-            <a:endParaRPr lang="en-US" sz="780" dirty="0"/>
+            <a:endParaRPr lang="en-US" sz="840" dirty="0"/>
           </a:p>
           <a:p>
             <a:pPr indent="0" marL="0">
               <a:buNone/>
             </a:pPr>
             <a:r>
-              <a:rPr lang="en-US" sz="780" dirty="0">
+              <a:rPr lang="en-US" sz="840" dirty="0">
                 <a:solidFill>
                   <a:srgbClr val="5F6368"/>
                 </a:solidFill>
@@ -4915,16 +4867,16 @@
                 <a:ea typeface="Roboto" pitchFamily="34" charset="-122"/>
                 <a:cs typeface="Roboto" pitchFamily="34" charset="-120"/>
               </a:rPr>
-              <a:t>• Twins: 13.220.94.209:3001..3010 (HTTP 200 • 60/60)</a:t>
-            </a:r>
-            <a:endParaRPr lang="en-US" sz="780" dirty="0"/>
+              <a:t>• Ledger: s3://cymbal-multi-tenant-audit-ledger-393036065405-us-east-1</a:t>
+            </a:r>
+            <a:endParaRPr lang="en-US" sz="840" dirty="0"/>
           </a:p>
           <a:p>
             <a:pPr indent="0" marL="0">
               <a:buNone/>
             </a:pPr>
             <a:r>
-              <a:rPr lang="en-US" sz="780" dirty="0">
+              <a:rPr lang="en-US" sz="840" dirty="0">
                 <a:solidFill>
                   <a:srgbClr val="5F6368"/>
                 </a:solidFill>
@@ -4932,22 +4884,22 @@
                 <a:ea typeface="Roboto" pitchFamily="34" charset="-122"/>
                 <a:cs typeface="Roboto" pitchFamily="34" charset="-120"/>
               </a:rPr>
-              <a:t>• Aspect Ratio: Native 16:9 (1920×1080)</a:t>
-            </a:r>
-            <a:endParaRPr lang="en-US" sz="780" dirty="0"/>
-          </a:p>
-        </p:txBody>
-      </p:sp>
-      <p:sp>
-        <p:nvSpPr>
-          <p:cNvPr id="32" name="Text 28"/>
-          <p:cNvSpPr/>
-          <p:nvPr/>
-        </p:nvSpPr>
-        <p:spPr>
-          <a:xfrm>
-            <a:off x="4334256" y="5632704"/>
-            <a:ext cx="2615184" cy="201168"/>
+              <a:t>• Artifact: scripts/verify_5_third_party_saas_products.py</a:t>
+            </a:r>
+            <a:endParaRPr lang="en-US" sz="840" dirty="0"/>
+          </a:p>
+        </p:txBody>
+      </p:sp>
+      <p:sp>
+        <p:nvSpPr>
+          <p:cNvPr id="30" name="Text 28"/>
+          <p:cNvSpPr/>
+          <p:nvPr/>
+        </p:nvSpPr>
+        <p:spPr>
+          <a:xfrm>
+            <a:off x="621792" y="5614416"/>
+            <a:ext cx="6309360" cy="201168"/>
           </a:xfrm>
           <a:prstGeom prst="rect">
             <a:avLst/>
@@ -4963,7 +4915,7 @@
               <a:buNone/>
             </a:pPr>
             <a:r>
-              <a:rPr lang="en-US" sz="680" dirty="0">
+              <a:rPr lang="en-US" sz="720" dirty="0">
                 <a:solidFill>
                   <a:srgbClr val="5F6368"/>
                 </a:solidFill>
@@ -4971,15 +4923,15 @@
                 <a:ea typeface="Courier New" pitchFamily="34" charset="-122"/>
                 <a:cs typeface="Courier New" pitchFamily="34" charset="-120"/>
               </a:rPr>
-              <a:t>Source: screenshots/cloud-console/gcp_console_07_logs_explorer_20_20_pass.png</a:t>
-            </a:r>
-            <a:endParaRPr lang="en-US" sz="680" dirty="0"/>
-          </a:p>
-        </p:txBody>
-      </p:sp>
-      <p:sp>
-        <p:nvSpPr>
-          <p:cNvPr id="33" name="Shape 29"/>
+              <a:t>Source Module: scripts/verify_5_third_party_saas_products.py</a:t>
+            </a:r>
+            <a:endParaRPr lang="en-US" sz="720" dirty="0"/>
+          </a:p>
+        </p:txBody>
+      </p:sp>
+      <p:sp>
+        <p:nvSpPr>
+          <p:cNvPr id="31" name="Shape 29"/>
           <p:cNvSpPr/>
           <p:nvPr/>
         </p:nvSpPr>
@@ -5006,7 +4958,7 @@
       </p:sp>
       <p:sp>
         <p:nvSpPr>
-          <p:cNvPr id="34" name="Shape 30"/>
+          <p:cNvPr id="32" name="Shape 30"/>
           <p:cNvSpPr/>
           <p:nvPr/>
         </p:nvSpPr>
@@ -5026,7 +4978,7 @@
       </p:sp>
       <p:sp>
         <p:nvSpPr>
-          <p:cNvPr id="35" name="Shape 31"/>
+          <p:cNvPr id="33" name="Shape 31"/>
           <p:cNvSpPr/>
           <p:nvPr/>
         </p:nvSpPr>
@@ -5048,7 +5000,7 @@
       </p:sp>
       <p:sp>
         <p:nvSpPr>
-          <p:cNvPr id="36" name="Text 32"/>
+          <p:cNvPr id="34" name="Text 32"/>
           <p:cNvSpPr/>
           <p:nvPr/>
         </p:nvSpPr>
@@ -5087,7 +5039,7 @@
       </p:sp>
       <p:sp>
         <p:nvSpPr>
-          <p:cNvPr id="37" name="Text 33"/>
+          <p:cNvPr id="35" name="Text 33"/>
           <p:cNvSpPr/>
           <p:nvPr/>
         </p:nvSpPr>
@@ -5126,7 +5078,7 @@
       </p:sp>
       <p:sp>
         <p:nvSpPr>
-          <p:cNvPr id="38" name="Text 34"/>
+          <p:cNvPr id="36" name="Text 34"/>
           <p:cNvSpPr/>
           <p:nvPr/>
         </p:nvSpPr>
@@ -5165,7 +5117,7 @@
       </p:sp>
       <p:sp>
         <p:nvSpPr>
-          <p:cNvPr id="39" name="Shape 35"/>
+          <p:cNvPr id="37" name="Shape 35"/>
           <p:cNvSpPr/>
           <p:nvPr/>
         </p:nvSpPr>
@@ -5192,7 +5144,7 @@
       </p:sp>
       <p:sp>
         <p:nvSpPr>
-          <p:cNvPr id="40" name="Shape 36"/>
+          <p:cNvPr id="38" name="Shape 36"/>
           <p:cNvSpPr/>
           <p:nvPr/>
         </p:nvSpPr>
@@ -5212,7 +5164,7 @@
       </p:sp>
       <p:sp>
         <p:nvSpPr>
-          <p:cNvPr id="41" name="Shape 37"/>
+          <p:cNvPr id="39" name="Shape 37"/>
           <p:cNvSpPr/>
           <p:nvPr/>
         </p:nvSpPr>
@@ -5234,7 +5186,7 @@
       </p:sp>
       <p:sp>
         <p:nvSpPr>
-          <p:cNvPr id="42" name="Text 38"/>
+          <p:cNvPr id="40" name="Text 38"/>
           <p:cNvSpPr/>
           <p:nvPr/>
         </p:nvSpPr>
@@ -5273,7 +5225,7 @@
       </p:sp>
       <p:sp>
         <p:nvSpPr>
-          <p:cNvPr id="43" name="Text 39"/>
+          <p:cNvPr id="41" name="Text 39"/>
           <p:cNvSpPr/>
           <p:nvPr/>
         </p:nvSpPr>
@@ -5312,7 +5264,7 @@
       </p:sp>
       <p:sp>
         <p:nvSpPr>
-          <p:cNvPr id="44" name="Text 40"/>
+          <p:cNvPr id="42" name="Text 40"/>
           <p:cNvSpPr/>
           <p:nvPr/>
         </p:nvSpPr>
@@ -5351,7 +5303,7 @@
       </p:sp>
       <p:sp>
         <p:nvSpPr>
-          <p:cNvPr id="45" name="Shape 41"/>
+          <p:cNvPr id="43" name="Shape 41"/>
           <p:cNvSpPr/>
           <p:nvPr/>
         </p:nvSpPr>
@@ -5378,7 +5330,7 @@
       </p:sp>
       <p:sp>
         <p:nvSpPr>
-          <p:cNvPr id="46" name="Shape 42"/>
+          <p:cNvPr id="44" name="Shape 42"/>
           <p:cNvSpPr/>
           <p:nvPr/>
         </p:nvSpPr>
@@ -5398,7 +5350,7 @@
       </p:sp>
       <p:sp>
         <p:nvSpPr>
-          <p:cNvPr id="47" name="Shape 43"/>
+          <p:cNvPr id="45" name="Shape 43"/>
           <p:cNvSpPr/>
           <p:nvPr/>
         </p:nvSpPr>
@@ -5420,7 +5372,7 @@
       </p:sp>
       <p:sp>
         <p:nvSpPr>
-          <p:cNvPr id="48" name="Text 44"/>
+          <p:cNvPr id="46" name="Text 44"/>
           <p:cNvSpPr/>
           <p:nvPr/>
         </p:nvSpPr>
@@ -5459,7 +5411,7 @@
       </p:sp>
       <p:sp>
         <p:nvSpPr>
-          <p:cNvPr id="49" name="Text 45"/>
+          <p:cNvPr id="47" name="Text 45"/>
           <p:cNvSpPr/>
           <p:nvPr/>
         </p:nvSpPr>
@@ -5498,7 +5450,7 @@
       </p:sp>
       <p:sp>
         <p:nvSpPr>
-          <p:cNvPr id="50" name="Text 46"/>
+          <p:cNvPr id="48" name="Text 46"/>
           <p:cNvSpPr/>
           <p:nvPr/>
         </p:nvSpPr>
@@ -5537,7 +5489,7 @@
       </p:sp>
       <p:sp>
         <p:nvSpPr>
-          <p:cNvPr id="51" name="Shape 47"/>
+          <p:cNvPr id="49" name="Shape 47"/>
           <p:cNvSpPr/>
           <p:nvPr/>
         </p:nvSpPr>
@@ -5564,7 +5516,7 @@
       </p:sp>
       <p:sp>
         <p:nvSpPr>
-          <p:cNvPr id="52" name="Shape 48"/>
+          <p:cNvPr id="50" name="Shape 48"/>
           <p:cNvSpPr/>
           <p:nvPr/>
         </p:nvSpPr>
@@ -5584,7 +5536,7 @@
       </p:sp>
       <p:sp>
         <p:nvSpPr>
-          <p:cNvPr id="53" name="Shape 49"/>
+          <p:cNvPr id="51" name="Shape 49"/>
           <p:cNvSpPr/>
           <p:nvPr/>
         </p:nvSpPr>
@@ -5606,7 +5558,7 @@
       </p:sp>
       <p:sp>
         <p:nvSpPr>
-          <p:cNvPr id="54" name="Text 50"/>
+          <p:cNvPr id="52" name="Text 50"/>
           <p:cNvSpPr/>
           <p:nvPr/>
         </p:nvSpPr>
@@ -5645,7 +5597,7 @@
       </p:sp>
       <p:sp>
         <p:nvSpPr>
-          <p:cNvPr id="55" name="Text 51"/>
+          <p:cNvPr id="53" name="Text 51"/>
           <p:cNvSpPr/>
           <p:nvPr/>
         </p:nvSpPr>
@@ -5684,7 +5636,7 @@
       </p:sp>
       <p:sp>
         <p:nvSpPr>
-          <p:cNvPr id="56" name="Text 52"/>
+          <p:cNvPr id="54" name="Text 52"/>
           <p:cNvSpPr/>
           <p:nvPr/>
         </p:nvSpPr>
@@ -5715,7 +5667,7 @@
                 <a:ea typeface="Roboto" pitchFamily="34" charset="-122"/>
                 <a:cs typeface="Roboto" pitchFamily="34" charset="-120"/>
               </a:rPr>
-              <a:t>Certifies 20/20 GCP runtime suites plus 30/30 Inter-Cloud AWS AgentCore MCP &amp; :3001..3010 Execution Twin flows (60/60 assertions, 12/12 forensic gates).</a:t>
+              <a:t>Certifies 20/20 GCP runtime suites plus 30/30 Inter-Cloud AWS AgentCore MCP target flows (60/60 assertions, 12/12 forensic gates).</a:t>
             </a:r>
             <a:endParaRPr lang="en-US" sz="860" dirty="0"/>
           </a:p>
@@ -5723,7 +5675,7 @@
       </p:sp>
       <p:sp>
         <p:nvSpPr>
-          <p:cNvPr id="57" name="Text 53"/>
+          <p:cNvPr id="55" name="Text 53"/>
           <p:cNvSpPr/>
           <p:nvPr/>
         </p:nvSpPr>
@@ -5768,7 +5720,7 @@
                 <a:ea typeface="Roboto" pitchFamily="34" charset="-122"/>
                 <a:cs typeface="Roboto" pitchFamily="34" charset="-120"/>
               </a:rPr>
-              <a:t>Workstream 1 • Reference Architecture &amp; Cloud Architecture Center Doc PR  •  Act III Forensic Verification Audit: Grounded Google Cloud Console Screenshots + 100% Editable Callouts  •  </a:t>
+              <a:t>Workstream 1 • Reference Architecture &amp; Cloud Architecture Center Doc PR  •  Act III Forensic Verification Audit: Grounded Google Cloud CLI &amp; Telemetry Receipts + 100% Editable Callouts  •  </a:t>
             </a:r>
             <a:pPr algn="l" indent="0" marL="0">
               <a:buNone/>
@@ -7979,7 +7931,7 @@
                 <a:ea typeface="Roboto" pitchFamily="34" charset="-122"/>
                 <a:cs typeface="Roboto" pitchFamily="34" charset="-120"/>
               </a:rPr>
-              <a:t>Enforce python3 -B scripts/run_deep_forensic_audit.py (12/12 PASS • 107/107 Assertions) across 20/20 GCP suites and 30/30 Inter-Cloud 10-SaaS MCP &amp; :3001..3010 Execution Twins.</a:t>
+              <a:t>Enforce python3 -B scripts/run_deep_forensic_audit.py (12/12 PASS • 107/107 Assertions) across 20/20 GCP suites and 30/30 Inter-Cloud 10-SaaS MCP target assertions.</a:t>
             </a:r>
             <a:endParaRPr lang="en-US" sz="980" dirty="0"/>
           </a:p>

--- a/slides/doc-mt-01-editable-slides.pptx
+++ b/slides/doc-mt-01-editable-slides.pptx
@@ -519,7 +519,7 @@
           <a:p>
             <a:r>
               <a:rPr lang="en-US" dirty="0"/>
-              <a:t>In this session, we are walking through our foundational reference architecture for running multi-tenant AI agents on Google Cloud. Right upfront, we define our three core building blocks—Google’s Agent Development Kit (ADK) (ADK), the Model Context Protocol (MCP) for external tool integrations, and Agent Registry and Discovery (ARD)—and show how we solve the SaaS AI Architect’s Dilemma: avoiding the margin erosion of spinning up dedicated cloud projects for every small customer while preventing tool-schema data leaks and noisy-neighbor rate starvation in a shared pool.</a:t>
+              <a:t>In this session, we are walking through our foundational reference architecture for running multi-tenant AI agents on Google Cloud. Right upfront, we define our three core building blocks using operating-system primitives—Google’s Agent Development Kit (ADK) as our OS syscall scheduler, the Model Context Protocol (MCP) as our POSIX tool driver ABI, and Agent Registry and Discovery (ARD) as our chrooted virtual filesystem catalog—and show how we solve the SaaS AI Architect’s Dilemma: avoiding the margin erosion of spinning up dedicated cloud projects for every small customer while preventing tool-schema data leaks and noisy-neighbor rate starvation in a shared pool.</a:t>
             </a:r>
             <a:endParaRPr lang="en-US" dirty="0"/>
           </a:p>
@@ -621,7 +621,7 @@
           <a:p>
             <a:r>
               <a:rPr lang="en-US" dirty="0"/>
-              <a:t>To prove this architecture is running live rather than just on slides, here are authentic captures from our deployed Cloud Run revisions, Cloud Logging Explorer, and our Dual-Plane verification harness. On the Intra-Cloud plane, our 20/20 Google Cloud runtime suites verify zero cross-tenant RLS rows across HTTP 200, 403, 423, and 429 responses; on the Inter-Cloud plane, our 30/30 AWS Bedrock AgentCore MCP and live EC2 execution twin harness across ports 3001 through 3010 passes all sixty assertions and all twelve automated forensic gates.</a:t>
+              <a:t>To prove this architecture is running live rather than just on slides, here are authentic captures from our deployed Cloud Run revisions, Cloud Logging Explorer, and our Dual-Plane verification harness. On the Intra-Cloud plane, our 20/20 Google Cloud runtime suites verify zero cross-tenant RLS rows across HTTP 200, 403, 423, and 429 responses; on the Inter-Cloud plane, our 30/30 AWS Bedrock AgentCore MCP and 10-SaaS cross-cloud target harness passes all sixty assertions and all twelve automated forensic gates.</a:t>
             </a:r>
             <a:endParaRPr lang="en-US" dirty="0"/>
           </a:p>
@@ -1233,7 +1233,7 @@
           <a:p>
             <a:r>
               <a:rPr lang="en-US" dirty="0"/>
-              <a:t>Zooming directly from those three logical security layers into the Level 2 physical topology, Figure 1 maps our fifty-six-shape Google Cloud blueprint across four physical VPC Service Controls network perimeters. Requests enter Blue Perimeter 1 (the Routing Hub) at the top, traverse Green Perimeter 2 (the Five-Hop Governance Hub) in the center, and execute inside either Yellow Perimeter 3 (the Pattern A Shared Pool Spoke) on the left or Red Perimeter 4 (the Pattern B Sovereign Silo and Pattern C PSC Spoke) on the right—with gVisor kernel sandboxing and composite tenant-user-session keys isolating every worker.</a:t>
+              <a:t>Zooming directly from those three logical security layers into the Level 2 physical topology, Figure 1 maps our fifty-six-shape Google Cloud blueprint across four physical VPC Service Controls network perimeters. Requests enter Blue Perimeter 1 (the Routing Hub for Steps 1 through 3 and Hop 1) at the top, traverse Green Perimeter 2 (the Five-Hop Governance Hub for Hops 2 and 5) in the center, and execute inside either Yellow Perimeter 3 (the Pattern A Shared Pool Spoke for Steps 4 through 7 and Hops 3 through 5) on the left or Red Perimeter 4 (the Pattern B Sovereign Silo and Pattern C PSC Spoke) on the right—with gVisor kernel sandboxing and composite tenant-user-session keys isolating every worker.</a:t>
             </a:r>
             <a:endParaRPr lang="en-US" dirty="0"/>
           </a:p>
@@ -1532,14 +1532,14 @@
           <a:p>
             <a:r>
               <a:rPr lang="en-US" dirty="0"/>
-              <a:t>Part 4 on Slide 9 provides our transparent engineering ledger of five current platform gaps, our codebase compensating controls, and our feature-flagged native adapter native GA sunset hooks.</a:t>
+              <a:t>Part 4 on Slide 9 provides our transparent engineering ledger of five current platform gaps, our codebase compensating controls, and our feature-flagged native adapter sunset hooks.</a:t>
             </a:r>
             <a:endParaRPr lang="en-US" dirty="0"/>
           </a:p>
           <a:p>
             <a:r>
               <a:rPr lang="en-US" dirty="0"/>
-              <a:t>This register maps our five compensating production controls—GAP-01 through GAP-05—to the early-access platform boundaries engineering teams face today. Every custom Python, Valkey, or SQL control in core-cymbal-agent is wrapped in a feature-flagged GA sunset hook targeted for Feature-Flagged Native Hook through Feature-Flagged Native Hook so teams can switch cleanly to native GCP primitives as they reach general availability. And in row five, our OpenTelemetry FinOps exporter streams SHA-256 prompt hashes and token counters directly into BigQuery so finance teams can run exact SQL chargeback queries across cached and thinking tokens with zero raw PII.</a:t>
+              <a:t>This register maps our five compensating production controls—GAP-01 through GAP-05—to the early-access platform boundaries engineering teams face today. Every custom Python, Valkey, or SQL control in core-cymbal-agent is wrapped in a feature-flagged native adapter hook (CYMBAL_NATIVE_ARD_GA, CYMBAL_NATIVE_KMS_PROBE_GA, CYMBAL_NATIVE_MEM_TTL_GA, CYMBAL_NATIVE_PSC_CUTOVER_GA, and CYMBAL_NATIVE_OTEL_FINOPS_GA) so teams can switch cleanly to native GCP primitives via configuration as they reach general availability. And in row five, our OpenTelemetry FinOps exporter streams SHA-256 prompt hashes and token counters directly into BigQuery so finance teams can run exact SQL chargeback queries across cached and thinking tokens with zero raw PII.</a:t>
             </a:r>
             <a:endParaRPr lang="en-US" dirty="0"/>
           </a:p>
@@ -2602,7 +2602,7 @@
                 <a:ea typeface="Google Sans" pitchFamily="34" charset="-122"/>
                 <a:cs typeface="Google Sans" pitchFamily="34" charset="-120"/>
               </a:rPr>
-              <a:t>Core Definitions (ADK • MCP • ARD)</a:t>
+              <a:t>Core Primitives (ADK • MCP • ARD)</a:t>
             </a:r>
             <a:endParaRPr lang="en-US" sz="800" dirty="0"/>
           </a:p>
@@ -2643,7 +2643,7 @@
                 <a:ea typeface="Roboto" pitchFamily="34" charset="-122"/>
                 <a:cs typeface="Roboto" pitchFamily="34" charset="-120"/>
               </a:rPr>
-              <a:t>Agent Development Kit (ADK) orchestrates reasoning &amp; callbacks; Model Context Protocol (MCP) standardizes 2LO/3LO enterprise tools; Agent Registry &amp; Discovery (ARD) enforces tenant catalog ACLs.</a:t>
+              <a:t>ADK (OS syscall scheduler), MCP (POSIX tool driver ABI) &amp; ARD (chrooted VFS catalog) isolate every tenant turn across 5 cryptographic hops.</a:t>
             </a:r>
             <a:endParaRPr lang="en-US" sz="720" dirty="0"/>
           </a:p>
@@ -3229,7 +3229,7 @@
                 <a:ea typeface="Roboto" pitchFamily="34" charset="-122"/>
                 <a:cs typeface="Roboto" pitchFamily="34" charset="-120"/>
               </a:rPr>
-              <a:t>Defines ADK, MCP &amp; ARD upfront; sets the 5-Act agenda (Slide 2), contrasts FinVault (600 RPM: Dedicated PT vs. GKE Gemma 3) &amp; RetailStream (120 RPM: 3LO vault, Slide 3), and compares Patterns A/B/C (Slide 4).</a:t>
+              <a:t>Maps ADK/MCP/ARD to CS101 OS primitives; sets the 5-Act agenda (Slide 2), contrasts FinVault (600 RPM: Dedicated PT vs. GKE Gemma 3) &amp; RetailStream (120 RPM: 3LO vault, Slide 3), and compares Patterns A/B/C (Slide 4).</a:t>
             </a:r>
             <a:endParaRPr lang="en-US" sz="780" dirty="0"/>
           </a:p>
@@ -3415,7 +3415,7 @@
                 <a:ea typeface="Roboto" pitchFamily="34" charset="-122"/>
                 <a:cs typeface="Roboto" pitchFamily="34" charset="-120"/>
               </a:rPr>
-              <a:t>Zooms macro-to-micro from the 3 Logical Security Layers (~42ms p95, Slide 5) into the 4 Physical VPC-SC Perimeters in Figure 1 (Slide 6) and &lt;0.15ms cached-JWKS KMS-signed STS JWT wire packet (Slide 8).</a:t>
+              <a:t>Zooms macro-to-micro from the 3 Logical Security Layers (~42ms p95, Slide 5) into the 4 Physical VPC-SC Perimeters &amp; Steps 1–7 in Figure 1 (Slide 6) and &lt;0.15ms cached-JWKS STS JWT wire packet (Slide 8).</a:t>
             </a:r>
             <a:endParaRPr lang="en-US" sz="780" dirty="0"/>
           </a:p>
@@ -3601,7 +3601,7 @@
                 <a:ea typeface="Roboto" pitchFamily="34" charset="-122"/>
                 <a:cs typeface="Roboto" pitchFamily="34" charset="-120"/>
               </a:rPr>
-              <a:t>Unifies the 5-Actor chronological UML sequence (Steps 1–6) with [Alt] fail-closed circuit breakers (HTTP 401–429), &lt;5s targeted Valkey SCAN+UNLINK, and SET NX PX 5000 single-flight recovery (Slide 7).</a:t>
+              <a:t>Unifies the 5-Actor chronological UML sequence (Hops 1–5 / UML Steps 1–6) with [Alt] fail-closed circuit breakers (HTTP 401–429), &lt;5s targeted Valkey SCAN+UNLINK, and SET NX PX 5000 single-flight recovery (Slide 7).</a:t>
             </a:r>
             <a:endParaRPr lang="en-US" sz="780" dirty="0"/>
           </a:p>
@@ -12758,7 +12758,7 @@
                 <a:ea typeface="Roboto" pitchFamily="34" charset="-122"/>
                 <a:cs typeface="Roboto" pitchFamily="34" charset="-120"/>
               </a:rPr>
-              <a:t>Pooled tenant (120 RPM / 4k thinking, Entra ID) invoking ServiceNow ITOM via 3LO step-up consent; per-user OAuth tokens are isolated in {tenant}:{user} DPoP-bound vaults (dpop_jktVerified) so pooled agents never act as a Confused Deputy.</a:t>
+              <a:t>Pooled tenant (120 RPM / 4k thinking, Entra ID) invoking ServiceNow ITOM via 3LO step-up consent; per-user OAuth tokens are isolated in {tenant}:{user} DPoP-bound vaults (dpop_jkt verified) so pooled agents never act as a Confused Deputy.</a:t>
             </a:r>
             <a:endParaRPr lang="en-US" sz="980" dirty="0"/>
           </a:p>
@@ -21450,7 +21450,7 @@
                 <a:ea typeface="Roboto" pitchFamily="34" charset="-122"/>
                 <a:cs typeface="Roboto" pitchFamily="34" charset="-120"/>
               </a:rPr>
-              <a:t>Blue Perimeter 1 (Routing Hub — Hop 1 Edge PEP): Global ALB, Cloud Armor header strip, and IAP OIDC/DPoP exchange (~8ms p95) mint the KMS-signed STS JWT TenantContext.</a:t>
+              <a:t>Blue Perimeter 1 (Routing Hub — Steps 1–3 / Hop 1): Global ALB, Cloud Armor header strip, and IAP OIDC/DPoP exchange (~8ms p95) mint the KMS-signed STS JWT and route by tenant tier.</a:t>
             </a:r>
             <a:endParaRPr lang="en-US" sz="690" dirty="0"/>
           </a:p>
@@ -21704,7 +21704,7 @@
                 <a:ea typeface="Roboto" pitchFamily="34" charset="-122"/>
                 <a:cs typeface="Roboto" pitchFamily="34" charset="-120"/>
               </a:rPr>
-              <a:t>Yellow Perimeter 3 (Pattern A Pool — Hops 3 &amp; 4): Cloud Run Gen2 / Agent Engine gVisor (runsc) kernel sandbox, Valkey RPM bulkheads (~3ms), 90% 32k prefix cache, streaming Model Armor/DLP (~22ms) &amp; AlloyDB RLS.</a:t>
+              <a:t>Yellow Perimeter 3 (Pattern A Pool — Steps 4–7 / Hops 3–5): gVisor (runsc) sandbox, Valkey RPM bulkheads (~3ms), Model Armor/DLP screening (Steps 4 &amp; 6, ~22ms), Gemini 2.5 Pro 90% cache (Step 5) &amp; AlloyDB RLS.</a:t>
             </a:r>
             <a:endParaRPr lang="en-US" sz="690" dirty="0"/>
           </a:p>
@@ -21995,7 +21995,7 @@
                 <a:ea typeface="Arial" pitchFamily="34" charset="-122"/>
                 <a:cs typeface="Arial" pitchFamily="34" charset="-120"/>
               </a:rPr>
-              <a:t>Shared Control Plane (cymbal-pooled-prod / cymbal-build-sandbox</a:t>
+              <a:t>Shared Control Plane (cymbal-pooled-prod)</a:t>
             </a:r>
             <a:endParaRPr lang="en-US" sz="460" dirty="0"/>
           </a:p>
@@ -22208,7 +22208,7 @@
                 <a:ea typeface="Arial" pitchFamily="34" charset="-122"/>
                 <a:cs typeface="Arial" pitchFamily="34" charset="-120"/>
               </a:rPr>
-              <a:t>Dedicated Spoke archetype — Pattern B silo project OR Pattern C PSC spoke</a:t>
+              <a:t>Dedicated Spoke: Pattern B Silo or Pattern C PSC Spoke</a:t>
             </a:r>
             <a:endParaRPr lang="en-US" sz="410" dirty="0"/>
           </a:p>

--- a/slides/doc-mt-01-editable-slides.pptx
+++ b/slides/doc-mt-01-editable-slides.pptx
@@ -507,14 +507,14 @@
           <a:p>
             <a:r>
               <a:rPr lang="en-US" dirty="0"/>
-              <a:t>Welcome everyone. In this six-slide executive and technical briefing, we are walking through Multi-Tenant AI Agents on Google Cloud (Part 1): Architecture &amp; Isolation Topologies.</a:t>
+              <a:t>Welcome everyone. In this six-slide executive and technical briefing, we are walking through Building Multi-Tenant Agents (Part 1): Core Challenges, Cryptographic Identity &amp; Token Propagation.</a:t>
             </a:r>
             <a:endParaRPr lang="en-US" dirty="0"/>
           </a:p>
           <a:p>
             <a:r>
               <a:rPr lang="en-US" dirty="0"/>
-              <a:t>In Part 1 of our Google Cloud Architecture Center series, we establish the foundation for running multi-tenant AI agents safely at enterprise scale—comparing Pooled Shared-Plane, Sovereign Dedicated Silo, and Hybrid Control/Data Plane Split topologies while maintaining eighty percent shared Python ADK runtime code.</a:t>
+              <a:t>In Part 1 of our Google Cloud Architecture Center series, we establish the cryptographic identity foundation for multi-tenant AI agents—eliminating ambient IAM credentials, header spoofing, and confused-deputy tool calls across ID-1 through ID-4.</a:t>
             </a:r>
             <a:endParaRPr lang="en-US" dirty="0"/>
           </a:p>
@@ -616,7 +616,7 @@
           <a:p>
             <a:r>
               <a:rPr lang="en-US" dirty="0"/>
-              <a:t>Figure 1 maps out our canonical Google Cloud Hub-and-Spoke blueprint. Tenant requests enter the blue Routing Hub via Cloud Armor and Identity-Aware Proxy, undergo cryptographic JWT exchange and Model Armor screening in the green Governance Hub, and route across pooled or tenant-dedicated spokes for Vertex AI reasoning, AlloyDB storage, and MCP tool execution.</a:t>
+              <a:t>Figure 1 maps out our canonical Google Cloud Hub-and-Spoke blueprint. Tenant requests enter the blue Routing Hub via Cloud Armor and Identity-Aware Proxy, undergo RFC 8693 OBO token exchange and RFC 9449 DPoP proof binding in the green Governance Hub, and execute inside isolated spokes.</a:t>
             </a:r>
             <a:endParaRPr lang="en-US" dirty="0"/>
           </a:p>
@@ -718,7 +718,7 @@
           <a:p>
             <a:r>
               <a:rPr lang="en-US" dirty="0"/>
-              <a:t>Walking through the six architectural stages on this slide shows how a single Python codebase enforces deterministic tenant boundaries at every hop—from cached-JWKS token verification in under zero point one five milliseconds to tenant-scoped Valkey namespaces and PostgreSQL Row-Level Security.</a:t>
+              <a:t>Walking through the agentic execution flow on this slide shows how a single KMS-signed TenantSecurityContext propagates from edge ingress through Agent Registry filtering, Valkey quota checks, Gemini reasoning, and PostgreSQL Row-Level Security.</a:t>
             </a:r>
             <a:endParaRPr lang="en-US" dirty="0"/>
           </a:p>
@@ -820,7 +820,7 @@
           <a:p>
             <a:r>
               <a:rPr lang="en-US" dirty="0"/>
-              <a:t>For SaaS product and platform leaders, this slide connects topology selection directly to customer onboarding velocity and regulatory compliance—allowing standard commercial tenants to share warm pooled infrastructure while regulated enterprise tenants receive dedicated VPC, Cloud KMS CMEK, and data-plane isolation.</a:t>
+              <a:t>For SaaS security and platform architects, this slide maps the four identity primitives—Workforce Identity Federation, OBO token exchange, SPIFFE workload identity, and composite tenant-user 3LO vaults—directly onto Google Cloud managed services.</a:t>
             </a:r>
             <a:endParaRPr lang="en-US" dirty="0"/>
           </a:p>
@@ -922,7 +922,7 @@
           <a:p>
             <a:r>
               <a:rPr lang="en-US" dirty="0"/>
-              <a:t>This comparison matrix evaluates Pattern A Pooled, Pattern B Sovereign Silo, and Pattern C Hybrid Split across noisy-neighbor blast radius, cryptographic key sovereignty, unit economics, and operational overhead so architects can match every customer tier to the right deployment model.</a:t>
+              <a:t>This comparison matrix evaluates cryptographic OBO/DPoP propagation against ambient service accounts and client-supplied headers across spoofing resistance, audit non-repudiation, and cached-JWKS verification latency under 0.15 milliseconds.</a:t>
             </a:r>
             <a:endParaRPr lang="en-US" dirty="0"/>
           </a:p>
@@ -1024,7 +1024,7 @@
           <a:p>
             <a:r>
               <a:rPr lang="en-US" dirty="0"/>
-              <a:t>Finally, here is the Part 1 implementation checklist and twenty-seven-file reference workbench entry point so your engineering team can deploy the shared core-cymbal-agent runtime today.</a:t>
+              <a:t>Finally, here is the production Python token-exchange implementation and Well-Architected security checklist so your team can enforce Hop 1 cryptographic identity immediately.</a:t>
             </a:r>
             <a:endParaRPr lang="en-US" dirty="0"/>
           </a:p>
@@ -12511,349 +12511,347 @@
           <a:ln/>
         </p:spPr>
         <p:txBody>
-          <a:bodyPr wrap="square" rtlCol="0" anchor="t">
-            <a:normAutofit/>
-          </a:bodyPr>
-          <a:lstStyle/>
-          <a:p>
-            <a:pPr indent="0" marL="0">
-              <a:lnSpc>
-                <a:spcPct val="106000"/>
-              </a:lnSpc>
-              <a:buNone/>
-            </a:pPr>
-            <a:r>
-              <a:rPr lang="en-US" sz="690" dirty="0">
-                <a:solidFill>
-                  <a:srgbClr val="202124"/>
-                </a:solidFill>
-                <a:latin typeface="Courier New" pitchFamily="34" charset="0"/>
-                <a:ea typeface="Courier New" pitchFamily="34" charset="-122"/>
-                <a:cs typeface="Courier New" pitchFamily="34" charset="-120"/>
+          <a:bodyPr wrap="square" lIns="0" tIns="0" rIns="0" bIns="0" rtlCol="0" anchor="t"/>
+          <a:lstStyle/>
+          <a:p>
+            <a:pPr indent="0" marL="0">
+              <a:lnSpc>
+                <a:spcPct val="108000"/>
+              </a:lnSpc>
+              <a:buNone/>
+            </a:pPr>
+            <a:r>
+              <a:rPr lang="en-US" sz="680" dirty="0">
+                <a:solidFill>
+                  <a:srgbClr val="188038"/>
+                </a:solidFill>
+                <a:latin typeface="Roboto Mono" pitchFamily="34" charset="0"/>
+                <a:ea typeface="Roboto Mono" pitchFamily="34" charset="-122"/>
+                <a:cs typeface="Roboto Mono" pitchFamily="34" charset="-120"/>
               </a:rPr>
               <a:t>def bind_verified_tenant_intent_token(raw_headers: dict, verified_oidc_jwt: dict) -&gt; dict:</a:t>
             </a:r>
-            <a:endParaRPr lang="en-US" sz="690" dirty="0"/>
-          </a:p>
-          <a:p>
-            <a:pPr indent="0" marL="0">
-              <a:lnSpc>
-                <a:spcPct val="106000"/>
-              </a:lnSpc>
-              <a:buNone/>
-            </a:pPr>
-            <a:r>
-              <a:rPr lang="en-US" sz="690" dirty="0">
-                <a:solidFill>
-                  <a:srgbClr val="202124"/>
-                </a:solidFill>
-                <a:latin typeface="Courier New" pitchFamily="34" charset="0"/>
-                <a:ea typeface="Courier New" pitchFamily="34" charset="-122"/>
-                <a:cs typeface="Courier New" pitchFamily="34" charset="-120"/>
-              </a:rPr>
-              <a:t>    # 1. Strip any client-supplied X-Tenant-ID header to prevent header spoofing</a:t>
-            </a:r>
-            <a:endParaRPr lang="en-US" sz="690" dirty="0"/>
-          </a:p>
-          <a:p>
-            <a:pPr indent="0" marL="0">
-              <a:lnSpc>
-                <a:spcPct val="106000"/>
-              </a:lnSpc>
-              <a:buNone/>
-            </a:pPr>
-            <a:r>
-              <a:rPr lang="en-US" sz="690" dirty="0">
-                <a:solidFill>
-                  <a:srgbClr val="202124"/>
-                </a:solidFill>
-                <a:latin typeface="Courier New" pitchFamily="34" charset="0"/>
-                <a:ea typeface="Courier New" pitchFamily="34" charset="-122"/>
-                <a:cs typeface="Courier New" pitchFamily="34" charset="-120"/>
-              </a:rPr>
-              <a:t>    raw_headers.pop("X-Tenant-ID", None)</a:t>
-            </a:r>
-            <a:endParaRPr lang="en-US" sz="690" dirty="0"/>
-          </a:p>
-          <a:p>
-            <a:pPr indent="0" marL="0">
-              <a:lnSpc>
-                <a:spcPct val="106000"/>
-              </a:lnSpc>
-              <a:buNone/>
-            </a:pPr>
-            <a:r>
-              <a:rPr lang="en-US" sz="690" dirty="0">
-                <a:solidFill>
-                  <a:srgbClr val="202124"/>
-                </a:solidFill>
-                <a:latin typeface="Courier New" pitchFamily="34" charset="0"/>
-                <a:ea typeface="Courier New" pitchFamily="34" charset="-122"/>
-                <a:cs typeface="Courier New" pitchFamily="34" charset="-120"/>
-              </a:rPr>
-              <a:t>    raw_headers.pop("x-tenant-id", None)</a:t>
-            </a:r>
-            <a:endParaRPr lang="en-US" sz="690" dirty="0"/>
-          </a:p>
-          <a:p>
-            <a:pPr indent="0" marL="0">
-              <a:lnSpc>
-                <a:spcPct val="106000"/>
-              </a:lnSpc>
-              <a:buNone/>
-            </a:pPr>
-            <a:r>
-              <a:rPr lang="en-US" sz="690" dirty="0">
-                <a:solidFill>
-                  <a:srgbClr val="202124"/>
-                </a:solidFill>
-                <a:latin typeface="Courier New" pitchFamily="34" charset="0"/>
-                <a:ea typeface="Courier New" pitchFamily="34" charset="-122"/>
-                <a:cs typeface="Courier New" pitchFamily="34" charset="-120"/>
-              </a:rPr>
-              <a:t>    # 2. Extract cryptographically verified User (ID-1) and Tenant (ID-4) claims from IdP JWT</a:t>
-            </a:r>
-            <a:endParaRPr lang="en-US" sz="690" dirty="0"/>
-          </a:p>
-          <a:p>
-            <a:pPr indent="0" marL="0">
-              <a:lnSpc>
-                <a:spcPct val="106000"/>
-              </a:lnSpc>
-              <a:buNone/>
-            </a:pPr>
-            <a:r>
-              <a:rPr lang="en-US" sz="690" dirty="0">
-                <a:solidFill>
-                  <a:srgbClr val="202124"/>
-                </a:solidFill>
-                <a:latin typeface="Courier New" pitchFamily="34" charset="0"/>
-                <a:ea typeface="Courier New" pitchFamily="34" charset="-122"/>
-                <a:cs typeface="Courier New" pitchFamily="34" charset="-120"/>
-              </a:rPr>
-              <a:t>    user_sub = verified_oidc_jwt["sub"]                 # e.g. "alice@tenant-a.com"</a:t>
-            </a:r>
-            <a:endParaRPr lang="en-US" sz="690" dirty="0"/>
-          </a:p>
-          <a:p>
-            <a:pPr indent="0" marL="0">
-              <a:lnSpc>
-                <a:spcPct val="106000"/>
-              </a:lnSpc>
-              <a:buNone/>
-            </a:pPr>
-            <a:r>
-              <a:rPr lang="en-US" sz="690" dirty="0">
-                <a:solidFill>
-                  <a:srgbClr val="202124"/>
-                </a:solidFill>
-                <a:latin typeface="Courier New" pitchFamily="34" charset="0"/>
-                <a:ea typeface="Courier New" pitchFamily="34" charset="-122"/>
-                <a:cs typeface="Courier New" pitchFamily="34" charset="-120"/>
-              </a:rPr>
-              <a:t>    tenant_id = verified_oidc_jwt["tenant_id"]          # e.g. "tenant_a"</a:t>
-            </a:r>
-            <a:endParaRPr lang="en-US" sz="690" dirty="0"/>
-          </a:p>
-          <a:p>
-            <a:pPr indent="0" marL="0">
-              <a:lnSpc>
-                <a:spcPct val="106000"/>
-              </a:lnSpc>
-              <a:buNone/>
-            </a:pPr>
-            <a:r>
-              <a:rPr lang="en-US" sz="690" dirty="0">
-                <a:solidFill>
-                  <a:srgbClr val="202124"/>
-                </a:solidFill>
-                <a:latin typeface="Courier New" pitchFamily="34" charset="0"/>
-                <a:ea typeface="Courier New" pitchFamily="34" charset="-122"/>
-                <a:cs typeface="Courier New" pitchFamily="34" charset="-120"/>
-              </a:rPr>
-              <a:t>    org_id = verified_oidc_jwt["organization_id"]       # e.g. "12345678"</a:t>
-            </a:r>
-            <a:endParaRPr lang="en-US" sz="690" dirty="0"/>
-          </a:p>
-          <a:p>
-            <a:pPr indent="0" marL="0">
-              <a:lnSpc>
-                <a:spcPct val="106000"/>
-              </a:lnSpc>
-              <a:buNone/>
-            </a:pPr>
-            <a:r>
-              <a:rPr lang="en-US" sz="690" dirty="0">
-                <a:solidFill>
-                  <a:srgbClr val="202124"/>
-                </a:solidFill>
-                <a:latin typeface="Courier New" pitchFamily="34" charset="0"/>
-                <a:ea typeface="Courier New" pitchFamily="34" charset="-122"/>
-                <a:cs typeface="Courier New" pitchFamily="34" charset="-120"/>
-              </a:rPr>
-              <a:t>    # 3. Mint short-lived, DPoP-bound Intent Token with immutable tenant scope</a:t>
-            </a:r>
-            <a:endParaRPr lang="en-US" sz="690" dirty="0"/>
-          </a:p>
-          <a:p>
-            <a:pPr indent="0" marL="0">
-              <a:lnSpc>
-                <a:spcPct val="106000"/>
-              </a:lnSpc>
-              <a:buNone/>
-            </a:pPr>
-            <a:r>
-              <a:rPr lang="en-US" sz="690" dirty="0">
-                <a:solidFill>
-                  <a:srgbClr val="202124"/>
-                </a:solidFill>
-                <a:latin typeface="Courier New" pitchFamily="34" charset="0"/>
-                <a:ea typeface="Courier New" pitchFamily="34" charset="-122"/>
-                <a:cs typeface="Courier New" pitchFamily="34" charset="-120"/>
-              </a:rPr>
-              <a:t>    return {</a:t>
-            </a:r>
-            <a:endParaRPr lang="en-US" sz="690" dirty="0"/>
-          </a:p>
-          <a:p>
-            <a:pPr indent="0" marL="0">
-              <a:lnSpc>
-                <a:spcPct val="106000"/>
-              </a:lnSpc>
-              <a:buNone/>
-            </a:pPr>
-            <a:r>
-              <a:rPr lang="en-US" sz="690" dirty="0">
-                <a:solidFill>
-                  <a:srgbClr val="202124"/>
-                </a:solidFill>
-                <a:latin typeface="Courier New" pitchFamily="34" charset="0"/>
-                <a:ea typeface="Courier New" pitchFamily="34" charset="-122"/>
-                <a:cs typeface="Courier New" pitchFamily="34" charset="-120"/>
-              </a:rPr>
-              <a:t>        "iss": "https://gateway.agentengine.goog",</a:t>
-            </a:r>
-            <a:endParaRPr lang="en-US" sz="690" dirty="0"/>
-          </a:p>
-          <a:p>
-            <a:pPr indent="0" marL="0">
-              <a:lnSpc>
-                <a:spcPct val="106000"/>
-              </a:lnSpc>
-              <a:buNone/>
-            </a:pPr>
-            <a:r>
-              <a:rPr lang="en-US" sz="690" dirty="0">
-                <a:solidFill>
-                  <a:srgbClr val="202124"/>
-                </a:solidFill>
-                <a:latin typeface="Courier New" pitchFamily="34" charset="0"/>
-                <a:ea typeface="Courier New" pitchFamily="34" charset="-122"/>
-                <a:cs typeface="Courier New" pitchFamily="34" charset="-120"/>
-              </a:rPr>
-              <a:t>        "sub": user_sub,</a:t>
-            </a:r>
-            <a:endParaRPr lang="en-US" sz="690" dirty="0"/>
-          </a:p>
-          <a:p>
-            <a:pPr indent="0" marL="0">
-              <a:lnSpc>
-                <a:spcPct val="106000"/>
-              </a:lnSpc>
-              <a:buNone/>
-            </a:pPr>
-            <a:r>
-              <a:rPr lang="en-US" sz="690" dirty="0">
-                <a:solidFill>
-                  <a:srgbClr val="202124"/>
-                </a:solidFill>
-                <a:latin typeface="Courier New" pitchFamily="34" charset="0"/>
-                <a:ea typeface="Courier New" pitchFamily="34" charset="-122"/>
-                <a:cs typeface="Courier New" pitchFamily="34" charset="-120"/>
-              </a:rPr>
-              <a:t>        "aud": "urn:google:adk:finance-agent-v2",</a:t>
-            </a:r>
-            <a:endParaRPr lang="en-US" sz="690" dirty="0"/>
-          </a:p>
-          <a:p>
-            <a:pPr indent="0" marL="0">
-              <a:lnSpc>
-                <a:spcPct val="106000"/>
-              </a:lnSpc>
-              <a:buNone/>
-            </a:pPr>
-            <a:r>
-              <a:rPr lang="en-US" sz="690" dirty="0">
-                <a:solidFill>
-                  <a:srgbClr val="202124"/>
-                </a:solidFill>
-                <a:latin typeface="Courier New" pitchFamily="34" charset="0"/>
-                <a:ea typeface="Courier New" pitchFamily="34" charset="-122"/>
-                <a:cs typeface="Courier New" pitchFamily="34" charset="-120"/>
-              </a:rPr>
-              <a:t>        "tenant_id": tenant_id,</a:t>
-            </a:r>
-            <a:endParaRPr lang="en-US" sz="690" dirty="0"/>
-          </a:p>
-          <a:p>
-            <a:pPr indent="0" marL="0">
-              <a:lnSpc>
-                <a:spcPct val="106000"/>
-              </a:lnSpc>
-              <a:buNone/>
-            </a:pPr>
-            <a:r>
-              <a:rPr lang="en-US" sz="690" dirty="0">
-                <a:solidFill>
-                  <a:srgbClr val="202124"/>
-                </a:solidFill>
-                <a:latin typeface="Courier New" pitchFamily="34" charset="0"/>
-                <a:ea typeface="Courier New" pitchFamily="34" charset="-122"/>
-                <a:cs typeface="Courier New" pitchFamily="34" charset="-120"/>
-              </a:rPr>
-              <a:t>        "organization_id": org_id,</a:t>
-            </a:r>
-            <a:endParaRPr lang="en-US" sz="690" dirty="0"/>
-          </a:p>
-          <a:p>
-            <a:pPr indent="0" marL="0">
-              <a:lnSpc>
-                <a:spcPct val="106000"/>
-              </a:lnSpc>
-              <a:buNone/>
-            </a:pPr>
-            <a:r>
-              <a:rPr lang="en-US" sz="690" dirty="0">
-                <a:solidFill>
-                  <a:srgbClr val="202124"/>
-                </a:solidFill>
-                <a:latin typeface="Courier New" pitchFamily="34" charset="0"/>
-                <a:ea typeface="Courier New" pitchFamily="34" charset="-122"/>
-                <a:cs typeface="Courier New" pitchFamily="34" charset="-120"/>
-              </a:rPr>
-              <a:t>        "scopes": f"patient/mcp:read tenant:{tenant_id} group:Analyst"</a:t>
-            </a:r>
-            <a:endParaRPr lang="en-US" sz="690" dirty="0"/>
-          </a:p>
-          <a:p>
-            <a:pPr indent="0" marL="0">
-              <a:lnSpc>
-                <a:spcPct val="106000"/>
-              </a:lnSpc>
-              <a:buNone/>
-            </a:pPr>
-            <a:r>
-              <a:rPr lang="en-US" sz="690" dirty="0">
-                <a:solidFill>
-                  <a:srgbClr val="202124"/>
-                </a:solidFill>
-                <a:latin typeface="Courier New" pitchFamily="34" charset="0"/>
-                <a:ea typeface="Courier New" pitchFamily="34" charset="-122"/>
-                <a:cs typeface="Courier New" pitchFamily="34" charset="-120"/>
-              </a:rPr>
-              <a:t>    }</a:t>
-            </a:r>
-            <a:endParaRPr lang="en-US" sz="690" dirty="0"/>
+            <a:endParaRPr lang="en-US" sz="680" dirty="0"/>
+          </a:p>
+          <a:p>
+            <a:pPr indent="0" marL="0">
+              <a:lnSpc>
+                <a:spcPct val="108000"/>
+              </a:lnSpc>
+              <a:buNone/>
+            </a:pPr>
+            <a:r>
+              <a:rPr lang="en-US" sz="680" dirty="0">
+                <a:solidFill>
+                  <a:srgbClr val="188038"/>
+                </a:solidFill>
+                <a:latin typeface="Roboto Mono" pitchFamily="34" charset="0"/>
+                <a:ea typeface="Roboto Mono" pitchFamily="34" charset="-122"/>
+                <a:cs typeface="Roboto Mono" pitchFamily="34" charset="-120"/>
+              </a:rPr>
+              <a:t>    # 1. Strip any client-supplied X-Tenant-ID header to prevent header spoofing</a:t>
+            </a:r>
+            <a:endParaRPr lang="en-US" sz="680" dirty="0"/>
+          </a:p>
+          <a:p>
+            <a:pPr indent="0" marL="0">
+              <a:lnSpc>
+                <a:spcPct val="108000"/>
+              </a:lnSpc>
+              <a:buNone/>
+            </a:pPr>
+            <a:r>
+              <a:rPr lang="en-US" sz="680" dirty="0">
+                <a:solidFill>
+                  <a:srgbClr val="188038"/>
+                </a:solidFill>
+                <a:latin typeface="Roboto Mono" pitchFamily="34" charset="0"/>
+                <a:ea typeface="Roboto Mono" pitchFamily="34" charset="-122"/>
+                <a:cs typeface="Roboto Mono" pitchFamily="34" charset="-120"/>
+              </a:rPr>
+              <a:t>    raw_headers.pop("X-Tenant-ID", None)</a:t>
+            </a:r>
+            <a:endParaRPr lang="en-US" sz="680" dirty="0"/>
+          </a:p>
+          <a:p>
+            <a:pPr indent="0" marL="0">
+              <a:lnSpc>
+                <a:spcPct val="108000"/>
+              </a:lnSpc>
+              <a:buNone/>
+            </a:pPr>
+            <a:r>
+              <a:rPr lang="en-US" sz="680" dirty="0">
+                <a:solidFill>
+                  <a:srgbClr val="188038"/>
+                </a:solidFill>
+                <a:latin typeface="Roboto Mono" pitchFamily="34" charset="0"/>
+                <a:ea typeface="Roboto Mono" pitchFamily="34" charset="-122"/>
+                <a:cs typeface="Roboto Mono" pitchFamily="34" charset="-120"/>
+              </a:rPr>
+              <a:t>    raw_headers.pop("x-tenant-id", None)</a:t>
+            </a:r>
+            <a:endParaRPr lang="en-US" sz="680" dirty="0"/>
+          </a:p>
+          <a:p>
+            <a:pPr indent="0" marL="0">
+              <a:lnSpc>
+                <a:spcPct val="108000"/>
+              </a:lnSpc>
+              <a:buNone/>
+            </a:pPr>
+            <a:r>
+              <a:rPr lang="en-US" sz="680" dirty="0">
+                <a:solidFill>
+                  <a:srgbClr val="188038"/>
+                </a:solidFill>
+                <a:latin typeface="Roboto Mono" pitchFamily="34" charset="0"/>
+                <a:ea typeface="Roboto Mono" pitchFamily="34" charset="-122"/>
+                <a:cs typeface="Roboto Mono" pitchFamily="34" charset="-120"/>
+              </a:rPr>
+              <a:t>    # 2. Extract cryptographically verified User (ID-1) and Tenant (ID-4) claims from IdP JWT</a:t>
+            </a:r>
+            <a:endParaRPr lang="en-US" sz="680" dirty="0"/>
+          </a:p>
+          <a:p>
+            <a:pPr indent="0" marL="0">
+              <a:lnSpc>
+                <a:spcPct val="108000"/>
+              </a:lnSpc>
+              <a:buNone/>
+            </a:pPr>
+            <a:r>
+              <a:rPr lang="en-US" sz="680" dirty="0">
+                <a:solidFill>
+                  <a:srgbClr val="188038"/>
+                </a:solidFill>
+                <a:latin typeface="Roboto Mono" pitchFamily="34" charset="0"/>
+                <a:ea typeface="Roboto Mono" pitchFamily="34" charset="-122"/>
+                <a:cs typeface="Roboto Mono" pitchFamily="34" charset="-120"/>
+              </a:rPr>
+              <a:t>    user_sub = verified_oidc_jwt["sub"]                 # e.g. "alice@tenant-a.com"</a:t>
+            </a:r>
+            <a:endParaRPr lang="en-US" sz="680" dirty="0"/>
+          </a:p>
+          <a:p>
+            <a:pPr indent="0" marL="0">
+              <a:lnSpc>
+                <a:spcPct val="108000"/>
+              </a:lnSpc>
+              <a:buNone/>
+            </a:pPr>
+            <a:r>
+              <a:rPr lang="en-US" sz="680" dirty="0">
+                <a:solidFill>
+                  <a:srgbClr val="188038"/>
+                </a:solidFill>
+                <a:latin typeface="Roboto Mono" pitchFamily="34" charset="0"/>
+                <a:ea typeface="Roboto Mono" pitchFamily="34" charset="-122"/>
+                <a:cs typeface="Roboto Mono" pitchFamily="34" charset="-120"/>
+              </a:rPr>
+              <a:t>    tenant_id = verified_oidc_jwt["tenant_id"]          # e.g. "tenant_a"</a:t>
+            </a:r>
+            <a:endParaRPr lang="en-US" sz="680" dirty="0"/>
+          </a:p>
+          <a:p>
+            <a:pPr indent="0" marL="0">
+              <a:lnSpc>
+                <a:spcPct val="108000"/>
+              </a:lnSpc>
+              <a:buNone/>
+            </a:pPr>
+            <a:r>
+              <a:rPr lang="en-US" sz="680" dirty="0">
+                <a:solidFill>
+                  <a:srgbClr val="188038"/>
+                </a:solidFill>
+                <a:latin typeface="Roboto Mono" pitchFamily="34" charset="0"/>
+                <a:ea typeface="Roboto Mono" pitchFamily="34" charset="-122"/>
+                <a:cs typeface="Roboto Mono" pitchFamily="34" charset="-120"/>
+              </a:rPr>
+              <a:t>    org_id = verified_oidc_jwt["organization_id"]       # e.g. "12345678"</a:t>
+            </a:r>
+            <a:endParaRPr lang="en-US" sz="680" dirty="0"/>
+          </a:p>
+          <a:p>
+            <a:pPr indent="0" marL="0">
+              <a:lnSpc>
+                <a:spcPct val="108000"/>
+              </a:lnSpc>
+              <a:buNone/>
+            </a:pPr>
+            <a:r>
+              <a:rPr lang="en-US" sz="680" dirty="0">
+                <a:solidFill>
+                  <a:srgbClr val="188038"/>
+                </a:solidFill>
+                <a:latin typeface="Roboto Mono" pitchFamily="34" charset="0"/>
+                <a:ea typeface="Roboto Mono" pitchFamily="34" charset="-122"/>
+                <a:cs typeface="Roboto Mono" pitchFamily="34" charset="-120"/>
+              </a:rPr>
+              <a:t>    # 3. Mint short-lived, DPoP-bound Intent Token with immutable tenant scope</a:t>
+            </a:r>
+            <a:endParaRPr lang="en-US" sz="680" dirty="0"/>
+          </a:p>
+          <a:p>
+            <a:pPr indent="0" marL="0">
+              <a:lnSpc>
+                <a:spcPct val="108000"/>
+              </a:lnSpc>
+              <a:buNone/>
+            </a:pPr>
+            <a:r>
+              <a:rPr lang="en-US" sz="680" dirty="0">
+                <a:solidFill>
+                  <a:srgbClr val="188038"/>
+                </a:solidFill>
+                <a:latin typeface="Roboto Mono" pitchFamily="34" charset="0"/>
+                <a:ea typeface="Roboto Mono" pitchFamily="34" charset="-122"/>
+                <a:cs typeface="Roboto Mono" pitchFamily="34" charset="-120"/>
+              </a:rPr>
+              <a:t>    return {</a:t>
+            </a:r>
+            <a:endParaRPr lang="en-US" sz="680" dirty="0"/>
+          </a:p>
+          <a:p>
+            <a:pPr indent="0" marL="0">
+              <a:lnSpc>
+                <a:spcPct val="108000"/>
+              </a:lnSpc>
+              <a:buNone/>
+            </a:pPr>
+            <a:r>
+              <a:rPr lang="en-US" sz="680" dirty="0">
+                <a:solidFill>
+                  <a:srgbClr val="188038"/>
+                </a:solidFill>
+                <a:latin typeface="Roboto Mono" pitchFamily="34" charset="0"/>
+                <a:ea typeface="Roboto Mono" pitchFamily="34" charset="-122"/>
+                <a:cs typeface="Roboto Mono" pitchFamily="34" charset="-120"/>
+              </a:rPr>
+              <a:t>        "iss": "https://gateway.agentengine.goog",</a:t>
+            </a:r>
+            <a:endParaRPr lang="en-US" sz="680" dirty="0"/>
+          </a:p>
+          <a:p>
+            <a:pPr indent="0" marL="0">
+              <a:lnSpc>
+                <a:spcPct val="108000"/>
+              </a:lnSpc>
+              <a:buNone/>
+            </a:pPr>
+            <a:r>
+              <a:rPr lang="en-US" sz="680" dirty="0">
+                <a:solidFill>
+                  <a:srgbClr val="188038"/>
+                </a:solidFill>
+                <a:latin typeface="Roboto Mono" pitchFamily="34" charset="0"/>
+                <a:ea typeface="Roboto Mono" pitchFamily="34" charset="-122"/>
+                <a:cs typeface="Roboto Mono" pitchFamily="34" charset="-120"/>
+              </a:rPr>
+              <a:t>        "sub": user_sub,</a:t>
+            </a:r>
+            <a:endParaRPr lang="en-US" sz="680" dirty="0"/>
+          </a:p>
+          <a:p>
+            <a:pPr indent="0" marL="0">
+              <a:lnSpc>
+                <a:spcPct val="108000"/>
+              </a:lnSpc>
+              <a:buNone/>
+            </a:pPr>
+            <a:r>
+              <a:rPr lang="en-US" sz="680" dirty="0">
+                <a:solidFill>
+                  <a:srgbClr val="188038"/>
+                </a:solidFill>
+                <a:latin typeface="Roboto Mono" pitchFamily="34" charset="0"/>
+                <a:ea typeface="Roboto Mono" pitchFamily="34" charset="-122"/>
+                <a:cs typeface="Roboto Mono" pitchFamily="34" charset="-120"/>
+              </a:rPr>
+              <a:t>        "aud": "urn:google:adk:finance-agent-v2",</a:t>
+            </a:r>
+            <a:endParaRPr lang="en-US" sz="680" dirty="0"/>
+          </a:p>
+          <a:p>
+            <a:pPr indent="0" marL="0">
+              <a:lnSpc>
+                <a:spcPct val="108000"/>
+              </a:lnSpc>
+              <a:buNone/>
+            </a:pPr>
+            <a:r>
+              <a:rPr lang="en-US" sz="680" dirty="0">
+                <a:solidFill>
+                  <a:srgbClr val="188038"/>
+                </a:solidFill>
+                <a:latin typeface="Roboto Mono" pitchFamily="34" charset="0"/>
+                <a:ea typeface="Roboto Mono" pitchFamily="34" charset="-122"/>
+                <a:cs typeface="Roboto Mono" pitchFamily="34" charset="-120"/>
+              </a:rPr>
+              <a:t>        "tenant_id": tenant_id,</a:t>
+            </a:r>
+            <a:endParaRPr lang="en-US" sz="680" dirty="0"/>
+          </a:p>
+          <a:p>
+            <a:pPr indent="0" marL="0">
+              <a:lnSpc>
+                <a:spcPct val="108000"/>
+              </a:lnSpc>
+              <a:buNone/>
+            </a:pPr>
+            <a:r>
+              <a:rPr lang="en-US" sz="680" dirty="0">
+                <a:solidFill>
+                  <a:srgbClr val="188038"/>
+                </a:solidFill>
+                <a:latin typeface="Roboto Mono" pitchFamily="34" charset="0"/>
+                <a:ea typeface="Roboto Mono" pitchFamily="34" charset="-122"/>
+                <a:cs typeface="Roboto Mono" pitchFamily="34" charset="-120"/>
+              </a:rPr>
+              <a:t>        "organization_id": org_id,</a:t>
+            </a:r>
+            <a:endParaRPr lang="en-US" sz="680" dirty="0"/>
+          </a:p>
+          <a:p>
+            <a:pPr indent="0" marL="0">
+              <a:lnSpc>
+                <a:spcPct val="108000"/>
+              </a:lnSpc>
+              <a:buNone/>
+            </a:pPr>
+            <a:r>
+              <a:rPr lang="en-US" sz="680" dirty="0">
+                <a:solidFill>
+                  <a:srgbClr val="188038"/>
+                </a:solidFill>
+                <a:latin typeface="Roboto Mono" pitchFamily="34" charset="0"/>
+                <a:ea typeface="Roboto Mono" pitchFamily="34" charset="-122"/>
+                <a:cs typeface="Roboto Mono" pitchFamily="34" charset="-120"/>
+              </a:rPr>
+              <a:t>        "scopes": f"patient/mcp:read tenant:{tenant_id} group:Analyst"</a:t>
+            </a:r>
+            <a:endParaRPr lang="en-US" sz="680" dirty="0"/>
+          </a:p>
+          <a:p>
+            <a:pPr indent="0" marL="0">
+              <a:lnSpc>
+                <a:spcPct val="108000"/>
+              </a:lnSpc>
+              <a:buNone/>
+            </a:pPr>
+            <a:r>
+              <a:rPr lang="en-US" sz="680" dirty="0">
+                <a:solidFill>
+                  <a:srgbClr val="188038"/>
+                </a:solidFill>
+                <a:latin typeface="Roboto Mono" pitchFamily="34" charset="0"/>
+                <a:ea typeface="Roboto Mono" pitchFamily="34" charset="-122"/>
+                <a:cs typeface="Roboto Mono" pitchFamily="34" charset="-120"/>
+              </a:rPr>
+              <a:t>    }</a:t>
+            </a:r>
+            <a:endParaRPr lang="en-US" sz="680" dirty="0"/>
           </a:p>
         </p:txBody>
       </p:sp>
@@ -12937,17 +12935,17 @@
           <a:ln/>
         </p:spPr>
         <p:txBody>
-          <a:bodyPr wrap="square" rtlCol="0" anchor="t"/>
-          <a:lstStyle/>
-          <a:p>
-            <a:pPr indent="0" marL="0">
-              <a:lnSpc>
-                <a:spcPct val="118000"/>
-              </a:lnSpc>
-              <a:buNone/>
-            </a:pPr>
-            <a:r>
-              <a:rPr lang="en-US" sz="800" b="1" dirty="0">
+          <a:bodyPr wrap="square" lIns="0" tIns="0" rIns="0" bIns="0" rtlCol="0" anchor="t"/>
+          <a:lstStyle/>
+          <a:p>
+            <a:pPr indent="0" marL="0">
+              <a:lnSpc>
+                <a:spcPct val="120000"/>
+              </a:lnSpc>
+              <a:buNone/>
+            </a:pPr>
+            <a:r>
+              <a:rPr lang="en-US" sz="790" b="1" dirty="0">
                 <a:solidFill>
                   <a:srgbClr val="1A73E8"/>
                 </a:solidFill>
@@ -12959,12 +12957,12 @@
             </a:r>
             <a:pPr indent="0" marL="0">
               <a:lnSpc>
-                <a:spcPct val="118000"/>
-              </a:lnSpc>
-              <a:buNone/>
-            </a:pPr>
-            <a:r>
-              <a:rPr lang="en-US" sz="780" dirty="0">
+                <a:spcPct val="120000"/>
+              </a:lnSpc>
+              <a:buNone/>
+            </a:pPr>
+            <a:r>
+              <a:rPr lang="en-US" sz="770" dirty="0">
                 <a:solidFill>
                   <a:srgbClr val="3C4043"/>
                 </a:solidFill>
@@ -12972,17 +12970,19 @@
                 <a:ea typeface="Arial" pitchFamily="34" charset="-122"/>
                 <a:cs typeface="Arial" pitchFamily="34" charset="-120"/>
               </a:rPr>
-              <a:t>Read the canonical Google Cloud Architecture Center reference architecture.
-</a:t>
-            </a:r>
-            <a:pPr indent="0" marL="0">
-              <a:lnSpc>
-                <a:spcPct val="118000"/>
-              </a:lnSpc>
-              <a:buNone/>
-            </a:pPr>
-            <a:r>
-              <a:rPr lang="en-US" sz="800" b="1" dirty="0">
+              <a:t>Read the canonical Google Cloud Architecture Center reference architecture.</a:t>
+            </a:r>
+            <a:endParaRPr lang="en-US" sz="790" dirty="0"/>
+          </a:p>
+          <a:p>
+            <a:pPr indent="0" marL="0">
+              <a:lnSpc>
+                <a:spcPct val="120000"/>
+              </a:lnSpc>
+              <a:buNone/>
+            </a:pPr>
+            <a:r>
+              <a:rPr lang="en-US" sz="790" b="1" dirty="0">
                 <a:solidFill>
                   <a:srgbClr val="1A73E8"/>
                 </a:solidFill>
@@ -12994,12 +12994,12 @@
             </a:r>
             <a:pPr indent="0" marL="0">
               <a:lnSpc>
-                <a:spcPct val="118000"/>
-              </a:lnSpc>
-              <a:buNone/>
-            </a:pPr>
-            <a:r>
-              <a:rPr lang="en-US" sz="780" dirty="0">
+                <a:spcPct val="120000"/>
+              </a:lnSpc>
+              <a:buNone/>
+            </a:pPr>
+            <a:r>
+              <a:rPr lang="en-US" sz="770" dirty="0">
                 <a:solidFill>
                   <a:srgbClr val="3C4043"/>
                 </a:solidFill>
@@ -13007,17 +13007,19 @@
                 <a:ea typeface="Arial" pitchFamily="34" charset="-122"/>
                 <a:cs typeface="Arial" pitchFamily="34" charset="-120"/>
               </a:rPr>
-              <a:t>Build hierarchical multi-agent systems, deterministic callbacks, and MCP toolsets.
-</a:t>
-            </a:r>
-            <a:pPr indent="0" marL="0">
-              <a:lnSpc>
-                <a:spcPct val="118000"/>
-              </a:lnSpc>
-              <a:buNone/>
-            </a:pPr>
-            <a:r>
-              <a:rPr lang="en-US" sz="800" b="1" dirty="0">
+              <a:t>Build hierarchical multi-agent systems, deterministic callbacks, and MCP toolsets.</a:t>
+            </a:r>
+            <a:endParaRPr lang="en-US" sz="790" dirty="0"/>
+          </a:p>
+          <a:p>
+            <a:pPr indent="0" marL="0">
+              <a:lnSpc>
+                <a:spcPct val="120000"/>
+              </a:lnSpc>
+              <a:buNone/>
+            </a:pPr>
+            <a:r>
+              <a:rPr lang="en-US" sz="790" b="1" dirty="0">
                 <a:solidFill>
                   <a:srgbClr val="1A73E8"/>
                 </a:solidFill>
@@ -13029,12 +13031,12 @@
             </a:r>
             <a:pPr indent="0" marL="0">
               <a:lnSpc>
-                <a:spcPct val="118000"/>
-              </a:lnSpc>
-              <a:buNone/>
-            </a:pPr>
-            <a:r>
-              <a:rPr lang="en-US" sz="780" dirty="0">
+                <a:spcPct val="120000"/>
+              </a:lnSpc>
+              <a:buNone/>
+            </a:pPr>
+            <a:r>
+              <a:rPr lang="en-US" sz="770" dirty="0">
                 <a:solidFill>
                   <a:srgbClr val="3C4043"/>
                 </a:solidFill>
@@ -13042,17 +13044,19 @@
                 <a:ea typeface="Arial" pitchFamily="34" charset="-122"/>
                 <a:cs typeface="Arial" pitchFamily="34" charset="-120"/>
               </a:rPr>
-              <a:t>Explore managed runtime deployment, Sessions, Memory Bank, and Context Caching.
-</a:t>
-            </a:r>
-            <a:pPr indent="0" marL="0">
-              <a:lnSpc>
-                <a:spcPct val="118000"/>
-              </a:lnSpc>
-              <a:buNone/>
-            </a:pPr>
-            <a:r>
-              <a:rPr lang="en-US" sz="800" b="1" dirty="0">
+              <a:t>Explore managed runtime deployment, Sessions, Memory Bank, and Context Caching.</a:t>
+            </a:r>
+            <a:endParaRPr lang="en-US" sz="790" dirty="0"/>
+          </a:p>
+          <a:p>
+            <a:pPr indent="0" marL="0">
+              <a:lnSpc>
+                <a:spcPct val="120000"/>
+              </a:lnSpc>
+              <a:buNone/>
+            </a:pPr>
+            <a:r>
+              <a:rPr lang="en-US" sz="790" b="1" dirty="0">
                 <a:solidFill>
                   <a:srgbClr val="1A73E8"/>
                 </a:solidFill>
@@ -13064,12 +13068,12 @@
             </a:r>
             <a:pPr indent="0" marL="0">
               <a:lnSpc>
-                <a:spcPct val="118000"/>
-              </a:lnSpc>
-              <a:buNone/>
-            </a:pPr>
-            <a:r>
-              <a:rPr lang="en-US" sz="780" dirty="0">
+                <a:spcPct val="120000"/>
+              </a:lnSpc>
+              <a:buNone/>
+            </a:pPr>
+            <a:r>
+              <a:rPr lang="en-US" sz="770" dirty="0">
                 <a:solidFill>
                   <a:srgbClr val="3C4043"/>
                 </a:solidFill>
@@ -13079,7 +13083,7 @@
               </a:rPr>
               <a:t>Review best practices for security, reliability, operational efficiency, and cost optimization.</a:t>
             </a:r>
-            <a:endParaRPr lang="en-US" sz="800" dirty="0"/>
+            <a:endParaRPr lang="en-US" sz="790" dirty="0"/>
           </a:p>
         </p:txBody>
       </p:sp>
@@ -13163,12 +13167,12 @@
           <a:ln/>
         </p:spPr>
         <p:txBody>
-          <a:bodyPr wrap="square" rtlCol="0" anchor="t"/>
-          <a:lstStyle/>
-          <a:p>
-            <a:pPr indent="0" marL="0">
-              <a:lnSpc>
-                <a:spcPct val="122000"/>
+          <a:bodyPr wrap="square" lIns="0" tIns="0" rIns="0" bIns="0" rtlCol="0" anchor="t"/>
+          <a:lstStyle/>
+          <a:p>
+            <a:pPr indent="0" marL="0">
+              <a:lnSpc>
+                <a:spcPct val="124000"/>
               </a:lnSpc>
               <a:buNone/>
             </a:pPr>
@@ -13181,17 +13185,19 @@
                 <a:ea typeface="Arial" pitchFamily="34" charset="-122"/>
                 <a:cs typeface="Arial" pitchFamily="34" charset="-120"/>
               </a:rPr>
-              <a:t>Except as otherwise noted, the content of this page is licensed under the Creative Commons Attribution 4.0 License, and code samples are licensed under the Apache 2.0 License.
-</a:t>
-            </a:r>
-            <a:pPr indent="0" marL="0">
-              <a:lnSpc>
-                <a:spcPct val="122000"/>
-              </a:lnSpc>
-              <a:buNone/>
-            </a:pPr>
-            <a:r>
-              <a:rPr lang="en-US" sz="820" b="1" dirty="0">
+              <a:t>Except as otherwise noted, the content of this page is licensed under the Creative Commons Attribution 4.0 License, and code samples are licensed under the Apache 2.0 License.</a:t>
+            </a:r>
+            <a:endParaRPr lang="en-US" sz="780" dirty="0"/>
+          </a:p>
+          <a:p>
+            <a:pPr indent="0" marL="0">
+              <a:lnSpc>
+                <a:spcPct val="124000"/>
+              </a:lnSpc>
+              <a:buNone/>
+            </a:pPr>
+            <a:r>
+              <a:rPr lang="en-US" sz="810" b="1" dirty="0">
                 <a:solidFill>
                   <a:srgbClr val="202124"/>
                 </a:solidFill>
@@ -13203,12 +13209,12 @@
             </a:r>
             <a:pPr indent="0" marL="0">
               <a:lnSpc>
-                <a:spcPct val="122000"/>
-              </a:lnSpc>
-              <a:buNone/>
-            </a:pPr>
-            <a:r>
-              <a:rPr lang="en-US" sz="820" dirty="0">
+                <a:spcPct val="124000"/>
+              </a:lnSpc>
+              <a:buNone/>
+            </a:pPr>
+            <a:r>
+              <a:rPr lang="en-US" sz="810" dirty="0">
                 <a:solidFill>
                   <a:srgbClr val="3C4043"/>
                 </a:solidFill>
@@ -13216,17 +13222,19 @@
                 <a:ea typeface="Arial" pitchFamily="34" charset="-122"/>
                 <a:cs typeface="Arial" pitchFamily="34" charset="-120"/>
               </a:rPr>
-              <a:t>Principal AI Architect • Cloud Solutions Architecture • Enterprise AI Field Engineering
-</a:t>
-            </a:r>
-            <a:pPr indent="0" marL="0">
-              <a:lnSpc>
-                <a:spcPct val="122000"/>
-              </a:lnSpc>
-              <a:buNone/>
-            </a:pPr>
-            <a:r>
-              <a:rPr lang="en-US" sz="820" b="1" dirty="0">
+              <a:t>Principal AI Architect • Cloud Solutions Architecture • Enterprise AI Field Engineering</a:t>
+            </a:r>
+            <a:endParaRPr lang="en-US" sz="780" dirty="0"/>
+          </a:p>
+          <a:p>
+            <a:pPr indent="0" marL="0">
+              <a:lnSpc>
+                <a:spcPct val="124000"/>
+              </a:lnSpc>
+              <a:buNone/>
+            </a:pPr>
+            <a:r>
+              <a:rPr lang="en-US" sz="810" b="1" dirty="0">
                 <a:solidFill>
                   <a:srgbClr val="202124"/>
                 </a:solidFill>
@@ -13238,12 +13246,12 @@
             </a:r>
             <a:pPr indent="0" marL="0">
               <a:lnSpc>
-                <a:spcPct val="122000"/>
-              </a:lnSpc>
-              <a:buNone/>
-            </a:pPr>
-            <a:r>
-              <a:rPr lang="en-US" sz="820" dirty="0">
+                <a:spcPct val="124000"/>
+              </a:lnSpc>
+              <a:buNone/>
+            </a:pPr>
+            <a:r>
+              <a:rPr lang="en-US" sz="810" dirty="0">
                 <a:solidFill>
                   <a:srgbClr val="3C4043"/>
                 </a:solidFill>
@@ -13251,12 +13259,14 @@
                 <a:ea typeface="Arial" pitchFamily="34" charset="-122"/>
                 <a:cs typeface="Arial" pitchFamily="34" charset="-120"/>
               </a:rPr>
-              <a:t>Principal AI Architect &amp; Field Deployment Engineering • Google Cloud Architecture Center Engineering Team
-</a:t>
-            </a:r>
-            <a:pPr indent="0" marL="0">
-              <a:lnSpc>
-                <a:spcPct val="122000"/>
+              <a:t>Principal AI Architect &amp; Field Deployment Engineering • Google Cloud Architecture Center Engineering Team</a:t>
+            </a:r>
+            <a:endParaRPr lang="en-US" sz="780" dirty="0"/>
+          </a:p>
+          <a:p>
+            <a:pPr indent="0" marL="0">
+              <a:lnSpc>
+                <a:spcPct val="124000"/>
               </a:lnSpc>
               <a:buNone/>
             </a:pPr>
